--- a/praesentation/LootLager_Praesentation.pptx
+++ b/praesentation/LootLager_Praesentation.pptx
@@ -110,12 +110,12 @@
   <p:extLst>
     <p:ext uri="{521415D9-36F7-43E2-AB2F-B90AF26B5E84}">
       <p14:sectionLst xmlns:p14="http://schemas.microsoft.com/office/powerpoint/2010/main">
-        <p14:section name="Start" id="{1f21e620-02d9-7667-c420-869d3341a757}">
+        <p14:section name="Start" id="{8b2633a6-3486-809e-f6cf-50b33d16ec60}">
           <p14:sldIdLst>
             <p14:sldId id="256"/>
           </p14:sldIdLst>
         </p14:section>
-        <p14:section name="Unser Unternehmen" id="{3425e527-47e1-463c-4e4e-bcd1c97bd47c}">
+        <p14:section name="Unser Unternehmen" id="{7cf94b8d-eb77-2773-e436-d1b9f7dd084e}">
           <p14:sldIdLst>
             <p14:sldId id="257"/>
             <p14:sldId id="258"/>
@@ -529,7 +529,9 @@
               <a:t>SPRECHTEXT (ca. 30 Sekunden):
 Wir sind die LootLager UG (haftungsbeschränkt). Wir verkaufen Gaming-Zubehör mit Custom Designs: Unsere Kunden bekommen ihr eigenes Design, entweder selbst hochgeladen oder von uns gestaltet. Unsere Marke heißt genauso wie die Firma: LootLager. Unser Slogan ist „Level up dein Setup.“ Als Rechtsform haben wir die UG (haftungsbeschränkt) gewählt: Wir haften nicht mit unserem Privatvermögen und brauchen kein großes Startkapital.
 NACHFRAGE „Warum die UG?“:
-Wir sind mehrere Gründer und wollen nicht mit unserem Privatvermögen haften. Für eine GmbH fehlen uns die 25.000 € Stammkapital. Die UG gibt uns die beschränkte Haftung schon ab 1 € Stammkapital.</a:t>
+Wir sind zwei Gründer und wollen nicht mit unserem Privatvermögen haften. Für eine GmbH fehlen uns die 25.000 € Stammkapital. Die UG gibt uns die beschränkte Haftung schon ab 1 € Stammkapital.
+NACHFRAGE „Wer führt die Geschäfte?“:
+Wir beide: Nick und Luca sind gemeinsam Geschäftsführer.</a:t>
             </a:r>
             <a:endParaRPr lang="en-US" dirty="0"/>
           </a:p>
@@ -797,15 +799,17 @@
             <a:r>
               <a:rPr lang="en-US" dirty="0"/>
               <a:t>WARUM DIE UG?
-Wir sind mehrere Gründer und wollen nicht mit unserem Privatvermögen haften. Für eine GmbH fehlen uns die 25.000 € Stammkapital. Die UG gibt uns die beschränkte Haftung schon ab 1 € Stammkapital.
+Wir sind zwei Gründer und wollen nicht mit unserem Privatvermögen haften. Für eine GmbH fehlen uns die 25.000 € Stammkapital. Die UG gibt uns die beschränkte Haftung schon ab 1 € Stammkapital.
 WAS HEISST HAFTUNGSBESCHRÄNKT?
 Wenn die Firma Schulden hat, haftet nur das Vermögen der Gesellschaft. Unser privates Geld ist geschützt.
 WARUM KEINE GbR ODER OHG?
 Dort haftet jeder Gesellschafter unbeschränkt mit seinem Privatvermögen, auch für die Schulden der anderen. Im Onlinehandel ist das zu riskant, z. B. bei Abmahnungen oder wenn wir auf Ware sitzen bleiben.
 WARUM KEIN EINZELUNTERNEHMEN?
-Ein Einzelunternehmen hat nur einen Inhaber, wir sind aber mehrere. Außerdem haftet der Inhaber unbeschränkt.
+Ein Einzelunternehmen hat nur einen Inhaber, wir sind aber zu zweit. Außerdem haftet der Inhaber unbeschränkt.
+WIE VIEL STAMMKAPITAL?
+1.000 €. Nick und Luca sind die Gesellschafter und zahlen je 500 € ein.
 WER FÜHRT DIE GESCHÄFTE?
-Ein Geschäftsführer, den wir Gesellschafter bestimmen. Bei uns: ________
+Wir beide: Nick und Luca sind gemeinsam Geschäftsführer. Die Geschäftsführung bestimmen die Gesellschafter, und das sind bei uns auch wir zwei.
 WIE GRÜNDET MAN EINE UG?
 Gesellschaftsvertrag beim Notar → Stammkapital einzahlen → Eintrag ins Handelsregister → Gewerbe anmelden → Finanzamt.</a:t>
             </a:r>
@@ -2116,7 +2120,7 @@
                   <a:schemeClr val="accent6"/>
                 </a:solidFill>
               </a:rPr>
-              <a:t>Gruppe ___  ·  [Eure Namen eintragen]</a:t>
+              <a:t>Gruppe 4  ·  Nick und Luca</a:t>
             </a:r>
             <a:endParaRPr lang="en-US" sz="1300" dirty="0"/>
           </a:p>
@@ -4347,7 +4351,7 @@
                   <a:schemeClr val="tx1"/>
                 </a:solidFill>
               </a:rPr>
-              <a:t>Gründung ab 1 € möglich. Wir starten mit 1.000 €.</a:t>
+              <a:t>Gründung ab 1 € möglich. Wir starten mit 1.000 €, je 500 € pro Person.</a:t>
             </a:r>
             <a:endParaRPr lang="en-US" sz="1400" dirty="0"/>
           </a:p>
@@ -4355,7 +4359,7 @@
       </p:sp>
       <p:sp>
         <p:nvSpPr>
-          <p:cNvPr id="13" name="Vorteil Alle sind Gesellschafter"/>
+          <p:cNvPr id="13" name="Vorteil Zwei Gesellschafter"/>
           <p:cNvSpPr/>
           <p:nvPr/>
         </p:nvSpPr>
@@ -4377,7 +4381,7 @@
       </p:sp>
       <p:sp>
         <p:nvSpPr>
-          <p:cNvPr id="14" name="Alle sind Gesellschafter Kreis"/>
+          <p:cNvPr id="14" name="Zwei Gesellschafter Kreis"/>
           <p:cNvSpPr/>
           <p:nvPr/>
         </p:nvSpPr>
@@ -4397,7 +4401,7 @@
       </p:sp>
       <p:pic>
         <p:nvPicPr>
-          <p:cNvPr id="15" name="Alle sind Gesellschafter Icon" descr="Alle sind Gesellschafter">    </p:cNvPr>
+          <p:cNvPr id="15" name="Zwei Gesellschafter Icon" descr="Zwei Gesellschafter">    </p:cNvPr>
           <p:cNvPicPr>
             <a:picLocks noChangeAspect="1"/>
           </p:cNvPicPr>
@@ -4421,7 +4425,7 @@
       </p:pic>
       <p:sp>
         <p:nvSpPr>
-          <p:cNvPr id="16" name="Alle sind Gesellschafter Titel"/>
+          <p:cNvPr id="16" name="Zwei Gesellschafter Titel"/>
           <p:cNvSpPr txBox="1"/>
           <p:nvPr/>
         </p:nvSpPr>
@@ -4449,7 +4453,7 @@
                   <a:schemeClr val="tx1"/>
                 </a:solidFill>
               </a:rPr>
-              <a:t>Alle sind Gesellschafter</a:t>
+              <a:t>Zwei Gesellschafter</a:t>
             </a:r>
             <a:endParaRPr lang="en-US" sz="1800" dirty="0"/>
           </a:p>
@@ -4457,7 +4461,7 @@
       </p:sp>
       <p:sp>
         <p:nvSpPr>
-          <p:cNvPr id="17" name="Alle sind Gesellschafter Text"/>
+          <p:cNvPr id="17" name="Zwei Gesellschafter Text"/>
           <p:cNvSpPr txBox="1"/>
           <p:nvPr/>
         </p:nvSpPr>
@@ -4485,7 +4489,7 @@
                   <a:schemeClr val="tx1"/>
                 </a:solidFill>
               </a:rPr>
-              <a:t>Jedes Gruppenmitglied hält den gleichen Anteil.</a:t>
+              <a:t>Nick und Luca halten je 50 % und führen gemeinsam die Geschäfte.</a:t>
             </a:r>
             <a:endParaRPr lang="en-US" sz="1400" dirty="0"/>
           </a:p>

--- a/praesentation/LootLager_Praesentation.pptx
+++ b/praesentation/LootLager_Praesentation.pptx
@@ -9,6 +9,9 @@
     <p:sldId id="257" r:id="rId3"/>
     <p:sldId id="258" r:id="rId4"/>
     <p:sldId id="259" r:id="rId5"/>
+    <p:sldId id="260" r:id="rId11"/>
+    <p:sldId id="261" r:id="rId12"/>
+    <p:sldId id="262" r:id="rId13"/>
   </p:sldIdLst>
   <p:notesMasterIdLst>
     <p:notesMasterId r:id="rId6"/>
@@ -846,6 +849,337 @@
         <p14:creationId xmlns:p14="http://schemas.microsoft.com/office/powerpoint/2010/main" val="1024086991"/>
       </p:ext>
     </p:extLst>
+  </p:cSld>
+  <p:clrMapOvr>
+    <a:masterClrMapping/>
+  </p:clrMapOvr>
+</p:notes>
+</file>
+
+<file path=ppt/notesSlides/notesSlide5.xml><?xml version="1.0" encoding="utf-8"?>
+<p:notes xmlns:a="http://schemas.openxmlformats.org/drawingml/2006/main" xmlns:p="http://schemas.openxmlformats.org/presentationml/2006/main" xmlns:r="http://schemas.openxmlformats.org/officeDocument/2006/relationships">
+  <p:cSld>
+    <p:spTree>
+      <p:nvGrpSpPr>
+        <p:cNvPr id="1" name=""/>
+        <p:cNvGrpSpPr/>
+        <p:nvPr/>
+      </p:nvGrpSpPr>
+      <p:grpSpPr>
+        <a:xfrm>
+          <a:off x="0" y="0"/>
+          <a:ext cx="0" cy="0"/>
+          <a:chOff x="0" y="0"/>
+          <a:chExt cx="0" cy="0"/>
+        </a:xfrm>
+      </p:grpSpPr>
+      <p:sp>
+        <p:nvSpPr>
+          <p:cNvPr id="2" name="Slide Image Placeholder 1"/>
+          <p:cNvSpPr>
+            <a:spLocks noGrp="1"/>
+          </p:cNvSpPr>
+          <p:nvPr>
+            <p:ph type="sldImg" idx="2"/>
+          </p:nvPr>
+        </p:nvSpPr>
+        <p:spPr/>
+      </p:sp>
+      <p:sp>
+        <p:nvSpPr>
+          <p:cNvPr id="3" name="Notes Placeholder 2"/>
+          <p:cNvSpPr>
+            <a:spLocks noGrp="1"/>
+          </p:cNvSpPr>
+          <p:nvPr>
+            <p:ph type="body" idx="3" sz="quarter"/>
+          </p:nvPr>
+        </p:nvSpPr>
+        <p:spPr/>
+        <p:txBody>
+          <a:bodyPr/>
+          <a:lstStyle/>
+          <a:p>
+            <a:r>
+              <a:t>SPRECHTEXT:</a:t>
+            </a:r>
+          </a:p>
+          <a:p>
+            <a:r>
+              <a:t>Für unseren Shop haben wir vier Shopsysteme verglichen: Shopify, Jimdo, WooCommerce und Shopware. Dafür haben wir eine Nutzwertanalyse gemacht. Jedes Kriterium hat eine Gewichtung, am wichtigsten sind uns die Kosten mit 25 %. Jeder Anbieter bekommt pro Kriterium 1 bis 10 Punkte, die wir mit der Gewichtung multiplizieren. Shopify hat mit 7,85 Punkten gewonnen, knapp vor Jimdo mit 7,45 Punkten.</a:t>
+            </a:r>
+          </a:p>
+          <a:p/>
+          <a:p>
+            <a:r>
+              <a:t>WARUM HAT SHOPIFY GEWONNEN?</a:t>
+            </a:r>
+          </a:p>
+          <a:p>
+            <a:r>
+              <a:t>Vor allem wegen der Funktionen: Bei uns laden Kunden ihr eigenes Motiv hoch. Dafür gibt es bei Shopify fertige Apps, auch für Print-on-Demand wie Printful oder Gelato. Bei Jimdo geht das nicht. Außerdem ist Shopify sehr einfach zu bedienen.</a:t>
+            </a:r>
+          </a:p>
+          <a:p/>
+          <a:p>
+            <a:r>
+              <a:t>WARUM NICHT JIMDO? ES IST DOCH BILLIGER UND AUS DEUTSCHLAND.</a:t>
+            </a:r>
+          </a:p>
+          <a:p>
+            <a:r>
+              <a:t>Stimmt, Jimdo ist günstiger und beim Datenschutz besser. Aber Jimdo hat zu wenige Shop-Funktionen. Einen Motiv-Upload für Kunden können wir damit nicht umsetzen, und das ist unser wichtigstes Merkmal.</a:t>
+            </a:r>
+          </a:p>
+          <a:p/>
+          <a:p>
+            <a:r>
+              <a:t>WARUM NICHT WOOCOMMERCE ODER SHOPWARE? DIE SIND DOCH KOSTENLOS.</a:t>
+            </a:r>
+          </a:p>
+          <a:p>
+            <a:r>
+              <a:t>Die Software ist kostenlos, aber wir bräuchten einen eigenen Server und müssten Updates und Sicherheit selbst machen. Dazu kommen Erweiterungen für deutsches Recht. Das ist für Einsteiger zu aufwendig und am Ende nicht billiger.</a:t>
+            </a:r>
+          </a:p>
+          <a:p/>
+          <a:p>
+            <a:r>
+              <a:t>WOHER KOMMEN DIE PREISE?</a:t>
+            </a:r>
+          </a:p>
+          <a:p>
+            <a:r>
+              <a:t>Aus Preisvergleichen im Internet, Stand Oktober 2026. Shopify Basic kostet 25 € im Monat bei jährlicher Zahlung, 33 € bei monatlicher Zahlung.</a:t>
+            </a:r>
+          </a:p>
+        </p:txBody>
+      </p:sp>
+      <p:sp>
+        <p:nvSpPr>
+          <p:cNvPr id="4" name="Slide Number Placeholder 3"/>
+          <p:cNvSpPr>
+            <a:spLocks noGrp="1"/>
+          </p:cNvSpPr>
+          <p:nvPr>
+            <p:ph type="sldNum" idx="5" sz="quarter"/>
+          </p:nvPr>
+        </p:nvSpPr>
+        <p:spPr/>
+      </p:sp>
+    </p:spTree>
+  </p:cSld>
+  <p:clrMapOvr>
+    <a:masterClrMapping/>
+  </p:clrMapOvr>
+</p:notes>
+</file>
+
+<file path=ppt/notesSlides/notesSlide6.xml><?xml version="1.0" encoding="utf-8"?>
+<p:notes xmlns:a="http://schemas.openxmlformats.org/drawingml/2006/main" xmlns:p="http://schemas.openxmlformats.org/presentationml/2006/main" xmlns:r="http://schemas.openxmlformats.org/officeDocument/2006/relationships">
+  <p:cSld>
+    <p:spTree>
+      <p:nvGrpSpPr>
+        <p:cNvPr id="1" name=""/>
+        <p:cNvGrpSpPr/>
+        <p:nvPr/>
+      </p:nvGrpSpPr>
+      <p:grpSpPr>
+        <a:xfrm>
+          <a:off x="0" y="0"/>
+          <a:ext cx="0" cy="0"/>
+          <a:chOff x="0" y="0"/>
+          <a:chExt cx="0" cy="0"/>
+        </a:xfrm>
+      </p:grpSpPr>
+      <p:sp>
+        <p:nvSpPr>
+          <p:cNvPr id="2" name="Slide Image Placeholder 1"/>
+          <p:cNvSpPr>
+            <a:spLocks noGrp="1"/>
+          </p:cNvSpPr>
+          <p:nvPr>
+            <p:ph type="sldImg" idx="2"/>
+          </p:nvPr>
+        </p:nvSpPr>
+        <p:spPr/>
+      </p:sp>
+      <p:sp>
+        <p:nvSpPr>
+          <p:cNvPr id="3" name="Notes Placeholder 2"/>
+          <p:cNvSpPr>
+            <a:spLocks noGrp="1"/>
+          </p:cNvSpPr>
+          <p:nvPr>
+            <p:ph type="body" idx="3" sz="quarter"/>
+          </p:nvPr>
+        </p:nvSpPr>
+        <p:spPr/>
+        <p:txBody>
+          <a:bodyPr/>
+          <a:lstStyle/>
+          <a:p>
+            <a:r>
+              <a:t>SPRECHTEXT:</a:t>
+            </a:r>
+          </a:p>
+          <a:p>
+            <a:r>
+              <a:t>Wir haben uns für Shopify entschieden. Der wichtigste Grund: Unsere Kunden sollen ihr eigenes Motiv hochladen. Dafür gibt es bei Shopify fertige Apps, und mit Print-on-Demand-Anbietern wie Printful oder Gelato wird das Produkt automatisch gedruckt und verschickt. Shopify ist einfach zu bedienen, wir brauchen keinen eigenen Server, und alle wichtigen Zahlungsarten wie PayPal und Klarna sind dabei. Der Start ist günstig: 3 Tage gratis, dann 3 Monate für je 1 €, danach kostet der Basic-Tarif 25 € im Monat.</a:t>
+            </a:r>
+          </a:p>
+          <a:p/>
+          <a:p>
+            <a:r>
+              <a:t>Rechts seht ihr den Entwurf unserer Startseite: oben Logo, Suchleiste, Konto und Warenkorb, darunter unsere Kategorien und ein Banner mit unserem Slogan und dem Button „Jetzt gestalten“. Dann kommen die Bestseller, unsere Vorteile und unten die Pflichtseiten wie Impressum und Datenschutz.</a:t>
+            </a:r>
+          </a:p>
+          <a:p/>
+          <a:p>
+            <a:r>
+              <a:t>HAT SHOPIFY AUCH NACHTEILE?</a:t>
+            </a:r>
+          </a:p>
+          <a:p>
+            <a:r>
+              <a:t>Ja. Shopify ist ein Unternehmen aus Kanada, die Daten werden teils außerhalb der EU verarbeitet. Wenn wir nicht Shopify Payments nutzen, zahlen wir im Basic-Tarif 2 % Gebühr pro Verkauf. Und manche Apps kosten extra.</a:t>
+            </a:r>
+          </a:p>
+          <a:p/>
+          <a:p>
+            <a:r>
+              <a:t>WARUM STEHT DA NICHT „30 TAGE RÜCKGABE“?</a:t>
+            </a:r>
+          </a:p>
+          <a:p>
+            <a:r>
+              <a:t>Weil unsere Produkte nach Kundenwunsch bedruckt werden. Für solche individuellen Produkte gibt es kein Widerrufsrecht (§ 312g Abs. 2 Nr. 1 BGB). Darauf müssen wir in der Widerrufsbelehrung hinweisen. Deshalb zeigen wir vor dem Kauf eine Design-Vorschau.</a:t>
+            </a:r>
+          </a:p>
+          <a:p/>
+          <a:p>
+            <a:r>
+              <a:t>WELCHE PFLICHTSEITEN BRAUCHT EIN SHOP?</a:t>
+            </a:r>
+          </a:p>
+          <a:p>
+            <a:r>
+              <a:t>Impressum (§ 5 DDG), Datenschutzerklärung (DSGVO), AGB, Widerrufsbelehrung sowie Infos zu Versand und Zahlung.</a:t>
+            </a:r>
+          </a:p>
+        </p:txBody>
+      </p:sp>
+      <p:sp>
+        <p:nvSpPr>
+          <p:cNvPr id="4" name="Slide Number Placeholder 3"/>
+          <p:cNvSpPr>
+            <a:spLocks noGrp="1"/>
+          </p:cNvSpPr>
+          <p:nvPr>
+            <p:ph type="sldNum" idx="5" sz="quarter"/>
+          </p:nvPr>
+        </p:nvSpPr>
+        <p:spPr/>
+      </p:sp>
+    </p:spTree>
+  </p:cSld>
+  <p:clrMapOvr>
+    <a:masterClrMapping/>
+  </p:clrMapOvr>
+</p:notes>
+</file>
+
+<file path=ppt/notesSlides/notesSlide7.xml><?xml version="1.0" encoding="utf-8"?>
+<p:notes xmlns:a="http://schemas.openxmlformats.org/drawingml/2006/main" xmlns:p="http://schemas.openxmlformats.org/presentationml/2006/main" xmlns:r="http://schemas.openxmlformats.org/officeDocument/2006/relationships">
+  <p:cSld>
+    <p:spTree>
+      <p:nvGrpSpPr>
+        <p:cNvPr id="1" name=""/>
+        <p:cNvGrpSpPr/>
+        <p:nvPr/>
+      </p:nvGrpSpPr>
+      <p:grpSpPr>
+        <a:xfrm>
+          <a:off x="0" y="0"/>
+          <a:ext cx="0" cy="0"/>
+          <a:chOff x="0" y="0"/>
+          <a:chExt cx="0" cy="0"/>
+        </a:xfrm>
+      </p:grpSpPr>
+      <p:sp>
+        <p:nvSpPr>
+          <p:cNvPr id="2" name="Slide Image Placeholder 1"/>
+          <p:cNvSpPr>
+            <a:spLocks noGrp="1"/>
+          </p:cNvSpPr>
+          <p:nvPr>
+            <p:ph type="sldImg" idx="2"/>
+          </p:nvPr>
+        </p:nvSpPr>
+        <p:spPr/>
+      </p:sp>
+      <p:sp>
+        <p:nvSpPr>
+          <p:cNvPr id="3" name="Notes Placeholder 2"/>
+          <p:cNvSpPr>
+            <a:spLocks noGrp="1"/>
+          </p:cNvSpPr>
+          <p:nvPr>
+            <p:ph type="body" idx="3" sz="quarter"/>
+          </p:nvPr>
+        </p:nvSpPr>
+        <p:spPr/>
+        <p:txBody>
+          <a:bodyPr/>
+          <a:lstStyle/>
+          <a:p>
+            <a:r>
+              <a:t>SPRECHTEXT:</a:t>
+            </a:r>
+          </a:p>
+          <a:p>
+            <a:r>
+              <a:t>Zum Schluss unser Fazit: Wir gründen die LootLager UG (haftungsbeschränkt) mit 1.000 € Stammkapital. Unsere Marke heißt LootLager, unser Slogan ist „Level up dein Setup.“ Den Shop bauen wir mit Shopify, und unser Logo haben wir mit ChatGPT erstellt.</a:t>
+            </a:r>
+          </a:p>
+          <a:p/>
+          <a:p>
+            <a:r>
+              <a:t>Als Nächstes würden wir den Gesellschaftsvertrag beim Notar beurkunden lassen und das Stammkapital einzahlen. Dann melden wir uns beim Handelsregister, beim Gewerbeamt und beim Finanzamt an. Danach sichern wir uns die Domain lootlager.de und melden die Marke beim DPMA an. Zum Schluss richten wir den Shop ein, machen eine Testbestellung und starten mit Werbung auf Instagram und TikTok.</a:t>
+            </a:r>
+          </a:p>
+          <a:p/>
+          <a:p>
+            <a:r>
+              <a:t>Vielen Dank fürs Zuhören! Habt ihr noch Fragen?</a:t>
+            </a:r>
+          </a:p>
+          <a:p/>
+          <a:p>
+            <a:r>
+              <a:t>WARUM DIE MARKE ANMELDEN?</a:t>
+            </a:r>
+          </a:p>
+          <a:p>
+            <a:r>
+              <a:t>Damit niemand anderes den Namen LootLager für Gaming-Zubehör nutzen darf. Eine Marke beim DPMA gilt 10 Jahre und kann verlängert werden. Unser KI-Logo ist sonst kaum geschützt, weil rein KI-generierte Bilder meist kein Urheberrecht haben.</a:t>
+            </a:r>
+          </a:p>
+        </p:txBody>
+      </p:sp>
+      <p:sp>
+        <p:nvSpPr>
+          <p:cNvPr id="4" name="Slide Number Placeholder 3"/>
+          <p:cNvSpPr>
+            <a:spLocks noGrp="1"/>
+          </p:cNvSpPr>
+          <p:nvPr>
+            <p:ph type="sldNum" idx="5" sz="quarter"/>
+          </p:nvPr>
+        </p:nvSpPr>
+        <p:spPr/>
+      </p:sp>
+    </p:spTree>
   </p:cSld>
   <p:clrMapOvr>
     <a:masterClrMapping/>
@@ -3268,7 +3602,7 @@
       </p:sp>
       <p:sp>
         <p:nvSpPr>
-          <p:cNvPr id="25" name="Slide Number Placeholder 0"/>
+          <p:cNvPr id="39" name="Slide Number Placeholder 0"/>
           <p:cNvSpPr>
             <a:spLocks noGrp="1"/>
           </p:cNvSpPr>
@@ -4862,7 +5196,7 @@
       </p:sp>
       <p:sp>
         <p:nvSpPr>
-          <p:cNvPr id="25" name="Slide Number Placeholder 0"/>
+          <p:cNvPr id="29" name="Slide Number Placeholder 0"/>
           <p:cNvSpPr>
             <a:spLocks noGrp="1"/>
           </p:cNvSpPr>
@@ -4903,6 +5237,5667 @@
             <a:fld id="{F7021451-1387-4CA6-816F-3879F97B5CBC}" type="slidenum">
               <a:rPr b="0" lang="en-US"/>
               <a:t>4</a:t>
+            </a:fld>
+            <a:endParaRPr lang="en-US"/>
+          </a:p>
+        </p:txBody>
+      </p:sp>
+    </p:spTree>
+  </p:cSld>
+  <p:clrMapOvr>
+    <a:masterClrMapping/>
+  </p:clrMapOvr>
+</p:sld>
+</file>
+
+<file path=ppt/slides/slide5.xml><?xml version="1.0" encoding="utf-8"?>
+<p:sld xmlns:a="http://schemas.openxmlformats.org/drawingml/2006/main" xmlns:p="http://schemas.openxmlformats.org/presentationml/2006/main" xmlns:r="http://schemas.openxmlformats.org/officeDocument/2006/relationships">
+  <p:cSld>
+    <p:spTree>
+      <p:nvGrpSpPr>
+        <p:cNvPr id="1" name=""/>
+        <p:cNvGrpSpPr/>
+        <p:nvPr/>
+      </p:nvGrpSpPr>
+      <p:grpSpPr/>
+      <p:sp>
+        <p:nvSpPr>
+          <p:cNvPr id="2" name="Text 0"/>
+          <p:cNvSpPr/>
+          <p:nvPr>
+            <p:ph idx="100" type="title" hasCustomPrompt="1"/>
+          </p:nvPr>
+        </p:nvSpPr>
+        <p:spPr>
+          <a:xfrm>
+            <a:off x="548640" y="365760"/>
+            <a:ext cx="11094415" cy="822960"/>
+          </a:xfrm>
+          <a:prstGeom prst="rect">
+            <a:avLst/>
+          </a:prstGeom>
+          <a:noFill/>
+          <a:ln/>
+        </p:spPr>
+        <p:txBody>
+          <a:bodyPr wrap="square" lIns="0" tIns="0" rIns="0" bIns="0" rtlCol="0" anchor="ctr"/>
+          <a:lstStyle/>
+          <a:p>
+            <a:pPr algn="l" indent="0" marL="0">
+              <a:buNone/>
+            </a:pPr>
+            <a:r>
+              <a:rPr lang="en-US" sz="3400" b="1" dirty="0">
+                <a:solidFill>
+                  <a:schemeClr val="tx1"/>
+                </a:solidFill>
+              </a:rPr>
+              <a:t>Anbietersuche: Welches Shopsystem passt?</a:t>
+            </a:r>
+            <a:endParaRPr lang="en-US" sz="3400" dirty="0"/>
+          </a:p>
+        </p:txBody>
+      </p:sp>
+      <p:sp>
+        <p:nvSpPr>
+          <p:cNvPr id="3" name="Erklärung"/>
+          <p:cNvSpPr txBox="1"/>
+          <p:nvPr/>
+        </p:nvSpPr>
+        <p:spPr>
+          <a:xfrm>
+            <a:off x="548640" y="1188720"/>
+            <a:ext cx="11091672" cy="320040"/>
+          </a:xfrm>
+          <a:prstGeom prst="rect">
+            <a:avLst/>
+          </a:prstGeom>
+          <a:noFill/>
+          <a:ln/>
+        </p:spPr>
+        <p:txBody>
+          <a:bodyPr wrap="square" lIns="0" tIns="0" rIns="0" bIns="0" rtlCol="0" anchor="ctr"/>
+          <a:lstStyle/>
+          <a:p>
+            <a:pPr indent="0" marL="0">
+              <a:buNone/>
+            </a:pPr>
+            <a:r>
+              <a:rPr lang="de-DE" sz="1400" b="1" dirty="0">
+                <a:solidFill>
+                  <a:schemeClr val="accent6"/>
+                </a:solidFill>
+              </a:rPr>
+              <a:t>Nutzwertanalyse: </a:t>
+            </a:r>
+            <a:r>
+              <a:rPr lang="de-DE" sz="1400" dirty="0">
+                <a:solidFill>
+                  <a:schemeClr val="accent6"/>
+                </a:solidFill>
+              </a:rPr>
+              <a:t>Punkte von 1 (schlecht) bis 10 (sehr gut), in Klammern gewichtet. Preise Stand Oktober 2026.</a:t>
+            </a:r>
+            <a:endParaRPr lang="de-DE" sz="1400" dirty="0"/>
+          </a:p>
+        </p:txBody>
+      </p:sp>
+      <p:graphicFrame>
+        <p:nvGraphicFramePr>
+          <p:cNvPr id="4" name="Nutzwertanalyse"/>
+          <p:cNvGraphicFramePr>
+            <a:graphicFrameLocks noGrp="1"/>
+          </p:cNvGraphicFramePr>
+          <p:nvPr/>
+        </p:nvGraphicFramePr>
+        <p:xfrm>
+          <a:off x="548640" y="1600200"/>
+          <a:ext cx="11091672" cy="3474720"/>
+        </p:xfrm>
+        <a:graphic>
+          <a:graphicData uri="http://schemas.openxmlformats.org/drawingml/2006/table">
+            <a:tbl>
+              <a:tblPr>
+                <a:tableStyleId>{5C22544A-7EE6-4342-B048-85BDC9FD1C3A}</a:tableStyleId>
+              </a:tblPr>
+              <a:tblGrid>
+                <a:gridCol w="3227832"/>
+                <a:gridCol w="1097280"/>
+                <a:gridCol w="1691640"/>
+                <a:gridCol w="1691640"/>
+                <a:gridCol w="1691640"/>
+                <a:gridCol w="1691640"/>
+              </a:tblGrid>
+              <a:tr h="713232">
+                <a:tc>
+                  <a:txBody>
+                    <a:bodyPr/>
+                    <a:lstStyle/>
+                    <a:p>
+                      <a:pPr/>
+                      <a:r>
+                        <a:rPr lang="de-DE" sz="1400" b="1" dirty="0">
+                          <a:solidFill>
+                            <a:schemeClr val="tx1"/>
+                          </a:solidFill>
+                        </a:rPr>
+                        <a:t>Kriterium</a:t>
+                      </a:r>
+                    </a:p>
+                  </a:txBody>
+                  <a:tcPr anchor="ctr" marL="91440" marR="91440" marT="27432" marB="27432">
+                    <a:lnL w="0">
+                      <a:noFill/>
+                    </a:lnL>
+                    <a:lnR w="0">
+                      <a:noFill/>
+                    </a:lnR>
+                    <a:lnT w="0">
+                      <a:noFill/>
+                    </a:lnT>
+                    <a:lnB w="0">
+                      <a:noFill/>
+                    </a:lnB>
+                    <a:solidFill>
+                      <a:schemeClr val="bg2"/>
+                    </a:solidFill>
+                  </a:tcPr>
+                </a:tc>
+                <a:tc>
+                  <a:txBody>
+                    <a:bodyPr/>
+                    <a:lstStyle/>
+                    <a:p>
+                      <a:pPr algn="ctr"/>
+                      <a:r>
+                        <a:rPr lang="de-DE" sz="1400" b="1" dirty="0">
+                          <a:solidFill>
+                            <a:schemeClr val="tx1"/>
+                          </a:solidFill>
+                        </a:rPr>
+                        <a:t>Gewichtung</a:t>
+                      </a:r>
+                    </a:p>
+                  </a:txBody>
+                  <a:tcPr anchor="ctr" marL="91440" marR="91440" marT="27432" marB="27432">
+                    <a:lnL w="0">
+                      <a:noFill/>
+                    </a:lnL>
+                    <a:lnR w="0">
+                      <a:noFill/>
+                    </a:lnR>
+                    <a:lnT w="0">
+                      <a:noFill/>
+                    </a:lnT>
+                    <a:lnB w="0">
+                      <a:noFill/>
+                    </a:lnB>
+                    <a:solidFill>
+                      <a:schemeClr val="bg2"/>
+                    </a:solidFill>
+                  </a:tcPr>
+                </a:tc>
+                <a:tc>
+                  <a:txBody>
+                    <a:bodyPr/>
+                    <a:lstStyle/>
+                    <a:p>
+                      <a:pPr algn="ctr"/>
+                      <a:r>
+                        <a:rPr lang="de-DE" sz="1500" b="1" dirty="0">
+                          <a:solidFill>
+                            <a:schemeClr val="bg1"/>
+                          </a:solidFill>
+                        </a:rPr>
+                        <a:t>Shopify</a:t>
+                      </a:r>
+                    </a:p>
+                    <a:p>
+                      <a:pPr algn="ctr"/>
+                      <a:r>
+                        <a:rPr lang="de-DE" sz="1000" dirty="0">
+                          <a:solidFill>
+                            <a:schemeClr val="accent5"/>
+                          </a:solidFill>
+                        </a:rPr>
+                        <a:t>Mietshop (SaaS)</a:t>
+                      </a:r>
+                    </a:p>
+                    <a:p>
+                      <a:pPr algn="ctr"/>
+                      <a:r>
+                        <a:rPr lang="de-DE" sz="1000" dirty="0">
+                          <a:solidFill>
+                            <a:schemeClr val="accent5"/>
+                          </a:solidFill>
+                        </a:rPr>
+                        <a:t>ab 25 € im Monat</a:t>
+                      </a:r>
+                    </a:p>
+                  </a:txBody>
+                  <a:tcPr anchor="ctr" marL="91440" marR="91440" marT="27432" marB="27432">
+                    <a:lnL w="0">
+                      <a:noFill/>
+                    </a:lnL>
+                    <a:lnR w="0">
+                      <a:noFill/>
+                    </a:lnR>
+                    <a:lnT w="0">
+                      <a:noFill/>
+                    </a:lnT>
+                    <a:lnB w="0">
+                      <a:noFill/>
+                    </a:lnB>
+                    <a:solidFill>
+                      <a:schemeClr val="accent1"/>
+                    </a:solidFill>
+                  </a:tcPr>
+                </a:tc>
+                <a:tc>
+                  <a:txBody>
+                    <a:bodyPr/>
+                    <a:lstStyle/>
+                    <a:p>
+                      <a:pPr algn="ctr"/>
+                      <a:r>
+                        <a:rPr lang="de-DE" sz="1500" b="1" dirty="0">
+                          <a:solidFill>
+                            <a:schemeClr val="tx1"/>
+                          </a:solidFill>
+                        </a:rPr>
+                        <a:t>Jimdo</a:t>
+                      </a:r>
+                    </a:p>
+                    <a:p>
+                      <a:pPr algn="ctr"/>
+                      <a:r>
+                        <a:rPr lang="de-DE" sz="1000" dirty="0">
+                          <a:solidFill>
+                            <a:schemeClr val="accent6"/>
+                          </a:solidFill>
+                        </a:rPr>
+                        <a:t>Homepage-Baukasten</a:t>
+                      </a:r>
+                    </a:p>
+                    <a:p>
+                      <a:pPr algn="ctr"/>
+                      <a:r>
+                        <a:rPr lang="de-DE" sz="1000" dirty="0">
+                          <a:solidFill>
+                            <a:schemeClr val="accent6"/>
+                          </a:solidFill>
+                        </a:rPr>
+                        <a:t>ab 18 € im Monat</a:t>
+                      </a:r>
+                    </a:p>
+                  </a:txBody>
+                  <a:tcPr anchor="ctr" marL="91440" marR="91440" marT="27432" marB="27432">
+                    <a:lnL w="0">
+                      <a:noFill/>
+                    </a:lnL>
+                    <a:lnR w="0">
+                      <a:noFill/>
+                    </a:lnR>
+                    <a:lnT w="0">
+                      <a:noFill/>
+                    </a:lnT>
+                    <a:lnB w="0">
+                      <a:noFill/>
+                    </a:lnB>
+                    <a:solidFill>
+                      <a:schemeClr val="bg2"/>
+                    </a:solidFill>
+                  </a:tcPr>
+                </a:tc>
+                <a:tc>
+                  <a:txBody>
+                    <a:bodyPr/>
+                    <a:lstStyle/>
+                    <a:p>
+                      <a:pPr algn="ctr"/>
+                      <a:r>
+                        <a:rPr lang="de-DE" sz="1500" b="1" dirty="0">
+                          <a:solidFill>
+                            <a:schemeClr val="tx1"/>
+                          </a:solidFill>
+                        </a:rPr>
+                        <a:t>WooCommerce</a:t>
+                      </a:r>
+                    </a:p>
+                    <a:p>
+                      <a:pPr algn="ctr"/>
+                      <a:r>
+                        <a:rPr lang="de-DE" sz="1000" dirty="0">
+                          <a:solidFill>
+                            <a:schemeClr val="accent6"/>
+                          </a:solidFill>
+                        </a:rPr>
+                        <a:t>WordPress-Plugin</a:t>
+                      </a:r>
+                    </a:p>
+                    <a:p>
+                      <a:pPr algn="ctr"/>
+                      <a:r>
+                        <a:rPr lang="de-DE" sz="1000" dirty="0">
+                          <a:solidFill>
+                            <a:schemeClr val="accent6"/>
+                          </a:solidFill>
+                        </a:rPr>
+                        <a:t>ca. 30 € im Monat*</a:t>
+                      </a:r>
+                    </a:p>
+                  </a:txBody>
+                  <a:tcPr anchor="ctr" marL="91440" marR="91440" marT="27432" marB="27432">
+                    <a:lnL w="0">
+                      <a:noFill/>
+                    </a:lnL>
+                    <a:lnR w="0">
+                      <a:noFill/>
+                    </a:lnR>
+                    <a:lnT w="0">
+                      <a:noFill/>
+                    </a:lnT>
+                    <a:lnB w="0">
+                      <a:noFill/>
+                    </a:lnB>
+                    <a:solidFill>
+                      <a:schemeClr val="bg2"/>
+                    </a:solidFill>
+                  </a:tcPr>
+                </a:tc>
+                <a:tc>
+                  <a:txBody>
+                    <a:bodyPr/>
+                    <a:lstStyle/>
+                    <a:p>
+                      <a:pPr algn="ctr"/>
+                      <a:r>
+                        <a:rPr lang="de-DE" sz="1500" b="1" dirty="0">
+                          <a:solidFill>
+                            <a:schemeClr val="tx1"/>
+                          </a:solidFill>
+                        </a:rPr>
+                        <a:t>Shopware 6</a:t>
+                      </a:r>
+                    </a:p>
+                    <a:p>
+                      <a:pPr algn="ctr"/>
+                      <a:r>
+                        <a:rPr lang="de-DE" sz="1000" dirty="0">
+                          <a:solidFill>
+                            <a:schemeClr val="accent6"/>
+                          </a:solidFill>
+                        </a:rPr>
+                        <a:t>Open Source</a:t>
+                      </a:r>
+                    </a:p>
+                    <a:p>
+                      <a:pPr algn="ctr"/>
+                      <a:r>
+                        <a:rPr lang="de-DE" sz="1000" dirty="0">
+                          <a:solidFill>
+                            <a:schemeClr val="accent6"/>
+                          </a:solidFill>
+                        </a:rPr>
+                        <a:t>ca. 30 € im Monat*</a:t>
+                      </a:r>
+                    </a:p>
+                  </a:txBody>
+                  <a:tcPr anchor="ctr" marL="91440" marR="91440" marT="27432" marB="27432">
+                    <a:lnL w="0">
+                      <a:noFill/>
+                    </a:lnL>
+                    <a:lnR w="0">
+                      <a:noFill/>
+                    </a:lnR>
+                    <a:lnT w="0">
+                      <a:noFill/>
+                    </a:lnT>
+                    <a:lnB w="0">
+                      <a:noFill/>
+                    </a:lnB>
+                    <a:solidFill>
+                      <a:schemeClr val="bg2"/>
+                    </a:solidFill>
+                  </a:tcPr>
+                </a:tc>
+              </a:tr>
+              <a:tr h="384048">
+                <a:tc>
+                  <a:txBody>
+                    <a:bodyPr/>
+                    <a:lstStyle/>
+                    <a:p>
+                      <a:pPr/>
+                      <a:r>
+                        <a:rPr lang="de-DE" sz="1300" dirty="0">
+                          <a:solidFill>
+                            <a:schemeClr val="tx1"/>
+                          </a:solidFill>
+                        </a:rPr>
+                        <a:t>Kosten (Start + monatlich)</a:t>
+                      </a:r>
+                    </a:p>
+                  </a:txBody>
+                  <a:tcPr anchor="ctr" marL="91440" marR="91440" marT="27432" marB="27432">
+                    <a:lnL w="0">
+                      <a:noFill/>
+                    </a:lnL>
+                    <a:lnR w="0">
+                      <a:noFill/>
+                    </a:lnR>
+                    <a:lnT w="0">
+                      <a:noFill/>
+                    </a:lnT>
+                    <a:lnB w="9525" cap="flat" cmpd="sng" algn="ctr">
+                      <a:solidFill>
+                        <a:srgbClr val="E5E0F5"/>
+                      </a:solidFill>
+                      <a:prstDash val="solid"/>
+                    </a:lnB>
+                    <a:solidFill>
+                      <a:schemeClr val="bg1"/>
+                    </a:solidFill>
+                  </a:tcPr>
+                </a:tc>
+                <a:tc>
+                  <a:txBody>
+                    <a:bodyPr/>
+                    <a:lstStyle/>
+                    <a:p>
+                      <a:pPr algn="ctr"/>
+                      <a:r>
+                        <a:rPr lang="de-DE" sz="1300" b="1" dirty="0">
+                          <a:solidFill>
+                            <a:schemeClr val="accent6"/>
+                          </a:solidFill>
+                        </a:rPr>
+                        <a:t>25 %</a:t>
+                      </a:r>
+                    </a:p>
+                  </a:txBody>
+                  <a:tcPr anchor="ctr" marL="91440" marR="91440" marT="27432" marB="27432">
+                    <a:lnL w="0">
+                      <a:noFill/>
+                    </a:lnL>
+                    <a:lnR w="0">
+                      <a:noFill/>
+                    </a:lnR>
+                    <a:lnT w="0">
+                      <a:noFill/>
+                    </a:lnT>
+                    <a:lnB w="9525" cap="flat" cmpd="sng" algn="ctr">
+                      <a:solidFill>
+                        <a:srgbClr val="E5E0F5"/>
+                      </a:solidFill>
+                      <a:prstDash val="solid"/>
+                    </a:lnB>
+                    <a:solidFill>
+                      <a:schemeClr val="bg1"/>
+                    </a:solidFill>
+                  </a:tcPr>
+                </a:tc>
+                <a:tc>
+                  <a:txBody>
+                    <a:bodyPr/>
+                    <a:lstStyle/>
+                    <a:p>
+                      <a:pPr algn="ctr"/>
+                      <a:r>
+                        <a:rPr lang="de-DE" sz="1400" b="1" dirty="0">
+                          <a:solidFill>
+                            <a:schemeClr val="tx1"/>
+                          </a:solidFill>
+                        </a:rPr>
+                        <a:t>7 </a:t>
+                      </a:r>
+                      <a:r>
+                        <a:rPr lang="de-DE" sz="1100" dirty="0">
+                          <a:solidFill>
+                            <a:schemeClr val="accent6"/>
+                          </a:solidFill>
+                        </a:rPr>
+                        <a:t>(1,75)</a:t>
+                      </a:r>
+                    </a:p>
+                  </a:txBody>
+                  <a:tcPr anchor="ctr" marL="91440" marR="91440" marT="27432" marB="27432">
+                    <a:lnL w="0">
+                      <a:noFill/>
+                    </a:lnL>
+                    <a:lnR w="0">
+                      <a:noFill/>
+                    </a:lnR>
+                    <a:lnT w="0">
+                      <a:noFill/>
+                    </a:lnT>
+                    <a:lnB w="9525" cap="flat" cmpd="sng" algn="ctr">
+                      <a:solidFill>
+                        <a:srgbClr val="E5E0F5"/>
+                      </a:solidFill>
+                      <a:prstDash val="solid"/>
+                    </a:lnB>
+                    <a:solidFill>
+                      <a:schemeClr val="bg2"/>
+                    </a:solidFill>
+                  </a:tcPr>
+                </a:tc>
+                <a:tc>
+                  <a:txBody>
+                    <a:bodyPr/>
+                    <a:lstStyle/>
+                    <a:p>
+                      <a:pPr algn="ctr"/>
+                      <a:r>
+                        <a:rPr lang="de-DE" sz="1400" b="1" dirty="0">
+                          <a:solidFill>
+                            <a:schemeClr val="tx1"/>
+                          </a:solidFill>
+                        </a:rPr>
+                        <a:t>8 </a:t>
+                      </a:r>
+                      <a:r>
+                        <a:rPr lang="de-DE" sz="1100" dirty="0">
+                          <a:solidFill>
+                            <a:schemeClr val="accent6"/>
+                          </a:solidFill>
+                        </a:rPr>
+                        <a:t>(2,00)</a:t>
+                      </a:r>
+                    </a:p>
+                  </a:txBody>
+                  <a:tcPr anchor="ctr" marL="91440" marR="91440" marT="27432" marB="27432">
+                    <a:lnL w="0">
+                      <a:noFill/>
+                    </a:lnL>
+                    <a:lnR w="0">
+                      <a:noFill/>
+                    </a:lnR>
+                    <a:lnT w="0">
+                      <a:noFill/>
+                    </a:lnT>
+                    <a:lnB w="9525" cap="flat" cmpd="sng" algn="ctr">
+                      <a:solidFill>
+                        <a:srgbClr val="E5E0F5"/>
+                      </a:solidFill>
+                      <a:prstDash val="solid"/>
+                    </a:lnB>
+                    <a:solidFill>
+                      <a:schemeClr val="bg1"/>
+                    </a:solidFill>
+                  </a:tcPr>
+                </a:tc>
+                <a:tc>
+                  <a:txBody>
+                    <a:bodyPr/>
+                    <a:lstStyle/>
+                    <a:p>
+                      <a:pPr algn="ctr"/>
+                      <a:r>
+                        <a:rPr lang="de-DE" sz="1400" b="1" dirty="0">
+                          <a:solidFill>
+                            <a:schemeClr val="tx1"/>
+                          </a:solidFill>
+                        </a:rPr>
+                        <a:t>6 </a:t>
+                      </a:r>
+                      <a:r>
+                        <a:rPr lang="de-DE" sz="1100" dirty="0">
+                          <a:solidFill>
+                            <a:schemeClr val="accent6"/>
+                          </a:solidFill>
+                        </a:rPr>
+                        <a:t>(1,50)</a:t>
+                      </a:r>
+                    </a:p>
+                  </a:txBody>
+                  <a:tcPr anchor="ctr" marL="91440" marR="91440" marT="27432" marB="27432">
+                    <a:lnL w="0">
+                      <a:noFill/>
+                    </a:lnL>
+                    <a:lnR w="0">
+                      <a:noFill/>
+                    </a:lnR>
+                    <a:lnT w="0">
+                      <a:noFill/>
+                    </a:lnT>
+                    <a:lnB w="9525" cap="flat" cmpd="sng" algn="ctr">
+                      <a:solidFill>
+                        <a:srgbClr val="E5E0F5"/>
+                      </a:solidFill>
+                      <a:prstDash val="solid"/>
+                    </a:lnB>
+                    <a:solidFill>
+                      <a:schemeClr val="bg1"/>
+                    </a:solidFill>
+                  </a:tcPr>
+                </a:tc>
+                <a:tc>
+                  <a:txBody>
+                    <a:bodyPr/>
+                    <a:lstStyle/>
+                    <a:p>
+                      <a:pPr algn="ctr"/>
+                      <a:r>
+                        <a:rPr lang="de-DE" sz="1400" b="1" dirty="0">
+                          <a:solidFill>
+                            <a:schemeClr val="tx1"/>
+                          </a:solidFill>
+                        </a:rPr>
+                        <a:t>4 </a:t>
+                      </a:r>
+                      <a:r>
+                        <a:rPr lang="de-DE" sz="1100" dirty="0">
+                          <a:solidFill>
+                            <a:schemeClr val="accent6"/>
+                          </a:solidFill>
+                        </a:rPr>
+                        <a:t>(1,00)</a:t>
+                      </a:r>
+                    </a:p>
+                  </a:txBody>
+                  <a:tcPr anchor="ctr" marL="91440" marR="91440" marT="27432" marB="27432">
+                    <a:lnL w="0">
+                      <a:noFill/>
+                    </a:lnL>
+                    <a:lnR w="0">
+                      <a:noFill/>
+                    </a:lnR>
+                    <a:lnT w="0">
+                      <a:noFill/>
+                    </a:lnT>
+                    <a:lnB w="9525" cap="flat" cmpd="sng" algn="ctr">
+                      <a:solidFill>
+                        <a:srgbClr val="E5E0F5"/>
+                      </a:solidFill>
+                      <a:prstDash val="solid"/>
+                    </a:lnB>
+                    <a:solidFill>
+                      <a:schemeClr val="bg1"/>
+                    </a:solidFill>
+                  </a:tcPr>
+                </a:tc>
+              </a:tr>
+              <a:tr h="384048">
+                <a:tc>
+                  <a:txBody>
+                    <a:bodyPr/>
+                    <a:lstStyle/>
+                    <a:p>
+                      <a:pPr/>
+                      <a:r>
+                        <a:rPr lang="de-DE" sz="1300" dirty="0">
+                          <a:solidFill>
+                            <a:schemeClr val="tx1"/>
+                          </a:solidFill>
+                        </a:rPr>
+                        <a:t>Bedienbarkeit für Einsteiger</a:t>
+                      </a:r>
+                    </a:p>
+                  </a:txBody>
+                  <a:tcPr anchor="ctr" marL="91440" marR="91440" marT="27432" marB="27432">
+                    <a:lnL w="0">
+                      <a:noFill/>
+                    </a:lnL>
+                    <a:lnR w="0">
+                      <a:noFill/>
+                    </a:lnR>
+                    <a:lnT w="0">
+                      <a:noFill/>
+                    </a:lnT>
+                    <a:lnB w="9525" cap="flat" cmpd="sng" algn="ctr">
+                      <a:solidFill>
+                        <a:srgbClr val="E5E0F5"/>
+                      </a:solidFill>
+                      <a:prstDash val="solid"/>
+                    </a:lnB>
+                    <a:solidFill>
+                      <a:schemeClr val="bg1"/>
+                    </a:solidFill>
+                  </a:tcPr>
+                </a:tc>
+                <a:tc>
+                  <a:txBody>
+                    <a:bodyPr/>
+                    <a:lstStyle/>
+                    <a:p>
+                      <a:pPr algn="ctr"/>
+                      <a:r>
+                        <a:rPr lang="de-DE" sz="1300" b="1" dirty="0">
+                          <a:solidFill>
+                            <a:schemeClr val="accent6"/>
+                          </a:solidFill>
+                        </a:rPr>
+                        <a:t>20 %</a:t>
+                      </a:r>
+                    </a:p>
+                  </a:txBody>
+                  <a:tcPr anchor="ctr" marL="91440" marR="91440" marT="27432" marB="27432">
+                    <a:lnL w="0">
+                      <a:noFill/>
+                    </a:lnL>
+                    <a:lnR w="0">
+                      <a:noFill/>
+                    </a:lnR>
+                    <a:lnT w="0">
+                      <a:noFill/>
+                    </a:lnT>
+                    <a:lnB w="9525" cap="flat" cmpd="sng" algn="ctr">
+                      <a:solidFill>
+                        <a:srgbClr val="E5E0F5"/>
+                      </a:solidFill>
+                      <a:prstDash val="solid"/>
+                    </a:lnB>
+                    <a:solidFill>
+                      <a:schemeClr val="bg1"/>
+                    </a:solidFill>
+                  </a:tcPr>
+                </a:tc>
+                <a:tc>
+                  <a:txBody>
+                    <a:bodyPr/>
+                    <a:lstStyle/>
+                    <a:p>
+                      <a:pPr algn="ctr"/>
+                      <a:r>
+                        <a:rPr lang="de-DE" sz="1400" b="1" dirty="0">
+                          <a:solidFill>
+                            <a:schemeClr val="tx1"/>
+                          </a:solidFill>
+                        </a:rPr>
+                        <a:t>9 </a:t>
+                      </a:r>
+                      <a:r>
+                        <a:rPr lang="de-DE" sz="1100" dirty="0">
+                          <a:solidFill>
+                            <a:schemeClr val="accent6"/>
+                          </a:solidFill>
+                        </a:rPr>
+                        <a:t>(1,80)</a:t>
+                      </a:r>
+                    </a:p>
+                  </a:txBody>
+                  <a:tcPr anchor="ctr" marL="91440" marR="91440" marT="27432" marB="27432">
+                    <a:lnL w="0">
+                      <a:noFill/>
+                    </a:lnL>
+                    <a:lnR w="0">
+                      <a:noFill/>
+                    </a:lnR>
+                    <a:lnT w="0">
+                      <a:noFill/>
+                    </a:lnT>
+                    <a:lnB w="9525" cap="flat" cmpd="sng" algn="ctr">
+                      <a:solidFill>
+                        <a:srgbClr val="E5E0F5"/>
+                      </a:solidFill>
+                      <a:prstDash val="solid"/>
+                    </a:lnB>
+                    <a:solidFill>
+                      <a:schemeClr val="bg2"/>
+                    </a:solidFill>
+                  </a:tcPr>
+                </a:tc>
+                <a:tc>
+                  <a:txBody>
+                    <a:bodyPr/>
+                    <a:lstStyle/>
+                    <a:p>
+                      <a:pPr algn="ctr"/>
+                      <a:r>
+                        <a:rPr lang="de-DE" sz="1400" b="1" dirty="0">
+                          <a:solidFill>
+                            <a:schemeClr val="tx1"/>
+                          </a:solidFill>
+                        </a:rPr>
+                        <a:t>9 </a:t>
+                      </a:r>
+                      <a:r>
+                        <a:rPr lang="de-DE" sz="1100" dirty="0">
+                          <a:solidFill>
+                            <a:schemeClr val="accent6"/>
+                          </a:solidFill>
+                        </a:rPr>
+                        <a:t>(1,80)</a:t>
+                      </a:r>
+                    </a:p>
+                  </a:txBody>
+                  <a:tcPr anchor="ctr" marL="91440" marR="91440" marT="27432" marB="27432">
+                    <a:lnL w="0">
+                      <a:noFill/>
+                    </a:lnL>
+                    <a:lnR w="0">
+                      <a:noFill/>
+                    </a:lnR>
+                    <a:lnT w="0">
+                      <a:noFill/>
+                    </a:lnT>
+                    <a:lnB w="9525" cap="flat" cmpd="sng" algn="ctr">
+                      <a:solidFill>
+                        <a:srgbClr val="E5E0F5"/>
+                      </a:solidFill>
+                      <a:prstDash val="solid"/>
+                    </a:lnB>
+                    <a:solidFill>
+                      <a:schemeClr val="bg1"/>
+                    </a:solidFill>
+                  </a:tcPr>
+                </a:tc>
+                <a:tc>
+                  <a:txBody>
+                    <a:bodyPr/>
+                    <a:lstStyle/>
+                    <a:p>
+                      <a:pPr algn="ctr"/>
+                      <a:r>
+                        <a:rPr lang="de-DE" sz="1400" b="1" dirty="0">
+                          <a:solidFill>
+                            <a:schemeClr val="tx1"/>
+                          </a:solidFill>
+                        </a:rPr>
+                        <a:t>4 </a:t>
+                      </a:r>
+                      <a:r>
+                        <a:rPr lang="de-DE" sz="1100" dirty="0">
+                          <a:solidFill>
+                            <a:schemeClr val="accent6"/>
+                          </a:solidFill>
+                        </a:rPr>
+                        <a:t>(0,80)</a:t>
+                      </a:r>
+                    </a:p>
+                  </a:txBody>
+                  <a:tcPr anchor="ctr" marL="91440" marR="91440" marT="27432" marB="27432">
+                    <a:lnL w="0">
+                      <a:noFill/>
+                    </a:lnL>
+                    <a:lnR w="0">
+                      <a:noFill/>
+                    </a:lnR>
+                    <a:lnT w="0">
+                      <a:noFill/>
+                    </a:lnT>
+                    <a:lnB w="9525" cap="flat" cmpd="sng" algn="ctr">
+                      <a:solidFill>
+                        <a:srgbClr val="E5E0F5"/>
+                      </a:solidFill>
+                      <a:prstDash val="solid"/>
+                    </a:lnB>
+                    <a:solidFill>
+                      <a:schemeClr val="bg1"/>
+                    </a:solidFill>
+                  </a:tcPr>
+                </a:tc>
+                <a:tc>
+                  <a:txBody>
+                    <a:bodyPr/>
+                    <a:lstStyle/>
+                    <a:p>
+                      <a:pPr algn="ctr"/>
+                      <a:r>
+                        <a:rPr lang="de-DE" sz="1400" b="1" dirty="0">
+                          <a:solidFill>
+                            <a:schemeClr val="tx1"/>
+                          </a:solidFill>
+                        </a:rPr>
+                        <a:t>4 </a:t>
+                      </a:r>
+                      <a:r>
+                        <a:rPr lang="de-DE" sz="1100" dirty="0">
+                          <a:solidFill>
+                            <a:schemeClr val="accent6"/>
+                          </a:solidFill>
+                        </a:rPr>
+                        <a:t>(0,80)</a:t>
+                      </a:r>
+                    </a:p>
+                  </a:txBody>
+                  <a:tcPr anchor="ctr" marL="91440" marR="91440" marT="27432" marB="27432">
+                    <a:lnL w="0">
+                      <a:noFill/>
+                    </a:lnL>
+                    <a:lnR w="0">
+                      <a:noFill/>
+                    </a:lnR>
+                    <a:lnT w="0">
+                      <a:noFill/>
+                    </a:lnT>
+                    <a:lnB w="9525" cap="flat" cmpd="sng" algn="ctr">
+                      <a:solidFill>
+                        <a:srgbClr val="E5E0F5"/>
+                      </a:solidFill>
+                      <a:prstDash val="solid"/>
+                    </a:lnB>
+                    <a:solidFill>
+                      <a:schemeClr val="bg1"/>
+                    </a:solidFill>
+                  </a:tcPr>
+                </a:tc>
+              </a:tr>
+              <a:tr h="384048">
+                <a:tc>
+                  <a:txBody>
+                    <a:bodyPr/>
+                    <a:lstStyle/>
+                    <a:p>
+                      <a:pPr/>
+                      <a:r>
+                        <a:rPr lang="de-DE" sz="1300" dirty="0">
+                          <a:solidFill>
+                            <a:schemeClr val="tx1"/>
+                          </a:solidFill>
+                        </a:rPr>
+                        <a:t>Funktionen (Custom Designs, Zahlung)</a:t>
+                      </a:r>
+                    </a:p>
+                  </a:txBody>
+                  <a:tcPr anchor="ctr" marL="91440" marR="91440" marT="27432" marB="27432">
+                    <a:lnL w="0">
+                      <a:noFill/>
+                    </a:lnL>
+                    <a:lnR w="0">
+                      <a:noFill/>
+                    </a:lnR>
+                    <a:lnT w="0">
+                      <a:noFill/>
+                    </a:lnT>
+                    <a:lnB w="9525" cap="flat" cmpd="sng" algn="ctr">
+                      <a:solidFill>
+                        <a:srgbClr val="E5E0F5"/>
+                      </a:solidFill>
+                      <a:prstDash val="solid"/>
+                    </a:lnB>
+                    <a:solidFill>
+                      <a:schemeClr val="bg1"/>
+                    </a:solidFill>
+                  </a:tcPr>
+                </a:tc>
+                <a:tc>
+                  <a:txBody>
+                    <a:bodyPr/>
+                    <a:lstStyle/>
+                    <a:p>
+                      <a:pPr algn="ctr"/>
+                      <a:r>
+                        <a:rPr lang="de-DE" sz="1300" b="1" dirty="0">
+                          <a:solidFill>
+                            <a:schemeClr val="accent6"/>
+                          </a:solidFill>
+                        </a:rPr>
+                        <a:t>20 %</a:t>
+                      </a:r>
+                    </a:p>
+                  </a:txBody>
+                  <a:tcPr anchor="ctr" marL="91440" marR="91440" marT="27432" marB="27432">
+                    <a:lnL w="0">
+                      <a:noFill/>
+                    </a:lnL>
+                    <a:lnR w="0">
+                      <a:noFill/>
+                    </a:lnR>
+                    <a:lnT w="0">
+                      <a:noFill/>
+                    </a:lnT>
+                    <a:lnB w="9525" cap="flat" cmpd="sng" algn="ctr">
+                      <a:solidFill>
+                        <a:srgbClr val="E5E0F5"/>
+                      </a:solidFill>
+                      <a:prstDash val="solid"/>
+                    </a:lnB>
+                    <a:solidFill>
+                      <a:schemeClr val="bg1"/>
+                    </a:solidFill>
+                  </a:tcPr>
+                </a:tc>
+                <a:tc>
+                  <a:txBody>
+                    <a:bodyPr/>
+                    <a:lstStyle/>
+                    <a:p>
+                      <a:pPr algn="ctr"/>
+                      <a:r>
+                        <a:rPr lang="de-DE" sz="1400" b="1" dirty="0">
+                          <a:solidFill>
+                            <a:schemeClr val="tx1"/>
+                          </a:solidFill>
+                        </a:rPr>
+                        <a:t>9 </a:t>
+                      </a:r>
+                      <a:r>
+                        <a:rPr lang="de-DE" sz="1100" dirty="0">
+                          <a:solidFill>
+                            <a:schemeClr val="accent6"/>
+                          </a:solidFill>
+                        </a:rPr>
+                        <a:t>(1,80)</a:t>
+                      </a:r>
+                    </a:p>
+                  </a:txBody>
+                  <a:tcPr anchor="ctr" marL="91440" marR="91440" marT="27432" marB="27432">
+                    <a:lnL w="0">
+                      <a:noFill/>
+                    </a:lnL>
+                    <a:lnR w="0">
+                      <a:noFill/>
+                    </a:lnR>
+                    <a:lnT w="0">
+                      <a:noFill/>
+                    </a:lnT>
+                    <a:lnB w="9525" cap="flat" cmpd="sng" algn="ctr">
+                      <a:solidFill>
+                        <a:srgbClr val="E5E0F5"/>
+                      </a:solidFill>
+                      <a:prstDash val="solid"/>
+                    </a:lnB>
+                    <a:solidFill>
+                      <a:schemeClr val="bg2"/>
+                    </a:solidFill>
+                  </a:tcPr>
+                </a:tc>
+                <a:tc>
+                  <a:txBody>
+                    <a:bodyPr/>
+                    <a:lstStyle/>
+                    <a:p>
+                      <a:pPr algn="ctr"/>
+                      <a:r>
+                        <a:rPr lang="de-DE" sz="1400" b="1" dirty="0">
+                          <a:solidFill>
+                            <a:schemeClr val="tx1"/>
+                          </a:solidFill>
+                        </a:rPr>
+                        <a:t>4 </a:t>
+                      </a:r>
+                      <a:r>
+                        <a:rPr lang="de-DE" sz="1100" dirty="0">
+                          <a:solidFill>
+                            <a:schemeClr val="accent6"/>
+                          </a:solidFill>
+                        </a:rPr>
+                        <a:t>(0,80)</a:t>
+                      </a:r>
+                    </a:p>
+                  </a:txBody>
+                  <a:tcPr anchor="ctr" marL="91440" marR="91440" marT="27432" marB="27432">
+                    <a:lnL w="0">
+                      <a:noFill/>
+                    </a:lnL>
+                    <a:lnR w="0">
+                      <a:noFill/>
+                    </a:lnR>
+                    <a:lnT w="0">
+                      <a:noFill/>
+                    </a:lnT>
+                    <a:lnB w="9525" cap="flat" cmpd="sng" algn="ctr">
+                      <a:solidFill>
+                        <a:srgbClr val="E5E0F5"/>
+                      </a:solidFill>
+                      <a:prstDash val="solid"/>
+                    </a:lnB>
+                    <a:solidFill>
+                      <a:schemeClr val="bg1"/>
+                    </a:solidFill>
+                  </a:tcPr>
+                </a:tc>
+                <a:tc>
+                  <a:txBody>
+                    <a:bodyPr/>
+                    <a:lstStyle/>
+                    <a:p>
+                      <a:pPr algn="ctr"/>
+                      <a:r>
+                        <a:rPr lang="de-DE" sz="1400" b="1" dirty="0">
+                          <a:solidFill>
+                            <a:schemeClr val="tx1"/>
+                          </a:solidFill>
+                        </a:rPr>
+                        <a:t>8 </a:t>
+                      </a:r>
+                      <a:r>
+                        <a:rPr lang="de-DE" sz="1100" dirty="0">
+                          <a:solidFill>
+                            <a:schemeClr val="accent6"/>
+                          </a:solidFill>
+                        </a:rPr>
+                        <a:t>(1,60)</a:t>
+                      </a:r>
+                    </a:p>
+                  </a:txBody>
+                  <a:tcPr anchor="ctr" marL="91440" marR="91440" marT="27432" marB="27432">
+                    <a:lnL w="0">
+                      <a:noFill/>
+                    </a:lnL>
+                    <a:lnR w="0">
+                      <a:noFill/>
+                    </a:lnR>
+                    <a:lnT w="0">
+                      <a:noFill/>
+                    </a:lnT>
+                    <a:lnB w="9525" cap="flat" cmpd="sng" algn="ctr">
+                      <a:solidFill>
+                        <a:srgbClr val="E5E0F5"/>
+                      </a:solidFill>
+                      <a:prstDash val="solid"/>
+                    </a:lnB>
+                    <a:solidFill>
+                      <a:schemeClr val="bg1"/>
+                    </a:solidFill>
+                  </a:tcPr>
+                </a:tc>
+                <a:tc>
+                  <a:txBody>
+                    <a:bodyPr/>
+                    <a:lstStyle/>
+                    <a:p>
+                      <a:pPr algn="ctr"/>
+                      <a:r>
+                        <a:rPr lang="de-DE" sz="1400" b="1" dirty="0">
+                          <a:solidFill>
+                            <a:schemeClr val="tx1"/>
+                          </a:solidFill>
+                        </a:rPr>
+                        <a:t>8 </a:t>
+                      </a:r>
+                      <a:r>
+                        <a:rPr lang="de-DE" sz="1100" dirty="0">
+                          <a:solidFill>
+                            <a:schemeClr val="accent6"/>
+                          </a:solidFill>
+                        </a:rPr>
+                        <a:t>(1,60)</a:t>
+                      </a:r>
+                    </a:p>
+                  </a:txBody>
+                  <a:tcPr anchor="ctr" marL="91440" marR="91440" marT="27432" marB="27432">
+                    <a:lnL w="0">
+                      <a:noFill/>
+                    </a:lnL>
+                    <a:lnR w="0">
+                      <a:noFill/>
+                    </a:lnR>
+                    <a:lnT w="0">
+                      <a:noFill/>
+                    </a:lnT>
+                    <a:lnB w="9525" cap="flat" cmpd="sng" algn="ctr">
+                      <a:solidFill>
+                        <a:srgbClr val="E5E0F5"/>
+                      </a:solidFill>
+                      <a:prstDash val="solid"/>
+                    </a:lnB>
+                    <a:solidFill>
+                      <a:schemeClr val="bg1"/>
+                    </a:solidFill>
+                  </a:tcPr>
+                </a:tc>
+              </a:tr>
+              <a:tr h="384048">
+                <a:tc>
+                  <a:txBody>
+                    <a:bodyPr/>
+                    <a:lstStyle/>
+                    <a:p>
+                      <a:pPr/>
+                      <a:r>
+                        <a:rPr lang="de-DE" sz="1300" dirty="0">
+                          <a:solidFill>
+                            <a:schemeClr val="tx1"/>
+                          </a:solidFill>
+                        </a:rPr>
+                        <a:t>Rechtssicherheit / DSGVO</a:t>
+                      </a:r>
+                    </a:p>
+                  </a:txBody>
+                  <a:tcPr anchor="ctr" marL="91440" marR="91440" marT="27432" marB="27432">
+                    <a:lnL w="0">
+                      <a:noFill/>
+                    </a:lnL>
+                    <a:lnR w="0">
+                      <a:noFill/>
+                    </a:lnR>
+                    <a:lnT w="0">
+                      <a:noFill/>
+                    </a:lnT>
+                    <a:lnB w="9525" cap="flat" cmpd="sng" algn="ctr">
+                      <a:solidFill>
+                        <a:srgbClr val="E5E0F5"/>
+                      </a:solidFill>
+                      <a:prstDash val="solid"/>
+                    </a:lnB>
+                    <a:solidFill>
+                      <a:schemeClr val="bg1"/>
+                    </a:solidFill>
+                  </a:tcPr>
+                </a:tc>
+                <a:tc>
+                  <a:txBody>
+                    <a:bodyPr/>
+                    <a:lstStyle/>
+                    <a:p>
+                      <a:pPr algn="ctr"/>
+                      <a:r>
+                        <a:rPr lang="de-DE" sz="1300" b="1" dirty="0">
+                          <a:solidFill>
+                            <a:schemeClr val="accent6"/>
+                          </a:solidFill>
+                        </a:rPr>
+                        <a:t>15 %</a:t>
+                      </a:r>
+                    </a:p>
+                  </a:txBody>
+                  <a:tcPr anchor="ctr" marL="91440" marR="91440" marT="27432" marB="27432">
+                    <a:lnL w="0">
+                      <a:noFill/>
+                    </a:lnL>
+                    <a:lnR w="0">
+                      <a:noFill/>
+                    </a:lnR>
+                    <a:lnT w="0">
+                      <a:noFill/>
+                    </a:lnT>
+                    <a:lnB w="9525" cap="flat" cmpd="sng" algn="ctr">
+                      <a:solidFill>
+                        <a:srgbClr val="E5E0F5"/>
+                      </a:solidFill>
+                      <a:prstDash val="solid"/>
+                    </a:lnB>
+                    <a:solidFill>
+                      <a:schemeClr val="bg1"/>
+                    </a:solidFill>
+                  </a:tcPr>
+                </a:tc>
+                <a:tc>
+                  <a:txBody>
+                    <a:bodyPr/>
+                    <a:lstStyle/>
+                    <a:p>
+                      <a:pPr algn="ctr"/>
+                      <a:r>
+                        <a:rPr lang="de-DE" sz="1400" b="1" dirty="0">
+                          <a:solidFill>
+                            <a:schemeClr val="tx1"/>
+                          </a:solidFill>
+                        </a:rPr>
+                        <a:t>6 </a:t>
+                      </a:r>
+                      <a:r>
+                        <a:rPr lang="de-DE" sz="1100" dirty="0">
+                          <a:solidFill>
+                            <a:schemeClr val="accent6"/>
+                          </a:solidFill>
+                        </a:rPr>
+                        <a:t>(0,90)</a:t>
+                      </a:r>
+                    </a:p>
+                  </a:txBody>
+                  <a:tcPr anchor="ctr" marL="91440" marR="91440" marT="27432" marB="27432">
+                    <a:lnL w="0">
+                      <a:noFill/>
+                    </a:lnL>
+                    <a:lnR w="0">
+                      <a:noFill/>
+                    </a:lnR>
+                    <a:lnT w="0">
+                      <a:noFill/>
+                    </a:lnT>
+                    <a:lnB w="9525" cap="flat" cmpd="sng" algn="ctr">
+                      <a:solidFill>
+                        <a:srgbClr val="E5E0F5"/>
+                      </a:solidFill>
+                      <a:prstDash val="solid"/>
+                    </a:lnB>
+                    <a:solidFill>
+                      <a:schemeClr val="bg2"/>
+                    </a:solidFill>
+                  </a:tcPr>
+                </a:tc>
+                <a:tc>
+                  <a:txBody>
+                    <a:bodyPr/>
+                    <a:lstStyle/>
+                    <a:p>
+                      <a:pPr algn="ctr"/>
+                      <a:r>
+                        <a:rPr lang="de-DE" sz="1400" b="1" dirty="0">
+                          <a:solidFill>
+                            <a:schemeClr val="tx1"/>
+                          </a:solidFill>
+                        </a:rPr>
+                        <a:t>9 </a:t>
+                      </a:r>
+                      <a:r>
+                        <a:rPr lang="de-DE" sz="1100" dirty="0">
+                          <a:solidFill>
+                            <a:schemeClr val="accent6"/>
+                          </a:solidFill>
+                        </a:rPr>
+                        <a:t>(1,35)</a:t>
+                      </a:r>
+                    </a:p>
+                  </a:txBody>
+                  <a:tcPr anchor="ctr" marL="91440" marR="91440" marT="27432" marB="27432">
+                    <a:lnL w="0">
+                      <a:noFill/>
+                    </a:lnL>
+                    <a:lnR w="0">
+                      <a:noFill/>
+                    </a:lnR>
+                    <a:lnT w="0">
+                      <a:noFill/>
+                    </a:lnT>
+                    <a:lnB w="9525" cap="flat" cmpd="sng" algn="ctr">
+                      <a:solidFill>
+                        <a:srgbClr val="E5E0F5"/>
+                      </a:solidFill>
+                      <a:prstDash val="solid"/>
+                    </a:lnB>
+                    <a:solidFill>
+                      <a:schemeClr val="bg1"/>
+                    </a:solidFill>
+                  </a:tcPr>
+                </a:tc>
+                <a:tc>
+                  <a:txBody>
+                    <a:bodyPr/>
+                    <a:lstStyle/>
+                    <a:p>
+                      <a:pPr algn="ctr"/>
+                      <a:r>
+                        <a:rPr lang="de-DE" sz="1400" b="1" dirty="0">
+                          <a:solidFill>
+                            <a:schemeClr val="tx1"/>
+                          </a:solidFill>
+                        </a:rPr>
+                        <a:t>8 </a:t>
+                      </a:r>
+                      <a:r>
+                        <a:rPr lang="de-DE" sz="1100" dirty="0">
+                          <a:solidFill>
+                            <a:schemeClr val="accent6"/>
+                          </a:solidFill>
+                        </a:rPr>
+                        <a:t>(1,20)</a:t>
+                      </a:r>
+                    </a:p>
+                  </a:txBody>
+                  <a:tcPr anchor="ctr" marL="91440" marR="91440" marT="27432" marB="27432">
+                    <a:lnL w="0">
+                      <a:noFill/>
+                    </a:lnL>
+                    <a:lnR w="0">
+                      <a:noFill/>
+                    </a:lnR>
+                    <a:lnT w="0">
+                      <a:noFill/>
+                    </a:lnT>
+                    <a:lnB w="9525" cap="flat" cmpd="sng" algn="ctr">
+                      <a:solidFill>
+                        <a:srgbClr val="E5E0F5"/>
+                      </a:solidFill>
+                      <a:prstDash val="solid"/>
+                    </a:lnB>
+                    <a:solidFill>
+                      <a:schemeClr val="bg1"/>
+                    </a:solidFill>
+                  </a:tcPr>
+                </a:tc>
+                <a:tc>
+                  <a:txBody>
+                    <a:bodyPr/>
+                    <a:lstStyle/>
+                    <a:p>
+                      <a:pPr algn="ctr"/>
+                      <a:r>
+                        <a:rPr lang="de-DE" sz="1400" b="1" dirty="0">
+                          <a:solidFill>
+                            <a:schemeClr val="tx1"/>
+                          </a:solidFill>
+                        </a:rPr>
+                        <a:t>9 </a:t>
+                      </a:r>
+                      <a:r>
+                        <a:rPr lang="de-DE" sz="1100" dirty="0">
+                          <a:solidFill>
+                            <a:schemeClr val="accent6"/>
+                          </a:solidFill>
+                        </a:rPr>
+                        <a:t>(1,35)</a:t>
+                      </a:r>
+                    </a:p>
+                  </a:txBody>
+                  <a:tcPr anchor="ctr" marL="91440" marR="91440" marT="27432" marB="27432">
+                    <a:lnL w="0">
+                      <a:noFill/>
+                    </a:lnL>
+                    <a:lnR w="0">
+                      <a:noFill/>
+                    </a:lnR>
+                    <a:lnT w="0">
+                      <a:noFill/>
+                    </a:lnT>
+                    <a:lnB w="9525" cap="flat" cmpd="sng" algn="ctr">
+                      <a:solidFill>
+                        <a:srgbClr val="E5E0F5"/>
+                      </a:solidFill>
+                      <a:prstDash val="solid"/>
+                    </a:lnB>
+                    <a:solidFill>
+                      <a:schemeClr val="bg1"/>
+                    </a:solidFill>
+                  </a:tcPr>
+                </a:tc>
+              </a:tr>
+              <a:tr h="384048">
+                <a:tc>
+                  <a:txBody>
+                    <a:bodyPr/>
+                    <a:lstStyle/>
+                    <a:p>
+                      <a:pPr/>
+                      <a:r>
+                        <a:rPr lang="de-DE" sz="1300" dirty="0">
+                          <a:solidFill>
+                            <a:schemeClr val="tx1"/>
+                          </a:solidFill>
+                        </a:rPr>
+                        <a:t>Design / Vorlagen</a:t>
+                      </a:r>
+                    </a:p>
+                  </a:txBody>
+                  <a:tcPr anchor="ctr" marL="91440" marR="91440" marT="27432" marB="27432">
+                    <a:lnL w="0">
+                      <a:noFill/>
+                    </a:lnL>
+                    <a:lnR w="0">
+                      <a:noFill/>
+                    </a:lnR>
+                    <a:lnT w="0">
+                      <a:noFill/>
+                    </a:lnT>
+                    <a:lnB w="9525" cap="flat" cmpd="sng" algn="ctr">
+                      <a:solidFill>
+                        <a:srgbClr val="E5E0F5"/>
+                      </a:solidFill>
+                      <a:prstDash val="solid"/>
+                    </a:lnB>
+                    <a:solidFill>
+                      <a:schemeClr val="bg1"/>
+                    </a:solidFill>
+                  </a:tcPr>
+                </a:tc>
+                <a:tc>
+                  <a:txBody>
+                    <a:bodyPr/>
+                    <a:lstStyle/>
+                    <a:p>
+                      <a:pPr algn="ctr"/>
+                      <a:r>
+                        <a:rPr lang="de-DE" sz="1300" b="1" dirty="0">
+                          <a:solidFill>
+                            <a:schemeClr val="accent6"/>
+                          </a:solidFill>
+                        </a:rPr>
+                        <a:t>10 %</a:t>
+                      </a:r>
+                    </a:p>
+                  </a:txBody>
+                  <a:tcPr anchor="ctr" marL="91440" marR="91440" marT="27432" marB="27432">
+                    <a:lnL w="0">
+                      <a:noFill/>
+                    </a:lnL>
+                    <a:lnR w="0">
+                      <a:noFill/>
+                    </a:lnR>
+                    <a:lnT w="0">
+                      <a:noFill/>
+                    </a:lnT>
+                    <a:lnB w="9525" cap="flat" cmpd="sng" algn="ctr">
+                      <a:solidFill>
+                        <a:srgbClr val="E5E0F5"/>
+                      </a:solidFill>
+                      <a:prstDash val="solid"/>
+                    </a:lnB>
+                    <a:solidFill>
+                      <a:schemeClr val="bg1"/>
+                    </a:solidFill>
+                  </a:tcPr>
+                </a:tc>
+                <a:tc>
+                  <a:txBody>
+                    <a:bodyPr/>
+                    <a:lstStyle/>
+                    <a:p>
+                      <a:pPr algn="ctr"/>
+                      <a:r>
+                        <a:rPr lang="de-DE" sz="1400" b="1" dirty="0">
+                          <a:solidFill>
+                            <a:schemeClr val="tx1"/>
+                          </a:solidFill>
+                        </a:rPr>
+                        <a:t>9 </a:t>
+                      </a:r>
+                      <a:r>
+                        <a:rPr lang="de-DE" sz="1100" dirty="0">
+                          <a:solidFill>
+                            <a:schemeClr val="accent6"/>
+                          </a:solidFill>
+                        </a:rPr>
+                        <a:t>(0,90)</a:t>
+                      </a:r>
+                    </a:p>
+                  </a:txBody>
+                  <a:tcPr anchor="ctr" marL="91440" marR="91440" marT="27432" marB="27432">
+                    <a:lnL w="0">
+                      <a:noFill/>
+                    </a:lnL>
+                    <a:lnR w="0">
+                      <a:noFill/>
+                    </a:lnR>
+                    <a:lnT w="0">
+                      <a:noFill/>
+                    </a:lnT>
+                    <a:lnB w="9525" cap="flat" cmpd="sng" algn="ctr">
+                      <a:solidFill>
+                        <a:srgbClr val="E5E0F5"/>
+                      </a:solidFill>
+                      <a:prstDash val="solid"/>
+                    </a:lnB>
+                    <a:solidFill>
+                      <a:schemeClr val="bg2"/>
+                    </a:solidFill>
+                  </a:tcPr>
+                </a:tc>
+                <a:tc>
+                  <a:txBody>
+                    <a:bodyPr/>
+                    <a:lstStyle/>
+                    <a:p>
+                      <a:pPr algn="ctr"/>
+                      <a:r>
+                        <a:rPr lang="de-DE" sz="1400" b="1" dirty="0">
+                          <a:solidFill>
+                            <a:schemeClr val="tx1"/>
+                          </a:solidFill>
+                        </a:rPr>
+                        <a:t>6 </a:t>
+                      </a:r>
+                      <a:r>
+                        <a:rPr lang="de-DE" sz="1100" dirty="0">
+                          <a:solidFill>
+                            <a:schemeClr val="accent6"/>
+                          </a:solidFill>
+                        </a:rPr>
+                        <a:t>(0,60)</a:t>
+                      </a:r>
+                    </a:p>
+                  </a:txBody>
+                  <a:tcPr anchor="ctr" marL="91440" marR="91440" marT="27432" marB="27432">
+                    <a:lnL w="0">
+                      <a:noFill/>
+                    </a:lnL>
+                    <a:lnR w="0">
+                      <a:noFill/>
+                    </a:lnR>
+                    <a:lnT w="0">
+                      <a:noFill/>
+                    </a:lnT>
+                    <a:lnB w="9525" cap="flat" cmpd="sng" algn="ctr">
+                      <a:solidFill>
+                        <a:srgbClr val="E5E0F5"/>
+                      </a:solidFill>
+                      <a:prstDash val="solid"/>
+                    </a:lnB>
+                    <a:solidFill>
+                      <a:schemeClr val="bg1"/>
+                    </a:solidFill>
+                  </a:tcPr>
+                </a:tc>
+                <a:tc>
+                  <a:txBody>
+                    <a:bodyPr/>
+                    <a:lstStyle/>
+                    <a:p>
+                      <a:pPr algn="ctr"/>
+                      <a:r>
+                        <a:rPr lang="de-DE" sz="1400" b="1" dirty="0">
+                          <a:solidFill>
+                            <a:schemeClr val="tx1"/>
+                          </a:solidFill>
+                        </a:rPr>
+                        <a:t>7 </a:t>
+                      </a:r>
+                      <a:r>
+                        <a:rPr lang="de-DE" sz="1100" dirty="0">
+                          <a:solidFill>
+                            <a:schemeClr val="accent6"/>
+                          </a:solidFill>
+                        </a:rPr>
+                        <a:t>(0,70)</a:t>
+                      </a:r>
+                    </a:p>
+                  </a:txBody>
+                  <a:tcPr anchor="ctr" marL="91440" marR="91440" marT="27432" marB="27432">
+                    <a:lnL w="0">
+                      <a:noFill/>
+                    </a:lnL>
+                    <a:lnR w="0">
+                      <a:noFill/>
+                    </a:lnR>
+                    <a:lnT w="0">
+                      <a:noFill/>
+                    </a:lnT>
+                    <a:lnB w="9525" cap="flat" cmpd="sng" algn="ctr">
+                      <a:solidFill>
+                        <a:srgbClr val="E5E0F5"/>
+                      </a:solidFill>
+                      <a:prstDash val="solid"/>
+                    </a:lnB>
+                    <a:solidFill>
+                      <a:schemeClr val="bg1"/>
+                    </a:solidFill>
+                  </a:tcPr>
+                </a:tc>
+                <a:tc>
+                  <a:txBody>
+                    <a:bodyPr/>
+                    <a:lstStyle/>
+                    <a:p>
+                      <a:pPr algn="ctr"/>
+                      <a:r>
+                        <a:rPr lang="de-DE" sz="1400" b="1" dirty="0">
+                          <a:solidFill>
+                            <a:schemeClr val="tx1"/>
+                          </a:solidFill>
+                        </a:rPr>
+                        <a:t>6 </a:t>
+                      </a:r>
+                      <a:r>
+                        <a:rPr lang="de-DE" sz="1100" dirty="0">
+                          <a:solidFill>
+                            <a:schemeClr val="accent6"/>
+                          </a:solidFill>
+                        </a:rPr>
+                        <a:t>(0,60)</a:t>
+                      </a:r>
+                    </a:p>
+                  </a:txBody>
+                  <a:tcPr anchor="ctr" marL="91440" marR="91440" marT="27432" marB="27432">
+                    <a:lnL w="0">
+                      <a:noFill/>
+                    </a:lnL>
+                    <a:lnR w="0">
+                      <a:noFill/>
+                    </a:lnR>
+                    <a:lnT w="0">
+                      <a:noFill/>
+                    </a:lnT>
+                    <a:lnB w="9525" cap="flat" cmpd="sng" algn="ctr">
+                      <a:solidFill>
+                        <a:srgbClr val="E5E0F5"/>
+                      </a:solidFill>
+                      <a:prstDash val="solid"/>
+                    </a:lnB>
+                    <a:solidFill>
+                      <a:schemeClr val="bg1"/>
+                    </a:solidFill>
+                  </a:tcPr>
+                </a:tc>
+              </a:tr>
+              <a:tr h="384048">
+                <a:tc>
+                  <a:txBody>
+                    <a:bodyPr/>
+                    <a:lstStyle/>
+                    <a:p>
+                      <a:pPr/>
+                      <a:r>
+                        <a:rPr lang="de-DE" sz="1300" dirty="0">
+                          <a:solidFill>
+                            <a:schemeClr val="tx1"/>
+                          </a:solidFill>
+                        </a:rPr>
+                        <a:t>Support auf Deutsch</a:t>
+                      </a:r>
+                    </a:p>
+                  </a:txBody>
+                  <a:tcPr anchor="ctr" marL="91440" marR="91440" marT="27432" marB="27432">
+                    <a:lnL w="0">
+                      <a:noFill/>
+                    </a:lnL>
+                    <a:lnR w="0">
+                      <a:noFill/>
+                    </a:lnR>
+                    <a:lnT w="0">
+                      <a:noFill/>
+                    </a:lnT>
+                    <a:lnB w="9525" cap="flat" cmpd="sng" algn="ctr">
+                      <a:solidFill>
+                        <a:srgbClr val="E5E0F5"/>
+                      </a:solidFill>
+                      <a:prstDash val="solid"/>
+                    </a:lnB>
+                    <a:solidFill>
+                      <a:schemeClr val="bg1"/>
+                    </a:solidFill>
+                  </a:tcPr>
+                </a:tc>
+                <a:tc>
+                  <a:txBody>
+                    <a:bodyPr/>
+                    <a:lstStyle/>
+                    <a:p>
+                      <a:pPr algn="ctr"/>
+                      <a:r>
+                        <a:rPr lang="de-DE" sz="1300" b="1" dirty="0">
+                          <a:solidFill>
+                            <a:schemeClr val="accent6"/>
+                          </a:solidFill>
+                        </a:rPr>
+                        <a:t>10 %</a:t>
+                      </a:r>
+                    </a:p>
+                  </a:txBody>
+                  <a:tcPr anchor="ctr" marL="91440" marR="91440" marT="27432" marB="27432">
+                    <a:lnL w="0">
+                      <a:noFill/>
+                    </a:lnL>
+                    <a:lnR w="0">
+                      <a:noFill/>
+                    </a:lnR>
+                    <a:lnT w="0">
+                      <a:noFill/>
+                    </a:lnT>
+                    <a:lnB w="9525" cap="flat" cmpd="sng" algn="ctr">
+                      <a:solidFill>
+                        <a:srgbClr val="E5E0F5"/>
+                      </a:solidFill>
+                      <a:prstDash val="solid"/>
+                    </a:lnB>
+                    <a:solidFill>
+                      <a:schemeClr val="bg1"/>
+                    </a:solidFill>
+                  </a:tcPr>
+                </a:tc>
+                <a:tc>
+                  <a:txBody>
+                    <a:bodyPr/>
+                    <a:lstStyle/>
+                    <a:p>
+                      <a:pPr algn="ctr"/>
+                      <a:r>
+                        <a:rPr lang="de-DE" sz="1400" b="1" dirty="0">
+                          <a:solidFill>
+                            <a:schemeClr val="tx1"/>
+                          </a:solidFill>
+                        </a:rPr>
+                        <a:t>7 </a:t>
+                      </a:r>
+                      <a:r>
+                        <a:rPr lang="de-DE" sz="1100" dirty="0">
+                          <a:solidFill>
+                            <a:schemeClr val="accent6"/>
+                          </a:solidFill>
+                        </a:rPr>
+                        <a:t>(0,70)</a:t>
+                      </a:r>
+                    </a:p>
+                  </a:txBody>
+                  <a:tcPr anchor="ctr" marL="91440" marR="91440" marT="27432" marB="27432">
+                    <a:lnL w="0">
+                      <a:noFill/>
+                    </a:lnL>
+                    <a:lnR w="0">
+                      <a:noFill/>
+                    </a:lnR>
+                    <a:lnT w="0">
+                      <a:noFill/>
+                    </a:lnT>
+                    <a:lnB w="9525" cap="flat" cmpd="sng" algn="ctr">
+                      <a:solidFill>
+                        <a:srgbClr val="E5E0F5"/>
+                      </a:solidFill>
+                      <a:prstDash val="solid"/>
+                    </a:lnB>
+                    <a:solidFill>
+                      <a:schemeClr val="bg2"/>
+                    </a:solidFill>
+                  </a:tcPr>
+                </a:tc>
+                <a:tc>
+                  <a:txBody>
+                    <a:bodyPr/>
+                    <a:lstStyle/>
+                    <a:p>
+                      <a:pPr algn="ctr"/>
+                      <a:r>
+                        <a:rPr lang="de-DE" sz="1400" b="1" dirty="0">
+                          <a:solidFill>
+                            <a:schemeClr val="tx1"/>
+                          </a:solidFill>
+                        </a:rPr>
+                        <a:t>9 </a:t>
+                      </a:r>
+                      <a:r>
+                        <a:rPr lang="de-DE" sz="1100" dirty="0">
+                          <a:solidFill>
+                            <a:schemeClr val="accent6"/>
+                          </a:solidFill>
+                        </a:rPr>
+                        <a:t>(0,90)</a:t>
+                      </a:r>
+                    </a:p>
+                  </a:txBody>
+                  <a:tcPr anchor="ctr" marL="91440" marR="91440" marT="27432" marB="27432">
+                    <a:lnL w="0">
+                      <a:noFill/>
+                    </a:lnL>
+                    <a:lnR w="0">
+                      <a:noFill/>
+                    </a:lnR>
+                    <a:lnT w="0">
+                      <a:noFill/>
+                    </a:lnT>
+                    <a:lnB w="9525" cap="flat" cmpd="sng" algn="ctr">
+                      <a:solidFill>
+                        <a:srgbClr val="E5E0F5"/>
+                      </a:solidFill>
+                      <a:prstDash val="solid"/>
+                    </a:lnB>
+                    <a:solidFill>
+                      <a:schemeClr val="bg1"/>
+                    </a:solidFill>
+                  </a:tcPr>
+                </a:tc>
+                <a:tc>
+                  <a:txBody>
+                    <a:bodyPr/>
+                    <a:lstStyle/>
+                    <a:p>
+                      <a:pPr algn="ctr"/>
+                      <a:r>
+                        <a:rPr lang="de-DE" sz="1400" b="1" dirty="0">
+                          <a:solidFill>
+                            <a:schemeClr val="tx1"/>
+                          </a:solidFill>
+                        </a:rPr>
+                        <a:t>4 </a:t>
+                      </a:r>
+                      <a:r>
+                        <a:rPr lang="de-DE" sz="1100" dirty="0">
+                          <a:solidFill>
+                            <a:schemeClr val="accent6"/>
+                          </a:solidFill>
+                        </a:rPr>
+                        <a:t>(0,40)</a:t>
+                      </a:r>
+                    </a:p>
+                  </a:txBody>
+                  <a:tcPr anchor="ctr" marL="91440" marR="91440" marT="27432" marB="27432">
+                    <a:lnL w="0">
+                      <a:noFill/>
+                    </a:lnL>
+                    <a:lnR w="0">
+                      <a:noFill/>
+                    </a:lnR>
+                    <a:lnT w="0">
+                      <a:noFill/>
+                    </a:lnT>
+                    <a:lnB w="9525" cap="flat" cmpd="sng" algn="ctr">
+                      <a:solidFill>
+                        <a:srgbClr val="E5E0F5"/>
+                      </a:solidFill>
+                      <a:prstDash val="solid"/>
+                    </a:lnB>
+                    <a:solidFill>
+                      <a:schemeClr val="bg1"/>
+                    </a:solidFill>
+                  </a:tcPr>
+                </a:tc>
+                <a:tc>
+                  <a:txBody>
+                    <a:bodyPr/>
+                    <a:lstStyle/>
+                    <a:p>
+                      <a:pPr algn="ctr"/>
+                      <a:r>
+                        <a:rPr lang="de-DE" sz="1400" b="1" dirty="0">
+                          <a:solidFill>
+                            <a:schemeClr val="tx1"/>
+                          </a:solidFill>
+                        </a:rPr>
+                        <a:t>7 </a:t>
+                      </a:r>
+                      <a:r>
+                        <a:rPr lang="de-DE" sz="1100" dirty="0">
+                          <a:solidFill>
+                            <a:schemeClr val="accent6"/>
+                          </a:solidFill>
+                        </a:rPr>
+                        <a:t>(0,70)</a:t>
+                      </a:r>
+                    </a:p>
+                  </a:txBody>
+                  <a:tcPr anchor="ctr" marL="91440" marR="91440" marT="27432" marB="27432">
+                    <a:lnL w="0">
+                      <a:noFill/>
+                    </a:lnL>
+                    <a:lnR w="0">
+                      <a:noFill/>
+                    </a:lnR>
+                    <a:lnT w="0">
+                      <a:noFill/>
+                    </a:lnT>
+                    <a:lnB w="9525" cap="flat" cmpd="sng" algn="ctr">
+                      <a:solidFill>
+                        <a:srgbClr val="E5E0F5"/>
+                      </a:solidFill>
+                      <a:prstDash val="solid"/>
+                    </a:lnB>
+                    <a:solidFill>
+                      <a:schemeClr val="bg1"/>
+                    </a:solidFill>
+                  </a:tcPr>
+                </a:tc>
+              </a:tr>
+              <a:tr h="457200">
+                <a:tc>
+                  <a:txBody>
+                    <a:bodyPr/>
+                    <a:lstStyle/>
+                    <a:p>
+                      <a:pPr/>
+                      <a:r>
+                        <a:rPr lang="de-DE" sz="1400" b="1" dirty="0">
+                          <a:solidFill>
+                            <a:schemeClr val="tx1"/>
+                          </a:solidFill>
+                        </a:rPr>
+                        <a:t>Summe (gewichtete Punkte)</a:t>
+                      </a:r>
+                    </a:p>
+                  </a:txBody>
+                  <a:tcPr anchor="ctr" marL="91440" marR="91440" marT="27432" marB="27432">
+                    <a:lnL w="0">
+                      <a:noFill/>
+                    </a:lnL>
+                    <a:lnR w="0">
+                      <a:noFill/>
+                    </a:lnR>
+                    <a:lnT w="19050" cap="flat" cmpd="sng" algn="ctr">
+                      <a:solidFill>
+                        <a:schemeClr val="accent1"/>
+                      </a:solidFill>
+                      <a:prstDash val="solid"/>
+                    </a:lnT>
+                    <a:lnB w="0">
+                      <a:noFill/>
+                    </a:lnB>
+                    <a:solidFill>
+                      <a:schemeClr val="bg1"/>
+                    </a:solidFill>
+                  </a:tcPr>
+                </a:tc>
+                <a:tc>
+                  <a:txBody>
+                    <a:bodyPr/>
+                    <a:lstStyle/>
+                    <a:p>
+                      <a:pPr algn="ctr"/>
+                      <a:r>
+                        <a:rPr lang="de-DE" sz="1400" b="1" dirty="0">
+                          <a:solidFill>
+                            <a:schemeClr val="accent6"/>
+                          </a:solidFill>
+                        </a:rPr>
+                        <a:t>100 %</a:t>
+                      </a:r>
+                    </a:p>
+                  </a:txBody>
+                  <a:tcPr anchor="ctr" marL="91440" marR="91440" marT="27432" marB="27432">
+                    <a:lnL w="0">
+                      <a:noFill/>
+                    </a:lnL>
+                    <a:lnR w="0">
+                      <a:noFill/>
+                    </a:lnR>
+                    <a:lnT w="19050" cap="flat" cmpd="sng" algn="ctr">
+                      <a:solidFill>
+                        <a:schemeClr val="accent1"/>
+                      </a:solidFill>
+                      <a:prstDash val="solid"/>
+                    </a:lnT>
+                    <a:lnB w="0">
+                      <a:noFill/>
+                    </a:lnB>
+                    <a:solidFill>
+                      <a:schemeClr val="bg1"/>
+                    </a:solidFill>
+                  </a:tcPr>
+                </a:tc>
+                <a:tc>
+                  <a:txBody>
+                    <a:bodyPr/>
+                    <a:lstStyle/>
+                    <a:p>
+                      <a:pPr algn="ctr"/>
+                      <a:r>
+                        <a:rPr lang="de-DE" sz="1800" b="1" dirty="0">
+                          <a:solidFill>
+                            <a:schemeClr val="bg1"/>
+                          </a:solidFill>
+                        </a:rPr>
+                        <a:t>7,85</a:t>
+                      </a:r>
+                    </a:p>
+                  </a:txBody>
+                  <a:tcPr anchor="ctr" marL="91440" marR="91440" marT="27432" marB="27432">
+                    <a:lnL w="0">
+                      <a:noFill/>
+                    </a:lnL>
+                    <a:lnR w="0">
+                      <a:noFill/>
+                    </a:lnR>
+                    <a:lnT w="19050" cap="flat" cmpd="sng" algn="ctr">
+                      <a:solidFill>
+                        <a:schemeClr val="accent1"/>
+                      </a:solidFill>
+                      <a:prstDash val="solid"/>
+                    </a:lnT>
+                    <a:lnB w="0">
+                      <a:noFill/>
+                    </a:lnB>
+                    <a:solidFill>
+                      <a:schemeClr val="accent1"/>
+                    </a:solidFill>
+                  </a:tcPr>
+                </a:tc>
+                <a:tc>
+                  <a:txBody>
+                    <a:bodyPr/>
+                    <a:lstStyle/>
+                    <a:p>
+                      <a:pPr algn="ctr"/>
+                      <a:r>
+                        <a:rPr lang="de-DE" sz="1600" b="1" dirty="0">
+                          <a:solidFill>
+                            <a:schemeClr val="tx1"/>
+                          </a:solidFill>
+                        </a:rPr>
+                        <a:t>7,45</a:t>
+                      </a:r>
+                    </a:p>
+                  </a:txBody>
+                  <a:tcPr anchor="ctr" marL="91440" marR="91440" marT="27432" marB="27432">
+                    <a:lnL w="0">
+                      <a:noFill/>
+                    </a:lnL>
+                    <a:lnR w="0">
+                      <a:noFill/>
+                    </a:lnR>
+                    <a:lnT w="19050" cap="flat" cmpd="sng" algn="ctr">
+                      <a:solidFill>
+                        <a:schemeClr val="accent1"/>
+                      </a:solidFill>
+                      <a:prstDash val="solid"/>
+                    </a:lnT>
+                    <a:lnB w="0">
+                      <a:noFill/>
+                    </a:lnB>
+                    <a:solidFill>
+                      <a:schemeClr val="bg1"/>
+                    </a:solidFill>
+                  </a:tcPr>
+                </a:tc>
+                <a:tc>
+                  <a:txBody>
+                    <a:bodyPr/>
+                    <a:lstStyle/>
+                    <a:p>
+                      <a:pPr algn="ctr"/>
+                      <a:r>
+                        <a:rPr lang="de-DE" sz="1600" b="1" dirty="0">
+                          <a:solidFill>
+                            <a:schemeClr val="tx1"/>
+                          </a:solidFill>
+                        </a:rPr>
+                        <a:t>6,20</a:t>
+                      </a:r>
+                    </a:p>
+                  </a:txBody>
+                  <a:tcPr anchor="ctr" marL="91440" marR="91440" marT="27432" marB="27432">
+                    <a:lnL w="0">
+                      <a:noFill/>
+                    </a:lnL>
+                    <a:lnR w="0">
+                      <a:noFill/>
+                    </a:lnR>
+                    <a:lnT w="19050" cap="flat" cmpd="sng" algn="ctr">
+                      <a:solidFill>
+                        <a:schemeClr val="accent1"/>
+                      </a:solidFill>
+                      <a:prstDash val="solid"/>
+                    </a:lnT>
+                    <a:lnB w="0">
+                      <a:noFill/>
+                    </a:lnB>
+                    <a:solidFill>
+                      <a:schemeClr val="bg1"/>
+                    </a:solidFill>
+                  </a:tcPr>
+                </a:tc>
+                <a:tc>
+                  <a:txBody>
+                    <a:bodyPr/>
+                    <a:lstStyle/>
+                    <a:p>
+                      <a:pPr algn="ctr"/>
+                      <a:r>
+                        <a:rPr lang="de-DE" sz="1600" b="1" dirty="0">
+                          <a:solidFill>
+                            <a:schemeClr val="tx1"/>
+                          </a:solidFill>
+                        </a:rPr>
+                        <a:t>6,05</a:t>
+                      </a:r>
+                    </a:p>
+                  </a:txBody>
+                  <a:tcPr anchor="ctr" marL="91440" marR="91440" marT="27432" marB="27432">
+                    <a:lnL w="0">
+                      <a:noFill/>
+                    </a:lnL>
+                    <a:lnR w="0">
+                      <a:noFill/>
+                    </a:lnR>
+                    <a:lnT w="19050" cap="flat" cmpd="sng" algn="ctr">
+                      <a:solidFill>
+                        <a:schemeClr val="accent1"/>
+                      </a:solidFill>
+                      <a:prstDash val="solid"/>
+                    </a:lnT>
+                    <a:lnB w="0">
+                      <a:noFill/>
+                    </a:lnB>
+                    <a:solidFill>
+                      <a:schemeClr val="bg1"/>
+                    </a:solidFill>
+                  </a:tcPr>
+                </a:tc>
+              </a:tr>
+            </a:tbl>
+          </a:graphicData>
+        </a:graphic>
+      </p:graphicFrame>
+      <p:sp>
+        <p:nvSpPr>
+          <p:cNvPr id="5" name="Ergebnis Hintergrund"/>
+          <p:cNvSpPr/>
+          <p:nvPr/>
+        </p:nvSpPr>
+        <p:spPr>
+          <a:xfrm>
+            <a:off x="548640" y="5230368"/>
+            <a:ext cx="11091672" cy="502920"/>
+          </a:xfrm>
+          <a:prstGeom prst="roundRect">
+            <a:avLst>
+              <a:gd name="adj" fmla="val 50000"/>
+            </a:avLst>
+          </a:prstGeom>
+          <a:solidFill>
+            <a:schemeClr val="accent1"/>
+          </a:solidFill>
+          <a:ln/>
+        </p:spPr>
+      </p:sp>
+      <p:pic>
+        <p:nvPicPr>
+          <p:cNvPr id="6" name="Ergebnis Icon" descr="Ergebnis Icon"/>
+          <p:cNvPicPr>
+            <a:picLocks noChangeAspect="1"/>
+          </p:cNvPicPr>
+          <p:nvPr/>
+        </p:nvPicPr>
+        <p:blipFill>
+          <a:blip r:embed="rId2"/>
+          <a:stretch>
+            <a:fillRect/>
+          </a:stretch>
+        </p:blipFill>
+        <p:spPr>
+          <a:xfrm>
+            <a:off x="777240" y="5344668"/>
+            <a:ext cx="274320" cy="274320"/>
+          </a:xfrm>
+          <a:prstGeom prst="rect">
+            <a:avLst/>
+          </a:prstGeom>
+        </p:spPr>
+      </p:pic>
+      <p:sp>
+        <p:nvSpPr>
+          <p:cNvPr id="7" name="Ergebnis Text"/>
+          <p:cNvSpPr txBox="1"/>
+          <p:nvPr/>
+        </p:nvSpPr>
+        <p:spPr>
+          <a:xfrm>
+            <a:off x="1188720" y="5230368"/>
+            <a:ext cx="10241280" cy="502920"/>
+          </a:xfrm>
+          <a:prstGeom prst="rect">
+            <a:avLst/>
+          </a:prstGeom>
+          <a:noFill/>
+          <a:ln/>
+        </p:spPr>
+        <p:txBody>
+          <a:bodyPr wrap="square" lIns="0" tIns="0" rIns="0" bIns="0" rtlCol="0" anchor="ctr"/>
+          <a:lstStyle/>
+          <a:p>
+            <a:pPr indent="0" marL="0">
+              <a:buNone/>
+            </a:pPr>
+            <a:r>
+              <a:rPr lang="de-DE" sz="1600" b="1" dirty="0">
+                <a:solidFill>
+                  <a:schemeClr val="bg1"/>
+                </a:solidFill>
+              </a:rPr>
+              <a:t>Ergebnis: </a:t>
+            </a:r>
+            <a:r>
+              <a:rPr lang="de-DE" sz="1600" dirty="0">
+                <a:solidFill>
+                  <a:schemeClr val="bg1"/>
+                </a:solidFill>
+              </a:rPr>
+              <a:t>Shopify gewinnt knapp vor Jimdo, weil sich Custom Designs dort am einfachsten umsetzen lassen.</a:t>
+            </a:r>
+            <a:endParaRPr lang="de-DE" sz="1600" dirty="0"/>
+          </a:p>
+        </p:txBody>
+      </p:sp>
+      <p:sp>
+        <p:nvSpPr>
+          <p:cNvPr id="8" name="Fußnote"/>
+          <p:cNvSpPr txBox="1"/>
+          <p:nvPr/>
+        </p:nvSpPr>
+        <p:spPr>
+          <a:xfrm>
+            <a:off x="548640" y="5806440"/>
+            <a:ext cx="8503920" cy="274320"/>
+          </a:xfrm>
+          <a:prstGeom prst="rect">
+            <a:avLst/>
+          </a:prstGeom>
+          <a:noFill/>
+          <a:ln/>
+        </p:spPr>
+        <p:txBody>
+          <a:bodyPr wrap="square" lIns="0" tIns="0" rIns="0" bIns="0" rtlCol="0" anchor="ctr"/>
+          <a:lstStyle/>
+          <a:p>
+            <a:pPr indent="0" marL="0">
+              <a:buNone/>
+            </a:pPr>
+            <a:r>
+              <a:rPr lang="de-DE" sz="1100" dirty="0">
+                <a:solidFill>
+                  <a:schemeClr val="accent6"/>
+                </a:solidFill>
+              </a:rPr>
+              <a:t>* Software kostenlos, aber Hosting, Erweiterungen für deutsches Recht und Wartung kosten Geld.</a:t>
+            </a:r>
+            <a:endParaRPr lang="de-DE" sz="1100" dirty="0"/>
+          </a:p>
+        </p:txBody>
+      </p:sp>
+      <p:sp>
+        <p:nvSpPr>
+          <p:cNvPr id="9" name="Slide Number Placeholder 0"/>
+          <p:cNvSpPr>
+            <a:spLocks noGrp="1"/>
+          </p:cNvSpPr>
+          <p:nvPr>
+            <p:ph type="sldNum" sz="quarter" idx="4294967295"/>
+          </p:nvPr>
+        </p:nvSpPr>
+        <p:spPr>
+          <a:xfrm>
+            <a:off x="548640" y="6263640"/>
+            <a:ext cx="548640" cy="365760"/>
+          </a:xfrm>
+          <a:prstGeom prst="rect">
+            <a:avLst/>
+          </a:prstGeom>
+          <a:extLst>
+            <a:ext uri="{C572A759-6A51-4108-AA02-DFA0A04FC94B}">
+              <ma14:wrappingTextBoxFlag xmlns:ma14="http://schemas.microsoft.com/office/mac/drawingml/2011/main" val="0"/>
+            </a:ext>
+          </a:extLst>
+        </p:spPr>
+        <p:txBody>
+          <a:bodyPr lIns="0" tIns="0" rIns="0" bIns="0"/>
+          <a:lstStyle>
+            <a:lvl1pPr>
+              <a:defRPr sz="1100">
+                <a:solidFill>
+                  <a:schemeClr val="accent6"/>
+                </a:solidFill>
+                <a:latin typeface="Calibri"/>
+                <a:ea typeface="Calibri"/>
+                <a:cs typeface="Calibri"/>
+              </a:defRPr>
+            </a:lvl1pPr>
+          </a:lstStyle>
+          <a:p>
+            <a:pPr algn="l"/>
+            <a:fld id="{F7021451-1387-4CA6-816F-3879F97B5CBC}" type="slidenum">
+              <a:rPr b="0" lang="en-US"/>
+              <a:t>5</a:t>
+            </a:fld>
+            <a:endParaRPr lang="en-US"/>
+          </a:p>
+        </p:txBody>
+      </p:sp>
+    </p:spTree>
+  </p:cSld>
+  <p:clrMapOvr>
+    <a:masterClrMapping/>
+  </p:clrMapOvr>
+</p:sld>
+</file>
+
+<file path=ppt/slides/slide6.xml><?xml version="1.0" encoding="utf-8"?>
+<p:sld xmlns:a="http://schemas.openxmlformats.org/drawingml/2006/main" xmlns:p="http://schemas.openxmlformats.org/presentationml/2006/main" xmlns:r="http://schemas.openxmlformats.org/officeDocument/2006/relationships">
+  <p:cSld>
+    <p:spTree>
+      <p:nvGrpSpPr>
+        <p:cNvPr id="1" name=""/>
+        <p:cNvGrpSpPr/>
+        <p:nvPr/>
+      </p:nvGrpSpPr>
+      <p:grpSpPr/>
+      <p:sp>
+        <p:nvSpPr>
+          <p:cNvPr id="2" name="Text 0"/>
+          <p:cNvSpPr/>
+          <p:nvPr>
+            <p:ph idx="100" type="title" hasCustomPrompt="1"/>
+          </p:nvPr>
+        </p:nvSpPr>
+        <p:spPr>
+          <a:xfrm>
+            <a:off x="548640" y="365760"/>
+            <a:ext cx="11094415" cy="822960"/>
+          </a:xfrm>
+          <a:prstGeom prst="rect">
+            <a:avLst/>
+          </a:prstGeom>
+          <a:noFill/>
+          <a:ln/>
+        </p:spPr>
+        <p:txBody>
+          <a:bodyPr wrap="square" lIns="0" tIns="0" rIns="0" bIns="0" rtlCol="0" anchor="ctr"/>
+          <a:lstStyle/>
+          <a:p>
+            <a:pPr algn="l" indent="0" marL="0">
+              <a:buNone/>
+            </a:pPr>
+            <a:r>
+              <a:rPr lang="en-US" sz="3400" b="1" dirty="0">
+                <a:solidFill>
+                  <a:schemeClr val="tx1"/>
+                </a:solidFill>
+              </a:rPr>
+              <a:t>Unsere Wahl: Shopify</a:t>
+            </a:r>
+            <a:endParaRPr lang="en-US" sz="3400" dirty="0"/>
+          </a:p>
+        </p:txBody>
+      </p:sp>
+      <p:sp>
+        <p:nvSpPr>
+          <p:cNvPr id="3" name="Gründe Überschrift"/>
+          <p:cNvSpPr txBox="1"/>
+          <p:nvPr/>
+        </p:nvSpPr>
+        <p:spPr>
+          <a:xfrm>
+            <a:off x="548640" y="1371600"/>
+            <a:ext cx="5303520" cy="411480"/>
+          </a:xfrm>
+          <a:prstGeom prst="rect">
+            <a:avLst/>
+          </a:prstGeom>
+          <a:noFill/>
+          <a:ln/>
+        </p:spPr>
+        <p:txBody>
+          <a:bodyPr wrap="square" lIns="0" tIns="0" rIns="0" bIns="0" rtlCol="0" anchor="ctr"/>
+          <a:lstStyle/>
+          <a:p>
+            <a:pPr indent="0" marL="0">
+              <a:buNone/>
+            </a:pPr>
+            <a:r>
+              <a:rPr lang="de-DE" sz="2000" b="1" dirty="0">
+                <a:solidFill>
+                  <a:schemeClr val="tx1"/>
+                </a:solidFill>
+              </a:rPr>
+              <a:t>Warum Shopify?</a:t>
+            </a:r>
+            <a:endParaRPr lang="de-DE" sz="2000" dirty="0"/>
+          </a:p>
+        </p:txBody>
+      </p:sp>
+      <p:sp>
+        <p:nvSpPr>
+          <p:cNvPr id="4" name="Custom Designs per App Kreis"/>
+          <p:cNvSpPr/>
+          <p:nvPr/>
+        </p:nvSpPr>
+        <p:spPr>
+          <a:xfrm>
+            <a:off x="548640" y="1965960"/>
+            <a:ext cx="502920" cy="502920"/>
+          </a:xfrm>
+          <a:prstGeom prst="ellipse">
+            <a:avLst/>
+          </a:prstGeom>
+          <a:solidFill>
+            <a:schemeClr val="accent1"/>
+          </a:solidFill>
+          <a:ln/>
+        </p:spPr>
+      </p:sp>
+      <p:pic>
+        <p:nvPicPr>
+          <p:cNvPr id="5" name="Custom Designs per App Icon" descr="Custom Designs per App Icon"/>
+          <p:cNvPicPr>
+            <a:picLocks noChangeAspect="1"/>
+          </p:cNvPicPr>
+          <p:nvPr/>
+        </p:nvPicPr>
+        <p:blipFill>
+          <a:blip r:embed="rId2"/>
+          <a:stretch>
+            <a:fillRect/>
+          </a:stretch>
+        </p:blipFill>
+        <p:spPr>
+          <a:xfrm>
+            <a:off x="674370" y="2091690"/>
+            <a:ext cx="251460" cy="251460"/>
+          </a:xfrm>
+          <a:prstGeom prst="rect">
+            <a:avLst/>
+          </a:prstGeom>
+        </p:spPr>
+      </p:pic>
+      <p:sp>
+        <p:nvSpPr>
+          <p:cNvPr id="6" name="Custom Designs per App Titel"/>
+          <p:cNvSpPr txBox="1"/>
+          <p:nvPr/>
+        </p:nvSpPr>
+        <p:spPr>
+          <a:xfrm>
+            <a:off x="1234440" y="1929384"/>
+            <a:ext cx="4617720" cy="310896"/>
+          </a:xfrm>
+          <a:prstGeom prst="rect">
+            <a:avLst/>
+          </a:prstGeom>
+          <a:noFill/>
+          <a:ln/>
+        </p:spPr>
+        <p:txBody>
+          <a:bodyPr wrap="square" lIns="0" tIns="0" rIns="0" bIns="0" rtlCol="0" anchor="ctr"/>
+          <a:lstStyle/>
+          <a:p>
+            <a:pPr indent="0" marL="0">
+              <a:buNone/>
+            </a:pPr>
+            <a:r>
+              <a:rPr lang="de-DE" sz="1600" b="1" dirty="0">
+                <a:solidFill>
+                  <a:schemeClr val="tx1"/>
+                </a:solidFill>
+              </a:rPr>
+              <a:t>Custom Designs per App</a:t>
+            </a:r>
+            <a:endParaRPr lang="de-DE" sz="1600" dirty="0"/>
+          </a:p>
+        </p:txBody>
+      </p:sp>
+      <p:sp>
+        <p:nvSpPr>
+          <p:cNvPr id="7" name="Custom Designs per App Text"/>
+          <p:cNvSpPr txBox="1"/>
+          <p:nvPr/>
+        </p:nvSpPr>
+        <p:spPr>
+          <a:xfrm>
+            <a:off x="1234440" y="2249424"/>
+            <a:ext cx="4617720" cy="457200"/>
+          </a:xfrm>
+          <a:prstGeom prst="rect">
+            <a:avLst/>
+          </a:prstGeom>
+          <a:noFill/>
+          <a:ln/>
+        </p:spPr>
+        <p:txBody>
+          <a:bodyPr wrap="square" lIns="0" tIns="0" rIns="0" bIns="0" rtlCol="0" anchor="t"/>
+          <a:lstStyle/>
+          <a:p>
+            <a:pPr indent="0" marL="0">
+              <a:buNone/>
+            </a:pPr>
+            <a:r>
+              <a:rPr lang="de-DE" sz="1300" dirty="0">
+                <a:solidFill>
+                  <a:schemeClr val="tx1"/>
+                </a:solidFill>
+              </a:rPr>
+              <a:t>Motiv-Upload und Druck per App, z. B. mit Printful</a:t>
+            </a:r>
+            <a:endParaRPr lang="de-DE" sz="1300" dirty="0"/>
+          </a:p>
+        </p:txBody>
+      </p:sp>
+      <p:sp>
+        <p:nvSpPr>
+          <p:cNvPr id="8" name="Schnell startklar Kreis"/>
+          <p:cNvSpPr/>
+          <p:nvPr/>
+        </p:nvSpPr>
+        <p:spPr>
+          <a:xfrm>
+            <a:off x="548640" y="2752344"/>
+            <a:ext cx="502920" cy="502920"/>
+          </a:xfrm>
+          <a:prstGeom prst="ellipse">
+            <a:avLst/>
+          </a:prstGeom>
+          <a:solidFill>
+            <a:schemeClr val="accent1"/>
+          </a:solidFill>
+          <a:ln/>
+        </p:spPr>
+      </p:sp>
+      <p:pic>
+        <p:nvPicPr>
+          <p:cNvPr id="9" name="Schnell startklar Icon" descr="Schnell startklar Icon"/>
+          <p:cNvPicPr>
+            <a:picLocks noChangeAspect="1"/>
+          </p:cNvPicPr>
+          <p:nvPr/>
+        </p:nvPicPr>
+        <p:blipFill>
+          <a:blip r:embed="rId3"/>
+          <a:stretch>
+            <a:fillRect/>
+          </a:stretch>
+        </p:blipFill>
+        <p:spPr>
+          <a:xfrm>
+            <a:off x="674370" y="2878074"/>
+            <a:ext cx="251460" cy="251460"/>
+          </a:xfrm>
+          <a:prstGeom prst="rect">
+            <a:avLst/>
+          </a:prstGeom>
+        </p:spPr>
+      </p:pic>
+      <p:sp>
+        <p:nvSpPr>
+          <p:cNvPr id="10" name="Schnell startklar Titel"/>
+          <p:cNvSpPr txBox="1"/>
+          <p:nvPr/>
+        </p:nvSpPr>
+        <p:spPr>
+          <a:xfrm>
+            <a:off x="1234440" y="2715768"/>
+            <a:ext cx="4617720" cy="310896"/>
+          </a:xfrm>
+          <a:prstGeom prst="rect">
+            <a:avLst/>
+          </a:prstGeom>
+          <a:noFill/>
+          <a:ln/>
+        </p:spPr>
+        <p:txBody>
+          <a:bodyPr wrap="square" lIns="0" tIns="0" rIns="0" bIns="0" rtlCol="0" anchor="ctr"/>
+          <a:lstStyle/>
+          <a:p>
+            <a:pPr indent="0" marL="0">
+              <a:buNone/>
+            </a:pPr>
+            <a:r>
+              <a:rPr lang="de-DE" sz="1600" b="1" dirty="0">
+                <a:solidFill>
+                  <a:schemeClr val="tx1"/>
+                </a:solidFill>
+              </a:rPr>
+              <a:t>Schnell startklar</a:t>
+            </a:r>
+            <a:endParaRPr lang="de-DE" sz="1600" dirty="0"/>
+          </a:p>
+        </p:txBody>
+      </p:sp>
+      <p:sp>
+        <p:nvSpPr>
+          <p:cNvPr id="11" name="Schnell startklar Text"/>
+          <p:cNvSpPr txBox="1"/>
+          <p:nvPr/>
+        </p:nvSpPr>
+        <p:spPr>
+          <a:xfrm>
+            <a:off x="1234440" y="3035808"/>
+            <a:ext cx="4617720" cy="457200"/>
+          </a:xfrm>
+          <a:prstGeom prst="rect">
+            <a:avLst/>
+          </a:prstGeom>
+          <a:noFill/>
+          <a:ln/>
+        </p:spPr>
+        <p:txBody>
+          <a:bodyPr wrap="square" lIns="0" tIns="0" rIns="0" bIns="0" rtlCol="0" anchor="t"/>
+          <a:lstStyle/>
+          <a:p>
+            <a:pPr indent="0" marL="0">
+              <a:buNone/>
+            </a:pPr>
+            <a:r>
+              <a:rPr lang="de-DE" sz="1300" dirty="0">
+                <a:solidFill>
+                  <a:schemeClr val="tx1"/>
+                </a:solidFill>
+              </a:rPr>
+              <a:t>Kein eigener Server nötig, in wenigen Tagen online</a:t>
+            </a:r>
+            <a:endParaRPr lang="de-DE" sz="1300" dirty="0"/>
+          </a:p>
+        </p:txBody>
+      </p:sp>
+      <p:sp>
+        <p:nvSpPr>
+          <p:cNvPr id="12" name="Alle wichtigen Zahlungsarten Kreis"/>
+          <p:cNvSpPr/>
+          <p:nvPr/>
+        </p:nvSpPr>
+        <p:spPr>
+          <a:xfrm>
+            <a:off x="548640" y="3538728"/>
+            <a:ext cx="502920" cy="502920"/>
+          </a:xfrm>
+          <a:prstGeom prst="ellipse">
+            <a:avLst/>
+          </a:prstGeom>
+          <a:solidFill>
+            <a:schemeClr val="accent1"/>
+          </a:solidFill>
+          <a:ln/>
+        </p:spPr>
+      </p:sp>
+      <p:pic>
+        <p:nvPicPr>
+          <p:cNvPr id="13" name="Alle wichtigen Zahlungsarten Icon" descr="Alle wichtigen Zahlungsarten Icon"/>
+          <p:cNvPicPr>
+            <a:picLocks noChangeAspect="1"/>
+          </p:cNvPicPr>
+          <p:nvPr/>
+        </p:nvPicPr>
+        <p:blipFill>
+          <a:blip r:embed="rId4"/>
+          <a:stretch>
+            <a:fillRect/>
+          </a:stretch>
+        </p:blipFill>
+        <p:spPr>
+          <a:xfrm>
+            <a:off x="674370" y="3664458"/>
+            <a:ext cx="251460" cy="251460"/>
+          </a:xfrm>
+          <a:prstGeom prst="rect">
+            <a:avLst/>
+          </a:prstGeom>
+        </p:spPr>
+      </p:pic>
+      <p:sp>
+        <p:nvSpPr>
+          <p:cNvPr id="14" name="Alle wichtigen Zahlungsarten Titel"/>
+          <p:cNvSpPr txBox="1"/>
+          <p:nvPr/>
+        </p:nvSpPr>
+        <p:spPr>
+          <a:xfrm>
+            <a:off x="1234440" y="3502152"/>
+            <a:ext cx="4617720" cy="310896"/>
+          </a:xfrm>
+          <a:prstGeom prst="rect">
+            <a:avLst/>
+          </a:prstGeom>
+          <a:noFill/>
+          <a:ln/>
+        </p:spPr>
+        <p:txBody>
+          <a:bodyPr wrap="square" lIns="0" tIns="0" rIns="0" bIns="0" rtlCol="0" anchor="ctr"/>
+          <a:lstStyle/>
+          <a:p>
+            <a:pPr indent="0" marL="0">
+              <a:buNone/>
+            </a:pPr>
+            <a:r>
+              <a:rPr lang="de-DE" sz="1600" b="1" dirty="0">
+                <a:solidFill>
+                  <a:schemeClr val="tx1"/>
+                </a:solidFill>
+              </a:rPr>
+              <a:t>Alle wichtigen Zahlungsarten</a:t>
+            </a:r>
+            <a:endParaRPr lang="de-DE" sz="1600" dirty="0"/>
+          </a:p>
+        </p:txBody>
+      </p:sp>
+      <p:sp>
+        <p:nvSpPr>
+          <p:cNvPr id="15" name="Alle wichtigen Zahlungsarten Text"/>
+          <p:cNvSpPr txBox="1"/>
+          <p:nvPr/>
+        </p:nvSpPr>
+        <p:spPr>
+          <a:xfrm>
+            <a:off x="1234440" y="3822192"/>
+            <a:ext cx="4617720" cy="457200"/>
+          </a:xfrm>
+          <a:prstGeom prst="rect">
+            <a:avLst/>
+          </a:prstGeom>
+          <a:noFill/>
+          <a:ln/>
+        </p:spPr>
+        <p:txBody>
+          <a:bodyPr wrap="square" lIns="0" tIns="0" rIns="0" bIns="0" rtlCol="0" anchor="t"/>
+          <a:lstStyle/>
+          <a:p>
+            <a:pPr indent="0" marL="0">
+              <a:buNone/>
+            </a:pPr>
+            <a:r>
+              <a:rPr lang="de-DE" sz="1300" dirty="0">
+                <a:solidFill>
+                  <a:schemeClr val="tx1"/>
+                </a:solidFill>
+              </a:rPr>
+              <a:t>PayPal, Klarna, Kreditkarte, Apple Pay und Google Pay</a:t>
+            </a:r>
+            <a:endParaRPr lang="de-DE" sz="1300" dirty="0"/>
+          </a:p>
+        </p:txBody>
+      </p:sp>
+      <p:sp>
+        <p:nvSpPr>
+          <p:cNvPr id="16" name="Günstiger Start Kreis"/>
+          <p:cNvSpPr/>
+          <p:nvPr/>
+        </p:nvSpPr>
+        <p:spPr>
+          <a:xfrm>
+            <a:off x="548640" y="4325112"/>
+            <a:ext cx="502920" cy="502920"/>
+          </a:xfrm>
+          <a:prstGeom prst="ellipse">
+            <a:avLst/>
+          </a:prstGeom>
+          <a:solidFill>
+            <a:schemeClr val="accent1"/>
+          </a:solidFill>
+          <a:ln/>
+        </p:spPr>
+      </p:sp>
+      <p:pic>
+        <p:nvPicPr>
+          <p:cNvPr id="17" name="Günstiger Start Icon" descr="Günstiger Start Icon"/>
+          <p:cNvPicPr>
+            <a:picLocks noChangeAspect="1"/>
+          </p:cNvPicPr>
+          <p:nvPr/>
+        </p:nvPicPr>
+        <p:blipFill>
+          <a:blip r:embed="rId5"/>
+          <a:stretch>
+            <a:fillRect/>
+          </a:stretch>
+        </p:blipFill>
+        <p:spPr>
+          <a:xfrm>
+            <a:off x="674370" y="4450842"/>
+            <a:ext cx="251460" cy="251460"/>
+          </a:xfrm>
+          <a:prstGeom prst="rect">
+            <a:avLst/>
+          </a:prstGeom>
+        </p:spPr>
+      </p:pic>
+      <p:sp>
+        <p:nvSpPr>
+          <p:cNvPr id="18" name="Günstiger Start Titel"/>
+          <p:cNvSpPr txBox="1"/>
+          <p:nvPr/>
+        </p:nvSpPr>
+        <p:spPr>
+          <a:xfrm>
+            <a:off x="1234440" y="4288536"/>
+            <a:ext cx="4617720" cy="310896"/>
+          </a:xfrm>
+          <a:prstGeom prst="rect">
+            <a:avLst/>
+          </a:prstGeom>
+          <a:noFill/>
+          <a:ln/>
+        </p:spPr>
+        <p:txBody>
+          <a:bodyPr wrap="square" lIns="0" tIns="0" rIns="0" bIns="0" rtlCol="0" anchor="ctr"/>
+          <a:lstStyle/>
+          <a:p>
+            <a:pPr indent="0" marL="0">
+              <a:buNone/>
+            </a:pPr>
+            <a:r>
+              <a:rPr lang="de-DE" sz="1600" b="1" dirty="0">
+                <a:solidFill>
+                  <a:schemeClr val="tx1"/>
+                </a:solidFill>
+              </a:rPr>
+              <a:t>Günstiger Start</a:t>
+            </a:r>
+            <a:endParaRPr lang="de-DE" sz="1600" dirty="0"/>
+          </a:p>
+        </p:txBody>
+      </p:sp>
+      <p:sp>
+        <p:nvSpPr>
+          <p:cNvPr id="19" name="Günstiger Start Text"/>
+          <p:cNvSpPr txBox="1"/>
+          <p:nvPr/>
+        </p:nvSpPr>
+        <p:spPr>
+          <a:xfrm>
+            <a:off x="1234440" y="4608576"/>
+            <a:ext cx="4617720" cy="457200"/>
+          </a:xfrm>
+          <a:prstGeom prst="rect">
+            <a:avLst/>
+          </a:prstGeom>
+          <a:noFill/>
+          <a:ln/>
+        </p:spPr>
+        <p:txBody>
+          <a:bodyPr wrap="square" lIns="0" tIns="0" rIns="0" bIns="0" rtlCol="0" anchor="t"/>
+          <a:lstStyle/>
+          <a:p>
+            <a:pPr indent="0" marL="0">
+              <a:buNone/>
+            </a:pPr>
+            <a:r>
+              <a:rPr lang="de-DE" sz="1300" dirty="0">
+                <a:solidFill>
+                  <a:schemeClr val="tx1"/>
+                </a:solidFill>
+              </a:rPr>
+              <a:t>3 Tage gratis, dann 3 Monate für je 1 €, danach ab 25 € im Monat</a:t>
+            </a:r>
+            <a:endParaRPr lang="de-DE" sz="1300" dirty="0"/>
+          </a:p>
+        </p:txBody>
+      </p:sp>
+      <p:sp>
+        <p:nvSpPr>
+          <p:cNvPr id="20" name="Nachteile Karte"/>
+          <p:cNvSpPr/>
+          <p:nvPr/>
+        </p:nvSpPr>
+        <p:spPr>
+          <a:xfrm>
+            <a:off x="548640" y="5138928"/>
+            <a:ext cx="5303520" cy="850392"/>
+          </a:xfrm>
+          <a:prstGeom prst="roundRect">
+            <a:avLst>
+              <a:gd name="adj" fmla="val 9000"/>
+            </a:avLst>
+          </a:prstGeom>
+          <a:solidFill>
+            <a:schemeClr val="accent3">
+              <a:alpha val="18000"/>
+            </a:schemeClr>
+          </a:solidFill>
+          <a:ln/>
+        </p:spPr>
+      </p:sp>
+      <p:sp>
+        <p:nvSpPr>
+          <p:cNvPr id="21" name="Nachteile Kreis"/>
+          <p:cNvSpPr/>
+          <p:nvPr/>
+        </p:nvSpPr>
+        <p:spPr>
+          <a:xfrm>
+            <a:off x="749808" y="5358384"/>
+            <a:ext cx="411480" cy="411480"/>
+          </a:xfrm>
+          <a:prstGeom prst="ellipse">
+            <a:avLst/>
+          </a:prstGeom>
+          <a:solidFill>
+            <a:schemeClr val="accent3"/>
+          </a:solidFill>
+          <a:ln/>
+        </p:spPr>
+      </p:sp>
+      <p:pic>
+        <p:nvPicPr>
+          <p:cNvPr id="22" name="Nachteile Icon" descr="Nachteile Icon"/>
+          <p:cNvPicPr>
+            <a:picLocks noChangeAspect="1"/>
+          </p:cNvPicPr>
+          <p:nvPr/>
+        </p:nvPicPr>
+        <p:blipFill>
+          <a:blip r:embed="rId6"/>
+          <a:stretch>
+            <a:fillRect/>
+          </a:stretch>
+        </p:blipFill>
+        <p:spPr>
+          <a:xfrm>
+            <a:off x="852678" y="5461254"/>
+            <a:ext cx="205740" cy="205740"/>
+          </a:xfrm>
+          <a:prstGeom prst="rect">
+            <a:avLst/>
+          </a:prstGeom>
+        </p:spPr>
+      </p:pic>
+      <p:sp>
+        <p:nvSpPr>
+          <p:cNvPr id="23" name="Nachteile Text"/>
+          <p:cNvSpPr txBox="1"/>
+          <p:nvPr/>
+        </p:nvSpPr>
+        <p:spPr>
+          <a:xfrm>
+            <a:off x="1325880" y="5138928"/>
+            <a:ext cx="4389120" cy="850392"/>
+          </a:xfrm>
+          <a:prstGeom prst="rect">
+            <a:avLst/>
+          </a:prstGeom>
+          <a:noFill/>
+          <a:ln/>
+        </p:spPr>
+        <p:txBody>
+          <a:bodyPr wrap="square" lIns="0" tIns="0" rIns="0" bIns="0" rtlCol="0" anchor="ctr"/>
+          <a:lstStyle/>
+          <a:p>
+            <a:pPr indent="0" marL="0">
+              <a:buNone/>
+            </a:pPr>
+            <a:r>
+              <a:rPr lang="de-DE" sz="1200" b="1" dirty="0">
+                <a:solidFill>
+                  <a:schemeClr val="tx1"/>
+                </a:solidFill>
+              </a:rPr>
+              <a:t>Nachteile: </a:t>
+            </a:r>
+            <a:r>
+              <a:rPr lang="de-DE" sz="1200" dirty="0">
+                <a:solidFill>
+                  <a:schemeClr val="tx1"/>
+                </a:solidFill>
+              </a:rPr>
+              <a:t>Daten teils außerhalb der EU. Ohne Shopify Payments 2 % Gebühr pro Verkauf. Manche Apps kosten extra.</a:t>
+            </a:r>
+            <a:endParaRPr lang="de-DE" sz="1200" dirty="0"/>
+          </a:p>
+        </p:txBody>
+      </p:sp>
+      <p:sp>
+        <p:nvSpPr>
+          <p:cNvPr id="24" name="Entwurf Überschrift"/>
+          <p:cNvSpPr txBox="1"/>
+          <p:nvPr/>
+        </p:nvSpPr>
+        <p:spPr>
+          <a:xfrm>
+            <a:off x="6309360" y="1371600"/>
+            <a:ext cx="5330952" cy="411480"/>
+          </a:xfrm>
+          <a:prstGeom prst="rect">
+            <a:avLst/>
+          </a:prstGeom>
+          <a:noFill/>
+          <a:ln/>
+        </p:spPr>
+        <p:txBody>
+          <a:bodyPr wrap="square" lIns="0" tIns="0" rIns="0" bIns="0" rtlCol="0" anchor="ctr"/>
+          <a:lstStyle/>
+          <a:p>
+            <a:pPr indent="0" marL="0">
+              <a:buNone/>
+            </a:pPr>
+            <a:r>
+              <a:rPr lang="de-DE" sz="2000" b="1" dirty="0">
+                <a:solidFill>
+                  <a:schemeClr val="tx1"/>
+                </a:solidFill>
+              </a:rPr>
+              <a:t>Entwurf unserer Startseite</a:t>
+            </a:r>
+            <a:endParaRPr lang="de-DE" sz="2000" dirty="0"/>
+          </a:p>
+        </p:txBody>
+      </p:sp>
+      <p:sp>
+        <p:nvSpPr>
+          <p:cNvPr id="25" name="Browser Rahmen"/>
+          <p:cNvSpPr/>
+          <p:nvPr/>
+        </p:nvSpPr>
+        <p:spPr>
+          <a:xfrm>
+            <a:off x="6309360" y="1920240"/>
+            <a:ext cx="5330952" cy="4069080"/>
+          </a:xfrm>
+          <a:prstGeom prst="roundRect">
+            <a:avLst>
+              <a:gd name="adj" fmla="val 3000"/>
+            </a:avLst>
+          </a:prstGeom>
+          <a:solidFill>
+            <a:schemeClr val="bg1"/>
+          </a:solidFill>
+          <a:ln w="12700">
+            <a:solidFill>
+              <a:srgbClr val="E5E0F5"/>
+            </a:solidFill>
+            <a:prstDash val="solid"/>
+          </a:ln>
+          <a:effectLst>
+            <a:outerShdw sx="100000" sy="100000" kx="0" ky="0" algn="bl" rotWithShape="0" blurRad="101600" dist="25400" dir="5400000">
+              <a:srgbClr val="2E1065">
+                <a:alpha val="12000"/>
+              </a:srgbClr>
+            </a:outerShdw>
+          </a:effectLst>
+        </p:spPr>
+      </p:sp>
+      <p:sp>
+        <p:nvSpPr>
+          <p:cNvPr id="26" name="Browser Punkt 1"/>
+          <p:cNvSpPr/>
+          <p:nvPr/>
+        </p:nvSpPr>
+        <p:spPr>
+          <a:xfrm>
+            <a:off x="6437376" y="2039112"/>
+            <a:ext cx="82296" cy="82296"/>
+          </a:xfrm>
+          <a:prstGeom prst="ellipse">
+            <a:avLst/>
+          </a:prstGeom>
+          <a:solidFill>
+            <a:srgbClr val="F87171"/>
+          </a:solidFill>
+          <a:ln/>
+        </p:spPr>
+      </p:sp>
+      <p:sp>
+        <p:nvSpPr>
+          <p:cNvPr id="27" name="Browser Punkt 2"/>
+          <p:cNvSpPr/>
+          <p:nvPr/>
+        </p:nvSpPr>
+        <p:spPr>
+          <a:xfrm>
+            <a:off x="6574536" y="2039112"/>
+            <a:ext cx="82296" cy="82296"/>
+          </a:xfrm>
+          <a:prstGeom prst="ellipse">
+            <a:avLst/>
+          </a:prstGeom>
+          <a:solidFill>
+            <a:srgbClr val="FBBF24"/>
+          </a:solidFill>
+          <a:ln/>
+        </p:spPr>
+      </p:sp>
+      <p:sp>
+        <p:nvSpPr>
+          <p:cNvPr id="28" name="Browser Punkt 3"/>
+          <p:cNvSpPr/>
+          <p:nvPr/>
+        </p:nvSpPr>
+        <p:spPr>
+          <a:xfrm>
+            <a:off x="6711696" y="2039112"/>
+            <a:ext cx="82296" cy="82296"/>
+          </a:xfrm>
+          <a:prstGeom prst="ellipse">
+            <a:avLst/>
+          </a:prstGeom>
+          <a:solidFill>
+            <a:srgbClr val="34D399"/>
+          </a:solidFill>
+          <a:ln/>
+        </p:spPr>
+      </p:sp>
+      <p:sp>
+        <p:nvSpPr>
+          <p:cNvPr id="29" name="Adresszeile"/>
+          <p:cNvSpPr/>
+          <p:nvPr/>
+        </p:nvSpPr>
+        <p:spPr>
+          <a:xfrm>
+            <a:off x="6986016" y="1984248"/>
+            <a:ext cx="2926080" cy="201168"/>
+          </a:xfrm>
+          <a:prstGeom prst="roundRect">
+            <a:avLst>
+              <a:gd name="adj" fmla="val 50000"/>
+            </a:avLst>
+          </a:prstGeom>
+          <a:solidFill>
+            <a:srgbClr val="F3F4F6"/>
+          </a:solidFill>
+          <a:ln/>
+        </p:spPr>
+      </p:sp>
+      <p:sp>
+        <p:nvSpPr>
+          <p:cNvPr id="30" name="Adresse"/>
+          <p:cNvSpPr txBox="1"/>
+          <p:nvPr/>
+        </p:nvSpPr>
+        <p:spPr>
+          <a:xfrm>
+            <a:off x="6986016" y="1984248"/>
+            <a:ext cx="2926080" cy="201168"/>
+          </a:xfrm>
+          <a:prstGeom prst="rect">
+            <a:avLst/>
+          </a:prstGeom>
+          <a:noFill/>
+          <a:ln/>
+        </p:spPr>
+        <p:txBody>
+          <a:bodyPr wrap="square" lIns="109728" tIns="0" rIns="109728" bIns="0" rtlCol="0" anchor="ctr"/>
+          <a:lstStyle/>
+          <a:p>
+            <a:pPr indent="0" marL="0">
+              <a:buNone/>
+            </a:pPr>
+            <a:r>
+              <a:rPr lang="de-DE" sz="800" dirty="0">
+                <a:solidFill>
+                  <a:schemeClr val="accent6"/>
+                </a:solidFill>
+              </a:rPr>
+              <a:t>lootlager.de</a:t>
+            </a:r>
+            <a:endParaRPr lang="de-DE" sz="800" dirty="0"/>
+          </a:p>
+        </p:txBody>
+      </p:sp>
+      <p:pic>
+        <p:nvPicPr>
+          <p:cNvPr id="31" name="Shop Logo" descr="Shop Logo"/>
+          <p:cNvPicPr>
+            <a:picLocks noChangeAspect="1"/>
+          </p:cNvPicPr>
+          <p:nvPr/>
+        </p:nvPicPr>
+        <p:blipFill>
+          <a:blip r:embed="rId7"/>
+          <a:stretch>
+            <a:fillRect/>
+          </a:stretch>
+        </p:blipFill>
+        <p:spPr>
+          <a:xfrm>
+            <a:off x="6437376" y="2304288"/>
+            <a:ext cx="1143000" cy="311618"/>
+          </a:xfrm>
+          <a:prstGeom prst="rect">
+            <a:avLst/>
+          </a:prstGeom>
+        </p:spPr>
+      </p:pic>
+      <p:sp>
+        <p:nvSpPr>
+          <p:cNvPr id="32" name="Suchfeld"/>
+          <p:cNvSpPr/>
+          <p:nvPr/>
+        </p:nvSpPr>
+        <p:spPr>
+          <a:xfrm>
+            <a:off x="7717536" y="2322576"/>
+            <a:ext cx="2697480" cy="274320"/>
+          </a:xfrm>
+          <a:prstGeom prst="roundRect">
+            <a:avLst>
+              <a:gd name="adj" fmla="val 50000"/>
+            </a:avLst>
+          </a:prstGeom>
+          <a:solidFill>
+            <a:schemeClr val="bg1"/>
+          </a:solidFill>
+          <a:ln w="9525">
+            <a:solidFill>
+              <a:srgbClr val="D1D5DB"/>
+            </a:solidFill>
+            <a:prstDash val="solid"/>
+          </a:ln>
+        </p:spPr>
+      </p:sp>
+      <p:sp>
+        <p:nvSpPr>
+          <p:cNvPr id="33" name="Suchfeld Text"/>
+          <p:cNvSpPr txBox="1"/>
+          <p:nvPr/>
+        </p:nvSpPr>
+        <p:spPr>
+          <a:xfrm>
+            <a:off x="7717536" y="2322576"/>
+            <a:ext cx="2377440" cy="274320"/>
+          </a:xfrm>
+          <a:prstGeom prst="rect">
+            <a:avLst/>
+          </a:prstGeom>
+          <a:noFill/>
+          <a:ln/>
+        </p:spPr>
+        <p:txBody>
+          <a:bodyPr wrap="square" lIns="109728" tIns="0" rIns="109728" bIns="0" rtlCol="0" anchor="ctr"/>
+          <a:lstStyle/>
+          <a:p>
+            <a:pPr indent="0" marL="0">
+              <a:buNone/>
+            </a:pPr>
+            <a:r>
+              <a:rPr lang="de-DE" sz="800" dirty="0">
+                <a:solidFill>
+                  <a:srgbClr val="9CA3AF"/>
+                </a:solidFill>
+              </a:rPr>
+              <a:t>Motiv oder Produkt suchen …</a:t>
+            </a:r>
+            <a:endParaRPr lang="de-DE" sz="800" dirty="0"/>
+          </a:p>
+        </p:txBody>
+      </p:sp>
+      <p:pic>
+        <p:nvPicPr>
+          <p:cNvPr id="34" name="Suche Icon" descr="Suche Icon"/>
+          <p:cNvPicPr>
+            <a:picLocks noChangeAspect="1"/>
+          </p:cNvPicPr>
+          <p:nvPr/>
+        </p:nvPicPr>
+        <p:blipFill>
+          <a:blip r:embed="rId8"/>
+          <a:stretch>
+            <a:fillRect/>
+          </a:stretch>
+        </p:blipFill>
+        <p:spPr>
+          <a:xfrm>
+            <a:off x="10168128" y="2386584"/>
+            <a:ext cx="146304" cy="146304"/>
+          </a:xfrm>
+          <a:prstGeom prst="rect">
+            <a:avLst/>
+          </a:prstGeom>
+        </p:spPr>
+      </p:pic>
+      <p:pic>
+        <p:nvPicPr>
+          <p:cNvPr id="35" name="Konto Icon" descr="Konto Icon"/>
+          <p:cNvPicPr>
+            <a:picLocks noChangeAspect="1"/>
+          </p:cNvPicPr>
+          <p:nvPr/>
+        </p:nvPicPr>
+        <p:blipFill>
+          <a:blip r:embed="rId9"/>
+          <a:stretch>
+            <a:fillRect/>
+          </a:stretch>
+        </p:blipFill>
+        <p:spPr>
+          <a:xfrm>
+            <a:off x="10780776" y="2359152"/>
+            <a:ext cx="201168" cy="201168"/>
+          </a:xfrm>
+          <a:prstGeom prst="rect">
+            <a:avLst/>
+          </a:prstGeom>
+        </p:spPr>
+      </p:pic>
+      <p:pic>
+        <p:nvPicPr>
+          <p:cNvPr id="36" name="Warenkorb Icon" descr="Warenkorb Icon"/>
+          <p:cNvPicPr>
+            <a:picLocks noChangeAspect="1"/>
+          </p:cNvPicPr>
+          <p:nvPr/>
+        </p:nvPicPr>
+        <p:blipFill>
+          <a:blip r:embed="rId10"/>
+          <a:stretch>
+            <a:fillRect/>
+          </a:stretch>
+        </p:blipFill>
+        <p:spPr>
+          <a:xfrm>
+            <a:off x="11146536" y="2359152"/>
+            <a:ext cx="201168" cy="201168"/>
+          </a:xfrm>
+          <a:prstGeom prst="rect">
+            <a:avLst/>
+          </a:prstGeom>
+        </p:spPr>
+      </p:pic>
+      <p:sp>
+        <p:nvSpPr>
+          <p:cNvPr id="37" name="Navigation"/>
+          <p:cNvSpPr txBox="1"/>
+          <p:nvPr/>
+        </p:nvSpPr>
+        <p:spPr>
+          <a:xfrm>
+            <a:off x="6437376" y="2743200"/>
+            <a:ext cx="5074920" cy="237744"/>
+          </a:xfrm>
+          <a:prstGeom prst="rect">
+            <a:avLst/>
+          </a:prstGeom>
+          <a:noFill/>
+          <a:ln/>
+        </p:spPr>
+        <p:txBody>
+          <a:bodyPr wrap="square" lIns="0" tIns="0" rIns="0" bIns="0" rtlCol="0" anchor="ctr"/>
+          <a:lstStyle/>
+          <a:p>
+            <a:pPr indent="0" marL="0" algn="ctr">
+              <a:buNone/>
+            </a:pPr>
+            <a:r>
+              <a:rPr lang="de-DE" sz="900" b="1" dirty="0">
+                <a:solidFill>
+                  <a:schemeClr val="tx1"/>
+                </a:solidFill>
+              </a:rPr>
+              <a:t>Mauspads     Controller-Skins     Keycaps     LED-Schilder     </a:t>
+            </a:r>
+            <a:r>
+              <a:rPr lang="de-DE" sz="900" b="1" dirty="0">
+                <a:solidFill>
+                  <a:schemeClr val="accent1"/>
+                </a:solidFill>
+              </a:rPr>
+              <a:t>Eigenes Design</a:t>
+            </a:r>
+            <a:endParaRPr lang="de-DE" sz="900" dirty="0"/>
+          </a:p>
+        </p:txBody>
+      </p:sp>
+      <p:sp>
+        <p:nvSpPr>
+          <p:cNvPr id="38" name="Banner"/>
+          <p:cNvSpPr/>
+          <p:nvPr/>
+        </p:nvSpPr>
+        <p:spPr>
+          <a:xfrm>
+            <a:off x="6437376" y="3072384"/>
+            <a:ext cx="5074920" cy="1051560"/>
+          </a:xfrm>
+          <a:prstGeom prst="roundRect">
+            <a:avLst>
+              <a:gd name="adj" fmla="val 7000"/>
+            </a:avLst>
+          </a:prstGeom>
+          <a:solidFill>
+            <a:schemeClr val="tx1"/>
+          </a:solidFill>
+          <a:ln/>
+        </p:spPr>
+      </p:sp>
+      <p:sp>
+        <p:nvSpPr>
+          <p:cNvPr id="39" name="Banner Slogan"/>
+          <p:cNvSpPr txBox="1"/>
+          <p:nvPr/>
+        </p:nvSpPr>
+        <p:spPr>
+          <a:xfrm>
+            <a:off x="6665976" y="3191256"/>
+            <a:ext cx="3566160" cy="365760"/>
+          </a:xfrm>
+          <a:prstGeom prst="rect">
+            <a:avLst/>
+          </a:prstGeom>
+          <a:noFill/>
+          <a:ln/>
+        </p:spPr>
+        <p:txBody>
+          <a:bodyPr wrap="square" lIns="0" tIns="0" rIns="0" bIns="0" rtlCol="0" anchor="ctr"/>
+          <a:lstStyle/>
+          <a:p>
+            <a:pPr indent="0" marL="0">
+              <a:buNone/>
+            </a:pPr>
+            <a:r>
+              <a:rPr lang="de-DE" sz="1800" b="1" dirty="0">
+                <a:solidFill>
+                  <a:schemeClr val="bg1"/>
+                </a:solidFill>
+              </a:rPr>
+              <a:t>Level up dein Setup.</a:t>
+            </a:r>
+            <a:endParaRPr lang="de-DE" sz="1800" dirty="0"/>
+          </a:p>
+        </p:txBody>
+      </p:sp>
+      <p:sp>
+        <p:nvSpPr>
+          <p:cNvPr id="40" name="Banner Text"/>
+          <p:cNvSpPr txBox="1"/>
+          <p:nvPr/>
+        </p:nvSpPr>
+        <p:spPr>
+          <a:xfrm>
+            <a:off x="6665976" y="3557016"/>
+            <a:ext cx="3566160" cy="228600"/>
+          </a:xfrm>
+          <a:prstGeom prst="rect">
+            <a:avLst/>
+          </a:prstGeom>
+          <a:noFill/>
+          <a:ln/>
+        </p:spPr>
+        <p:txBody>
+          <a:bodyPr wrap="square" lIns="0" tIns="0" rIns="0" bIns="0" rtlCol="0" anchor="ctr"/>
+          <a:lstStyle/>
+          <a:p>
+            <a:pPr indent="0" marL="0">
+              <a:buNone/>
+            </a:pPr>
+            <a:r>
+              <a:rPr lang="de-DE" sz="900" dirty="0">
+                <a:solidFill>
+                  <a:schemeClr val="accent5"/>
+                </a:solidFill>
+              </a:rPr>
+              <a:t>Lade dein Motiv hoch, wir drucken es auf dein Zubehör.</a:t>
+            </a:r>
+            <a:endParaRPr lang="de-DE" sz="900" dirty="0"/>
+          </a:p>
+        </p:txBody>
+      </p:sp>
+      <p:sp>
+        <p:nvSpPr>
+          <p:cNvPr id="41" name="Banner Button"/>
+          <p:cNvSpPr/>
+          <p:nvPr/>
+        </p:nvSpPr>
+        <p:spPr>
+          <a:xfrm>
+            <a:off x="6665976" y="3831336"/>
+            <a:ext cx="1234440" cy="219456"/>
+          </a:xfrm>
+          <a:prstGeom prst="roundRect">
+            <a:avLst>
+              <a:gd name="adj" fmla="val 50000"/>
+            </a:avLst>
+          </a:prstGeom>
+          <a:solidFill>
+            <a:schemeClr val="accent2"/>
+          </a:solidFill>
+          <a:ln/>
+        </p:spPr>
+      </p:sp>
+      <p:sp>
+        <p:nvSpPr>
+          <p:cNvPr id="42" name="Banner Button Text"/>
+          <p:cNvSpPr txBox="1"/>
+          <p:nvPr/>
+        </p:nvSpPr>
+        <p:spPr>
+          <a:xfrm>
+            <a:off x="6665976" y="3831336"/>
+            <a:ext cx="1234440" cy="219456"/>
+          </a:xfrm>
+          <a:prstGeom prst="rect">
+            <a:avLst/>
+          </a:prstGeom>
+          <a:noFill/>
+          <a:ln/>
+        </p:spPr>
+        <p:txBody>
+          <a:bodyPr wrap="square" lIns="0" tIns="0" rIns="0" bIns="0" rtlCol="0" anchor="ctr"/>
+          <a:lstStyle/>
+          <a:p>
+            <a:pPr indent="0" marL="0" algn="ctr">
+              <a:buNone/>
+            </a:pPr>
+            <a:r>
+              <a:rPr lang="de-DE" sz="900" b="1" dirty="0">
+                <a:solidFill>
+                  <a:schemeClr val="tx1"/>
+                </a:solidFill>
+              </a:rPr>
+              <a:t>Jetzt gestalten</a:t>
+            </a:r>
+            <a:endParaRPr lang="de-DE" sz="900" dirty="0"/>
+          </a:p>
+        </p:txBody>
+      </p:sp>
+      <p:sp>
+        <p:nvSpPr>
+          <p:cNvPr id="43" name="Banner Truhe Kreis"/>
+          <p:cNvSpPr/>
+          <p:nvPr/>
+        </p:nvSpPr>
+        <p:spPr>
+          <a:xfrm>
+            <a:off x="10442448" y="3163824"/>
+            <a:ext cx="868680" cy="868680"/>
+          </a:xfrm>
+          <a:prstGeom prst="ellipse">
+            <a:avLst/>
+          </a:prstGeom>
+          <a:solidFill>
+            <a:schemeClr val="bg1"/>
+          </a:solidFill>
+          <a:ln/>
+        </p:spPr>
+      </p:sp>
+      <p:pic>
+        <p:nvPicPr>
+          <p:cNvPr id="44" name="Banner Truhe" descr="Banner Truhe"/>
+          <p:cNvPicPr>
+            <a:picLocks noChangeAspect="1"/>
+          </p:cNvPicPr>
+          <p:nvPr/>
+        </p:nvPicPr>
+        <p:blipFill>
+          <a:blip r:embed="rId11"/>
+          <a:stretch>
+            <a:fillRect/>
+          </a:stretch>
+        </p:blipFill>
+        <p:spPr>
+          <a:xfrm>
+            <a:off x="10588752" y="3310128"/>
+            <a:ext cx="576072" cy="576072"/>
+          </a:xfrm>
+          <a:prstGeom prst="rect">
+            <a:avLst/>
+          </a:prstGeom>
+        </p:spPr>
+      </p:pic>
+      <p:sp>
+        <p:nvSpPr>
+          <p:cNvPr id="45" name="Bestseller Überschrift"/>
+          <p:cNvSpPr txBox="1"/>
+          <p:nvPr/>
+        </p:nvSpPr>
+        <p:spPr>
+          <a:xfrm>
+            <a:off x="6437376" y="4233672"/>
+            <a:ext cx="5074920" cy="219456"/>
+          </a:xfrm>
+          <a:prstGeom prst="rect">
+            <a:avLst/>
+          </a:prstGeom>
+          <a:noFill/>
+          <a:ln/>
+        </p:spPr>
+        <p:txBody>
+          <a:bodyPr wrap="square" lIns="0" tIns="0" rIns="0" bIns="0" rtlCol="0" anchor="ctr"/>
+          <a:lstStyle/>
+          <a:p>
+            <a:pPr indent="0" marL="0">
+              <a:buNone/>
+            </a:pPr>
+            <a:r>
+              <a:rPr lang="de-DE" sz="1000" b="1" dirty="0">
+                <a:solidFill>
+                  <a:schemeClr val="tx1"/>
+                </a:solidFill>
+              </a:rPr>
+              <a:t>Bestseller</a:t>
+            </a:r>
+            <a:endParaRPr lang="de-DE" sz="1000" dirty="0"/>
+          </a:p>
+        </p:txBody>
+      </p:sp>
+      <p:sp>
+        <p:nvSpPr>
+          <p:cNvPr id="46" name="Produkt XXL-Mauspad"/>
+          <p:cNvSpPr/>
+          <p:nvPr/>
+        </p:nvSpPr>
+        <p:spPr>
+          <a:xfrm>
+            <a:off x="6437376" y="4507992"/>
+            <a:ext cx="1200150" cy="749808"/>
+          </a:xfrm>
+          <a:prstGeom prst="roundRect">
+            <a:avLst>
+              <a:gd name="adj" fmla="val 7500"/>
+            </a:avLst>
+          </a:prstGeom>
+          <a:solidFill>
+            <a:schemeClr val="bg2"/>
+          </a:solidFill>
+          <a:ln/>
+        </p:spPr>
+      </p:sp>
+      <p:sp>
+        <p:nvSpPr>
+          <p:cNvPr id="47" name="XXL-Mauspad Kreis"/>
+          <p:cNvSpPr/>
+          <p:nvPr/>
+        </p:nvSpPr>
+        <p:spPr>
+          <a:xfrm>
+            <a:off x="6547104" y="4599432"/>
+            <a:ext cx="347472" cy="347472"/>
+          </a:xfrm>
+          <a:prstGeom prst="ellipse">
+            <a:avLst/>
+          </a:prstGeom>
+          <a:solidFill>
+            <a:schemeClr val="accent1"/>
+          </a:solidFill>
+          <a:ln/>
+        </p:spPr>
+      </p:sp>
+      <p:pic>
+        <p:nvPicPr>
+          <p:cNvPr id="48" name="XXL-Mauspad Icon" descr="XXL-Mauspad Icon"/>
+          <p:cNvPicPr>
+            <a:picLocks noChangeAspect="1"/>
+          </p:cNvPicPr>
+          <p:nvPr/>
+        </p:nvPicPr>
+        <p:blipFill>
+          <a:blip r:embed="rId12"/>
+          <a:stretch>
+            <a:fillRect/>
+          </a:stretch>
+        </p:blipFill>
+        <p:spPr>
+          <a:xfrm>
+            <a:off x="6633972" y="4686300"/>
+            <a:ext cx="173736" cy="173736"/>
+          </a:xfrm>
+          <a:prstGeom prst="rect">
+            <a:avLst/>
+          </a:prstGeom>
+        </p:spPr>
+      </p:pic>
+      <p:sp>
+        <p:nvSpPr>
+          <p:cNvPr id="49" name="XXL-Mauspad Name"/>
+          <p:cNvSpPr txBox="1"/>
+          <p:nvPr/>
+        </p:nvSpPr>
+        <p:spPr>
+          <a:xfrm>
+            <a:off x="6547104" y="4992624"/>
+            <a:ext cx="1017270" cy="201168"/>
+          </a:xfrm>
+          <a:prstGeom prst="rect">
+            <a:avLst/>
+          </a:prstGeom>
+          <a:noFill/>
+          <a:ln/>
+        </p:spPr>
+        <p:txBody>
+          <a:bodyPr wrap="square" lIns="0" tIns="0" rIns="0" bIns="0" rtlCol="0" anchor="ctr"/>
+          <a:lstStyle/>
+          <a:p>
+            <a:pPr indent="0" marL="0">
+              <a:buNone/>
+            </a:pPr>
+            <a:r>
+              <a:rPr lang="de-DE" sz="900" b="1" dirty="0">
+                <a:solidFill>
+                  <a:schemeClr val="tx1"/>
+                </a:solidFill>
+              </a:rPr>
+              <a:t>XXL-Mauspad</a:t>
+            </a:r>
+            <a:endParaRPr lang="de-DE" sz="900" dirty="0"/>
+          </a:p>
+        </p:txBody>
+      </p:sp>
+      <p:sp>
+        <p:nvSpPr>
+          <p:cNvPr id="50" name="Produkt Controller-Skin"/>
+          <p:cNvSpPr/>
+          <p:nvPr/>
+        </p:nvSpPr>
+        <p:spPr>
+          <a:xfrm>
+            <a:off x="7728966" y="4507992"/>
+            <a:ext cx="1200150" cy="749808"/>
+          </a:xfrm>
+          <a:prstGeom prst="roundRect">
+            <a:avLst>
+              <a:gd name="adj" fmla="val 7500"/>
+            </a:avLst>
+          </a:prstGeom>
+          <a:solidFill>
+            <a:schemeClr val="bg2"/>
+          </a:solidFill>
+          <a:ln/>
+        </p:spPr>
+      </p:sp>
+      <p:sp>
+        <p:nvSpPr>
+          <p:cNvPr id="51" name="Controller-Skin Kreis"/>
+          <p:cNvSpPr/>
+          <p:nvPr/>
+        </p:nvSpPr>
+        <p:spPr>
+          <a:xfrm>
+            <a:off x="7838694" y="4599432"/>
+            <a:ext cx="347472" cy="347472"/>
+          </a:xfrm>
+          <a:prstGeom prst="ellipse">
+            <a:avLst/>
+          </a:prstGeom>
+          <a:solidFill>
+            <a:schemeClr val="accent1"/>
+          </a:solidFill>
+          <a:ln/>
+        </p:spPr>
+      </p:sp>
+      <p:pic>
+        <p:nvPicPr>
+          <p:cNvPr id="52" name="Controller-Skin Icon" descr="Controller-Skin Icon"/>
+          <p:cNvPicPr>
+            <a:picLocks noChangeAspect="1"/>
+          </p:cNvPicPr>
+          <p:nvPr/>
+        </p:nvPicPr>
+        <p:blipFill>
+          <a:blip r:embed="rId13"/>
+          <a:stretch>
+            <a:fillRect/>
+          </a:stretch>
+        </p:blipFill>
+        <p:spPr>
+          <a:xfrm>
+            <a:off x="7925562" y="4686300"/>
+            <a:ext cx="173736" cy="173736"/>
+          </a:xfrm>
+          <a:prstGeom prst="rect">
+            <a:avLst/>
+          </a:prstGeom>
+        </p:spPr>
+      </p:pic>
+      <p:sp>
+        <p:nvSpPr>
+          <p:cNvPr id="53" name="Controller-Skin Name"/>
+          <p:cNvSpPr txBox="1"/>
+          <p:nvPr/>
+        </p:nvSpPr>
+        <p:spPr>
+          <a:xfrm>
+            <a:off x="7838694" y="4992624"/>
+            <a:ext cx="1017270" cy="201168"/>
+          </a:xfrm>
+          <a:prstGeom prst="rect">
+            <a:avLst/>
+          </a:prstGeom>
+          <a:noFill/>
+          <a:ln/>
+        </p:spPr>
+        <p:txBody>
+          <a:bodyPr wrap="square" lIns="0" tIns="0" rIns="0" bIns="0" rtlCol="0" anchor="ctr"/>
+          <a:lstStyle/>
+          <a:p>
+            <a:pPr indent="0" marL="0">
+              <a:buNone/>
+            </a:pPr>
+            <a:r>
+              <a:rPr lang="de-DE" sz="900" b="1" dirty="0">
+                <a:solidFill>
+                  <a:schemeClr val="tx1"/>
+                </a:solidFill>
+              </a:rPr>
+              <a:t>Controller-Skin</a:t>
+            </a:r>
+            <a:endParaRPr lang="de-DE" sz="900" dirty="0"/>
+          </a:p>
+        </p:txBody>
+      </p:sp>
+      <p:sp>
+        <p:nvSpPr>
+          <p:cNvPr id="54" name="Produkt Custom Keycaps"/>
+          <p:cNvSpPr/>
+          <p:nvPr/>
+        </p:nvSpPr>
+        <p:spPr>
+          <a:xfrm>
+            <a:off x="9020556" y="4507992"/>
+            <a:ext cx="1200150" cy="749808"/>
+          </a:xfrm>
+          <a:prstGeom prst="roundRect">
+            <a:avLst>
+              <a:gd name="adj" fmla="val 7500"/>
+            </a:avLst>
+          </a:prstGeom>
+          <a:solidFill>
+            <a:schemeClr val="bg2"/>
+          </a:solidFill>
+          <a:ln/>
+        </p:spPr>
+      </p:sp>
+      <p:sp>
+        <p:nvSpPr>
+          <p:cNvPr id="55" name="Custom Keycaps Kreis"/>
+          <p:cNvSpPr/>
+          <p:nvPr/>
+        </p:nvSpPr>
+        <p:spPr>
+          <a:xfrm>
+            <a:off x="9130284" y="4599432"/>
+            <a:ext cx="347472" cy="347472"/>
+          </a:xfrm>
+          <a:prstGeom prst="ellipse">
+            <a:avLst/>
+          </a:prstGeom>
+          <a:solidFill>
+            <a:schemeClr val="accent1"/>
+          </a:solidFill>
+          <a:ln/>
+        </p:spPr>
+      </p:sp>
+      <p:pic>
+        <p:nvPicPr>
+          <p:cNvPr id="56" name="Custom Keycaps Icon" descr="Custom Keycaps Icon"/>
+          <p:cNvPicPr>
+            <a:picLocks noChangeAspect="1"/>
+          </p:cNvPicPr>
+          <p:nvPr/>
+        </p:nvPicPr>
+        <p:blipFill>
+          <a:blip r:embed="rId14"/>
+          <a:stretch>
+            <a:fillRect/>
+          </a:stretch>
+        </p:blipFill>
+        <p:spPr>
+          <a:xfrm>
+            <a:off x="9217152" y="4686300"/>
+            <a:ext cx="173736" cy="173736"/>
+          </a:xfrm>
+          <a:prstGeom prst="rect">
+            <a:avLst/>
+          </a:prstGeom>
+        </p:spPr>
+      </p:pic>
+      <p:sp>
+        <p:nvSpPr>
+          <p:cNvPr id="57" name="Custom Keycaps Name"/>
+          <p:cNvSpPr txBox="1"/>
+          <p:nvPr/>
+        </p:nvSpPr>
+        <p:spPr>
+          <a:xfrm>
+            <a:off x="9130284" y="4992624"/>
+            <a:ext cx="1017270" cy="201168"/>
+          </a:xfrm>
+          <a:prstGeom prst="rect">
+            <a:avLst/>
+          </a:prstGeom>
+          <a:noFill/>
+          <a:ln/>
+        </p:spPr>
+        <p:txBody>
+          <a:bodyPr wrap="square" lIns="0" tIns="0" rIns="0" bIns="0" rtlCol="0" anchor="ctr"/>
+          <a:lstStyle/>
+          <a:p>
+            <a:pPr indent="0" marL="0">
+              <a:buNone/>
+            </a:pPr>
+            <a:r>
+              <a:rPr lang="de-DE" sz="900" b="1" dirty="0">
+                <a:solidFill>
+                  <a:schemeClr val="tx1"/>
+                </a:solidFill>
+              </a:rPr>
+              <a:t>Custom Keycaps</a:t>
+            </a:r>
+            <a:endParaRPr lang="de-DE" sz="900" dirty="0"/>
+          </a:p>
+        </p:txBody>
+      </p:sp>
+      <p:sp>
+        <p:nvSpPr>
+          <p:cNvPr id="58" name="Produkt LED-Schild"/>
+          <p:cNvSpPr/>
+          <p:nvPr/>
+        </p:nvSpPr>
+        <p:spPr>
+          <a:xfrm>
+            <a:off x="10312146" y="4507992"/>
+            <a:ext cx="1200150" cy="749808"/>
+          </a:xfrm>
+          <a:prstGeom prst="roundRect">
+            <a:avLst>
+              <a:gd name="adj" fmla="val 7500"/>
+            </a:avLst>
+          </a:prstGeom>
+          <a:solidFill>
+            <a:schemeClr val="bg2"/>
+          </a:solidFill>
+          <a:ln/>
+        </p:spPr>
+      </p:sp>
+      <p:sp>
+        <p:nvSpPr>
+          <p:cNvPr id="59" name="LED-Schild Kreis"/>
+          <p:cNvSpPr/>
+          <p:nvPr/>
+        </p:nvSpPr>
+        <p:spPr>
+          <a:xfrm>
+            <a:off x="10421874" y="4599432"/>
+            <a:ext cx="347472" cy="347472"/>
+          </a:xfrm>
+          <a:prstGeom prst="ellipse">
+            <a:avLst/>
+          </a:prstGeom>
+          <a:solidFill>
+            <a:schemeClr val="accent1"/>
+          </a:solidFill>
+          <a:ln/>
+        </p:spPr>
+      </p:sp>
+      <p:pic>
+        <p:nvPicPr>
+          <p:cNvPr id="60" name="LED-Schild Icon" descr="LED-Schild Icon"/>
+          <p:cNvPicPr>
+            <a:picLocks noChangeAspect="1"/>
+          </p:cNvPicPr>
+          <p:nvPr/>
+        </p:nvPicPr>
+        <p:blipFill>
+          <a:blip r:embed="rId15"/>
+          <a:stretch>
+            <a:fillRect/>
+          </a:stretch>
+        </p:blipFill>
+        <p:spPr>
+          <a:xfrm>
+            <a:off x="10508742" y="4686300"/>
+            <a:ext cx="173736" cy="173736"/>
+          </a:xfrm>
+          <a:prstGeom prst="rect">
+            <a:avLst/>
+          </a:prstGeom>
+        </p:spPr>
+      </p:pic>
+      <p:sp>
+        <p:nvSpPr>
+          <p:cNvPr id="61" name="LED-Schild Name"/>
+          <p:cNvSpPr txBox="1"/>
+          <p:nvPr/>
+        </p:nvSpPr>
+        <p:spPr>
+          <a:xfrm>
+            <a:off x="10421874" y="4992624"/>
+            <a:ext cx="1017270" cy="201168"/>
+          </a:xfrm>
+          <a:prstGeom prst="rect">
+            <a:avLst/>
+          </a:prstGeom>
+          <a:noFill/>
+          <a:ln/>
+        </p:spPr>
+        <p:txBody>
+          <a:bodyPr wrap="square" lIns="0" tIns="0" rIns="0" bIns="0" rtlCol="0" anchor="ctr"/>
+          <a:lstStyle/>
+          <a:p>
+            <a:pPr indent="0" marL="0">
+              <a:buNone/>
+            </a:pPr>
+            <a:r>
+              <a:rPr lang="de-DE" sz="900" b="1" dirty="0">
+                <a:solidFill>
+                  <a:schemeClr val="tx1"/>
+                </a:solidFill>
+              </a:rPr>
+              <a:t>LED-Schild</a:t>
+            </a:r>
+            <a:endParaRPr lang="de-DE" sz="900" dirty="0"/>
+          </a:p>
+        </p:txBody>
+      </p:sp>
+      <p:sp>
+        <p:nvSpPr>
+          <p:cNvPr id="62" name="Vorteile"/>
+          <p:cNvSpPr txBox="1"/>
+          <p:nvPr/>
+        </p:nvSpPr>
+        <p:spPr>
+          <a:xfrm>
+            <a:off x="6437376" y="5330952"/>
+            <a:ext cx="5074920" cy="219456"/>
+          </a:xfrm>
+          <a:prstGeom prst="rect">
+            <a:avLst/>
+          </a:prstGeom>
+          <a:noFill/>
+          <a:ln/>
+        </p:spPr>
+        <p:txBody>
+          <a:bodyPr wrap="square" lIns="0" tIns="0" rIns="0" bIns="0" rtlCol="0" anchor="ctr"/>
+          <a:lstStyle/>
+          <a:p>
+            <a:pPr indent="0" marL="0" algn="ctr">
+              <a:buNone/>
+            </a:pPr>
+            <a:r>
+              <a:rPr lang="de-DE" sz="850" b="1" dirty="0">
+                <a:solidFill>
+                  <a:schemeClr val="accent4"/>
+                </a:solidFill>
+              </a:rPr>
+              <a:t>Versand aus Deutschland  ·  Design-Vorschau vor dem Kauf  ·  PayPal, Klarna, Karte</a:t>
+            </a:r>
+            <a:endParaRPr lang="de-DE" sz="850" dirty="0"/>
+          </a:p>
+        </p:txBody>
+      </p:sp>
+      <p:sp>
+        <p:nvSpPr>
+          <p:cNvPr id="63" name="Footer"/>
+          <p:cNvSpPr/>
+          <p:nvPr/>
+        </p:nvSpPr>
+        <p:spPr>
+          <a:xfrm>
+            <a:off x="6437376" y="5605272"/>
+            <a:ext cx="5074920" cy="292608"/>
+          </a:xfrm>
+          <a:prstGeom prst="roundRect">
+            <a:avLst>
+              <a:gd name="adj" fmla="val 20000"/>
+            </a:avLst>
+          </a:prstGeom>
+          <a:solidFill>
+            <a:srgbClr val="F3F4F6"/>
+          </a:solidFill>
+          <a:ln/>
+        </p:spPr>
+      </p:sp>
+      <p:sp>
+        <p:nvSpPr>
+          <p:cNvPr id="64" name="Footer Text"/>
+          <p:cNvSpPr txBox="1"/>
+          <p:nvPr/>
+        </p:nvSpPr>
+        <p:spPr>
+          <a:xfrm>
+            <a:off x="6437376" y="5605272"/>
+            <a:ext cx="5074920" cy="292608"/>
+          </a:xfrm>
+          <a:prstGeom prst="rect">
+            <a:avLst/>
+          </a:prstGeom>
+          <a:noFill/>
+          <a:ln/>
+        </p:spPr>
+        <p:txBody>
+          <a:bodyPr wrap="square" lIns="0" tIns="0" rIns="0" bIns="0" rtlCol="0" anchor="ctr"/>
+          <a:lstStyle/>
+          <a:p>
+            <a:pPr indent="0" marL="0" algn="ctr">
+              <a:buNone/>
+            </a:pPr>
+            <a:r>
+              <a:rPr lang="de-DE" sz="800" dirty="0">
+                <a:solidFill>
+                  <a:schemeClr val="accent6"/>
+                </a:solidFill>
+              </a:rPr>
+              <a:t>Impressum  ·  Datenschutz  ·  AGB  ·  Widerruf  ·  Versand &amp; Zahlung</a:t>
+            </a:r>
+            <a:endParaRPr lang="de-DE" sz="800" dirty="0"/>
+          </a:p>
+        </p:txBody>
+      </p:sp>
+      <p:sp>
+        <p:nvSpPr>
+          <p:cNvPr id="65" name="Slide Number Placeholder 0"/>
+          <p:cNvSpPr>
+            <a:spLocks noGrp="1"/>
+          </p:cNvSpPr>
+          <p:nvPr>
+            <p:ph type="sldNum" sz="quarter" idx="4294967295"/>
+          </p:nvPr>
+        </p:nvSpPr>
+        <p:spPr>
+          <a:xfrm>
+            <a:off x="548640" y="6263640"/>
+            <a:ext cx="548640" cy="365760"/>
+          </a:xfrm>
+          <a:prstGeom prst="rect">
+            <a:avLst/>
+          </a:prstGeom>
+          <a:extLst>
+            <a:ext uri="{C572A759-6A51-4108-AA02-DFA0A04FC94B}">
+              <ma14:wrappingTextBoxFlag xmlns:ma14="http://schemas.microsoft.com/office/mac/drawingml/2011/main" val="0"/>
+            </a:ext>
+          </a:extLst>
+        </p:spPr>
+        <p:txBody>
+          <a:bodyPr lIns="0" tIns="0" rIns="0" bIns="0"/>
+          <a:lstStyle>
+            <a:lvl1pPr>
+              <a:defRPr sz="1100">
+                <a:solidFill>
+                  <a:schemeClr val="accent6"/>
+                </a:solidFill>
+                <a:latin typeface="Calibri"/>
+                <a:ea typeface="Calibri"/>
+                <a:cs typeface="Calibri"/>
+              </a:defRPr>
+            </a:lvl1pPr>
+          </a:lstStyle>
+          <a:p>
+            <a:pPr algn="l"/>
+            <a:fld id="{F7021451-1387-4CA6-816F-3879F97B5CBC}" type="slidenum">
+              <a:rPr b="0" lang="en-US"/>
+              <a:t>6</a:t>
+            </a:fld>
+            <a:endParaRPr lang="en-US"/>
+          </a:p>
+        </p:txBody>
+      </p:sp>
+    </p:spTree>
+  </p:cSld>
+  <p:clrMapOvr>
+    <a:masterClrMapping/>
+  </p:clrMapOvr>
+</p:sld>
+</file>
+
+<file path=ppt/slides/slide7.xml><?xml version="1.0" encoding="utf-8"?>
+<p:sld xmlns:a="http://schemas.openxmlformats.org/drawingml/2006/main" xmlns:p="http://schemas.openxmlformats.org/presentationml/2006/main" xmlns:r="http://schemas.openxmlformats.org/officeDocument/2006/relationships">
+  <p:cSld>
+    <p:spTree>
+      <p:nvGrpSpPr>
+        <p:cNvPr id="1" name=""/>
+        <p:cNvGrpSpPr/>
+        <p:nvPr/>
+      </p:nvGrpSpPr>
+      <p:grpSpPr/>
+      <p:sp>
+        <p:nvSpPr>
+          <p:cNvPr id="2" name="Text 0"/>
+          <p:cNvSpPr/>
+          <p:nvPr>
+            <p:ph idx="100" type="title" hasCustomPrompt="1"/>
+          </p:nvPr>
+        </p:nvSpPr>
+        <p:spPr>
+          <a:xfrm>
+            <a:off x="548640" y="365760"/>
+            <a:ext cx="11094415" cy="822960"/>
+          </a:xfrm>
+          <a:prstGeom prst="rect">
+            <a:avLst/>
+          </a:prstGeom>
+          <a:noFill/>
+          <a:ln/>
+        </p:spPr>
+        <p:txBody>
+          <a:bodyPr wrap="square" lIns="0" tIns="0" rIns="0" bIns="0" rtlCol="0" anchor="ctr"/>
+          <a:lstStyle/>
+          <a:p>
+            <a:pPr algn="l" indent="0" marL="0">
+              <a:buNone/>
+            </a:pPr>
+            <a:r>
+              <a:rPr lang="en-US" sz="3400" b="1" dirty="0">
+                <a:solidFill>
+                  <a:schemeClr val="tx1"/>
+                </a:solidFill>
+              </a:rPr>
+              <a:t>Fazit und Ausblick</a:t>
+            </a:r>
+            <a:endParaRPr lang="en-US" sz="3400" dirty="0"/>
+          </a:p>
+        </p:txBody>
+      </p:sp>
+      <p:sp>
+        <p:nvSpPr>
+          <p:cNvPr id="3" name="Fazit Karte"/>
+          <p:cNvSpPr/>
+          <p:nvPr/>
+        </p:nvSpPr>
+        <p:spPr>
+          <a:xfrm>
+            <a:off x="548640" y="1463040"/>
+            <a:ext cx="5120640" cy="3977640"/>
+          </a:xfrm>
+          <a:prstGeom prst="roundRect">
+            <a:avLst>
+              <a:gd name="adj" fmla="val 4000"/>
+            </a:avLst>
+          </a:prstGeom>
+          <a:solidFill>
+            <a:schemeClr val="bg2"/>
+          </a:solidFill>
+          <a:ln/>
+        </p:spPr>
+      </p:sp>
+      <p:sp>
+        <p:nvSpPr>
+          <p:cNvPr id="4" name="Fazit Überschrift"/>
+          <p:cNvSpPr txBox="1"/>
+          <p:nvPr/>
+        </p:nvSpPr>
+        <p:spPr>
+          <a:xfrm>
+            <a:off x="822960" y="1645920"/>
+            <a:ext cx="4572000" cy="411480"/>
+          </a:xfrm>
+          <a:prstGeom prst="rect">
+            <a:avLst/>
+          </a:prstGeom>
+          <a:noFill/>
+          <a:ln/>
+        </p:spPr>
+        <p:txBody>
+          <a:bodyPr wrap="square" lIns="0" tIns="0" rIns="0" bIns="0" rtlCol="0" anchor="ctr"/>
+          <a:lstStyle/>
+          <a:p>
+            <a:pPr indent="0" marL="0">
+              <a:buNone/>
+            </a:pPr>
+            <a:r>
+              <a:rPr lang="de-DE" sz="2000" b="1" dirty="0">
+                <a:solidFill>
+                  <a:schemeClr val="tx1"/>
+                </a:solidFill>
+              </a:rPr>
+              <a:t>Das steht fest</a:t>
+            </a:r>
+            <a:endParaRPr lang="de-DE" sz="2000" dirty="0"/>
+          </a:p>
+        </p:txBody>
+      </p:sp>
+      <p:sp>
+        <p:nvSpPr>
+          <p:cNvPr id="5" name="Firma Kreis"/>
+          <p:cNvSpPr/>
+          <p:nvPr/>
+        </p:nvSpPr>
+        <p:spPr>
+          <a:xfrm>
+            <a:off x="822960" y="2240280"/>
+            <a:ext cx="457200" cy="457200"/>
+          </a:xfrm>
+          <a:prstGeom prst="ellipse">
+            <a:avLst/>
+          </a:prstGeom>
+          <a:solidFill>
+            <a:schemeClr val="accent1"/>
+          </a:solidFill>
+          <a:ln/>
+        </p:spPr>
+      </p:sp>
+      <p:pic>
+        <p:nvPicPr>
+          <p:cNvPr id="6" name="Firma Icon" descr="Firma Icon"/>
+          <p:cNvPicPr>
+            <a:picLocks noChangeAspect="1"/>
+          </p:cNvPicPr>
+          <p:nvPr/>
+        </p:nvPicPr>
+        <p:blipFill>
+          <a:blip r:embed="rId2"/>
+          <a:stretch>
+            <a:fillRect/>
+          </a:stretch>
+        </p:blipFill>
+        <p:spPr>
+          <a:xfrm>
+            <a:off x="937260" y="2354580"/>
+            <a:ext cx="228600" cy="228600"/>
+          </a:xfrm>
+          <a:prstGeom prst="rect">
+            <a:avLst/>
+          </a:prstGeom>
+        </p:spPr>
+      </p:pic>
+      <p:sp>
+        <p:nvSpPr>
+          <p:cNvPr id="7" name="FIRMA Label"/>
+          <p:cNvSpPr txBox="1"/>
+          <p:nvPr/>
+        </p:nvSpPr>
+        <p:spPr>
+          <a:xfrm>
+            <a:off x="1463040" y="2203704"/>
+            <a:ext cx="4023360" cy="219456"/>
+          </a:xfrm>
+          <a:prstGeom prst="rect">
+            <a:avLst/>
+          </a:prstGeom>
+          <a:noFill/>
+          <a:ln/>
+        </p:spPr>
+        <p:txBody>
+          <a:bodyPr wrap="square" lIns="0" tIns="0" rIns="0" bIns="0" rtlCol="0" anchor="ctr"/>
+          <a:lstStyle/>
+          <a:p>
+            <a:pPr indent="0" marL="0">
+              <a:buNone/>
+            </a:pPr>
+            <a:r>
+              <a:rPr lang="de-DE" sz="1100" b="1" dirty="0">
+                <a:solidFill>
+                  <a:schemeClr val="accent1"/>
+                </a:solidFill>
+              </a:rPr>
+              <a:t>FIRMA</a:t>
+            </a:r>
+            <a:endParaRPr lang="de-DE" sz="1100" dirty="0"/>
+          </a:p>
+        </p:txBody>
+      </p:sp>
+      <p:sp>
+        <p:nvSpPr>
+          <p:cNvPr id="8" name="FIRMA Wert"/>
+          <p:cNvSpPr txBox="1"/>
+          <p:nvPr/>
+        </p:nvSpPr>
+        <p:spPr>
+          <a:xfrm>
+            <a:off x="1463040" y="2423160"/>
+            <a:ext cx="4023360" cy="292608"/>
+          </a:xfrm>
+          <a:prstGeom prst="rect">
+            <a:avLst/>
+          </a:prstGeom>
+          <a:noFill/>
+          <a:ln/>
+        </p:spPr>
+        <p:txBody>
+          <a:bodyPr wrap="square" lIns="0" tIns="0" rIns="0" bIns="0" rtlCol="0" anchor="ctr"/>
+          <a:lstStyle/>
+          <a:p>
+            <a:pPr indent="0" marL="0">
+              <a:buNone/>
+            </a:pPr>
+            <a:r>
+              <a:rPr lang="de-DE" sz="1500" b="1" dirty="0">
+                <a:solidFill>
+                  <a:schemeClr val="tx1"/>
+                </a:solidFill>
+              </a:rPr>
+              <a:t>LootLager UG (haftungsbeschränkt)</a:t>
+            </a:r>
+            <a:endParaRPr lang="de-DE" sz="1500" dirty="0"/>
+          </a:p>
+        </p:txBody>
+      </p:sp>
+      <p:sp>
+        <p:nvSpPr>
+          <p:cNvPr id="9" name="Rechtsform Kreis"/>
+          <p:cNvSpPr/>
+          <p:nvPr/>
+        </p:nvSpPr>
+        <p:spPr>
+          <a:xfrm>
+            <a:off x="822960" y="2862072"/>
+            <a:ext cx="457200" cy="457200"/>
+          </a:xfrm>
+          <a:prstGeom prst="ellipse">
+            <a:avLst/>
+          </a:prstGeom>
+          <a:solidFill>
+            <a:schemeClr val="accent1"/>
+          </a:solidFill>
+          <a:ln/>
+        </p:spPr>
+      </p:sp>
+      <p:pic>
+        <p:nvPicPr>
+          <p:cNvPr id="10" name="Rechtsform Icon" descr="Rechtsform Icon"/>
+          <p:cNvPicPr>
+            <a:picLocks noChangeAspect="1"/>
+          </p:cNvPicPr>
+          <p:nvPr/>
+        </p:nvPicPr>
+        <p:blipFill>
+          <a:blip r:embed="rId3"/>
+          <a:stretch>
+            <a:fillRect/>
+          </a:stretch>
+        </p:blipFill>
+        <p:spPr>
+          <a:xfrm>
+            <a:off x="937260" y="2976372"/>
+            <a:ext cx="228600" cy="228600"/>
+          </a:xfrm>
+          <a:prstGeom prst="rect">
+            <a:avLst/>
+          </a:prstGeom>
+        </p:spPr>
+      </p:pic>
+      <p:sp>
+        <p:nvSpPr>
+          <p:cNvPr id="11" name="RECHTSFORM Label"/>
+          <p:cNvSpPr txBox="1"/>
+          <p:nvPr/>
+        </p:nvSpPr>
+        <p:spPr>
+          <a:xfrm>
+            <a:off x="1463040" y="2825496"/>
+            <a:ext cx="4023360" cy="219456"/>
+          </a:xfrm>
+          <a:prstGeom prst="rect">
+            <a:avLst/>
+          </a:prstGeom>
+          <a:noFill/>
+          <a:ln/>
+        </p:spPr>
+        <p:txBody>
+          <a:bodyPr wrap="square" lIns="0" tIns="0" rIns="0" bIns="0" rtlCol="0" anchor="ctr"/>
+          <a:lstStyle/>
+          <a:p>
+            <a:pPr indent="0" marL="0">
+              <a:buNone/>
+            </a:pPr>
+            <a:r>
+              <a:rPr lang="de-DE" sz="1100" b="1" dirty="0">
+                <a:solidFill>
+                  <a:schemeClr val="accent1"/>
+                </a:solidFill>
+              </a:rPr>
+              <a:t>RECHTSFORM</a:t>
+            </a:r>
+            <a:endParaRPr lang="de-DE" sz="1100" dirty="0"/>
+          </a:p>
+        </p:txBody>
+      </p:sp>
+      <p:sp>
+        <p:nvSpPr>
+          <p:cNvPr id="12" name="RECHTSFORM Wert"/>
+          <p:cNvSpPr txBox="1"/>
+          <p:nvPr/>
+        </p:nvSpPr>
+        <p:spPr>
+          <a:xfrm>
+            <a:off x="1463040" y="3044952"/>
+            <a:ext cx="4023360" cy="292608"/>
+          </a:xfrm>
+          <a:prstGeom prst="rect">
+            <a:avLst/>
+          </a:prstGeom>
+          <a:noFill/>
+          <a:ln/>
+        </p:spPr>
+        <p:txBody>
+          <a:bodyPr wrap="square" lIns="0" tIns="0" rIns="0" bIns="0" rtlCol="0" anchor="ctr"/>
+          <a:lstStyle/>
+          <a:p>
+            <a:pPr indent="0" marL="0">
+              <a:buNone/>
+            </a:pPr>
+            <a:r>
+              <a:rPr lang="de-DE" sz="1500" b="1" dirty="0">
+                <a:solidFill>
+                  <a:schemeClr val="tx1"/>
+                </a:solidFill>
+              </a:rPr>
+              <a:t>UG, Stammkapital 1.000 €</a:t>
+            </a:r>
+            <a:endParaRPr lang="de-DE" sz="1500" dirty="0"/>
+          </a:p>
+        </p:txBody>
+      </p:sp>
+      <p:sp>
+        <p:nvSpPr>
+          <p:cNvPr id="13" name="Marke Kreis"/>
+          <p:cNvSpPr/>
+          <p:nvPr/>
+        </p:nvSpPr>
+        <p:spPr>
+          <a:xfrm>
+            <a:off x="822960" y="3483864"/>
+            <a:ext cx="457200" cy="457200"/>
+          </a:xfrm>
+          <a:prstGeom prst="ellipse">
+            <a:avLst/>
+          </a:prstGeom>
+          <a:solidFill>
+            <a:schemeClr val="accent1"/>
+          </a:solidFill>
+          <a:ln/>
+        </p:spPr>
+      </p:sp>
+      <p:pic>
+        <p:nvPicPr>
+          <p:cNvPr id="14" name="Marke Icon" descr="Marke Icon"/>
+          <p:cNvPicPr>
+            <a:picLocks noChangeAspect="1"/>
+          </p:cNvPicPr>
+          <p:nvPr/>
+        </p:nvPicPr>
+        <p:blipFill>
+          <a:blip r:embed="rId4"/>
+          <a:stretch>
+            <a:fillRect/>
+          </a:stretch>
+        </p:blipFill>
+        <p:spPr>
+          <a:xfrm>
+            <a:off x="937260" y="3598164"/>
+            <a:ext cx="228600" cy="228600"/>
+          </a:xfrm>
+          <a:prstGeom prst="rect">
+            <a:avLst/>
+          </a:prstGeom>
+        </p:spPr>
+      </p:pic>
+      <p:sp>
+        <p:nvSpPr>
+          <p:cNvPr id="15" name="MARKE Label"/>
+          <p:cNvSpPr txBox="1"/>
+          <p:nvPr/>
+        </p:nvSpPr>
+        <p:spPr>
+          <a:xfrm>
+            <a:off x="1463040" y="3447288"/>
+            <a:ext cx="4023360" cy="219456"/>
+          </a:xfrm>
+          <a:prstGeom prst="rect">
+            <a:avLst/>
+          </a:prstGeom>
+          <a:noFill/>
+          <a:ln/>
+        </p:spPr>
+        <p:txBody>
+          <a:bodyPr wrap="square" lIns="0" tIns="0" rIns="0" bIns="0" rtlCol="0" anchor="ctr"/>
+          <a:lstStyle/>
+          <a:p>
+            <a:pPr indent="0" marL="0">
+              <a:buNone/>
+            </a:pPr>
+            <a:r>
+              <a:rPr lang="de-DE" sz="1100" b="1" dirty="0">
+                <a:solidFill>
+                  <a:schemeClr val="accent1"/>
+                </a:solidFill>
+              </a:rPr>
+              <a:t>MARKE</a:t>
+            </a:r>
+            <a:endParaRPr lang="de-DE" sz="1100" dirty="0"/>
+          </a:p>
+        </p:txBody>
+      </p:sp>
+      <p:sp>
+        <p:nvSpPr>
+          <p:cNvPr id="16" name="MARKE Wert"/>
+          <p:cNvSpPr txBox="1"/>
+          <p:nvPr/>
+        </p:nvSpPr>
+        <p:spPr>
+          <a:xfrm>
+            <a:off x="1463040" y="3666744"/>
+            <a:ext cx="4023360" cy="292608"/>
+          </a:xfrm>
+          <a:prstGeom prst="rect">
+            <a:avLst/>
+          </a:prstGeom>
+          <a:noFill/>
+          <a:ln/>
+        </p:spPr>
+        <p:txBody>
+          <a:bodyPr wrap="square" lIns="0" tIns="0" rIns="0" bIns="0" rtlCol="0" anchor="ctr"/>
+          <a:lstStyle/>
+          <a:p>
+            <a:pPr indent="0" marL="0">
+              <a:buNone/>
+            </a:pPr>
+            <a:r>
+              <a:rPr lang="de-DE" sz="1500" b="1" dirty="0">
+                <a:solidFill>
+                  <a:schemeClr val="tx1"/>
+                </a:solidFill>
+              </a:rPr>
+              <a:t>LootLager · „Level up dein Setup.“</a:t>
+            </a:r>
+            <a:endParaRPr lang="de-DE" sz="1500" dirty="0"/>
+          </a:p>
+        </p:txBody>
+      </p:sp>
+      <p:sp>
+        <p:nvSpPr>
+          <p:cNvPr id="17" name="Shopsystem Kreis"/>
+          <p:cNvSpPr/>
+          <p:nvPr/>
+        </p:nvSpPr>
+        <p:spPr>
+          <a:xfrm>
+            <a:off x="822960" y="4105656"/>
+            <a:ext cx="457200" cy="457200"/>
+          </a:xfrm>
+          <a:prstGeom prst="ellipse">
+            <a:avLst/>
+          </a:prstGeom>
+          <a:solidFill>
+            <a:schemeClr val="accent1"/>
+          </a:solidFill>
+          <a:ln/>
+        </p:spPr>
+      </p:sp>
+      <p:pic>
+        <p:nvPicPr>
+          <p:cNvPr id="18" name="Shopsystem Icon" descr="Shopsystem Icon"/>
+          <p:cNvPicPr>
+            <a:picLocks noChangeAspect="1"/>
+          </p:cNvPicPr>
+          <p:nvPr/>
+        </p:nvPicPr>
+        <p:blipFill>
+          <a:blip r:embed="rId5"/>
+          <a:stretch>
+            <a:fillRect/>
+          </a:stretch>
+        </p:blipFill>
+        <p:spPr>
+          <a:xfrm>
+            <a:off x="937260" y="4219956"/>
+            <a:ext cx="228600" cy="228600"/>
+          </a:xfrm>
+          <a:prstGeom prst="rect">
+            <a:avLst/>
+          </a:prstGeom>
+        </p:spPr>
+      </p:pic>
+      <p:sp>
+        <p:nvSpPr>
+          <p:cNvPr id="19" name="SHOPSYSTEM Label"/>
+          <p:cNvSpPr txBox="1"/>
+          <p:nvPr/>
+        </p:nvSpPr>
+        <p:spPr>
+          <a:xfrm>
+            <a:off x="1463040" y="4069080"/>
+            <a:ext cx="4023360" cy="219456"/>
+          </a:xfrm>
+          <a:prstGeom prst="rect">
+            <a:avLst/>
+          </a:prstGeom>
+          <a:noFill/>
+          <a:ln/>
+        </p:spPr>
+        <p:txBody>
+          <a:bodyPr wrap="square" lIns="0" tIns="0" rIns="0" bIns="0" rtlCol="0" anchor="ctr"/>
+          <a:lstStyle/>
+          <a:p>
+            <a:pPr indent="0" marL="0">
+              <a:buNone/>
+            </a:pPr>
+            <a:r>
+              <a:rPr lang="de-DE" sz="1100" b="1" dirty="0">
+                <a:solidFill>
+                  <a:schemeClr val="accent1"/>
+                </a:solidFill>
+              </a:rPr>
+              <a:t>SHOPSYSTEM</a:t>
+            </a:r>
+            <a:endParaRPr lang="de-DE" sz="1100" dirty="0"/>
+          </a:p>
+        </p:txBody>
+      </p:sp>
+      <p:sp>
+        <p:nvSpPr>
+          <p:cNvPr id="20" name="SHOPSYSTEM Wert"/>
+          <p:cNvSpPr txBox="1"/>
+          <p:nvPr/>
+        </p:nvSpPr>
+        <p:spPr>
+          <a:xfrm>
+            <a:off x="1463040" y="4288536"/>
+            <a:ext cx="4023360" cy="292608"/>
+          </a:xfrm>
+          <a:prstGeom prst="rect">
+            <a:avLst/>
+          </a:prstGeom>
+          <a:noFill/>
+          <a:ln/>
+        </p:spPr>
+        <p:txBody>
+          <a:bodyPr wrap="square" lIns="0" tIns="0" rIns="0" bIns="0" rtlCol="0" anchor="ctr"/>
+          <a:lstStyle/>
+          <a:p>
+            <a:pPr indent="0" marL="0">
+              <a:buNone/>
+            </a:pPr>
+            <a:r>
+              <a:rPr lang="de-DE" sz="1500" b="1" dirty="0">
+                <a:solidFill>
+                  <a:schemeClr val="tx1"/>
+                </a:solidFill>
+              </a:rPr>
+              <a:t>Shopify (Basic-Tarif)</a:t>
+            </a:r>
+            <a:endParaRPr lang="de-DE" sz="1500" dirty="0"/>
+          </a:p>
+        </p:txBody>
+      </p:sp>
+      <p:sp>
+        <p:nvSpPr>
+          <p:cNvPr id="21" name="Logo Kreis"/>
+          <p:cNvSpPr/>
+          <p:nvPr/>
+        </p:nvSpPr>
+        <p:spPr>
+          <a:xfrm>
+            <a:off x="822960" y="4727448"/>
+            <a:ext cx="457200" cy="457200"/>
+          </a:xfrm>
+          <a:prstGeom prst="ellipse">
+            <a:avLst/>
+          </a:prstGeom>
+          <a:solidFill>
+            <a:schemeClr val="accent1"/>
+          </a:solidFill>
+          <a:ln/>
+        </p:spPr>
+      </p:sp>
+      <p:pic>
+        <p:nvPicPr>
+          <p:cNvPr id="22" name="Logo Icon" descr="Logo Icon"/>
+          <p:cNvPicPr>
+            <a:picLocks noChangeAspect="1"/>
+          </p:cNvPicPr>
+          <p:nvPr/>
+        </p:nvPicPr>
+        <p:blipFill>
+          <a:blip r:embed="rId6"/>
+          <a:stretch>
+            <a:fillRect/>
+          </a:stretch>
+        </p:blipFill>
+        <p:spPr>
+          <a:xfrm>
+            <a:off x="937260" y="4841748"/>
+            <a:ext cx="228600" cy="228600"/>
+          </a:xfrm>
+          <a:prstGeom prst="rect">
+            <a:avLst/>
+          </a:prstGeom>
+        </p:spPr>
+      </p:pic>
+      <p:sp>
+        <p:nvSpPr>
+          <p:cNvPr id="23" name="LOGO Label"/>
+          <p:cNvSpPr txBox="1"/>
+          <p:nvPr/>
+        </p:nvSpPr>
+        <p:spPr>
+          <a:xfrm>
+            <a:off x="1463040" y="4690872"/>
+            <a:ext cx="4023360" cy="219456"/>
+          </a:xfrm>
+          <a:prstGeom prst="rect">
+            <a:avLst/>
+          </a:prstGeom>
+          <a:noFill/>
+          <a:ln/>
+        </p:spPr>
+        <p:txBody>
+          <a:bodyPr wrap="square" lIns="0" tIns="0" rIns="0" bIns="0" rtlCol="0" anchor="ctr"/>
+          <a:lstStyle/>
+          <a:p>
+            <a:pPr indent="0" marL="0">
+              <a:buNone/>
+            </a:pPr>
+            <a:r>
+              <a:rPr lang="de-DE" sz="1100" b="1" dirty="0">
+                <a:solidFill>
+                  <a:schemeClr val="accent1"/>
+                </a:solidFill>
+              </a:rPr>
+              <a:t>LOGO</a:t>
+            </a:r>
+            <a:endParaRPr lang="de-DE" sz="1100" dirty="0"/>
+          </a:p>
+        </p:txBody>
+      </p:sp>
+      <p:sp>
+        <p:nvSpPr>
+          <p:cNvPr id="24" name="LOGO Wert"/>
+          <p:cNvSpPr txBox="1"/>
+          <p:nvPr/>
+        </p:nvSpPr>
+        <p:spPr>
+          <a:xfrm>
+            <a:off x="1463040" y="4910328"/>
+            <a:ext cx="4023360" cy="292608"/>
+          </a:xfrm>
+          <a:prstGeom prst="rect">
+            <a:avLst/>
+          </a:prstGeom>
+          <a:noFill/>
+          <a:ln/>
+        </p:spPr>
+        <p:txBody>
+          <a:bodyPr wrap="square" lIns="0" tIns="0" rIns="0" bIns="0" rtlCol="0" anchor="ctr"/>
+          <a:lstStyle/>
+          <a:p>
+            <a:pPr indent="0" marL="0">
+              <a:buNone/>
+            </a:pPr>
+            <a:r>
+              <a:rPr lang="de-DE" sz="1500" b="1" dirty="0">
+                <a:solidFill>
+                  <a:schemeClr val="tx1"/>
+                </a:solidFill>
+              </a:rPr>
+              <a:t>mit KI erstellt (ChatGPT)</a:t>
+            </a:r>
+            <a:endParaRPr lang="de-DE" sz="1500" dirty="0"/>
+          </a:p>
+        </p:txBody>
+      </p:sp>
+      <p:sp>
+        <p:nvSpPr>
+          <p:cNvPr id="25" name="Schritte Überschrift"/>
+          <p:cNvSpPr txBox="1"/>
+          <p:nvPr/>
+        </p:nvSpPr>
+        <p:spPr>
+          <a:xfrm>
+            <a:off x="6172200" y="1645920"/>
+            <a:ext cx="5468112" cy="411480"/>
+          </a:xfrm>
+          <a:prstGeom prst="rect">
+            <a:avLst/>
+          </a:prstGeom>
+          <a:noFill/>
+          <a:ln/>
+        </p:spPr>
+        <p:txBody>
+          <a:bodyPr wrap="square" lIns="0" tIns="0" rIns="0" bIns="0" rtlCol="0" anchor="ctr"/>
+          <a:lstStyle/>
+          <a:p>
+            <a:pPr indent="0" marL="0">
+              <a:buNone/>
+            </a:pPr>
+            <a:r>
+              <a:rPr lang="de-DE" sz="2000" b="1" dirty="0">
+                <a:solidFill>
+                  <a:schemeClr val="tx1"/>
+                </a:solidFill>
+              </a:rPr>
+              <a:t>Unsere nächsten Schritte</a:t>
+            </a:r>
+            <a:endParaRPr lang="de-DE" sz="2000" dirty="0"/>
+          </a:p>
+        </p:txBody>
+      </p:sp>
+      <p:sp>
+        <p:nvSpPr>
+          <p:cNvPr id="26" name="Schritt 1 Kreis"/>
+          <p:cNvSpPr/>
+          <p:nvPr/>
+        </p:nvSpPr>
+        <p:spPr>
+          <a:xfrm>
+            <a:off x="6172200" y="2240280"/>
+            <a:ext cx="457200" cy="457200"/>
+          </a:xfrm>
+          <a:prstGeom prst="ellipse">
+            <a:avLst/>
+          </a:prstGeom>
+          <a:solidFill>
+            <a:schemeClr val="accent1"/>
+          </a:solidFill>
+          <a:ln/>
+        </p:spPr>
+      </p:sp>
+      <p:sp>
+        <p:nvSpPr>
+          <p:cNvPr id="27" name="Schritt 1 Nummer"/>
+          <p:cNvSpPr txBox="1"/>
+          <p:nvPr/>
+        </p:nvSpPr>
+        <p:spPr>
+          <a:xfrm>
+            <a:off x="6172200" y="2240280"/>
+            <a:ext cx="457200" cy="457200"/>
+          </a:xfrm>
+          <a:prstGeom prst="rect">
+            <a:avLst/>
+          </a:prstGeom>
+          <a:noFill/>
+          <a:ln/>
+        </p:spPr>
+        <p:txBody>
+          <a:bodyPr wrap="square" lIns="0" tIns="0" rIns="0" bIns="0" rtlCol="0" anchor="ctr"/>
+          <a:lstStyle/>
+          <a:p>
+            <a:pPr indent="0" marL="0" algn="ctr">
+              <a:buNone/>
+            </a:pPr>
+            <a:r>
+              <a:rPr lang="de-DE" sz="1600" b="1" dirty="0">
+                <a:solidFill>
+                  <a:schemeClr val="bg1"/>
+                </a:solidFill>
+              </a:rPr>
+              <a:t>1</a:t>
+            </a:r>
+            <a:endParaRPr lang="de-DE" sz="1600" dirty="0"/>
+          </a:p>
+        </p:txBody>
+      </p:sp>
+      <p:sp>
+        <p:nvSpPr>
+          <p:cNvPr id="28" name="Schritt 1 Titel"/>
+          <p:cNvSpPr txBox="1"/>
+          <p:nvPr/>
+        </p:nvSpPr>
+        <p:spPr>
+          <a:xfrm>
+            <a:off x="6812280" y="2194560"/>
+            <a:ext cx="4828032" cy="292608"/>
+          </a:xfrm>
+          <a:prstGeom prst="rect">
+            <a:avLst/>
+          </a:prstGeom>
+          <a:noFill/>
+          <a:ln/>
+        </p:spPr>
+        <p:txBody>
+          <a:bodyPr wrap="square" lIns="0" tIns="0" rIns="0" bIns="0" rtlCol="0" anchor="ctr"/>
+          <a:lstStyle/>
+          <a:p>
+            <a:pPr indent="0" marL="0">
+              <a:buNone/>
+            </a:pPr>
+            <a:r>
+              <a:rPr lang="de-DE" sz="1600" b="1" dirty="0">
+                <a:solidFill>
+                  <a:schemeClr val="tx1"/>
+                </a:solidFill>
+              </a:rPr>
+              <a:t>Gründen</a:t>
+            </a:r>
+            <a:endParaRPr lang="de-DE" sz="1600" dirty="0"/>
+          </a:p>
+        </p:txBody>
+      </p:sp>
+      <p:sp>
+        <p:nvSpPr>
+          <p:cNvPr id="29" name="Schritt 1 Text"/>
+          <p:cNvSpPr txBox="1"/>
+          <p:nvPr/>
+        </p:nvSpPr>
+        <p:spPr>
+          <a:xfrm>
+            <a:off x="6812280" y="2496312"/>
+            <a:ext cx="4828032" cy="384048"/>
+          </a:xfrm>
+          <a:prstGeom prst="rect">
+            <a:avLst/>
+          </a:prstGeom>
+          <a:noFill/>
+          <a:ln/>
+        </p:spPr>
+        <p:txBody>
+          <a:bodyPr wrap="square" lIns="0" tIns="0" rIns="0" bIns="0" rtlCol="0" anchor="t"/>
+          <a:lstStyle/>
+          <a:p>
+            <a:pPr indent="0" marL="0">
+              <a:buNone/>
+            </a:pPr>
+            <a:r>
+              <a:rPr lang="de-DE" sz="1250" dirty="0">
+                <a:solidFill>
+                  <a:schemeClr val="tx1"/>
+                </a:solidFill>
+              </a:rPr>
+              <a:t>Gesellschaftsvertrag beim Notar, 1.000 € Stammkapital einzahlen</a:t>
+            </a:r>
+            <a:endParaRPr lang="de-DE" sz="1250" dirty="0"/>
+          </a:p>
+        </p:txBody>
+      </p:sp>
+      <p:sp>
+        <p:nvSpPr>
+          <p:cNvPr id="30" name="Schritt 2 Kreis"/>
+          <p:cNvSpPr/>
+          <p:nvPr/>
+        </p:nvSpPr>
+        <p:spPr>
+          <a:xfrm>
+            <a:off x="6172200" y="2898648"/>
+            <a:ext cx="457200" cy="457200"/>
+          </a:xfrm>
+          <a:prstGeom prst="ellipse">
+            <a:avLst/>
+          </a:prstGeom>
+          <a:solidFill>
+            <a:schemeClr val="accent1"/>
+          </a:solidFill>
+          <a:ln/>
+        </p:spPr>
+      </p:sp>
+      <p:sp>
+        <p:nvSpPr>
+          <p:cNvPr id="31" name="Schritt 2 Nummer"/>
+          <p:cNvSpPr txBox="1"/>
+          <p:nvPr/>
+        </p:nvSpPr>
+        <p:spPr>
+          <a:xfrm>
+            <a:off x="6172200" y="2898648"/>
+            <a:ext cx="457200" cy="457200"/>
+          </a:xfrm>
+          <a:prstGeom prst="rect">
+            <a:avLst/>
+          </a:prstGeom>
+          <a:noFill/>
+          <a:ln/>
+        </p:spPr>
+        <p:txBody>
+          <a:bodyPr wrap="square" lIns="0" tIns="0" rIns="0" bIns="0" rtlCol="0" anchor="ctr"/>
+          <a:lstStyle/>
+          <a:p>
+            <a:pPr indent="0" marL="0" algn="ctr">
+              <a:buNone/>
+            </a:pPr>
+            <a:r>
+              <a:rPr lang="de-DE" sz="1600" b="1" dirty="0">
+                <a:solidFill>
+                  <a:schemeClr val="bg1"/>
+                </a:solidFill>
+              </a:rPr>
+              <a:t>2</a:t>
+            </a:r>
+            <a:endParaRPr lang="de-DE" sz="1600" dirty="0"/>
+          </a:p>
+        </p:txBody>
+      </p:sp>
+      <p:sp>
+        <p:nvSpPr>
+          <p:cNvPr id="32" name="Schritt 2 Titel"/>
+          <p:cNvSpPr txBox="1"/>
+          <p:nvPr/>
+        </p:nvSpPr>
+        <p:spPr>
+          <a:xfrm>
+            <a:off x="6812280" y="2852928"/>
+            <a:ext cx="4828032" cy="292608"/>
+          </a:xfrm>
+          <a:prstGeom prst="rect">
+            <a:avLst/>
+          </a:prstGeom>
+          <a:noFill/>
+          <a:ln/>
+        </p:spPr>
+        <p:txBody>
+          <a:bodyPr wrap="square" lIns="0" tIns="0" rIns="0" bIns="0" rtlCol="0" anchor="ctr"/>
+          <a:lstStyle/>
+          <a:p>
+            <a:pPr indent="0" marL="0">
+              <a:buNone/>
+            </a:pPr>
+            <a:r>
+              <a:rPr lang="de-DE" sz="1600" b="1" dirty="0">
+                <a:solidFill>
+                  <a:schemeClr val="tx1"/>
+                </a:solidFill>
+              </a:rPr>
+              <a:t>Anmelden</a:t>
+            </a:r>
+            <a:endParaRPr lang="de-DE" sz="1600" dirty="0"/>
+          </a:p>
+        </p:txBody>
+      </p:sp>
+      <p:sp>
+        <p:nvSpPr>
+          <p:cNvPr id="33" name="Schritt 2 Text"/>
+          <p:cNvSpPr txBox="1"/>
+          <p:nvPr/>
+        </p:nvSpPr>
+        <p:spPr>
+          <a:xfrm>
+            <a:off x="6812280" y="3154680"/>
+            <a:ext cx="4828032" cy="384048"/>
+          </a:xfrm>
+          <a:prstGeom prst="rect">
+            <a:avLst/>
+          </a:prstGeom>
+          <a:noFill/>
+          <a:ln/>
+        </p:spPr>
+        <p:txBody>
+          <a:bodyPr wrap="square" lIns="0" tIns="0" rIns="0" bIns="0" rtlCol="0" anchor="t"/>
+          <a:lstStyle/>
+          <a:p>
+            <a:pPr indent="0" marL="0">
+              <a:buNone/>
+            </a:pPr>
+            <a:r>
+              <a:rPr lang="de-DE" sz="1250" dirty="0">
+                <a:solidFill>
+                  <a:schemeClr val="tx1"/>
+                </a:solidFill>
+              </a:rPr>
+              <a:t>Handelsregister, Gewerbeamt und Finanzamt</a:t>
+            </a:r>
+            <a:endParaRPr lang="de-DE" sz="1250" dirty="0"/>
+          </a:p>
+        </p:txBody>
+      </p:sp>
+      <p:sp>
+        <p:nvSpPr>
+          <p:cNvPr id="34" name="Schritt 3 Kreis"/>
+          <p:cNvSpPr/>
+          <p:nvPr/>
+        </p:nvSpPr>
+        <p:spPr>
+          <a:xfrm>
+            <a:off x="6172200" y="3557016"/>
+            <a:ext cx="457200" cy="457200"/>
+          </a:xfrm>
+          <a:prstGeom prst="ellipse">
+            <a:avLst/>
+          </a:prstGeom>
+          <a:solidFill>
+            <a:schemeClr val="accent1"/>
+          </a:solidFill>
+          <a:ln/>
+        </p:spPr>
+      </p:sp>
+      <p:sp>
+        <p:nvSpPr>
+          <p:cNvPr id="35" name="Schritt 3 Nummer"/>
+          <p:cNvSpPr txBox="1"/>
+          <p:nvPr/>
+        </p:nvSpPr>
+        <p:spPr>
+          <a:xfrm>
+            <a:off x="6172200" y="3557016"/>
+            <a:ext cx="457200" cy="457200"/>
+          </a:xfrm>
+          <a:prstGeom prst="rect">
+            <a:avLst/>
+          </a:prstGeom>
+          <a:noFill/>
+          <a:ln/>
+        </p:spPr>
+        <p:txBody>
+          <a:bodyPr wrap="square" lIns="0" tIns="0" rIns="0" bIns="0" rtlCol="0" anchor="ctr"/>
+          <a:lstStyle/>
+          <a:p>
+            <a:pPr indent="0" marL="0" algn="ctr">
+              <a:buNone/>
+            </a:pPr>
+            <a:r>
+              <a:rPr lang="de-DE" sz="1600" b="1" dirty="0">
+                <a:solidFill>
+                  <a:schemeClr val="bg1"/>
+                </a:solidFill>
+              </a:rPr>
+              <a:t>3</a:t>
+            </a:r>
+            <a:endParaRPr lang="de-DE" sz="1600" dirty="0"/>
+          </a:p>
+        </p:txBody>
+      </p:sp>
+      <p:sp>
+        <p:nvSpPr>
+          <p:cNvPr id="36" name="Schritt 3 Titel"/>
+          <p:cNvSpPr txBox="1"/>
+          <p:nvPr/>
+        </p:nvSpPr>
+        <p:spPr>
+          <a:xfrm>
+            <a:off x="6812280" y="3511296"/>
+            <a:ext cx="4828032" cy="292608"/>
+          </a:xfrm>
+          <a:prstGeom prst="rect">
+            <a:avLst/>
+          </a:prstGeom>
+          <a:noFill/>
+          <a:ln/>
+        </p:spPr>
+        <p:txBody>
+          <a:bodyPr wrap="square" lIns="0" tIns="0" rIns="0" bIns="0" rtlCol="0" anchor="ctr"/>
+          <a:lstStyle/>
+          <a:p>
+            <a:pPr indent="0" marL="0">
+              <a:buNone/>
+            </a:pPr>
+            <a:r>
+              <a:rPr lang="de-DE" sz="1600" b="1" dirty="0">
+                <a:solidFill>
+                  <a:schemeClr val="tx1"/>
+                </a:solidFill>
+              </a:rPr>
+              <a:t>Namen sichern</a:t>
+            </a:r>
+            <a:endParaRPr lang="de-DE" sz="1600" dirty="0"/>
+          </a:p>
+        </p:txBody>
+      </p:sp>
+      <p:sp>
+        <p:nvSpPr>
+          <p:cNvPr id="37" name="Schritt 3 Text"/>
+          <p:cNvSpPr txBox="1"/>
+          <p:nvPr/>
+        </p:nvSpPr>
+        <p:spPr>
+          <a:xfrm>
+            <a:off x="6812280" y="3813048"/>
+            <a:ext cx="4828032" cy="384048"/>
+          </a:xfrm>
+          <a:prstGeom prst="rect">
+            <a:avLst/>
+          </a:prstGeom>
+          <a:noFill/>
+          <a:ln/>
+        </p:spPr>
+        <p:txBody>
+          <a:bodyPr wrap="square" lIns="0" tIns="0" rIns="0" bIns="0" rtlCol="0" anchor="t"/>
+          <a:lstStyle/>
+          <a:p>
+            <a:pPr indent="0" marL="0">
+              <a:buNone/>
+            </a:pPr>
+            <a:r>
+              <a:rPr lang="de-DE" sz="1250" dirty="0">
+                <a:solidFill>
+                  <a:schemeClr val="tx1"/>
+                </a:solidFill>
+              </a:rPr>
+              <a:t>Domain lootlager.de und Marke LootLager beim DPMA anmelden</a:t>
+            </a:r>
+            <a:endParaRPr lang="de-DE" sz="1250" dirty="0"/>
+          </a:p>
+        </p:txBody>
+      </p:sp>
+      <p:sp>
+        <p:nvSpPr>
+          <p:cNvPr id="38" name="Schritt 4 Kreis"/>
+          <p:cNvSpPr/>
+          <p:nvPr/>
+        </p:nvSpPr>
+        <p:spPr>
+          <a:xfrm>
+            <a:off x="6172200" y="4215384"/>
+            <a:ext cx="457200" cy="457200"/>
+          </a:xfrm>
+          <a:prstGeom prst="ellipse">
+            <a:avLst/>
+          </a:prstGeom>
+          <a:solidFill>
+            <a:schemeClr val="accent1"/>
+          </a:solidFill>
+          <a:ln/>
+        </p:spPr>
+      </p:sp>
+      <p:sp>
+        <p:nvSpPr>
+          <p:cNvPr id="39" name="Schritt 4 Nummer"/>
+          <p:cNvSpPr txBox="1"/>
+          <p:nvPr/>
+        </p:nvSpPr>
+        <p:spPr>
+          <a:xfrm>
+            <a:off x="6172200" y="4215384"/>
+            <a:ext cx="457200" cy="457200"/>
+          </a:xfrm>
+          <a:prstGeom prst="rect">
+            <a:avLst/>
+          </a:prstGeom>
+          <a:noFill/>
+          <a:ln/>
+        </p:spPr>
+        <p:txBody>
+          <a:bodyPr wrap="square" lIns="0" tIns="0" rIns="0" bIns="0" rtlCol="0" anchor="ctr"/>
+          <a:lstStyle/>
+          <a:p>
+            <a:pPr indent="0" marL="0" algn="ctr">
+              <a:buNone/>
+            </a:pPr>
+            <a:r>
+              <a:rPr lang="de-DE" sz="1600" b="1" dirty="0">
+                <a:solidFill>
+                  <a:schemeClr val="bg1"/>
+                </a:solidFill>
+              </a:rPr>
+              <a:t>4</a:t>
+            </a:r>
+            <a:endParaRPr lang="de-DE" sz="1600" dirty="0"/>
+          </a:p>
+        </p:txBody>
+      </p:sp>
+      <p:sp>
+        <p:nvSpPr>
+          <p:cNvPr id="40" name="Schritt 4 Titel"/>
+          <p:cNvSpPr txBox="1"/>
+          <p:nvPr/>
+        </p:nvSpPr>
+        <p:spPr>
+          <a:xfrm>
+            <a:off x="6812280" y="4169664"/>
+            <a:ext cx="4828032" cy="292608"/>
+          </a:xfrm>
+          <a:prstGeom prst="rect">
+            <a:avLst/>
+          </a:prstGeom>
+          <a:noFill/>
+          <a:ln/>
+        </p:spPr>
+        <p:txBody>
+          <a:bodyPr wrap="square" lIns="0" tIns="0" rIns="0" bIns="0" rtlCol="0" anchor="ctr"/>
+          <a:lstStyle/>
+          <a:p>
+            <a:pPr indent="0" marL="0">
+              <a:buNone/>
+            </a:pPr>
+            <a:r>
+              <a:rPr lang="de-DE" sz="1600" b="1" dirty="0">
+                <a:solidFill>
+                  <a:schemeClr val="tx1"/>
+                </a:solidFill>
+              </a:rPr>
+              <a:t>Shop bauen</a:t>
+            </a:r>
+            <a:endParaRPr lang="de-DE" sz="1600" dirty="0"/>
+          </a:p>
+        </p:txBody>
+      </p:sp>
+      <p:sp>
+        <p:nvSpPr>
+          <p:cNvPr id="41" name="Schritt 4 Text"/>
+          <p:cNvSpPr txBox="1"/>
+          <p:nvPr/>
+        </p:nvSpPr>
+        <p:spPr>
+          <a:xfrm>
+            <a:off x="6812280" y="4471416"/>
+            <a:ext cx="4828032" cy="384048"/>
+          </a:xfrm>
+          <a:prstGeom prst="rect">
+            <a:avLst/>
+          </a:prstGeom>
+          <a:noFill/>
+          <a:ln/>
+        </p:spPr>
+        <p:txBody>
+          <a:bodyPr wrap="square" lIns="0" tIns="0" rIns="0" bIns="0" rtlCol="0" anchor="t"/>
+          <a:lstStyle/>
+          <a:p>
+            <a:pPr indent="0" marL="0">
+              <a:buNone/>
+            </a:pPr>
+            <a:r>
+              <a:rPr lang="de-DE" sz="1250" dirty="0">
+                <a:solidFill>
+                  <a:schemeClr val="tx1"/>
+                </a:solidFill>
+              </a:rPr>
+              <a:t>Shopify einrichten, Produkte und Rechtstexte anlegen</a:t>
+            </a:r>
+            <a:endParaRPr lang="de-DE" sz="1250" dirty="0"/>
+          </a:p>
+        </p:txBody>
+      </p:sp>
+      <p:sp>
+        <p:nvSpPr>
+          <p:cNvPr id="42" name="Schritt 5 Kreis"/>
+          <p:cNvSpPr/>
+          <p:nvPr/>
+        </p:nvSpPr>
+        <p:spPr>
+          <a:xfrm>
+            <a:off x="6172200" y="4873752"/>
+            <a:ext cx="457200" cy="457200"/>
+          </a:xfrm>
+          <a:prstGeom prst="ellipse">
+            <a:avLst/>
+          </a:prstGeom>
+          <a:solidFill>
+            <a:schemeClr val="accent1"/>
+          </a:solidFill>
+          <a:ln/>
+        </p:spPr>
+      </p:sp>
+      <p:sp>
+        <p:nvSpPr>
+          <p:cNvPr id="43" name="Schritt 5 Nummer"/>
+          <p:cNvSpPr txBox="1"/>
+          <p:nvPr/>
+        </p:nvSpPr>
+        <p:spPr>
+          <a:xfrm>
+            <a:off x="6172200" y="4873752"/>
+            <a:ext cx="457200" cy="457200"/>
+          </a:xfrm>
+          <a:prstGeom prst="rect">
+            <a:avLst/>
+          </a:prstGeom>
+          <a:noFill/>
+          <a:ln/>
+        </p:spPr>
+        <p:txBody>
+          <a:bodyPr wrap="square" lIns="0" tIns="0" rIns="0" bIns="0" rtlCol="0" anchor="ctr"/>
+          <a:lstStyle/>
+          <a:p>
+            <a:pPr indent="0" marL="0" algn="ctr">
+              <a:buNone/>
+            </a:pPr>
+            <a:r>
+              <a:rPr lang="de-DE" sz="1600" b="1" dirty="0">
+                <a:solidFill>
+                  <a:schemeClr val="bg1"/>
+                </a:solidFill>
+              </a:rPr>
+              <a:t>5</a:t>
+            </a:r>
+            <a:endParaRPr lang="de-DE" sz="1600" dirty="0"/>
+          </a:p>
+        </p:txBody>
+      </p:sp>
+      <p:sp>
+        <p:nvSpPr>
+          <p:cNvPr id="44" name="Schritt 5 Titel"/>
+          <p:cNvSpPr txBox="1"/>
+          <p:nvPr/>
+        </p:nvSpPr>
+        <p:spPr>
+          <a:xfrm>
+            <a:off x="6812280" y="4828032"/>
+            <a:ext cx="4828032" cy="292608"/>
+          </a:xfrm>
+          <a:prstGeom prst="rect">
+            <a:avLst/>
+          </a:prstGeom>
+          <a:noFill/>
+          <a:ln/>
+        </p:spPr>
+        <p:txBody>
+          <a:bodyPr wrap="square" lIns="0" tIns="0" rIns="0" bIns="0" rtlCol="0" anchor="ctr"/>
+          <a:lstStyle/>
+          <a:p>
+            <a:pPr indent="0" marL="0">
+              <a:buNone/>
+            </a:pPr>
+            <a:r>
+              <a:rPr lang="de-DE" sz="1600" b="1" dirty="0">
+                <a:solidFill>
+                  <a:schemeClr val="tx1"/>
+                </a:solidFill>
+              </a:rPr>
+              <a:t>Live gehen</a:t>
+            </a:r>
+            <a:endParaRPr lang="de-DE" sz="1600" dirty="0"/>
+          </a:p>
+        </p:txBody>
+      </p:sp>
+      <p:sp>
+        <p:nvSpPr>
+          <p:cNvPr id="45" name="Schritt 5 Text"/>
+          <p:cNvSpPr txBox="1"/>
+          <p:nvPr/>
+        </p:nvSpPr>
+        <p:spPr>
+          <a:xfrm>
+            <a:off x="6812280" y="5129784"/>
+            <a:ext cx="4828032" cy="384048"/>
+          </a:xfrm>
+          <a:prstGeom prst="rect">
+            <a:avLst/>
+          </a:prstGeom>
+          <a:noFill/>
+          <a:ln/>
+        </p:spPr>
+        <p:txBody>
+          <a:bodyPr wrap="square" lIns="0" tIns="0" rIns="0" bIns="0" rtlCol="0" anchor="t"/>
+          <a:lstStyle/>
+          <a:p>
+            <a:pPr indent="0" marL="0">
+              <a:buNone/>
+            </a:pPr>
+            <a:r>
+              <a:rPr lang="de-DE" sz="1250" dirty="0">
+                <a:solidFill>
+                  <a:schemeClr val="tx1"/>
+                </a:solidFill>
+              </a:rPr>
+              <a:t>Testbestellung machen, dann Start mit Werbung auf Instagram und TikTok</a:t>
+            </a:r>
+            <a:endParaRPr lang="de-DE" sz="1250" dirty="0"/>
+          </a:p>
+        </p:txBody>
+      </p:sp>
+      <p:sp>
+        <p:nvSpPr>
+          <p:cNvPr id="46" name="Quellen"/>
+          <p:cNvSpPr txBox="1"/>
+          <p:nvPr/>
+        </p:nvSpPr>
+        <p:spPr>
+          <a:xfrm>
+            <a:off x="548640" y="5559552"/>
+            <a:ext cx="11091672" cy="457200"/>
+          </a:xfrm>
+          <a:prstGeom prst="rect">
+            <a:avLst/>
+          </a:prstGeom>
+          <a:noFill/>
+          <a:ln/>
+        </p:spPr>
+        <p:txBody>
+          <a:bodyPr wrap="square" lIns="0" tIns="0" rIns="0" bIns="0" rtlCol="0" anchor="t"/>
+          <a:lstStyle/>
+          <a:p>
+            <a:pPr indent="0" marL="0">
+              <a:buNone/>
+            </a:pPr>
+            <a:r>
+              <a:rPr lang="de-DE" sz="1000" b="1" dirty="0">
+                <a:solidFill>
+                  <a:schemeClr val="accent6"/>
+                </a:solidFill>
+              </a:rPr>
+              <a:t>Quellen: </a:t>
+            </a:r>
+            <a:r>
+              <a:rPr lang="de-DE" sz="1000" dirty="0">
+                <a:solidFill>
+                  <a:schemeClr val="accent6"/>
+                </a:solidFill>
+              </a:rPr>
+              <a:t>HGB §§ 17–19, GmbHG §§ 4 und 5a, BGB § 312g · Preise und Funktionen der Shopsysteme: Preisvergleiche auf qualimero.com, l-iz.de und tooltester.com (abgerufen am 07.10.2026) · Logo: ChatGPT (KI)</a:t>
+            </a:r>
+            <a:endParaRPr lang="de-DE" sz="1000" dirty="0"/>
+          </a:p>
+        </p:txBody>
+      </p:sp>
+      <p:sp>
+        <p:nvSpPr>
+          <p:cNvPr id="47" name="Slide Number Placeholder 0"/>
+          <p:cNvSpPr>
+            <a:spLocks noGrp="1"/>
+          </p:cNvSpPr>
+          <p:nvPr>
+            <p:ph type="sldNum" sz="quarter" idx="4294967295"/>
+          </p:nvPr>
+        </p:nvSpPr>
+        <p:spPr>
+          <a:xfrm>
+            <a:off x="548640" y="6263640"/>
+            <a:ext cx="548640" cy="365760"/>
+          </a:xfrm>
+          <a:prstGeom prst="rect">
+            <a:avLst/>
+          </a:prstGeom>
+          <a:extLst>
+            <a:ext uri="{C572A759-6A51-4108-AA02-DFA0A04FC94B}">
+              <ma14:wrappingTextBoxFlag xmlns:ma14="http://schemas.microsoft.com/office/mac/drawingml/2011/main" val="0"/>
+            </a:ext>
+          </a:extLst>
+        </p:spPr>
+        <p:txBody>
+          <a:bodyPr lIns="0" tIns="0" rIns="0" bIns="0"/>
+          <a:lstStyle>
+            <a:lvl1pPr>
+              <a:defRPr sz="1100">
+                <a:solidFill>
+                  <a:schemeClr val="accent6"/>
+                </a:solidFill>
+                <a:latin typeface="Calibri"/>
+                <a:ea typeface="Calibri"/>
+                <a:cs typeface="Calibri"/>
+              </a:defRPr>
+            </a:lvl1pPr>
+          </a:lstStyle>
+          <a:p>
+            <a:pPr algn="l"/>
+            <a:fld id="{F7021451-1387-4CA6-816F-3879F97B5CBC}" type="slidenum">
+              <a:rPr b="0" lang="en-US"/>
+              <a:t>7</a:t>
             </a:fld>
             <a:endParaRPr lang="en-US"/>
           </a:p>

--- a/praesentation/LootLager_Praesentation.pptx
+++ b/praesentation/LootLager_Praesentation.pptx
@@ -709,13 +709,36 @@
           <a:lstStyle/>
           <a:p>
             <a:r>
-              <a:rPr lang="en-US" dirty="0"/>
-              <a:t>„Loot“ ist in Videospielen die Beute, die man als Belohnung bekommt. „Lager“ steht für unseren Shop, in dem alles für dein Gaming-Setup bereitliegt. Der Name ist kurz, passt zu unserer Zielgruppe und ist durch das doppelte L leicht zu merken.
-Logo: Die Truhe ist eine Loot-Kiste wie in Videospielen. Wer bei uns bestellt, bekommt seine Belohnung. Violett und Türkis sind typische Gaming-Farben. Das Logo haben wir mit ChatGPT erstellt.
-NACHFRAGE „Unterschied Firma und Marke?“:
-Die Firma ist der rechtliche Name unseres Unternehmens. Sie steht im Handelsregister und enthält die Rechtsform: LootLager UG (haftungsbeschränkt). Die Marke ist der Name, unter dem die Kunden unseren Shop und unsere Produkte kennen: LootLager. Bei uns heißen beide gleich, so erkennt man uns leichter wieder.</a:t>
-            </a:r>
-            <a:endParaRPr lang="en-US" dirty="0"/>
+              <a:t>„Loot“ ist in Videospielen die Beute, die man als Belohnung bekommt. „Lager“ steht für unseren Shop, in dem alles für dein Gaming-Setup bereitliegt. Der Name ist kurz, passt zu unserer Zielgruppe und ist durch das doppelte L leicht zu merken.</a:t>
+            </a:r>
+          </a:p>
+          <a:p/>
+          <a:p>
+            <a:r>
+              <a:t>Logo: Die Truhe ist eine Loot-Kiste wie in Videospielen. Wer bei uns bestellt, bekommt seine Belohnung. Violett und Türkis sind typische Gaming-Farben. Das Logo haben wir mit ChatGPT erstellt.</a:t>
+            </a:r>
+          </a:p>
+          <a:p/>
+          <a:p>
+            <a:r>
+              <a:t>NACHFRAGE „Unterschied Firma und Marke?“:</a:t>
+            </a:r>
+          </a:p>
+          <a:p>
+            <a:r>
+              <a:t>Die Firma ist der rechtliche Name unseres Unternehmens. Sie steht im Handelsregister und enthält die Rechtsform: LootLager UG (haftungsbeschränkt). Die Marke ist der Name, unter dem die Kunden unseren Shop und unsere Produkte kennen: LootLager. Bei uns heißen beide gleich, so erkennt man uns leichter wieder.</a:t>
+            </a:r>
+          </a:p>
+          <a:p/>
+          <a:p>
+            <a:r>
+              <a:t>NACHFRAGE „Gibt es den Namen schon?“:</a:t>
+            </a:r>
+          </a:p>
+          <a:p>
+            <a:r>
+              <a:t>Unsere Gründung ist fiktiv, deshalb nehmen wir an, dass der Name frei ist. Eine kurze Websuche hat keinen Shop „LootLager“ gefunden. Bei einer echten Gründung würden wir im Handelsregister nach der Firma suchen, beim DPMA nach der Marke und bei der DENIC nach der Domain lootlager.de.</a:t>
+            </a:r>
           </a:p>
         </p:txBody>
       </p:sp>

--- a/praesentation/LootLager_Praesentation.pptx
+++ b/praesentation/LootLager_Praesentation.pptx
@@ -12,6 +12,7 @@
     <p:sldId id="260" r:id="rId11"/>
     <p:sldId id="261" r:id="rId12"/>
     <p:sldId id="262" r:id="rId13"/>
+    <p:sldId id="263" r:id="rId14"/>
   </p:sldIdLst>
   <p:notesMasterIdLst>
     <p:notesMasterId r:id="rId6"/>
@@ -621,10 +622,42 @@
           <a:lstStyle/>
           <a:p>
             <a:r>
-              <a:rPr lang="en-US" dirty="0"/>
-              <a:t>Wir verkaufen Gaming-Zubehör, das unsere Kunden selbst gestalten können. Man wählt ein Produkt aus, lädt ein eigenes Motiv hoch oder lässt es von uns gestalten, und wir produzieren und versenden es. Unser Sortiment: XXL-Mauspads, Controller-Skins, Custom Keycaps und LED-Schilder. Unsere Zielgruppe sind Gamer und Streamer zwischen 16 und 30, die ein einzigartiges Setup wollen.</a:t>
-            </a:r>
-            <a:endParaRPr lang="en-US" dirty="0"/>
+              <a:t>Wir verkaufen Gaming-Zubehör, das unsere Kunden selbst gestalten können. Man wählt ein Produkt aus, lädt ein eigenes Motiv hoch oder lässt es von uns gestalten, und wir produzieren und versenden es.</a:t>
+            </a:r>
+          </a:p>
+          <a:p/>
+          <a:p>
+            <a:r>
+              <a:t>Unser Sortiment hat fünf Produkte: das XXL-Mauspad für 24,99 €, den Controller-Skin für 14,99 €, Custom Keycaps im 4er-Set für 19,99 €, das LED-Schild für 49,99 € und den Headset-Halter für 29,99 €.</a:t>
+            </a:r>
+          </a:p>
+          <a:p/>
+          <a:p>
+            <a:r>
+              <a:t>Unsere Zielgruppe sind Gamer und Streamer zwischen 16 und 30, die ein einzigartiges Setup wollen.</a:t>
+            </a:r>
+          </a:p>
+          <a:p/>
+          <a:p>
+            <a:r>
+              <a:t>SIND DIE PREISE ECHT?</a:t>
+            </a:r>
+          </a:p>
+          <a:p>
+            <a:r>
+              <a:t>Nein. Unsere Gründung ist fiktiv, deshalb haben wir uns die Preise ausgedacht. Alle Preise sind inklusive Mehrwertsteuer gemeint.</a:t>
+            </a:r>
+          </a:p>
+          <a:p/>
+          <a:p>
+            <a:r>
+              <a:t>WOHER SIND DIE PRODUKTBILDER?</a:t>
+            </a:r>
+          </a:p>
+          <a:p>
+            <a:r>
+              <a:t>Die haben wir mit Gemini erstellt, einer KI von Google. Die Produkte gibt es noch nicht in echt, die Bilder zeigen, wie sie aussehen sollen.</a:t>
+            </a:r>
           </a:p>
         </p:txBody>
       </p:sp>
@@ -737,7 +770,29 @@
           </a:p>
           <a:p>
             <a:r>
-              <a:t>Unsere Gründung ist fiktiv, deshalb nehmen wir an, dass der Name frei ist. Eine kurze Websuche hat keinen Shop „LootLager“ gefunden. Bei einer echten Gründung würden wir im Handelsregister nach der Firma suchen, beim DPMA nach der Marke und bei der DENIC nach der Domain lootlager.de.</a:t>
+              <a:t>Unsere Gründung ist fiktiv, deshalb nehmen wir an, dass der Name frei ist. Eine kurze Websuche hat keinen Shop „LootLager“ gefunden. Bei einer echten Gründung würden wir im Handelsregister nach der Firma suchen und beim DPMA nach der Marke.</a:t>
+            </a:r>
+          </a:p>
+          <a:p/>
+          <a:p>
+            <a:r>
+              <a:t>UNSERE DOMAIN:</a:t>
+            </a:r>
+          </a:p>
+          <a:p>
+            <a:r>
+              <a:t>Die Domain ist die Adresse, unter der man unseren Shop im Internet findet. Wir nehmen lootlager.de, also genau unseren Markennamen. So findet man uns leicht.</a:t>
+            </a:r>
+          </a:p>
+          <a:p/>
+          <a:p>
+            <a:r>
+              <a:t>NACHFRAGE „Ist die Domain frei?“:</a:t>
+            </a:r>
+          </a:p>
+          <a:p>
+            <a:r>
+              <a:t>Nein, in echt ist lootlager.de schon vergeben. Das zeigt die Abfrage bei der DENIC (Stand 13.10.2026). Weil unsere Gründung fiktiv ist, tun wir so, als wäre sie frei. Online stellen können wir den Shop trotzdem: über die kostenlose Netlify-Adresse lootlager.netlify.app.</a:t>
             </a:r>
           </a:p>
         </p:txBody>
@@ -929,51 +984,85 @@
           </a:p>
           <a:p>
             <a:r>
-              <a:t>Für unseren Shop haben wir vier Shopsysteme verglichen: Shopify, Jimdo, WooCommerce und Shopware. Dafür haben wir eine Nutzwertanalyse gemacht. Jedes Kriterium hat eine Gewichtung, am wichtigsten sind uns die Kosten mit 25 %. Jeder Anbieter bekommt pro Kriterium 1 bis 10 Punkte, die wir mit der Gewichtung multiplizieren. Shopify hat mit 7,85 Punkten gewonnen, knapp vor Jimdo mit 7,45 Punkten.</a:t>
+              <a:t>Für unsere Homepage haben wir vier Möglichkeiten verglichen: Netlify, Claude Code, Shopify und Jimdo. Dafür haben wir in Excel eine Nutzwertanalyse gemacht. Die Datei heißt Nutzwertanalyse.xlsx.</a:t>
             </a:r>
           </a:p>
           <a:p/>
           <a:p>
             <a:r>
-              <a:t>WARUM HAT SHOPIFY GEWONNEN?</a:t>
-            </a:r>
-          </a:p>
-          <a:p>
-            <a:r>
-              <a:t>Vor allem wegen der Funktionen: Bei uns laden Kunden ihr eigenes Motiv hoch. Dafür gibt es bei Shopify fertige Apps, auch für Print-on-Demand wie Printful oder Gelato. Bei Jimdo geht das nicht. Außerdem ist Shopify sehr einfach zu bedienen.</a:t>
+              <a:t>Links stehen unsere sechs Kriterien. Jedes Kriterium hat eine Gewichtung, am wichtigsten sind uns die Kosten mit 25 %. Jeder Anbieter bekommt pro Kriterium 1 bis 10 Punkte. Excel multipliziert die Punkte mit der Gewichtung und zählt alles zusammen. Das macht die Formel SUMMENPRODUKT in der letzten Zeile.</a:t>
             </a:r>
           </a:p>
           <a:p/>
           <a:p>
             <a:r>
-              <a:t>WARUM NICHT JIMDO? ES IST DOCH BILLIGER UND AUS DEUTSCHLAND.</a:t>
-            </a:r>
-          </a:p>
-          <a:p>
-            <a:r>
-              <a:t>Stimmt, Jimdo ist günstiger und beim Datenschutz besser. Aber Jimdo hat zu wenige Shop-Funktionen. Einen Motiv-Upload für Kunden können wir damit nicht umsetzen, und das ist unser wichtigstes Merkmal.</a:t>
+              <a:t>Netlify hat mit 7,65 Punkten gewonnen, knapp vor Shopify mit 7,45 Punkten. Dann kommen Jimdo mit 6,85 und Claude Code mit 5,65 Punkten.</a:t>
             </a:r>
           </a:p>
           <a:p/>
           <a:p>
             <a:r>
-              <a:t>WARUM NICHT WOOCOMMERCE ODER SHOPWARE? DIE SIND DOCH KOSTENLOS.</a:t>
-            </a:r>
-          </a:p>
-          <a:p>
-            <a:r>
-              <a:t>Die Software ist kostenlos, aber wir bräuchten einen eigenen Server und müssten Updates und Sicherheit selbst machen. Dazu kommen Erweiterungen für deutsches Recht. Das ist für Einsteiger zu aufwendig und am Ende nicht billiger.</a:t>
+              <a:t>WAS SIND DIE VIER ANBIETER?</a:t>
+            </a:r>
+          </a:p>
+          <a:p>
+            <a:r>
+              <a:t>Netlify ist ein Hosting-Anbieter aus den USA: Man baut die Seite selbst und Netlify stellt sie ins Internet. Claude Code ist ein KI-Werkzeug von Anthropic, das Webseiten programmiert. Shopify ist ein Mietshop aus Kanada, bei dem alles fertig ist. Jimdo ist ein Homepage-Baukasten aus Hamburg.</a:t>
             </a:r>
           </a:p>
           <a:p/>
           <a:p>
             <a:r>
-              <a:t>WOHER KOMMEN DIE PREISE?</a:t>
-            </a:r>
-          </a:p>
-          <a:p>
-            <a:r>
-              <a:t>Aus Preisvergleichen im Internet, Stand Oktober 2026. Shopify Basic kostet 25 € im Monat bei jährlicher Zahlung, 33 € bei monatlicher Zahlung.</a:t>
+              <a:t>WARUM HAT NETLIFY GEWONNEN?</a:t>
+            </a:r>
+          </a:p>
+          <a:p>
+            <a:r>
+              <a:t>Wegen der Kosten und der Freiheit beim Design. Der Free-Tarif kostet 0 € im Monat, und eine eigene Domain mit HTTPS ist dabei. Weil wir die Seite selbst bauen, sieht sie genau so aus, wie wir wollen. Das passt zu unserer Idee mit den Custom Designs.</a:t>
+            </a:r>
+          </a:p>
+          <a:p/>
+          <a:p>
+            <a:r>
+              <a:t>CLAUDE CODE IST DOCH KEIN ANBIETER FÜR HOMEPAGES?</a:t>
+            </a:r>
+          </a:p>
+          <a:p>
+            <a:r>
+              <a:t>Stimmt. Claude Code programmiert die Seite, stellt sie aber nicht ins Internet. Deshalb gibt es bei „Domain und Hosting“ nur 1 Punkt. Wir haben es trotzdem verglichen, weil wir unsere Seite damit gebaut haben. Am Ende kombinieren wir beides: gebaut mit Claude Code, online bei Netlify.</a:t>
+            </a:r>
+          </a:p>
+          <a:p/>
+          <a:p>
+            <a:r>
+              <a:t>WARUM NICHT SHOPIFY? DA IST DOCH ALLES FERTIG.</a:t>
+            </a:r>
+          </a:p>
+          <a:p>
+            <a:r>
+              <a:t>Stimmt, bei Warenkorb und Zahlung ist Shopify am besten, deshalb 10 Punkte. Aber Shopify kostet ab 25 € im Monat, und beim Design sind wir an die Vorlagen gebunden. Für einen echten Shop mit vielen Bestellungen wäre Shopify eine gute zweite Wahl.</a:t>
+            </a:r>
+          </a:p>
+          <a:p/>
+          <a:p>
+            <a:r>
+              <a:t>WARUM NICHT JIMDO?</a:t>
+            </a:r>
+          </a:p>
+          <a:p>
+            <a:r>
+              <a:t>Jimdo ist einfach und aus Deutschland, deshalb gut beim Datenschutz. Aber beim Design und bei den Shop-Funktionen ist es eingeschränkt.</a:t>
+            </a:r>
+          </a:p>
+          <a:p/>
+          <a:p>
+            <a:r>
+              <a:t>WIE KOMMT IHR AUF DIE PUNKTE?</a:t>
+            </a:r>
+          </a:p>
+          <a:p>
+            <a:r>
+              <a:t>Die Punkte haben wir selbst vergeben. Die Preise kommen von netlify.com und aus Preisvergleichen im Internet, Stand 13.10.2026.</a:t>
             </a:r>
           </a:p>
         </p:txBody>
@@ -1048,29 +1137,57 @@
           </a:p>
           <a:p>
             <a:r>
-              <a:t>Wir haben uns für Shopify entschieden. Der wichtigste Grund: Unsere Kunden sollen ihr eigenes Motiv hochladen. Dafür gibt es bei Shopify fertige Apps, und mit Print-on-Demand-Anbietern wie Printful oder Gelato wird das Produkt automatisch gedruckt und verschickt. Shopify ist einfach zu bedienen, wir brauchen keinen eigenen Server, und alle wichtigen Zahlungsarten wie PayPal und Klarna sind dabei. Der Start ist günstig: 3 Tage gratis, dann 3 Monate für je 1 €, danach kostet der Basic-Tarif 25 € im Monat.</a:t>
+              <a:t>Wir haben uns für Netlify entschieden. Netlify ist ein Hosting-Anbieter: Wir bauen die Seite selbst, und Netlify stellt sie ins Internet. Der Free-Tarif kostet nichts. Dazu bekommen wir eine kostenlose Adresse, nämlich lootlager.netlify.app, und können später unsere eigene Domain anschließen. HTTPS, also die sichere Verbindung, ist automatisch dabei.</a:t>
             </a:r>
           </a:p>
           <a:p/>
           <a:p>
             <a:r>
-              <a:t>Rechts seht ihr den Entwurf unserer Startseite: oben Logo, Suchleiste, Konto und Warenkorb, darunter unsere Kategorien und ein Banner mit unserem Slogan und dem Button „Jetzt gestalten“. Dann kommen die Bestseller, unsere Vorteile und unten die Pflichtseiten wie Impressum und Datenschutz.</a:t>
+              <a:t>Gebaut haben wir die Seite mit Claude Code, einer KI, die programmieren kann. Dadurch sind wir beim Design frei und nicht an einen Baukasten gebunden. Online geht die Seite, indem wir den Ordner bei Netlify hochladen oder unser GitHub-Projekt verbinden.</a:t>
             </a:r>
           </a:p>
           <a:p/>
           <a:p>
             <a:r>
-              <a:t>HAT SHOPIFY AUCH NACHTEILE?</a:t>
-            </a:r>
-          </a:p>
-          <a:p>
-            <a:r>
-              <a:t>Ja. Shopify ist ein Unternehmen aus Kanada, die Daten werden teils außerhalb der EU verarbeitet. Wenn wir nicht Shopify Payments nutzen, zahlen wir im Basic-Tarif 2 % Gebühr pro Verkauf. Und manche Apps kosten extra.</a:t>
+              <a:t>Rechts seht ihr unsere Startseite: oben das Logo, die Suche und der Warenkorb. Darunter der Slogan „Level up dein Setup.“ und der Button „Jetzt gestalten“. Dann kommen unsere fünf Produkte. Die Bilder dazu haben wir mit Gemini erstellt. Weiter unten kann man ein eigenes Motiv hochladen und sieht sofort eine Vorschau.</a:t>
             </a:r>
           </a:p>
           <a:p/>
           <a:p>
             <a:r>
+              <a:t>HAT NETLIFY AUCH NACHTEILE?</a:t>
+            </a:r>
+          </a:p>
+          <a:p>
+            <a:r>
+              <a:t>Ja. Netlify ist kein fertiges Shopsystem. Den Warenkorb haben wir selbst gebaut, und eine echte Zahlung müssten wir noch einbauen, zum Beispiel mit PayPal oder Stripe. Die Server stehen in den USA, das müssen wir in der Datenschutzerklärung angeben. Und Rechtstexte wie AGB bekommen wir nicht mitgeliefert.</a:t>
+            </a:r>
+          </a:p>
+          <a:p/>
+          <a:p>
+            <a:r>
+              <a:t>KANN MAN BEI EUCH WIRKLICH BESTELLEN?</a:t>
+            </a:r>
+          </a:p>
+          <a:p>
+            <a:r>
+              <a:t>Nein. Der Shop ist eine Demo für unser Schulprojekt. Man kann Produkte in den Warenkorb legen, aber an der Kasse kommt ein Hinweis, dass es keine echten Bestellungen gibt.</a:t>
+            </a:r>
+          </a:p>
+          <a:p/>
+          <a:p>
+            <a:r>
+              <a:t>WAS KOSTET NETLIFY, WENN DER SHOP GRÖSSER WIRD?</a:t>
+            </a:r>
+          </a:p>
+          <a:p>
+            <a:r>
+              <a:t>Im Free-Tarif sind 300 Credits im Monat dabei. Jede Veröffentlichung kostet 15 Credits. Wenn das nicht mehr reicht, gibt es den Tarif Personal für 9 Dollar und Pro für 20 Dollar im Monat.</a:t>
+            </a:r>
+          </a:p>
+          <a:p/>
+          <a:p>
+            <a:r>
               <a:t>WARUM STEHT DA NICHT „30 TAGE RÜCKGABE“?</a:t>
             </a:r>
           </a:p>
@@ -1087,7 +1204,7 @@
           </a:p>
           <a:p>
             <a:r>
-              <a:t>Impressum (§ 5 DDG), Datenschutzerklärung (DSGVO), AGB, Widerrufsbelehrung sowie Infos zu Versand und Zahlung.</a:t>
+              <a:t>Impressum (§ 5 DDG), Datenschutzerklärung (DSGVO), AGB, Widerrufsbelehrung sowie Infos zu Versand und Zahlung. Auf unserer Seite stehen sie unten im Footer unter „Rechtliches“.</a:t>
             </a:r>
           </a:p>
         </p:txBody>
@@ -1162,30 +1279,121 @@
           </a:p>
           <a:p>
             <a:r>
-              <a:t>Zum Schluss unser Fazit: Wir gründen die LootLager UG (haftungsbeschränkt) mit 1.000 € Stammkapital. Unsere Marke heißt LootLager, unser Slogan ist „Level up dein Setup.“ Den Shop bauen wir mit Shopify, und unser Logo haben wir mit ChatGPT erstellt.</a:t>
+              <a:t>Zum Schluss unser Fazit: Wir gründen die LootLager UG (haftungsbeschränkt) mit 1.000 € Stammkapital. Unsere Marke heißt LootLager, unser Slogan ist „Level up dein Setup.“ Unsere Domain ist lootlager.de. Den Shop haben wir mit Claude Code gebaut und stellen ihn mit Netlify ins Internet. Unser Logo haben wir mit ChatGPT erstellt, die Bilder mit Gemini.</a:t>
             </a:r>
           </a:p>
           <a:p/>
           <a:p>
             <a:r>
-              <a:t>Als Nächstes würden wir den Gesellschaftsvertrag beim Notar beurkunden lassen und das Stammkapital einzahlen. Dann melden wir uns beim Handelsregister, beim Gewerbeamt und beim Finanzamt an. Danach sichern wir uns die Domain lootlager.de und melden die Marke beim DPMA an. Zum Schluss richten wir den Shop ein, machen eine Testbestellung und starten mit Werbung auf Instagram und TikTok.</a:t>
+              <a:t>Als Nächstes würden wir den Gesellschaftsvertrag beim Notar beurkunden lassen und das Stammkapital einzahlen. Dann melden wir uns beim Handelsregister, beim Gewerbeamt und beim Finanzamt an. Danach verbinden wir die Domain lootlager.de mit Netlify und melden die Marke beim DPMA an. Zum Schluss bauen wir die Zahlung ein, ergänzen die Rechtstexte, machen eine Testbestellung und starten mit Werbung auf Instagram und TikTok.</a:t>
             </a:r>
           </a:p>
           <a:p/>
           <a:p>
             <a:r>
+              <a:t>WARUM DIE MARKE ANMELDEN?</a:t>
+            </a:r>
+          </a:p>
+          <a:p>
+            <a:r>
+              <a:t>Damit niemand anderes den Namen LootLager für Gaming-Zubehör nutzen darf. Eine Marke beim DPMA gilt 10 Jahre und kann verlängert werden. Unser KI-Logo ist sonst kaum geschützt, weil rein KI-generierte Bilder meist kein Urheberrecht haben.</a:t>
+            </a:r>
+          </a:p>
+        </p:txBody>
+      </p:sp>
+      <p:sp>
+        <p:nvSpPr>
+          <p:cNvPr id="4" name="Slide Number Placeholder 3"/>
+          <p:cNvSpPr>
+            <a:spLocks noGrp="1"/>
+          </p:cNvSpPr>
+          <p:nvPr>
+            <p:ph type="sldNum" idx="5" sz="quarter"/>
+          </p:nvPr>
+        </p:nvSpPr>
+        <p:spPr/>
+      </p:sp>
+    </p:spTree>
+  </p:cSld>
+  <p:clrMapOvr>
+    <a:masterClrMapping/>
+  </p:clrMapOvr>
+</p:notes>
+</file>
+
+<file path=ppt/notesSlides/notesSlide8.xml><?xml version="1.0" encoding="utf-8"?>
+<p:notes xmlns:a="http://schemas.openxmlformats.org/drawingml/2006/main" xmlns:p="http://schemas.openxmlformats.org/presentationml/2006/main" xmlns:r="http://schemas.openxmlformats.org/officeDocument/2006/relationships">
+  <p:cSld>
+    <p:spTree>
+      <p:nvGrpSpPr>
+        <p:cNvPr id="1" name=""/>
+        <p:cNvGrpSpPr/>
+        <p:nvPr/>
+      </p:nvGrpSpPr>
+      <p:grpSpPr>
+        <a:xfrm>
+          <a:off x="0" y="0"/>
+          <a:ext cx="0" cy="0"/>
+          <a:chOff x="0" y="0"/>
+          <a:chExt cx="0" cy="0"/>
+        </a:xfrm>
+      </p:grpSpPr>
+      <p:sp>
+        <p:nvSpPr>
+          <p:cNvPr id="2" name="Slide Image Placeholder 1"/>
+          <p:cNvSpPr>
+            <a:spLocks noGrp="1"/>
+          </p:cNvSpPr>
+          <p:nvPr>
+            <p:ph type="sldImg" idx="2"/>
+          </p:nvPr>
+        </p:nvSpPr>
+        <p:spPr/>
+      </p:sp>
+      <p:sp>
+        <p:nvSpPr>
+          <p:cNvPr id="3" name="Notes Placeholder 2"/>
+          <p:cNvSpPr>
+            <a:spLocks noGrp="1"/>
+          </p:cNvSpPr>
+          <p:nvPr>
+            <p:ph type="body" idx="3" sz="quarter"/>
+          </p:nvPr>
+        </p:nvSpPr>
+        <p:spPr/>
+        <p:txBody>
+          <a:bodyPr/>
+          <a:lstStyle/>
+          <a:p>
+            <a:r>
+              <a:t>SPRECHTEXT:</a:t>
+            </a:r>
+          </a:p>
+          <a:p>
+            <a:r>
               <a:t>Vielen Dank fürs Zuhören! Habt ihr noch Fragen?</a:t>
             </a:r>
           </a:p>
           <a:p/>
           <a:p>
             <a:r>
-              <a:t>WARUM DIE MARKE ANMELDEN?</a:t>
-            </a:r>
-          </a:p>
-          <a:p>
-            <a:r>
-              <a:t>Damit niemand anderes den Namen LootLager für Gaming-Zubehör nutzen darf. Eine Marke beim DPMA gilt 10 Jahre und kann verlängert werden. Unser KI-Logo ist sonst kaum geschützt, weil rein KI-generierte Bilder meist kein Urheberrecht haben.</a:t>
+              <a:t>WOHER SIND DIE BILDER?</a:t>
+            </a:r>
+          </a:p>
+          <a:p>
+            <a:r>
+              <a:t>Die Produktbilder, das Bild mit der Truhe auf der Startseite und dieses Bild vom Schreibtisch haben wir mit Gemini erstellt, einer KI von Google. Das Logo ist von ChatGPT. Die Prompts stehen in unserem Projekt im Ordner assets/ki-bilder.</a:t>
+            </a:r>
+          </a:p>
+          <a:p/>
+          <a:p>
+            <a:r>
+              <a:t>GIBT ES DIE PRODUKTE SCHON?</a:t>
+            </a:r>
+          </a:p>
+          <a:p>
+            <a:r>
+              <a:t>Nein. Unsere Gründung ist fiktiv. Die Bilder zeigen, wie die Produkte aussehen sollen.</a:t>
             </a:r>
           </a:p>
         </p:txBody>
@@ -1863,6 +2071,30 @@
       </p:grpSpPr>
       <p:pic>
         <p:nvPicPr>
+          <p:cNvPr id="23" name="Hintergrund" descr=""/>
+          <p:cNvPicPr>
+            <a:picLocks noChangeAspect="1"/>
+          </p:cNvPicPr>
+          <p:nvPr/>
+        </p:nvPicPr>
+        <p:blipFill>
+          <a:blip r:embed="rId7"/>
+          <a:stretch>
+            <a:fillRect/>
+          </a:stretch>
+        </p:blipFill>
+        <p:spPr>
+          <a:xfrm>
+            <a:off x="0" y="0"/>
+            <a:ext cx="12192000" cy="6858000"/>
+          </a:xfrm>
+          <a:prstGeom prst="rect">
+            <a:avLst/>
+          </a:prstGeom>
+        </p:spPr>
+      </p:pic>
+      <p:pic>
+        <p:nvPicPr>
           <p:cNvPr id="2" name="Firmenlogo" descr="Logo von LootLager: eine offene violette Schatztruhe neben dem Schriftzug LootLager">    </p:cNvPr>
           <p:cNvPicPr>
             <a:picLocks noChangeAspect="1"/>
@@ -1870,7 +2102,7 @@
           <p:nvPr/>
         </p:nvPicPr>
         <p:blipFill>
-          <a:blip r:embed="rId1"/>
+          <a:blip r:embed="rId8"/>
           <a:stretch>
             <a:fillRect/>
           </a:stretch>
@@ -2704,7 +2936,7 @@
                   <a:schemeClr val="accent6"/>
                 </a:solidFill>
               </a:rPr>
-              <a:t>Mauspad, Controller-Skin, Keycaps oder LED-Schild</a:t>
+              <a:t>Mauspad, Controller-Skin, Keycaps, LED-Schild oder Headset-Halter</a:t>
             </a:r>
             <a:endParaRPr lang="en-US" sz="1400" dirty="0"/>
           </a:p>
@@ -2996,7 +3228,7 @@
                   <a:schemeClr val="tx1"/>
                 </a:solidFill>
               </a:rPr>
-              <a:t>Unser Sortiment</a:t>
+              <a:t>Unsere 5 Produkte</a:t>
             </a:r>
             <a:endParaRPr lang="en-US" sz="2000" dirty="0"/>
           </a:p>
@@ -3010,12 +3242,12 @@
         </p:nvSpPr>
         <p:spPr>
           <a:xfrm>
-            <a:off x="6309360" y="2011680"/>
-            <a:ext cx="2514600" cy="1463040"/>
+            <a:off x="6309360" y="1965960"/>
+            <a:ext cx="5330952" cy="566928"/>
           </a:xfrm>
           <a:prstGeom prst="roundRect">
             <a:avLst>
-              <a:gd name="adj" fmla="val 7500"/>
+              <a:gd name="adj" fmla="val 22000"/>
             </a:avLst>
           </a:prstGeom>
           <a:solidFill>
@@ -3024,47 +3256,29 @@
           <a:ln/>
         </p:spPr>
       </p:sp>
-      <p:sp>
-        <p:nvSpPr>
-          <p:cNvPr id="18" name="XXL-Mauspads Kreis"/>
-          <p:cNvSpPr/>
-          <p:nvPr/>
-        </p:nvSpPr>
-        <p:spPr>
-          <a:xfrm>
-            <a:off x="6537960" y="2240280"/>
-            <a:ext cx="502920" cy="502920"/>
-          </a:xfrm>
-          <a:prstGeom prst="ellipse">
-            <a:avLst/>
-          </a:prstGeom>
-          <a:solidFill>
-            <a:schemeClr val="accent1"/>
-          </a:solidFill>
-          <a:ln/>
-        </p:spPr>
-      </p:sp>
       <p:pic>
         <p:nvPicPr>
-          <p:cNvPr id="19" name="XXL-Mauspads Icon" descr="XXL-Mauspads">    </p:cNvPr>
+          <p:cNvPr id="19" name="XXL-Mauspads Foto" descr="XXL-Mauspad mit Berglandschaft in Violett und Türkis"/>
           <p:cNvPicPr>
             <a:picLocks noChangeAspect="1"/>
           </p:cNvPicPr>
           <p:nvPr/>
         </p:nvPicPr>
         <p:blipFill>
-          <a:blip r:embed="rId1"/>
+          <a:blip r:embed="rId10"/>
           <a:stretch>
             <a:fillRect/>
           </a:stretch>
         </p:blipFill>
         <p:spPr>
           <a:xfrm>
-            <a:off x="6663690" y="2366010"/>
-            <a:ext cx="251460" cy="251460"/>
-          </a:xfrm>
-          <a:prstGeom prst="rect">
-            <a:avLst/>
+            <a:off x="6309360" y="1965960"/>
+            <a:ext cx="755904" cy="566928"/>
+          </a:xfrm>
+          <a:prstGeom prst="roundRect">
+            <a:avLst>
+              <a:gd name="adj" fmla="val 22000"/>
+            </a:avLst>
           </a:prstGeom>
         </p:spPr>
       </p:pic>
@@ -3076,8 +3290,8 @@
         </p:nvSpPr>
         <p:spPr>
           <a:xfrm>
-            <a:off x="6537960" y="2834640"/>
-            <a:ext cx="2057400" cy="292608"/>
+            <a:off x="7205472" y="2011680"/>
+            <a:ext cx="2898648" cy="256032"/>
           </a:xfrm>
           <a:prstGeom prst="rect">
             <a:avLst/>
@@ -3093,12 +3307,12 @@
               <a:buNone/>
             </a:pPr>
             <a:r>
-              <a:rPr lang="en-US" sz="1600" b="1" dirty="0">
+              <a:rPr lang="en-US" sz="1500" b="1" dirty="0">
                 <a:solidFill>
                   <a:schemeClr val="tx1"/>
                 </a:solidFill>
               </a:rPr>
-              <a:t>XXL-Mauspads</a:t>
+              <a:t>XXL-Mauspad</a:t>
             </a:r>
             <a:endParaRPr lang="en-US" sz="1600" dirty="0"/>
           </a:p>
@@ -3112,8 +3326,8 @@
         </p:nvSpPr>
         <p:spPr>
           <a:xfrm>
-            <a:off x="6537960" y="3108960"/>
-            <a:ext cx="2057400" cy="274320"/>
+            <a:off x="7205472" y="2267712"/>
+            <a:ext cx="2898648" cy="219456"/>
           </a:xfrm>
           <a:prstGeom prst="rect">
             <a:avLst/>
@@ -3134,7 +3348,7 @@
                   <a:schemeClr val="accent6"/>
                 </a:solidFill>
               </a:rPr>
-              <a:t>mit eigenem Motiv</a:t>
+              <a:t>900 × 400 mm, mit eigenem Motiv</a:t>
             </a:r>
             <a:endParaRPr lang="en-US" sz="1200" dirty="0"/>
           </a:p>
@@ -3148,12 +3362,12 @@
         </p:nvSpPr>
         <p:spPr>
           <a:xfrm>
-            <a:off x="9125712" y="2011680"/>
-            <a:ext cx="2514600" cy="1463040"/>
+            <a:off x="6309360" y="2615184"/>
+            <a:ext cx="5330952" cy="566928"/>
           </a:xfrm>
           <a:prstGeom prst="roundRect">
             <a:avLst>
-              <a:gd name="adj" fmla="val 7500"/>
+              <a:gd name="adj" fmla="val 22000"/>
             </a:avLst>
           </a:prstGeom>
           <a:solidFill>
@@ -3162,47 +3376,29 @@
           <a:ln/>
         </p:spPr>
       </p:sp>
-      <p:sp>
-        <p:nvSpPr>
-          <p:cNvPr id="23" name="Controller-Skins Kreis"/>
-          <p:cNvSpPr/>
-          <p:nvPr/>
-        </p:nvSpPr>
-        <p:spPr>
-          <a:xfrm>
-            <a:off x="9354312" y="2240280"/>
-            <a:ext cx="502920" cy="502920"/>
-          </a:xfrm>
-          <a:prstGeom prst="ellipse">
-            <a:avLst/>
-          </a:prstGeom>
-          <a:solidFill>
-            <a:schemeClr val="accent4"/>
-          </a:solidFill>
-          <a:ln/>
-        </p:spPr>
-      </p:sp>
       <p:pic>
         <p:nvPicPr>
-          <p:cNvPr id="24" name="Controller-Skins Icon" descr="Controller-Skins">    </p:cNvPr>
+          <p:cNvPr id="24" name="Controller-Skins Foto" descr="Controller mit Skin im Farbverlauf von Violett nach Türkis"/>
           <p:cNvPicPr>
             <a:picLocks noChangeAspect="1"/>
           </p:cNvPicPr>
           <p:nvPr/>
         </p:nvPicPr>
         <p:blipFill>
-          <a:blip r:embed="rId2"/>
+          <a:blip r:embed="rId11"/>
           <a:stretch>
             <a:fillRect/>
           </a:stretch>
         </p:blipFill>
         <p:spPr>
           <a:xfrm>
-            <a:off x="9480042" y="2366010"/>
-            <a:ext cx="251460" cy="251460"/>
-          </a:xfrm>
-          <a:prstGeom prst="rect">
-            <a:avLst/>
+            <a:off x="6309360" y="2615184"/>
+            <a:ext cx="755904" cy="566928"/>
+          </a:xfrm>
+          <a:prstGeom prst="roundRect">
+            <a:avLst>
+              <a:gd name="adj" fmla="val 22000"/>
+            </a:avLst>
           </a:prstGeom>
         </p:spPr>
       </p:pic>
@@ -3214,8 +3410,8 @@
         </p:nvSpPr>
         <p:spPr>
           <a:xfrm>
-            <a:off x="9354312" y="2834640"/>
-            <a:ext cx="2057400" cy="292608"/>
+            <a:off x="7205472" y="2660904"/>
+            <a:ext cx="2898648" cy="256032"/>
           </a:xfrm>
           <a:prstGeom prst="rect">
             <a:avLst/>
@@ -3231,12 +3427,12 @@
               <a:buNone/>
             </a:pPr>
             <a:r>
-              <a:rPr lang="en-US" sz="1600" b="1" dirty="0">
+              <a:rPr lang="en-US" sz="1500" b="1" dirty="0">
                 <a:solidFill>
                   <a:schemeClr val="tx1"/>
                 </a:solidFill>
               </a:rPr>
-              <a:t>Controller-Skins</a:t>
+              <a:t>Controller-Skin</a:t>
             </a:r>
             <a:endParaRPr lang="en-US" sz="1600" dirty="0"/>
           </a:p>
@@ -3250,8 +3446,8 @@
         </p:nvSpPr>
         <p:spPr>
           <a:xfrm>
-            <a:off x="9354312" y="3108960"/>
-            <a:ext cx="2057400" cy="274320"/>
+            <a:off x="7205472" y="2916936"/>
+            <a:ext cx="2898648" cy="219456"/>
           </a:xfrm>
           <a:prstGeom prst="rect">
             <a:avLst/>
@@ -3286,12 +3482,12 @@
         </p:nvSpPr>
         <p:spPr>
           <a:xfrm>
-            <a:off x="6309360" y="3776472"/>
-            <a:ext cx="2514600" cy="1463040"/>
+            <a:off x="6309360" y="3264408"/>
+            <a:ext cx="5330952" cy="566928"/>
           </a:xfrm>
           <a:prstGeom prst="roundRect">
             <a:avLst>
-              <a:gd name="adj" fmla="val 7500"/>
+              <a:gd name="adj" fmla="val 22000"/>
             </a:avLst>
           </a:prstGeom>
           <a:solidFill>
@@ -3300,47 +3496,29 @@
           <a:ln/>
         </p:spPr>
       </p:sp>
-      <p:sp>
-        <p:nvSpPr>
-          <p:cNvPr id="28" name="Custom Keycaps Kreis"/>
-          <p:cNvSpPr/>
-          <p:nvPr/>
-        </p:nvSpPr>
-        <p:spPr>
-          <a:xfrm>
-            <a:off x="6537960" y="4005072"/>
-            <a:ext cx="502920" cy="502920"/>
-          </a:xfrm>
-          <a:prstGeom prst="ellipse">
-            <a:avLst/>
-          </a:prstGeom>
-          <a:solidFill>
-            <a:schemeClr val="accent1"/>
-          </a:solidFill>
-          <a:ln/>
-        </p:spPr>
-      </p:sp>
       <p:pic>
         <p:nvPicPr>
-          <p:cNvPr id="29" name="Custom Keycaps Icon" descr="Custom Keycaps">    </p:cNvPr>
+          <p:cNvPr id="29" name="Custom Keycaps Foto" descr="Vier Keycaps mit den Buchstaben L, O, O und T"/>
           <p:cNvPicPr>
             <a:picLocks noChangeAspect="1"/>
           </p:cNvPicPr>
           <p:nvPr/>
         </p:nvPicPr>
         <p:blipFill>
-          <a:blip r:embed="rId3"/>
+          <a:blip r:embed="rId12"/>
           <a:stretch>
             <a:fillRect/>
           </a:stretch>
         </p:blipFill>
         <p:spPr>
           <a:xfrm>
-            <a:off x="6663690" y="4130802"/>
-            <a:ext cx="251460" cy="251460"/>
-          </a:xfrm>
-          <a:prstGeom prst="rect">
-            <a:avLst/>
+            <a:off x="6309360" y="3264408"/>
+            <a:ext cx="755904" cy="566928"/>
+          </a:xfrm>
+          <a:prstGeom prst="roundRect">
+            <a:avLst>
+              <a:gd name="adj" fmla="val 22000"/>
+            </a:avLst>
           </a:prstGeom>
         </p:spPr>
       </p:pic>
@@ -3352,8 +3530,8 @@
         </p:nvSpPr>
         <p:spPr>
           <a:xfrm>
-            <a:off x="6537960" y="4599432"/>
-            <a:ext cx="2057400" cy="292608"/>
+            <a:off x="7205472" y="3310128"/>
+            <a:ext cx="2898648" cy="256032"/>
           </a:xfrm>
           <a:prstGeom prst="rect">
             <a:avLst/>
@@ -3369,12 +3547,12 @@
               <a:buNone/>
             </a:pPr>
             <a:r>
-              <a:rPr lang="en-US" sz="1600" b="1" dirty="0">
+              <a:rPr lang="en-US" sz="1500" b="1" dirty="0">
                 <a:solidFill>
                   <a:schemeClr val="tx1"/>
                 </a:solidFill>
               </a:rPr>
-              <a:t>Custom Keycaps</a:t>
+              <a:t>Custom Keycaps (4er-Set)</a:t>
             </a:r>
             <a:endParaRPr lang="en-US" sz="1600" dirty="0"/>
           </a:p>
@@ -3388,8 +3566,8 @@
         </p:nvSpPr>
         <p:spPr>
           <a:xfrm>
-            <a:off x="6537960" y="4873752"/>
-            <a:ext cx="2057400" cy="274320"/>
+            <a:off x="7205472" y="3566160"/>
+            <a:ext cx="2898648" cy="219456"/>
           </a:xfrm>
           <a:prstGeom prst="rect">
             <a:avLst/>
@@ -3424,12 +3602,12 @@
         </p:nvSpPr>
         <p:spPr>
           <a:xfrm>
-            <a:off x="9125712" y="3776472"/>
-            <a:ext cx="2514600" cy="1463040"/>
+            <a:off x="6309360" y="3913632"/>
+            <a:ext cx="5330952" cy="566928"/>
           </a:xfrm>
           <a:prstGeom prst="roundRect">
             <a:avLst>
-              <a:gd name="adj" fmla="val 7500"/>
+              <a:gd name="adj" fmla="val 22000"/>
             </a:avLst>
           </a:prstGeom>
           <a:solidFill>
@@ -3438,47 +3616,29 @@
           <a:ln/>
         </p:spPr>
       </p:sp>
-      <p:sp>
-        <p:nvSpPr>
-          <p:cNvPr id="33" name="LED-Schilder Kreis"/>
-          <p:cNvSpPr/>
-          <p:nvPr/>
-        </p:nvSpPr>
-        <p:spPr>
-          <a:xfrm>
-            <a:off x="9354312" y="4005072"/>
-            <a:ext cx="502920" cy="502920"/>
-          </a:xfrm>
-          <a:prstGeom prst="ellipse">
-            <a:avLst/>
-          </a:prstGeom>
-          <a:solidFill>
-            <a:schemeClr val="accent4"/>
-          </a:solidFill>
-          <a:ln/>
-        </p:spPr>
-      </p:sp>
       <p:pic>
         <p:nvPicPr>
-          <p:cNvPr id="34" name="LED-Schilder Icon" descr="LED-Schilder">    </p:cNvPr>
+          <p:cNvPr id="34" name="LED-Schilder Foto" descr="Neon-Schild mit leuchtendem Schriftzug GG!"/>
           <p:cNvPicPr>
             <a:picLocks noChangeAspect="1"/>
           </p:cNvPicPr>
           <p:nvPr/>
         </p:nvPicPr>
         <p:blipFill>
-          <a:blip r:embed="rId4"/>
+          <a:blip r:embed="rId13"/>
           <a:stretch>
             <a:fillRect/>
           </a:stretch>
         </p:blipFill>
         <p:spPr>
           <a:xfrm>
-            <a:off x="9480042" y="4130802"/>
-            <a:ext cx="251460" cy="251460"/>
-          </a:xfrm>
-          <a:prstGeom prst="rect">
-            <a:avLst/>
+            <a:off x="6309360" y="3913632"/>
+            <a:ext cx="755904" cy="566928"/>
+          </a:xfrm>
+          <a:prstGeom prst="roundRect">
+            <a:avLst>
+              <a:gd name="adj" fmla="val 22000"/>
+            </a:avLst>
           </a:prstGeom>
         </p:spPr>
       </p:pic>
@@ -3490,8 +3650,8 @@
         </p:nvSpPr>
         <p:spPr>
           <a:xfrm>
-            <a:off x="9354312" y="4599432"/>
-            <a:ext cx="2057400" cy="292608"/>
+            <a:off x="7205472" y="3959352"/>
+            <a:ext cx="2898648" cy="256032"/>
           </a:xfrm>
           <a:prstGeom prst="rect">
             <a:avLst/>
@@ -3507,12 +3667,12 @@
               <a:buNone/>
             </a:pPr>
             <a:r>
-              <a:rPr lang="en-US" sz="1600" b="1" dirty="0">
+              <a:rPr lang="en-US" sz="1500" b="1" dirty="0">
                 <a:solidFill>
                   <a:schemeClr val="tx1"/>
                 </a:solidFill>
               </a:rPr>
-              <a:t>LED-Schilder</a:t>
+              <a:t>LED-Schild</a:t>
             </a:r>
             <a:endParaRPr lang="en-US" sz="1600" dirty="0"/>
           </a:p>
@@ -3526,8 +3686,8 @@
         </p:nvSpPr>
         <p:spPr>
           <a:xfrm>
-            <a:off x="9354312" y="4873752"/>
-            <a:ext cx="2057400" cy="274320"/>
+            <a:off x="7205472" y="4215384"/>
+            <a:ext cx="2898648" cy="219456"/>
           </a:xfrm>
           <a:prstGeom prst="rect">
             <a:avLst/>
@@ -3548,7 +3708,7 @@
                   <a:schemeClr val="accent6"/>
                 </a:solidFill>
               </a:rPr>
-              <a:t>Neon-Schriftzug mit Namen</a:t>
+              <a:t>Neon-Schriftzug mit deinem Namen</a:t>
             </a:r>
             <a:endParaRPr lang="en-US" sz="1200" dirty="0"/>
           </a:p>
@@ -3620,6 +3780,301 @@
               <a:t>Gamer und Streamer zwischen 16 und 30, die ein Setup wollen, das es nur einmal gibt</a:t>
             </a:r>
             <a:endParaRPr lang="en-US" sz="1600" dirty="0"/>
+          </a:p>
+        </p:txBody>
+      </p:sp>
+      <p:sp>
+        <p:nvSpPr>
+          <p:cNvPr id="40" name="Produkt Headset-Halter"/>
+          <p:cNvSpPr/>
+          <p:nvPr/>
+        </p:nvSpPr>
+        <p:spPr>
+          <a:xfrm>
+            <a:off x="6309360" y="4562856"/>
+            <a:ext cx="5330952" cy="566928"/>
+          </a:xfrm>
+          <a:prstGeom prst="roundRect">
+            <a:avLst>
+              <a:gd name="adj" fmla="val 22000"/>
+            </a:avLst>
+          </a:prstGeom>
+          <a:solidFill>
+            <a:schemeClr val="bg2"/>
+          </a:solidFill>
+          <a:ln/>
+        </p:spPr>
+      </p:sp>
+      <p:pic>
+        <p:nvPicPr>
+          <p:cNvPr id="42" name="Headset-Halter Foto" descr="Violetter Headset-Halter mit schwarzem Headset"/>
+          <p:cNvPicPr>
+            <a:picLocks noChangeAspect="1"/>
+          </p:cNvPicPr>
+          <p:nvPr/>
+        </p:nvPicPr>
+        <p:blipFill>
+          <a:blip r:embed="rId14"/>
+          <a:stretch>
+            <a:fillRect/>
+          </a:stretch>
+        </p:blipFill>
+        <p:spPr>
+          <a:xfrm>
+            <a:off x="6309360" y="4562856"/>
+            <a:ext cx="755904" cy="566928"/>
+          </a:xfrm>
+          <a:prstGeom prst="roundRect">
+            <a:avLst>
+              <a:gd name="adj" fmla="val 22000"/>
+            </a:avLst>
+          </a:prstGeom>
+        </p:spPr>
+      </p:pic>
+      <p:sp>
+        <p:nvSpPr>
+          <p:cNvPr id="43" name="Headset-Halter Name"/>
+          <p:cNvSpPr txBox="1"/>
+          <p:nvPr/>
+        </p:nvSpPr>
+        <p:spPr>
+          <a:xfrm>
+            <a:off x="7205472" y="4608576"/>
+            <a:ext cx="2898648" cy="256032"/>
+          </a:xfrm>
+          <a:prstGeom prst="rect">
+            <a:avLst/>
+          </a:prstGeom>
+          <a:noFill/>
+          <a:ln/>
+        </p:spPr>
+        <p:txBody>
+          <a:bodyPr wrap="square" lIns="0" tIns="0" rIns="0" bIns="0" rtlCol="0" anchor="ctr"/>
+          <a:lstStyle/>
+          <a:p>
+            <a:pPr indent="0" marL="0">
+              <a:buNone/>
+            </a:pPr>
+            <a:r>
+              <a:rPr lang="en-US" sz="1500" b="1" dirty="0">
+                <a:solidFill>
+                  <a:schemeClr val="tx1"/>
+                </a:solidFill>
+              </a:rPr>
+              <a:t>Headset-Halter</a:t>
+            </a:r>
+            <a:endParaRPr lang="en-US" sz="1600" dirty="0"/>
+          </a:p>
+        </p:txBody>
+      </p:sp>
+      <p:sp>
+        <p:nvSpPr>
+          <p:cNvPr id="44" name="Headset-Halter Beschreibung"/>
+          <p:cNvSpPr txBox="1"/>
+          <p:nvPr/>
+        </p:nvSpPr>
+        <p:spPr>
+          <a:xfrm>
+            <a:off x="7205472" y="4864608"/>
+            <a:ext cx="2898648" cy="219456"/>
+          </a:xfrm>
+          <a:prstGeom prst="rect">
+            <a:avLst/>
+          </a:prstGeom>
+          <a:noFill/>
+          <a:ln/>
+        </p:spPr>
+        <p:txBody>
+          <a:bodyPr wrap="square" lIns="0" tIns="0" rIns="0" bIns="0" rtlCol="0" anchor="ctr"/>
+          <a:lstStyle/>
+          <a:p>
+            <a:pPr indent="0" marL="0">
+              <a:buNone/>
+            </a:pPr>
+            <a:r>
+              <a:rPr lang="en-US" sz="1200" dirty="0">
+                <a:solidFill>
+                  <a:schemeClr val="accent6"/>
+                </a:solidFill>
+              </a:rPr>
+              <a:t>mit graviertem Gamertag</a:t>
+            </a:r>
+            <a:endParaRPr lang="en-US" sz="1200" dirty="0"/>
+          </a:p>
+        </p:txBody>
+      </p:sp>
+      <p:sp>
+        <p:nvSpPr>
+          <p:cNvPr id="45" name="XXL-Mauspad Preis"/>
+          <p:cNvSpPr txBox="1"/>
+          <p:nvPr/>
+        </p:nvSpPr>
+        <p:spPr>
+          <a:xfrm>
+            <a:off x="10104120" y="1965960"/>
+            <a:ext cx="1353312" cy="566928"/>
+          </a:xfrm>
+          <a:prstGeom prst="rect">
+            <a:avLst/>
+          </a:prstGeom>
+          <a:noFill/>
+          <a:ln/>
+        </p:spPr>
+        <p:txBody>
+          <a:bodyPr wrap="square" lIns="0" tIns="0" rIns="0" bIns="0" rtlCol="0" anchor="ctr"/>
+          <a:lstStyle/>
+          <a:p>
+            <a:pPr algn="r" indent="0" marL="0">
+              <a:buNone/>
+            </a:pPr>
+            <a:r>
+              <a:rPr lang="de-DE" sz="1600" b="1" dirty="0">
+                <a:solidFill>
+                  <a:schemeClr val="accent1"/>
+                </a:solidFill>
+              </a:rPr>
+              <a:t>24,99 €</a:t>
+            </a:r>
+          </a:p>
+        </p:txBody>
+      </p:sp>
+      <p:sp>
+        <p:nvSpPr>
+          <p:cNvPr id="46" name="Controller-Skin Preis"/>
+          <p:cNvSpPr txBox="1"/>
+          <p:nvPr/>
+        </p:nvSpPr>
+        <p:spPr>
+          <a:xfrm>
+            <a:off x="10104120" y="2615184"/>
+            <a:ext cx="1353312" cy="566928"/>
+          </a:xfrm>
+          <a:prstGeom prst="rect">
+            <a:avLst/>
+          </a:prstGeom>
+          <a:noFill/>
+          <a:ln/>
+        </p:spPr>
+        <p:txBody>
+          <a:bodyPr wrap="square" lIns="0" tIns="0" rIns="0" bIns="0" rtlCol="0" anchor="ctr"/>
+          <a:lstStyle/>
+          <a:p>
+            <a:pPr algn="r" indent="0" marL="0">
+              <a:buNone/>
+            </a:pPr>
+            <a:r>
+              <a:rPr lang="de-DE" sz="1600" b="1" dirty="0">
+                <a:solidFill>
+                  <a:schemeClr val="accent1"/>
+                </a:solidFill>
+              </a:rPr>
+              <a:t>14,99 €</a:t>
+            </a:r>
+          </a:p>
+        </p:txBody>
+      </p:sp>
+      <p:sp>
+        <p:nvSpPr>
+          <p:cNvPr id="47" name="Custom Keycaps (4er-Set) Preis"/>
+          <p:cNvSpPr txBox="1"/>
+          <p:nvPr/>
+        </p:nvSpPr>
+        <p:spPr>
+          <a:xfrm>
+            <a:off x="10104120" y="3264408"/>
+            <a:ext cx="1353312" cy="566928"/>
+          </a:xfrm>
+          <a:prstGeom prst="rect">
+            <a:avLst/>
+          </a:prstGeom>
+          <a:noFill/>
+          <a:ln/>
+        </p:spPr>
+        <p:txBody>
+          <a:bodyPr wrap="square" lIns="0" tIns="0" rIns="0" bIns="0" rtlCol="0" anchor="ctr"/>
+          <a:lstStyle/>
+          <a:p>
+            <a:pPr algn="r" indent="0" marL="0">
+              <a:buNone/>
+            </a:pPr>
+            <a:r>
+              <a:rPr lang="de-DE" sz="1600" b="1" dirty="0">
+                <a:solidFill>
+                  <a:schemeClr val="accent1"/>
+                </a:solidFill>
+              </a:rPr>
+              <a:t>19,99 €</a:t>
+            </a:r>
+          </a:p>
+        </p:txBody>
+      </p:sp>
+      <p:sp>
+        <p:nvSpPr>
+          <p:cNvPr id="48" name="LED-Schild Preis"/>
+          <p:cNvSpPr txBox="1"/>
+          <p:nvPr/>
+        </p:nvSpPr>
+        <p:spPr>
+          <a:xfrm>
+            <a:off x="10104120" y="3913632"/>
+            <a:ext cx="1353312" cy="566928"/>
+          </a:xfrm>
+          <a:prstGeom prst="rect">
+            <a:avLst/>
+          </a:prstGeom>
+          <a:noFill/>
+          <a:ln/>
+        </p:spPr>
+        <p:txBody>
+          <a:bodyPr wrap="square" lIns="0" tIns="0" rIns="0" bIns="0" rtlCol="0" anchor="ctr"/>
+          <a:lstStyle/>
+          <a:p>
+            <a:pPr algn="r" indent="0" marL="0">
+              <a:buNone/>
+            </a:pPr>
+            <a:r>
+              <a:rPr lang="de-DE" sz="1600" b="1" dirty="0">
+                <a:solidFill>
+                  <a:schemeClr val="accent1"/>
+                </a:solidFill>
+              </a:rPr>
+              <a:t>49,99 €</a:t>
+            </a:r>
+          </a:p>
+        </p:txBody>
+      </p:sp>
+      <p:sp>
+        <p:nvSpPr>
+          <p:cNvPr id="49" name="Headset-Halter Preis"/>
+          <p:cNvSpPr txBox="1"/>
+          <p:nvPr/>
+        </p:nvSpPr>
+        <p:spPr>
+          <a:xfrm>
+            <a:off x="10104120" y="4562856"/>
+            <a:ext cx="1353312" cy="566928"/>
+          </a:xfrm>
+          <a:prstGeom prst="rect">
+            <a:avLst/>
+          </a:prstGeom>
+          <a:noFill/>
+          <a:ln/>
+        </p:spPr>
+        <p:txBody>
+          <a:bodyPr wrap="square" lIns="0" tIns="0" rIns="0" bIns="0" rtlCol="0" anchor="ctr"/>
+          <a:lstStyle/>
+          <a:p>
+            <a:pPr algn="r" indent="0" marL="0">
+              <a:buNone/>
+            </a:pPr>
+            <a:r>
+              <a:rPr lang="de-DE" sz="1600" b="1" dirty="0">
+                <a:solidFill>
+                  <a:schemeClr val="accent1"/>
+                </a:solidFill>
+              </a:rPr>
+              <a:t>29,99 €</a:t>
+            </a:r>
           </a:p>
         </p:txBody>
       </p:sp>
@@ -3728,7 +4183,7 @@
                   <a:schemeClr val="tx1"/>
                 </a:solidFill>
               </a:rPr>
-              <a:t>Name und Logo</a:t>
+              <a:t>Name, Logo und Domain</a:t>
             </a:r>
             <a:endParaRPr lang="en-US" sz="3400" dirty="0"/>
           </a:p>
@@ -4076,7 +4531,7 @@
         <p:spPr>
           <a:xfrm>
             <a:off x="4846320" y="3886200"/>
-            <a:ext cx="3247492" cy="1645920"/>
+            <a:ext cx="2514600" cy="1645920"/>
           </a:xfrm>
           <a:prstGeom prst="roundRect">
             <a:avLst>
@@ -4098,7 +4553,7 @@
         <p:spPr>
           <a:xfrm>
             <a:off x="5074920" y="4069080"/>
-            <a:ext cx="2790292" cy="274320"/>
+            <a:ext cx="2057400" cy="274320"/>
           </a:xfrm>
           <a:prstGeom prst="rect">
             <a:avLst/>
@@ -4134,7 +4589,7 @@
         <p:spPr>
           <a:xfrm>
             <a:off x="5074920" y="4343400"/>
-            <a:ext cx="2790292" cy="566928"/>
+            <a:ext cx="2057400" cy="566928"/>
           </a:xfrm>
           <a:prstGeom prst="rect">
             <a:avLst/>
@@ -4170,7 +4625,7 @@
         <p:spPr>
           <a:xfrm>
             <a:off x="5074920" y="5029200"/>
-            <a:ext cx="2790292" cy="320040"/>
+            <a:ext cx="2057400" cy="411480"/>
           </a:xfrm>
           <a:prstGeom prst="rect">
             <a:avLst/>
@@ -4205,8 +4660,8 @@
         </p:nvSpPr>
         <p:spPr>
           <a:xfrm>
-            <a:off x="8395564" y="3886200"/>
-            <a:ext cx="3247492" cy="1645920"/>
+            <a:off x="7543800" y="3886200"/>
+            <a:ext cx="1600200" cy="1645920"/>
           </a:xfrm>
           <a:prstGeom prst="roundRect">
             <a:avLst>
@@ -4227,8 +4682,8 @@
         </p:nvSpPr>
         <p:spPr>
           <a:xfrm>
-            <a:off x="8624164" y="4069080"/>
-            <a:ext cx="2790292" cy="274320"/>
+            <a:off x="7744968" y="4069080"/>
+            <a:ext cx="1216152" cy="274320"/>
           </a:xfrm>
           <a:prstGeom prst="rect">
             <a:avLst/>
@@ -4263,8 +4718,8 @@
         </p:nvSpPr>
         <p:spPr>
           <a:xfrm>
-            <a:off x="8624164" y="4343400"/>
-            <a:ext cx="2790292" cy="566928"/>
+            <a:off x="7744968" y="4343400"/>
+            <a:ext cx="1216152" cy="566928"/>
           </a:xfrm>
           <a:prstGeom prst="rect">
             <a:avLst/>
@@ -4299,8 +4754,8 @@
         </p:nvSpPr>
         <p:spPr>
           <a:xfrm>
-            <a:off x="8624164" y="5029200"/>
-            <a:ext cx="2790292" cy="320040"/>
+            <a:off x="7744968" y="5029200"/>
+            <a:ext cx="1216152" cy="411480"/>
           </a:xfrm>
           <a:prstGeom prst="rect">
             <a:avLst/>
@@ -4321,7 +4776,137 @@
                   <a:schemeClr val="accent6"/>
                 </a:solidFill>
               </a:rPr>
-              <a:t>Name, unter dem Kunden uns kennen</a:t>
+              <a:t>so kennen uns die Kunden</a:t>
+            </a:r>
+            <a:endParaRPr lang="en-US" sz="1200" dirty="0"/>
+          </a:p>
+        </p:txBody>
+      </p:sp>
+      <p:sp>
+        <p:nvSpPr>
+          <p:cNvPr id="26" name="DOMAIN Karte"/>
+          <p:cNvSpPr/>
+          <p:nvPr/>
+        </p:nvSpPr>
+        <p:spPr>
+          <a:xfrm>
+            <a:off x="9326880" y="3886200"/>
+            <a:ext cx="2313432" cy="1645920"/>
+          </a:xfrm>
+          <a:prstGeom prst="roundRect">
+            <a:avLst>
+              <a:gd name="adj" fmla="val 6667"/>
+            </a:avLst>
+          </a:prstGeom>
+          <a:solidFill>
+            <a:schemeClr val="bg2"/>
+          </a:solidFill>
+          <a:ln/>
+        </p:spPr>
+      </p:sp>
+      <p:sp>
+        <p:nvSpPr>
+          <p:cNvPr id="27" name="DOMAIN Label"/>
+          <p:cNvSpPr txBox="1"/>
+          <p:nvPr/>
+        </p:nvSpPr>
+        <p:spPr>
+          <a:xfrm>
+            <a:off x="9555480" y="4069080"/>
+            <a:ext cx="1874520" cy="274320"/>
+          </a:xfrm>
+          <a:prstGeom prst="rect">
+            <a:avLst/>
+          </a:prstGeom>
+          <a:noFill/>
+          <a:ln/>
+        </p:spPr>
+        <p:txBody>
+          <a:bodyPr wrap="square" lIns="0" tIns="0" rIns="0" bIns="0" rtlCol="0" anchor="ctr"/>
+          <a:lstStyle/>
+          <a:p>
+            <a:pPr indent="0" marL="0">
+              <a:buNone/>
+            </a:pPr>
+            <a:r>
+              <a:rPr lang="en-US" sz="1200" b="1" spc="200" kern="0" dirty="0">
+                <a:solidFill>
+                  <a:schemeClr val="accent1"/>
+                </a:solidFill>
+              </a:rPr>
+              <a:t>DOMAIN</a:t>
+            </a:r>
+            <a:endParaRPr lang="en-US" sz="1200" dirty="0"/>
+          </a:p>
+        </p:txBody>
+      </p:sp>
+      <p:sp>
+        <p:nvSpPr>
+          <p:cNvPr id="28" name="DOMAIN Wert"/>
+          <p:cNvSpPr txBox="1"/>
+          <p:nvPr/>
+        </p:nvSpPr>
+        <p:spPr>
+          <a:xfrm>
+            <a:off x="9555480" y="4343400"/>
+            <a:ext cx="1874520" cy="566928"/>
+          </a:xfrm>
+          <a:prstGeom prst="rect">
+            <a:avLst/>
+          </a:prstGeom>
+          <a:noFill/>
+          <a:ln/>
+        </p:spPr>
+        <p:txBody>
+          <a:bodyPr wrap="square" lIns="0" tIns="0" rIns="0" bIns="0" rtlCol="0" anchor="t"/>
+          <a:lstStyle/>
+          <a:p>
+            <a:pPr indent="0" marL="0">
+              <a:buNone/>
+            </a:pPr>
+            <a:r>
+              <a:rPr lang="en-US" sz="1600" b="1" dirty="0">
+                <a:solidFill>
+                  <a:schemeClr val="tx1"/>
+                </a:solidFill>
+              </a:rPr>
+              <a:t>lootlager.de</a:t>
+            </a:r>
+            <a:endParaRPr lang="en-US" sz="1600" dirty="0"/>
+          </a:p>
+        </p:txBody>
+      </p:sp>
+      <p:sp>
+        <p:nvSpPr>
+          <p:cNvPr id="29" name="DOMAIN Beschreibung"/>
+          <p:cNvSpPr txBox="1"/>
+          <p:nvPr/>
+        </p:nvSpPr>
+        <p:spPr>
+          <a:xfrm>
+            <a:off x="9555480" y="5029200"/>
+            <a:ext cx="1874520" cy="411480"/>
+          </a:xfrm>
+          <a:prstGeom prst="rect">
+            <a:avLst/>
+          </a:prstGeom>
+          <a:noFill/>
+          <a:ln/>
+        </p:spPr>
+        <p:txBody>
+          <a:bodyPr wrap="square" lIns="0" tIns="0" rIns="0" bIns="0" rtlCol="0" anchor="t"/>
+          <a:lstStyle/>
+          <a:p>
+            <a:pPr indent="0" marL="0">
+              <a:buNone/>
+            </a:pPr>
+            <a:r>
+              <a:rPr lang="en-US" sz="1200" dirty="0">
+                <a:solidFill>
+                  <a:schemeClr val="accent6"/>
+                </a:solidFill>
+              </a:rPr>
+              <a:t>unsere Adresse im Internet</a:t>
             </a:r>
             <a:endParaRPr lang="en-US" sz="1200" dirty="0"/>
           </a:p>
@@ -5315,7 +5900,7 @@
                   <a:schemeClr val="tx1"/>
                 </a:solidFill>
               </a:rPr>
-              <a:t>Anbietersuche: Welches Shopsystem passt?</a:t>
+              <a:t>Anbietersuche: Womit bauen wir den Shop?</a:t>
             </a:r>
             <a:endParaRPr lang="en-US" sz="3400" dirty="0"/>
           </a:p>
@@ -5329,7 +5914,7 @@
         </p:nvSpPr>
         <p:spPr>
           <a:xfrm>
-            <a:off x="548640" y="1188720"/>
+            <a:off x="548640" y="1133856"/>
             <a:ext cx="11091672" cy="320040"/>
           </a:xfrm>
           <a:prstGeom prst="rect">
@@ -5359,23 +5944,211 @@
                   <a:schemeClr val="accent6"/>
                 </a:solidFill>
               </a:rPr>
-              <a:t>Punkte von 1 (schlecht) bis 10 (sehr gut), in Klammern gewichtet. Preise Stand Oktober 2026.</a:t>
+              <a:t>Punkte von 1 (schlecht) bis 10 (sehr gut). Summe = Punkte × Gewichtung. Preise Stand Oktober 2026.</a:t>
             </a:r>
             <a:endParaRPr lang="de-DE" sz="1400" dirty="0"/>
+          </a:p>
+        </p:txBody>
+      </p:sp>
+      <p:sp>
+        <p:nvSpPr>
+          <p:cNvPr id="10" name="Excel Namenfeld"/>
+          <p:cNvSpPr/>
+          <p:nvPr/>
+        </p:nvSpPr>
+        <p:spPr>
+          <a:xfrm>
+            <a:off x="621792" y="1522476"/>
+            <a:ext cx="566928" cy="192024"/>
+          </a:xfrm>
+          <a:prstGeom prst="rect">
+            <a:avLst/>
+          </a:prstGeom>
+          <a:solidFill>
+            <a:schemeClr val="bg1"/>
+          </a:solidFill>
+          <a:ln w="9525">
+            <a:solidFill>
+              <a:srgbClr val="D9DCE3"/>
+            </a:solidFill>
+          </a:ln>
+        </p:spPr>
+      </p:sp>
+      <p:sp>
+        <p:nvSpPr>
+          <p:cNvPr id="11" name="Excel Namenfeld Text"/>
+          <p:cNvSpPr txBox="1"/>
+          <p:nvPr/>
+        </p:nvSpPr>
+        <p:spPr>
+          <a:xfrm>
+            <a:off x="621792" y="1522476"/>
+            <a:ext cx="566928" cy="192024"/>
+          </a:xfrm>
+          <a:prstGeom prst="rect">
+            <a:avLst/>
+          </a:prstGeom>
+          <a:noFill/>
+          <a:ln/>
+        </p:spPr>
+        <p:txBody>
+          <a:bodyPr wrap="square" lIns="0" tIns="0" rIns="0" bIns="0" rtlCol="0" anchor="ctr"/>
+          <a:lstStyle/>
+          <a:p>
+            <a:pPr algn="ctr" indent="0" marL="0">
+              <a:buNone/>
+            </a:pPr>
+            <a:r>
+              <a:rPr lang="de-DE" sz="1000" dirty="0">
+                <a:solidFill>
+                  <a:schemeClr val="tx1"/>
+                </a:solidFill>
+              </a:rPr>
+              <a:t>C10</a:t>
+            </a:r>
+          </a:p>
+        </p:txBody>
+      </p:sp>
+      <p:sp>
+        <p:nvSpPr>
+          <p:cNvPr id="12" name="Excel fx"/>
+          <p:cNvSpPr txBox="1"/>
+          <p:nvPr/>
+        </p:nvSpPr>
+        <p:spPr>
+          <a:xfrm>
+            <a:off x="1298448" y="1481328"/>
+            <a:ext cx="274320" cy="274320"/>
+          </a:xfrm>
+          <a:prstGeom prst="rect">
+            <a:avLst/>
+          </a:prstGeom>
+          <a:noFill/>
+          <a:ln/>
+        </p:spPr>
+        <p:txBody>
+          <a:bodyPr wrap="square" lIns="0" tIns="0" rIns="0" bIns="0" rtlCol="0" anchor="ctr"/>
+          <a:lstStyle/>
+          <a:p>
+            <a:pPr algn="ctr" indent="0" marL="0">
+              <a:buNone/>
+            </a:pPr>
+            <a:r>
+              <a:rPr lang="de-DE" sz="1100" i="1" dirty="0">
+                <a:solidFill>
+                  <a:schemeClr val="accent6"/>
+                </a:solidFill>
+              </a:rPr>
+              <a:t>fx</a:t>
+            </a:r>
+          </a:p>
+        </p:txBody>
+      </p:sp>
+      <p:sp>
+        <p:nvSpPr>
+          <p:cNvPr id="13" name="Excel Formelfeld"/>
+          <p:cNvSpPr/>
+          <p:nvPr/>
+        </p:nvSpPr>
+        <p:spPr>
+          <a:xfrm>
+            <a:off x="1609344" y="1522476"/>
+            <a:ext cx="6035040" cy="192024"/>
+          </a:xfrm>
+          <a:prstGeom prst="rect">
+            <a:avLst/>
+          </a:prstGeom>
+          <a:solidFill>
+            <a:schemeClr val="bg1"/>
+          </a:solidFill>
+          <a:ln w="9525">
+            <a:solidFill>
+              <a:srgbClr val="D9DCE3"/>
+            </a:solidFill>
+          </a:ln>
+        </p:spPr>
+      </p:sp>
+      <p:sp>
+        <p:nvSpPr>
+          <p:cNvPr id="14" name="Excel Formel"/>
+          <p:cNvSpPr txBox="1"/>
+          <p:nvPr/>
+        </p:nvSpPr>
+        <p:spPr>
+          <a:xfrm>
+            <a:off x="1609344" y="1522476"/>
+            <a:ext cx="6035040" cy="192024"/>
+          </a:xfrm>
+          <a:prstGeom prst="rect">
+            <a:avLst/>
+          </a:prstGeom>
+          <a:noFill/>
+          <a:ln/>
+        </p:spPr>
+        <p:txBody>
+          <a:bodyPr wrap="square" lIns="73152" tIns="0" rIns="73152" bIns="0" rtlCol="0" anchor="ctr"/>
+          <a:lstStyle/>
+          <a:p>
+            <a:pPr algn="l" indent="0" marL="0">
+              <a:buNone/>
+            </a:pPr>
+            <a:r>
+              <a:rPr lang="de-DE" sz="1000" dirty="0">
+                <a:solidFill>
+                  <a:schemeClr val="tx1"/>
+                </a:solidFill>
+              </a:rPr>
+              <a:t>=SUMMENPRODUKT($B$4:$B$9;C4:C9)</a:t>
+            </a:r>
+          </a:p>
+        </p:txBody>
+      </p:sp>
+      <p:sp>
+        <p:nvSpPr>
+          <p:cNvPr id="15" name="Excel Dateiname"/>
+          <p:cNvSpPr txBox="1"/>
+          <p:nvPr/>
+        </p:nvSpPr>
+        <p:spPr>
+          <a:xfrm>
+            <a:off x="7863840" y="1481328"/>
+            <a:ext cx="3776472" cy="274320"/>
+          </a:xfrm>
+          <a:prstGeom prst="rect">
+            <a:avLst/>
+          </a:prstGeom>
+          <a:noFill/>
+          <a:ln/>
+        </p:spPr>
+        <p:txBody>
+          <a:bodyPr wrap="square" lIns="0" tIns="0" rIns="0" bIns="0" rtlCol="0" anchor="ctr"/>
+          <a:lstStyle/>
+          <a:p>
+            <a:pPr algn="r" indent="0" marL="0">
+              <a:buNone/>
+            </a:pPr>
+            <a:r>
+              <a:rPr lang="de-DE" sz="1000" b="1" dirty="0">
+                <a:solidFill>
+                  <a:schemeClr val="accent6"/>
+                </a:solidFill>
+              </a:rPr>
+              <a:t>Datei: Nutzwertanalyse.xlsx</a:t>
+            </a:r>
           </a:p>
         </p:txBody>
       </p:sp>
       <p:graphicFrame>
         <p:nvGraphicFramePr>
-          <p:cNvPr id="4" name="Nutzwertanalyse"/>
+          <p:cNvPr id="4" name="Nutzwertanalyse" descr="Nutzwertanalyse als Excel-Tabelle"/>
           <p:cNvGraphicFramePr>
             <a:graphicFrameLocks noGrp="1"/>
           </p:cNvGraphicFramePr>
           <p:nvPr/>
         </p:nvGraphicFramePr>
         <p:xfrm>
-          <a:off x="548640" y="1600200"/>
-          <a:ext cx="11091672" cy="3474720"/>
+          <a:off x="548640" y="1755648"/>
+          <a:ext cx="11000232" cy="3456432"/>
         </p:xfrm>
         <a:graphic>
           <a:graphicData uri="http://schemas.openxmlformats.org/drawingml/2006/table">
@@ -5384,20 +6157,384 @@
                 <a:tableStyleId>{5C22544A-7EE6-4342-B048-85BDC9FD1C3A}</a:tableStyleId>
               </a:tblPr>
               <a:tblGrid>
-                <a:gridCol w="3227832"/>
-                <a:gridCol w="1097280"/>
-                <a:gridCol w="1691640"/>
-                <a:gridCol w="1691640"/>
-                <a:gridCol w="1691640"/>
-                <a:gridCol w="1691640"/>
+                <a:gridCol w="420624"/>
+                <a:gridCol w="3310128"/>
+                <a:gridCol w="1344168"/>
+                <a:gridCol w="1481328"/>
+                <a:gridCol w="1481328"/>
+                <a:gridCol w="1481328"/>
+                <a:gridCol w="1481328"/>
               </a:tblGrid>
-              <a:tr h="713232">
+              <a:tr h="228600">
                 <a:tc>
                   <a:txBody>
                     <a:bodyPr/>
                     <a:lstStyle/>
                     <a:p>
-                      <a:pPr/>
+                      <a:pPr algn="ctr"/>
+                      <a:endParaRPr lang="de-DE" sz="800" dirty="0"/>
+                    </a:p>
+                  </a:txBody>
+                  <a:tcPr anchor="ctr" marL="91440" marR="91440" marT="0" marB="0">
+                    <a:lnL w="6350" cap="flat" cmpd="sng" algn="ctr">
+                      <a:solidFill>
+                        <a:srgbClr val="D9DCE3"/>
+                      </a:solidFill>
+                      <a:prstDash val="solid"/>
+                    </a:lnL>
+                    <a:lnR w="6350" cap="flat" cmpd="sng" algn="ctr">
+                      <a:solidFill>
+                        <a:srgbClr val="D9DCE3"/>
+                      </a:solidFill>
+                      <a:prstDash val="solid"/>
+                    </a:lnR>
+                    <a:lnT w="6350" cap="flat" cmpd="sng" algn="ctr">
+                      <a:solidFill>
+                        <a:srgbClr val="D9DCE3"/>
+                      </a:solidFill>
+                      <a:prstDash val="solid"/>
+                    </a:lnT>
+                    <a:lnB w="6350" cap="flat" cmpd="sng" algn="ctr">
+                      <a:solidFill>
+                        <a:srgbClr val="D9DCE3"/>
+                      </a:solidFill>
+                      <a:prstDash val="solid"/>
+                    </a:lnB>
+                    <a:solidFill>
+                      <a:srgbClr val="F3F4F6"/>
+                    </a:solidFill>
+                  </a:tcPr>
+                </a:tc>
+                <a:tc>
+                  <a:txBody>
+                    <a:bodyPr/>
+                    <a:lstStyle/>
+                    <a:p>
+                      <a:pPr algn="ctr"/>
+                      <a:r>
+                        <a:rPr lang="de-DE" sz="800" dirty="0">
+                          <a:solidFill>
+                            <a:schemeClr val="accent6"/>
+                          </a:solidFill>
+                        </a:rPr>
+                        <a:t>A</a:t>
+                      </a:r>
+                    </a:p>
+                  </a:txBody>
+                  <a:tcPr anchor="ctr" marL="91440" marR="91440" marT="0" marB="0">
+                    <a:lnL w="6350" cap="flat" cmpd="sng" algn="ctr">
+                      <a:solidFill>
+                        <a:srgbClr val="D9DCE3"/>
+                      </a:solidFill>
+                      <a:prstDash val="solid"/>
+                    </a:lnL>
+                    <a:lnR w="6350" cap="flat" cmpd="sng" algn="ctr">
+                      <a:solidFill>
+                        <a:srgbClr val="D9DCE3"/>
+                      </a:solidFill>
+                      <a:prstDash val="solid"/>
+                    </a:lnR>
+                    <a:lnT w="6350" cap="flat" cmpd="sng" algn="ctr">
+                      <a:solidFill>
+                        <a:srgbClr val="D9DCE3"/>
+                      </a:solidFill>
+                      <a:prstDash val="solid"/>
+                    </a:lnT>
+                    <a:lnB w="6350" cap="flat" cmpd="sng" algn="ctr">
+                      <a:solidFill>
+                        <a:srgbClr val="D9DCE3"/>
+                      </a:solidFill>
+                      <a:prstDash val="solid"/>
+                    </a:lnB>
+                    <a:solidFill>
+                      <a:srgbClr val="F3F4F6"/>
+                    </a:solidFill>
+                  </a:tcPr>
+                </a:tc>
+                <a:tc>
+                  <a:txBody>
+                    <a:bodyPr/>
+                    <a:lstStyle/>
+                    <a:p>
+                      <a:pPr algn="ctr"/>
+                      <a:r>
+                        <a:rPr lang="de-DE" sz="800" dirty="0">
+                          <a:solidFill>
+                            <a:schemeClr val="accent6"/>
+                          </a:solidFill>
+                        </a:rPr>
+                        <a:t>B</a:t>
+                      </a:r>
+                    </a:p>
+                  </a:txBody>
+                  <a:tcPr anchor="ctr" marL="91440" marR="91440" marT="0" marB="0">
+                    <a:lnL w="6350" cap="flat" cmpd="sng" algn="ctr">
+                      <a:solidFill>
+                        <a:srgbClr val="D9DCE3"/>
+                      </a:solidFill>
+                      <a:prstDash val="solid"/>
+                    </a:lnL>
+                    <a:lnR w="6350" cap="flat" cmpd="sng" algn="ctr">
+                      <a:solidFill>
+                        <a:srgbClr val="D9DCE3"/>
+                      </a:solidFill>
+                      <a:prstDash val="solid"/>
+                    </a:lnR>
+                    <a:lnT w="6350" cap="flat" cmpd="sng" algn="ctr">
+                      <a:solidFill>
+                        <a:srgbClr val="D9DCE3"/>
+                      </a:solidFill>
+                      <a:prstDash val="solid"/>
+                    </a:lnT>
+                    <a:lnB w="6350" cap="flat" cmpd="sng" algn="ctr">
+                      <a:solidFill>
+                        <a:srgbClr val="D9DCE3"/>
+                      </a:solidFill>
+                      <a:prstDash val="solid"/>
+                    </a:lnB>
+                    <a:solidFill>
+                      <a:srgbClr val="F3F4F6"/>
+                    </a:solidFill>
+                  </a:tcPr>
+                </a:tc>
+                <a:tc>
+                  <a:txBody>
+                    <a:bodyPr/>
+                    <a:lstStyle/>
+                    <a:p>
+                      <a:pPr algn="ctr"/>
+                      <a:r>
+                        <a:rPr lang="de-DE" sz="800" dirty="0">
+                          <a:solidFill>
+                            <a:schemeClr val="accent6"/>
+                          </a:solidFill>
+                        </a:rPr>
+                        <a:t>C</a:t>
+                      </a:r>
+                    </a:p>
+                  </a:txBody>
+                  <a:tcPr anchor="ctr" marL="91440" marR="91440" marT="0" marB="0">
+                    <a:lnL w="6350" cap="flat" cmpd="sng" algn="ctr">
+                      <a:solidFill>
+                        <a:srgbClr val="D9DCE3"/>
+                      </a:solidFill>
+                      <a:prstDash val="solid"/>
+                    </a:lnL>
+                    <a:lnR w="6350" cap="flat" cmpd="sng" algn="ctr">
+                      <a:solidFill>
+                        <a:srgbClr val="D9DCE3"/>
+                      </a:solidFill>
+                      <a:prstDash val="solid"/>
+                    </a:lnR>
+                    <a:lnT w="6350" cap="flat" cmpd="sng" algn="ctr">
+                      <a:solidFill>
+                        <a:srgbClr val="D9DCE3"/>
+                      </a:solidFill>
+                      <a:prstDash val="solid"/>
+                    </a:lnT>
+                    <a:lnB w="6350" cap="flat" cmpd="sng" algn="ctr">
+                      <a:solidFill>
+                        <a:srgbClr val="D9DCE3"/>
+                      </a:solidFill>
+                      <a:prstDash val="solid"/>
+                    </a:lnB>
+                    <a:solidFill>
+                      <a:srgbClr val="F3F4F6"/>
+                    </a:solidFill>
+                  </a:tcPr>
+                </a:tc>
+                <a:tc>
+                  <a:txBody>
+                    <a:bodyPr/>
+                    <a:lstStyle/>
+                    <a:p>
+                      <a:pPr algn="ctr"/>
+                      <a:r>
+                        <a:rPr lang="de-DE" sz="800" dirty="0">
+                          <a:solidFill>
+                            <a:schemeClr val="accent6"/>
+                          </a:solidFill>
+                        </a:rPr>
+                        <a:t>D</a:t>
+                      </a:r>
+                    </a:p>
+                  </a:txBody>
+                  <a:tcPr anchor="ctr" marL="91440" marR="91440" marT="0" marB="0">
+                    <a:lnL w="6350" cap="flat" cmpd="sng" algn="ctr">
+                      <a:solidFill>
+                        <a:srgbClr val="D9DCE3"/>
+                      </a:solidFill>
+                      <a:prstDash val="solid"/>
+                    </a:lnL>
+                    <a:lnR w="6350" cap="flat" cmpd="sng" algn="ctr">
+                      <a:solidFill>
+                        <a:srgbClr val="D9DCE3"/>
+                      </a:solidFill>
+                      <a:prstDash val="solid"/>
+                    </a:lnR>
+                    <a:lnT w="6350" cap="flat" cmpd="sng" algn="ctr">
+                      <a:solidFill>
+                        <a:srgbClr val="D9DCE3"/>
+                      </a:solidFill>
+                      <a:prstDash val="solid"/>
+                    </a:lnT>
+                    <a:lnB w="6350" cap="flat" cmpd="sng" algn="ctr">
+                      <a:solidFill>
+                        <a:srgbClr val="D9DCE3"/>
+                      </a:solidFill>
+                      <a:prstDash val="solid"/>
+                    </a:lnB>
+                    <a:solidFill>
+                      <a:srgbClr val="F3F4F6"/>
+                    </a:solidFill>
+                  </a:tcPr>
+                </a:tc>
+                <a:tc>
+                  <a:txBody>
+                    <a:bodyPr/>
+                    <a:lstStyle/>
+                    <a:p>
+                      <a:pPr algn="ctr"/>
+                      <a:r>
+                        <a:rPr lang="de-DE" sz="800" dirty="0">
+                          <a:solidFill>
+                            <a:schemeClr val="accent6"/>
+                          </a:solidFill>
+                        </a:rPr>
+                        <a:t>E</a:t>
+                      </a:r>
+                    </a:p>
+                  </a:txBody>
+                  <a:tcPr anchor="ctr" marL="91440" marR="91440" marT="0" marB="0">
+                    <a:lnL w="6350" cap="flat" cmpd="sng" algn="ctr">
+                      <a:solidFill>
+                        <a:srgbClr val="D9DCE3"/>
+                      </a:solidFill>
+                      <a:prstDash val="solid"/>
+                    </a:lnL>
+                    <a:lnR w="6350" cap="flat" cmpd="sng" algn="ctr">
+                      <a:solidFill>
+                        <a:srgbClr val="D9DCE3"/>
+                      </a:solidFill>
+                      <a:prstDash val="solid"/>
+                    </a:lnR>
+                    <a:lnT w="6350" cap="flat" cmpd="sng" algn="ctr">
+                      <a:solidFill>
+                        <a:srgbClr val="D9DCE3"/>
+                      </a:solidFill>
+                      <a:prstDash val="solid"/>
+                    </a:lnT>
+                    <a:lnB w="6350" cap="flat" cmpd="sng" algn="ctr">
+                      <a:solidFill>
+                        <a:srgbClr val="D9DCE3"/>
+                      </a:solidFill>
+                      <a:prstDash val="solid"/>
+                    </a:lnB>
+                    <a:solidFill>
+                      <a:srgbClr val="F3F4F6"/>
+                    </a:solidFill>
+                  </a:tcPr>
+                </a:tc>
+                <a:tc>
+                  <a:txBody>
+                    <a:bodyPr/>
+                    <a:lstStyle/>
+                    <a:p>
+                      <a:pPr algn="ctr"/>
+                      <a:r>
+                        <a:rPr lang="de-DE" sz="800" dirty="0">
+                          <a:solidFill>
+                            <a:schemeClr val="accent6"/>
+                          </a:solidFill>
+                        </a:rPr>
+                        <a:t>F</a:t>
+                      </a:r>
+                    </a:p>
+                  </a:txBody>
+                  <a:tcPr anchor="ctr" marL="91440" marR="91440" marT="0" marB="0">
+                    <a:lnL w="6350" cap="flat" cmpd="sng" algn="ctr">
+                      <a:solidFill>
+                        <a:srgbClr val="D9DCE3"/>
+                      </a:solidFill>
+                      <a:prstDash val="solid"/>
+                    </a:lnL>
+                    <a:lnR w="6350" cap="flat" cmpd="sng" algn="ctr">
+                      <a:solidFill>
+                        <a:srgbClr val="D9DCE3"/>
+                      </a:solidFill>
+                      <a:prstDash val="solid"/>
+                    </a:lnR>
+                    <a:lnT w="6350" cap="flat" cmpd="sng" algn="ctr">
+                      <a:solidFill>
+                        <a:srgbClr val="D9DCE3"/>
+                      </a:solidFill>
+                      <a:prstDash val="solid"/>
+                    </a:lnT>
+                    <a:lnB w="6350" cap="flat" cmpd="sng" algn="ctr">
+                      <a:solidFill>
+                        <a:srgbClr val="D9DCE3"/>
+                      </a:solidFill>
+                      <a:prstDash val="solid"/>
+                    </a:lnB>
+                    <a:solidFill>
+                      <a:srgbClr val="F3F4F6"/>
+                    </a:solidFill>
+                  </a:tcPr>
+                </a:tc>
+              </a:tr>
+              <a:tr h="329184">
+                <a:tc>
+                  <a:txBody>
+                    <a:bodyPr/>
+                    <a:lstStyle/>
+                    <a:p>
+                      <a:pPr algn="ctr"/>
+                      <a:r>
+                        <a:rPr lang="de-DE" sz="800" dirty="0">
+                          <a:solidFill>
+                            <a:schemeClr val="accent6"/>
+                          </a:solidFill>
+                        </a:rPr>
+                        <a:t>1</a:t>
+                      </a:r>
+                    </a:p>
+                  </a:txBody>
+                  <a:tcPr anchor="ctr" marL="91440" marR="91440" marT="0" marB="0">
+                    <a:lnL w="6350" cap="flat" cmpd="sng" algn="ctr">
+                      <a:solidFill>
+                        <a:srgbClr val="D9DCE3"/>
+                      </a:solidFill>
+                      <a:prstDash val="solid"/>
+                    </a:lnL>
+                    <a:lnR w="6350" cap="flat" cmpd="sng" algn="ctr">
+                      <a:solidFill>
+                        <a:srgbClr val="D9DCE3"/>
+                      </a:solidFill>
+                      <a:prstDash val="solid"/>
+                    </a:lnR>
+                    <a:lnT w="6350" cap="flat" cmpd="sng" algn="ctr">
+                      <a:solidFill>
+                        <a:srgbClr val="D9DCE3"/>
+                      </a:solidFill>
+                      <a:prstDash val="solid"/>
+                    </a:lnT>
+                    <a:lnB w="6350" cap="flat" cmpd="sng" algn="ctr">
+                      <a:solidFill>
+                        <a:srgbClr val="D9DCE3"/>
+                      </a:solidFill>
+                      <a:prstDash val="solid"/>
+                    </a:lnB>
+                    <a:solidFill>
+                      <a:srgbClr val="F3F4F6"/>
+                    </a:solidFill>
+                  </a:tcPr>
+                </a:tc>
+                <a:tc>
+                  <a:txBody>
+                    <a:bodyPr/>
+                    <a:lstStyle/>
+                    <a:p>
+                      <a:pPr algn="l"/>
                       <a:r>
                         <a:rPr lang="de-DE" sz="1400" b="1" dirty="0">
                           <a:solidFill>
@@ -5409,17 +6546,29 @@
                     </a:p>
                   </a:txBody>
                   <a:tcPr anchor="ctr" marL="91440" marR="91440" marT="27432" marB="27432">
-                    <a:lnL w="0">
-                      <a:noFill/>
+                    <a:lnL w="6350" cap="flat" cmpd="sng" algn="ctr">
+                      <a:solidFill>
+                        <a:srgbClr val="D9DCE3"/>
+                      </a:solidFill>
+                      <a:prstDash val="solid"/>
                     </a:lnL>
-                    <a:lnR w="0">
-                      <a:noFill/>
+                    <a:lnR w="6350" cap="flat" cmpd="sng" algn="ctr">
+                      <a:solidFill>
+                        <a:srgbClr val="D9DCE3"/>
+                      </a:solidFill>
+                      <a:prstDash val="solid"/>
                     </a:lnR>
-                    <a:lnT w="0">
-                      <a:noFill/>
+                    <a:lnT w="6350" cap="flat" cmpd="sng" algn="ctr">
+                      <a:solidFill>
+                        <a:srgbClr val="D9DCE3"/>
+                      </a:solidFill>
+                      <a:prstDash val="solid"/>
                     </a:lnT>
-                    <a:lnB w="0">
-                      <a:noFill/>
+                    <a:lnB w="6350" cap="flat" cmpd="sng" algn="ctr">
+                      <a:solidFill>
+                        <a:srgbClr val="D9DCE3"/>
+                      </a:solidFill>
+                      <a:prstDash val="solid"/>
                     </a:lnB>
                     <a:solidFill>
                       <a:schemeClr val="bg2"/>
@@ -5443,17 +6592,29 @@
                     </a:p>
                   </a:txBody>
                   <a:tcPr anchor="ctr" marL="91440" marR="91440" marT="27432" marB="27432">
-                    <a:lnL w="0">
-                      <a:noFill/>
+                    <a:lnL w="6350" cap="flat" cmpd="sng" algn="ctr">
+                      <a:solidFill>
+                        <a:srgbClr val="D9DCE3"/>
+                      </a:solidFill>
+                      <a:prstDash val="solid"/>
                     </a:lnL>
-                    <a:lnR w="0">
-                      <a:noFill/>
+                    <a:lnR w="6350" cap="flat" cmpd="sng" algn="ctr">
+                      <a:solidFill>
+                        <a:srgbClr val="D9DCE3"/>
+                      </a:solidFill>
+                      <a:prstDash val="solid"/>
                     </a:lnR>
-                    <a:lnT w="0">
-                      <a:noFill/>
+                    <a:lnT w="6350" cap="flat" cmpd="sng" algn="ctr">
+                      <a:solidFill>
+                        <a:srgbClr val="D9DCE3"/>
+                      </a:solidFill>
+                      <a:prstDash val="solid"/>
                     </a:lnT>
-                    <a:lnB w="0">
-                      <a:noFill/>
+                    <a:lnB w="6350" cap="flat" cmpd="sng" algn="ctr">
+                      <a:solidFill>
+                        <a:srgbClr val="D9DCE3"/>
+                      </a:solidFill>
+                      <a:prstDash val="solid"/>
                     </a:lnB>
                     <a:solidFill>
                       <a:schemeClr val="bg2"/>
@@ -5467,49 +6628,39 @@
                     <a:p>
                       <a:pPr algn="ctr"/>
                       <a:r>
-                        <a:rPr lang="de-DE" sz="1500" b="1" dirty="0">
+                        <a:rPr lang="de-DE" sz="1400" b="1" dirty="0">
                           <a:solidFill>
                             <a:schemeClr val="bg1"/>
                           </a:solidFill>
                         </a:rPr>
-                        <a:t>Shopify</a:t>
-                      </a:r>
-                    </a:p>
-                    <a:p>
-                      <a:pPr algn="ctr"/>
-                      <a:r>
-                        <a:rPr lang="de-DE" sz="1000" dirty="0">
-                          <a:solidFill>
-                            <a:schemeClr val="accent5"/>
-                          </a:solidFill>
-                        </a:rPr>
-                        <a:t>Mietshop (SaaS)</a:t>
-                      </a:r>
-                    </a:p>
-                    <a:p>
-                      <a:pPr algn="ctr"/>
-                      <a:r>
-                        <a:rPr lang="de-DE" sz="1000" dirty="0">
-                          <a:solidFill>
-                            <a:schemeClr val="accent5"/>
-                          </a:solidFill>
-                        </a:rPr>
-                        <a:t>ab 25 € im Monat</a:t>
+                        <a:t>Netlify</a:t>
                       </a:r>
                     </a:p>
                   </a:txBody>
                   <a:tcPr anchor="ctr" marL="91440" marR="91440" marT="27432" marB="27432">
-                    <a:lnL w="0">
-                      <a:noFill/>
+                    <a:lnL w="6350" cap="flat" cmpd="sng" algn="ctr">
+                      <a:solidFill>
+                        <a:srgbClr val="D9DCE3"/>
+                      </a:solidFill>
+                      <a:prstDash val="solid"/>
                     </a:lnL>
-                    <a:lnR w="0">
-                      <a:noFill/>
+                    <a:lnR w="6350" cap="flat" cmpd="sng" algn="ctr">
+                      <a:solidFill>
+                        <a:srgbClr val="D9DCE3"/>
+                      </a:solidFill>
+                      <a:prstDash val="solid"/>
                     </a:lnR>
-                    <a:lnT w="0">
-                      <a:noFill/>
+                    <a:lnT w="6350" cap="flat" cmpd="sng" algn="ctr">
+                      <a:solidFill>
+                        <a:srgbClr val="D9DCE3"/>
+                      </a:solidFill>
+                      <a:prstDash val="solid"/>
                     </a:lnT>
-                    <a:lnB w="0">
-                      <a:noFill/>
+                    <a:lnB w="6350" cap="flat" cmpd="sng" algn="ctr">
+                      <a:solidFill>
+                        <a:srgbClr val="D9DCE3"/>
+                      </a:solidFill>
+                      <a:prstDash val="solid"/>
                     </a:lnB>
                     <a:solidFill>
                       <a:schemeClr val="accent1"/>
@@ -5523,49 +6674,39 @@
                     <a:p>
                       <a:pPr algn="ctr"/>
                       <a:r>
-                        <a:rPr lang="de-DE" sz="1500" b="1" dirty="0">
+                        <a:rPr lang="de-DE" sz="1400" b="1" dirty="0">
                           <a:solidFill>
                             <a:schemeClr val="tx1"/>
                           </a:solidFill>
                         </a:rPr>
-                        <a:t>Jimdo</a:t>
-                      </a:r>
-                    </a:p>
-                    <a:p>
-                      <a:pPr algn="ctr"/>
-                      <a:r>
-                        <a:rPr lang="de-DE" sz="1000" dirty="0">
-                          <a:solidFill>
-                            <a:schemeClr val="accent6"/>
-                          </a:solidFill>
-                        </a:rPr>
-                        <a:t>Homepage-Baukasten</a:t>
-                      </a:r>
-                    </a:p>
-                    <a:p>
-                      <a:pPr algn="ctr"/>
-                      <a:r>
-                        <a:rPr lang="de-DE" sz="1000" dirty="0">
-                          <a:solidFill>
-                            <a:schemeClr val="accent6"/>
-                          </a:solidFill>
-                        </a:rPr>
-                        <a:t>ab 18 € im Monat</a:t>
+                        <a:t>Claude Code</a:t>
                       </a:r>
                     </a:p>
                   </a:txBody>
                   <a:tcPr anchor="ctr" marL="91440" marR="91440" marT="27432" marB="27432">
-                    <a:lnL w="0">
-                      <a:noFill/>
+                    <a:lnL w="6350" cap="flat" cmpd="sng" algn="ctr">
+                      <a:solidFill>
+                        <a:srgbClr val="D9DCE3"/>
+                      </a:solidFill>
+                      <a:prstDash val="solid"/>
                     </a:lnL>
-                    <a:lnR w="0">
-                      <a:noFill/>
+                    <a:lnR w="6350" cap="flat" cmpd="sng" algn="ctr">
+                      <a:solidFill>
+                        <a:srgbClr val="D9DCE3"/>
+                      </a:solidFill>
+                      <a:prstDash val="solid"/>
                     </a:lnR>
-                    <a:lnT w="0">
-                      <a:noFill/>
+                    <a:lnT w="6350" cap="flat" cmpd="sng" algn="ctr">
+                      <a:solidFill>
+                        <a:srgbClr val="D9DCE3"/>
+                      </a:solidFill>
+                      <a:prstDash val="solid"/>
                     </a:lnT>
-                    <a:lnB w="0">
-                      <a:noFill/>
+                    <a:lnB w="6350" cap="flat" cmpd="sng" algn="ctr">
+                      <a:solidFill>
+                        <a:srgbClr val="D9DCE3"/>
+                      </a:solidFill>
+                      <a:prstDash val="solid"/>
                     </a:lnB>
                     <a:solidFill>
                       <a:schemeClr val="bg2"/>
@@ -5579,49 +6720,39 @@
                     <a:p>
                       <a:pPr algn="ctr"/>
                       <a:r>
-                        <a:rPr lang="de-DE" sz="1500" b="1" dirty="0">
+                        <a:rPr lang="de-DE" sz="1400" b="1" dirty="0">
                           <a:solidFill>
                             <a:schemeClr val="tx1"/>
                           </a:solidFill>
                         </a:rPr>
-                        <a:t>WooCommerce</a:t>
-                      </a:r>
-                    </a:p>
-                    <a:p>
-                      <a:pPr algn="ctr"/>
-                      <a:r>
-                        <a:rPr lang="de-DE" sz="1000" dirty="0">
-                          <a:solidFill>
-                            <a:schemeClr val="accent6"/>
-                          </a:solidFill>
-                        </a:rPr>
-                        <a:t>WordPress-Plugin</a:t>
-                      </a:r>
-                    </a:p>
-                    <a:p>
-                      <a:pPr algn="ctr"/>
-                      <a:r>
-                        <a:rPr lang="de-DE" sz="1000" dirty="0">
-                          <a:solidFill>
-                            <a:schemeClr val="accent6"/>
-                          </a:solidFill>
-                        </a:rPr>
-                        <a:t>ca. 30 € im Monat*</a:t>
+                        <a:t>Shopify</a:t>
                       </a:r>
                     </a:p>
                   </a:txBody>
                   <a:tcPr anchor="ctr" marL="91440" marR="91440" marT="27432" marB="27432">
-                    <a:lnL w="0">
-                      <a:noFill/>
+                    <a:lnL w="6350" cap="flat" cmpd="sng" algn="ctr">
+                      <a:solidFill>
+                        <a:srgbClr val="D9DCE3"/>
+                      </a:solidFill>
+                      <a:prstDash val="solid"/>
                     </a:lnL>
-                    <a:lnR w="0">
-                      <a:noFill/>
+                    <a:lnR w="6350" cap="flat" cmpd="sng" algn="ctr">
+                      <a:solidFill>
+                        <a:srgbClr val="D9DCE3"/>
+                      </a:solidFill>
+                      <a:prstDash val="solid"/>
                     </a:lnR>
-                    <a:lnT w="0">
-                      <a:noFill/>
+                    <a:lnT w="6350" cap="flat" cmpd="sng" algn="ctr">
+                      <a:solidFill>
+                        <a:srgbClr val="D9DCE3"/>
+                      </a:solidFill>
+                      <a:prstDash val="solid"/>
                     </a:lnT>
-                    <a:lnB w="0">
-                      <a:noFill/>
+                    <a:lnB w="6350" cap="flat" cmpd="sng" algn="ctr">
+                      <a:solidFill>
+                        <a:srgbClr val="D9DCE3"/>
+                      </a:solidFill>
+                      <a:prstDash val="solid"/>
                     </a:lnB>
                     <a:solidFill>
                       <a:schemeClr val="bg2"/>
@@ -5635,49 +6766,39 @@
                     <a:p>
                       <a:pPr algn="ctr"/>
                       <a:r>
-                        <a:rPr lang="de-DE" sz="1500" b="1" dirty="0">
+                        <a:rPr lang="de-DE" sz="1400" b="1" dirty="0">
                           <a:solidFill>
                             <a:schemeClr val="tx1"/>
                           </a:solidFill>
                         </a:rPr>
-                        <a:t>Shopware 6</a:t>
-                      </a:r>
-                    </a:p>
-                    <a:p>
-                      <a:pPr algn="ctr"/>
-                      <a:r>
-                        <a:rPr lang="de-DE" sz="1000" dirty="0">
-                          <a:solidFill>
-                            <a:schemeClr val="accent6"/>
-                          </a:solidFill>
-                        </a:rPr>
-                        <a:t>Open Source</a:t>
-                      </a:r>
-                    </a:p>
-                    <a:p>
-                      <a:pPr algn="ctr"/>
-                      <a:r>
-                        <a:rPr lang="de-DE" sz="1000" dirty="0">
-                          <a:solidFill>
-                            <a:schemeClr val="accent6"/>
-                          </a:solidFill>
-                        </a:rPr>
-                        <a:t>ca. 30 € im Monat*</a:t>
+                        <a:t>Jimdo</a:t>
                       </a:r>
                     </a:p>
                   </a:txBody>
                   <a:tcPr anchor="ctr" marL="91440" marR="91440" marT="27432" marB="27432">
-                    <a:lnL w="0">
-                      <a:noFill/>
+                    <a:lnL w="6350" cap="flat" cmpd="sng" algn="ctr">
+                      <a:solidFill>
+                        <a:srgbClr val="D9DCE3"/>
+                      </a:solidFill>
+                      <a:prstDash val="solid"/>
                     </a:lnL>
-                    <a:lnR w="0">
-                      <a:noFill/>
+                    <a:lnR w="6350" cap="flat" cmpd="sng" algn="ctr">
+                      <a:solidFill>
+                        <a:srgbClr val="D9DCE3"/>
+                      </a:solidFill>
+                      <a:prstDash val="solid"/>
                     </a:lnR>
-                    <a:lnT w="0">
-                      <a:noFill/>
+                    <a:lnT w="6350" cap="flat" cmpd="sng" algn="ctr">
+                      <a:solidFill>
+                        <a:srgbClr val="D9DCE3"/>
+                      </a:solidFill>
+                      <a:prstDash val="solid"/>
                     </a:lnT>
-                    <a:lnB w="0">
-                      <a:noFill/>
+                    <a:lnB w="6350" cap="flat" cmpd="sng" algn="ctr">
+                      <a:solidFill>
+                        <a:srgbClr val="D9DCE3"/>
+                      </a:solidFill>
+                      <a:prstDash val="solid"/>
                     </a:lnB>
                     <a:solidFill>
                       <a:schemeClr val="bg2"/>
@@ -5685,36 +6806,130 @@
                   </a:tcPr>
                 </a:tc>
               </a:tr>
-              <a:tr h="384048">
+              <a:tr h="278892">
                 <a:tc>
                   <a:txBody>
                     <a:bodyPr/>
                     <a:lstStyle/>
                     <a:p>
-                      <a:pPr/>
+                      <a:pPr algn="ctr"/>
                       <a:r>
-                        <a:rPr lang="de-DE" sz="1300" dirty="0">
+                        <a:rPr lang="de-DE" sz="800" dirty="0">
                           <a:solidFill>
-                            <a:schemeClr val="tx1"/>
+                            <a:schemeClr val="accent6"/>
                           </a:solidFill>
                         </a:rPr>
-                        <a:t>Kosten (Start + monatlich)</a:t>
+                        <a:t>2</a:t>
                       </a:r>
                     </a:p>
                   </a:txBody>
-                  <a:tcPr anchor="ctr" marL="91440" marR="91440" marT="27432" marB="27432">
-                    <a:lnL w="0">
-                      <a:noFill/>
+                  <a:tcPr anchor="ctr" marL="91440" marR="91440" marT="0" marB="0">
+                    <a:lnL w="6350" cap="flat" cmpd="sng" algn="ctr">
+                      <a:solidFill>
+                        <a:srgbClr val="D9DCE3"/>
+                      </a:solidFill>
+                      <a:prstDash val="solid"/>
                     </a:lnL>
-                    <a:lnR w="0">
-                      <a:noFill/>
+                    <a:lnR w="6350" cap="flat" cmpd="sng" algn="ctr">
+                      <a:solidFill>
+                        <a:srgbClr val="D9DCE3"/>
+                      </a:solidFill>
+                      <a:prstDash val="solid"/>
                     </a:lnR>
-                    <a:lnT w="0">
-                      <a:noFill/>
+                    <a:lnT w="6350" cap="flat" cmpd="sng" algn="ctr">
+                      <a:solidFill>
+                        <a:srgbClr val="D9DCE3"/>
+                      </a:solidFill>
+                      <a:prstDash val="solid"/>
                     </a:lnT>
-                    <a:lnB w="9525" cap="flat" cmpd="sng" algn="ctr">
-                      <a:solidFill>
-                        <a:srgbClr val="E5E0F5"/>
+                    <a:lnB w="6350" cap="flat" cmpd="sng" algn="ctr">
+                      <a:solidFill>
+                        <a:srgbClr val="D9DCE3"/>
+                      </a:solidFill>
+                      <a:prstDash val="solid"/>
+                    </a:lnB>
+                    <a:solidFill>
+                      <a:srgbClr val="F3F4F6"/>
+                    </a:solidFill>
+                  </a:tcPr>
+                </a:tc>
+                <a:tc>
+                  <a:txBody>
+                    <a:bodyPr/>
+                    <a:lstStyle/>
+                    <a:p>
+                      <a:pPr algn="l"/>
+                      <a:r>
+                        <a:rPr lang="de-DE" sz="1000" dirty="0">
+                          <a:solidFill>
+                            <a:schemeClr val="accent6"/>
+                          </a:solidFill>
+                        </a:rPr>
+                        <a:t>Art</a:t>
+                      </a:r>
+                    </a:p>
+                  </a:txBody>
+                  <a:tcPr anchor="ctr" marL="91440" marR="91440" marT="0" marB="0">
+                    <a:lnL w="6350" cap="flat" cmpd="sng" algn="ctr">
+                      <a:solidFill>
+                        <a:srgbClr val="D9DCE3"/>
+                      </a:solidFill>
+                      <a:prstDash val="solid"/>
+                    </a:lnL>
+                    <a:lnR w="6350" cap="flat" cmpd="sng" algn="ctr">
+                      <a:solidFill>
+                        <a:srgbClr val="D9DCE3"/>
+                      </a:solidFill>
+                      <a:prstDash val="solid"/>
+                    </a:lnR>
+                    <a:lnT w="6350" cap="flat" cmpd="sng" algn="ctr">
+                      <a:solidFill>
+                        <a:srgbClr val="D9DCE3"/>
+                      </a:solidFill>
+                      <a:prstDash val="solid"/>
+                    </a:lnT>
+                    <a:lnB w="6350" cap="flat" cmpd="sng" algn="ctr">
+                      <a:solidFill>
+                        <a:srgbClr val="D9DCE3"/>
+                      </a:solidFill>
+                      <a:prstDash val="solid"/>
+                    </a:lnB>
+                    <a:solidFill>
+                      <a:schemeClr val="bg1"/>
+                    </a:solidFill>
+                  </a:tcPr>
+                </a:tc>
+                <a:tc>
+                  <a:txBody>
+                    <a:bodyPr/>
+                    <a:lstStyle/>
+                    <a:p>
+                      <a:pPr algn="ctr"/>
+                      <a:endParaRPr lang="de-DE" sz="1000" dirty="0"/>
+                    </a:p>
+                  </a:txBody>
+                  <a:tcPr anchor="ctr" marL="91440" marR="91440" marT="0" marB="0">
+                    <a:lnL w="6350" cap="flat" cmpd="sng" algn="ctr">
+                      <a:solidFill>
+                        <a:srgbClr val="D9DCE3"/>
+                      </a:solidFill>
+                      <a:prstDash val="solid"/>
+                    </a:lnL>
+                    <a:lnR w="6350" cap="flat" cmpd="sng" algn="ctr">
+                      <a:solidFill>
+                        <a:srgbClr val="D9DCE3"/>
+                      </a:solidFill>
+                      <a:prstDash val="solid"/>
+                    </a:lnR>
+                    <a:lnT w="6350" cap="flat" cmpd="sng" algn="ctr">
+                      <a:solidFill>
+                        <a:srgbClr val="D9DCE3"/>
+                      </a:solidFill>
+                      <a:prstDash val="solid"/>
+                    </a:lnT>
+                    <a:lnB w="6350" cap="flat" cmpd="sng" algn="ctr">
+                      <a:solidFill>
+                        <a:srgbClr val="D9DCE3"/>
                       </a:solidFill>
                       <a:prstDash val="solid"/>
                     </a:lnB>
@@ -5730,7 +6945,602 @@
                     <a:p>
                       <a:pPr algn="ctr"/>
                       <a:r>
-                        <a:rPr lang="de-DE" sz="1300" b="1" dirty="0">
+                        <a:rPr lang="de-DE" sz="1000" dirty="0">
+                          <a:solidFill>
+                            <a:schemeClr val="dk2"/>
+                          </a:solidFill>
+                        </a:rPr>
+                        <a:t>Hosting</a:t>
+                      </a:r>
+                    </a:p>
+                  </a:txBody>
+                  <a:tcPr anchor="ctr" marL="91440" marR="91440" marT="0" marB="0">
+                    <a:lnL w="6350" cap="flat" cmpd="sng" algn="ctr">
+                      <a:solidFill>
+                        <a:srgbClr val="D9DCE3"/>
+                      </a:solidFill>
+                      <a:prstDash val="solid"/>
+                    </a:lnL>
+                    <a:lnR w="6350" cap="flat" cmpd="sng" algn="ctr">
+                      <a:solidFill>
+                        <a:srgbClr val="D9DCE3"/>
+                      </a:solidFill>
+                      <a:prstDash val="solid"/>
+                    </a:lnR>
+                    <a:lnT w="6350" cap="flat" cmpd="sng" algn="ctr">
+                      <a:solidFill>
+                        <a:srgbClr val="D9DCE3"/>
+                      </a:solidFill>
+                      <a:prstDash val="solid"/>
+                    </a:lnT>
+                    <a:lnB w="6350" cap="flat" cmpd="sng" algn="ctr">
+                      <a:solidFill>
+                        <a:srgbClr val="D9DCE3"/>
+                      </a:solidFill>
+                      <a:prstDash val="solid"/>
+                    </a:lnB>
+                    <a:solidFill>
+                      <a:srgbClr val="EDE7FF"/>
+                    </a:solidFill>
+                  </a:tcPr>
+                </a:tc>
+                <a:tc>
+                  <a:txBody>
+                    <a:bodyPr/>
+                    <a:lstStyle/>
+                    <a:p>
+                      <a:pPr algn="ctr"/>
+                      <a:r>
+                        <a:rPr lang="de-DE" sz="1000" dirty="0">
+                          <a:solidFill>
+                            <a:schemeClr val="accent6"/>
+                          </a:solidFill>
+                        </a:rPr>
+                        <a:t>KI-Programmierer</a:t>
+                      </a:r>
+                    </a:p>
+                  </a:txBody>
+                  <a:tcPr anchor="ctr" marL="91440" marR="91440" marT="0" marB="0">
+                    <a:lnL w="6350" cap="flat" cmpd="sng" algn="ctr">
+                      <a:solidFill>
+                        <a:srgbClr val="D9DCE3"/>
+                      </a:solidFill>
+                      <a:prstDash val="solid"/>
+                    </a:lnL>
+                    <a:lnR w="6350" cap="flat" cmpd="sng" algn="ctr">
+                      <a:solidFill>
+                        <a:srgbClr val="D9DCE3"/>
+                      </a:solidFill>
+                      <a:prstDash val="solid"/>
+                    </a:lnR>
+                    <a:lnT w="6350" cap="flat" cmpd="sng" algn="ctr">
+                      <a:solidFill>
+                        <a:srgbClr val="D9DCE3"/>
+                      </a:solidFill>
+                      <a:prstDash val="solid"/>
+                    </a:lnT>
+                    <a:lnB w="6350" cap="flat" cmpd="sng" algn="ctr">
+                      <a:solidFill>
+                        <a:srgbClr val="D9DCE3"/>
+                      </a:solidFill>
+                      <a:prstDash val="solid"/>
+                    </a:lnB>
+                    <a:solidFill>
+                      <a:schemeClr val="bg1"/>
+                    </a:solidFill>
+                  </a:tcPr>
+                </a:tc>
+                <a:tc>
+                  <a:txBody>
+                    <a:bodyPr/>
+                    <a:lstStyle/>
+                    <a:p>
+                      <a:pPr algn="ctr"/>
+                      <a:r>
+                        <a:rPr lang="de-DE" sz="1000" dirty="0">
+                          <a:solidFill>
+                            <a:schemeClr val="accent6"/>
+                          </a:solidFill>
+                        </a:rPr>
+                        <a:t>Mietshop (SaaS)</a:t>
+                      </a:r>
+                    </a:p>
+                  </a:txBody>
+                  <a:tcPr anchor="ctr" marL="91440" marR="91440" marT="0" marB="0">
+                    <a:lnL w="6350" cap="flat" cmpd="sng" algn="ctr">
+                      <a:solidFill>
+                        <a:srgbClr val="D9DCE3"/>
+                      </a:solidFill>
+                      <a:prstDash val="solid"/>
+                    </a:lnL>
+                    <a:lnR w="6350" cap="flat" cmpd="sng" algn="ctr">
+                      <a:solidFill>
+                        <a:srgbClr val="D9DCE3"/>
+                      </a:solidFill>
+                      <a:prstDash val="solid"/>
+                    </a:lnR>
+                    <a:lnT w="6350" cap="flat" cmpd="sng" algn="ctr">
+                      <a:solidFill>
+                        <a:srgbClr val="D9DCE3"/>
+                      </a:solidFill>
+                      <a:prstDash val="solid"/>
+                    </a:lnT>
+                    <a:lnB w="6350" cap="flat" cmpd="sng" algn="ctr">
+                      <a:solidFill>
+                        <a:srgbClr val="D9DCE3"/>
+                      </a:solidFill>
+                      <a:prstDash val="solid"/>
+                    </a:lnB>
+                    <a:solidFill>
+                      <a:schemeClr val="bg1"/>
+                    </a:solidFill>
+                  </a:tcPr>
+                </a:tc>
+                <a:tc>
+                  <a:txBody>
+                    <a:bodyPr/>
+                    <a:lstStyle/>
+                    <a:p>
+                      <a:pPr algn="ctr"/>
+                      <a:r>
+                        <a:rPr lang="de-DE" sz="1000" dirty="0">
+                          <a:solidFill>
+                            <a:schemeClr val="accent6"/>
+                          </a:solidFill>
+                        </a:rPr>
+                        <a:t>Homepage-Baukasten</a:t>
+                      </a:r>
+                    </a:p>
+                  </a:txBody>
+                  <a:tcPr anchor="ctr" marL="91440" marR="91440" marT="0" marB="0">
+                    <a:lnL w="6350" cap="flat" cmpd="sng" algn="ctr">
+                      <a:solidFill>
+                        <a:srgbClr val="D9DCE3"/>
+                      </a:solidFill>
+                      <a:prstDash val="solid"/>
+                    </a:lnL>
+                    <a:lnR w="6350" cap="flat" cmpd="sng" algn="ctr">
+                      <a:solidFill>
+                        <a:srgbClr val="D9DCE3"/>
+                      </a:solidFill>
+                      <a:prstDash val="solid"/>
+                    </a:lnR>
+                    <a:lnT w="6350" cap="flat" cmpd="sng" algn="ctr">
+                      <a:solidFill>
+                        <a:srgbClr val="D9DCE3"/>
+                      </a:solidFill>
+                      <a:prstDash val="solid"/>
+                    </a:lnT>
+                    <a:lnB w="6350" cap="flat" cmpd="sng" algn="ctr">
+                      <a:solidFill>
+                        <a:srgbClr val="D9DCE3"/>
+                      </a:solidFill>
+                      <a:prstDash val="solid"/>
+                    </a:lnB>
+                    <a:solidFill>
+                      <a:schemeClr val="bg1"/>
+                    </a:solidFill>
+                  </a:tcPr>
+                </a:tc>
+              </a:tr>
+              <a:tr h="278892">
+                <a:tc>
+                  <a:txBody>
+                    <a:bodyPr/>
+                    <a:lstStyle/>
+                    <a:p>
+                      <a:pPr algn="ctr"/>
+                      <a:r>
+                        <a:rPr lang="de-DE" sz="800" dirty="0">
+                          <a:solidFill>
+                            <a:schemeClr val="accent6"/>
+                          </a:solidFill>
+                        </a:rPr>
+                        <a:t>3</a:t>
+                      </a:r>
+                    </a:p>
+                  </a:txBody>
+                  <a:tcPr anchor="ctr" marL="91440" marR="91440" marT="0" marB="0">
+                    <a:lnL w="6350" cap="flat" cmpd="sng" algn="ctr">
+                      <a:solidFill>
+                        <a:srgbClr val="D9DCE3"/>
+                      </a:solidFill>
+                      <a:prstDash val="solid"/>
+                    </a:lnL>
+                    <a:lnR w="6350" cap="flat" cmpd="sng" algn="ctr">
+                      <a:solidFill>
+                        <a:srgbClr val="D9DCE3"/>
+                      </a:solidFill>
+                      <a:prstDash val="solid"/>
+                    </a:lnR>
+                    <a:lnT w="6350" cap="flat" cmpd="sng" algn="ctr">
+                      <a:solidFill>
+                        <a:srgbClr val="D9DCE3"/>
+                      </a:solidFill>
+                      <a:prstDash val="solid"/>
+                    </a:lnT>
+                    <a:lnB w="6350" cap="flat" cmpd="sng" algn="ctr">
+                      <a:solidFill>
+                        <a:srgbClr val="D9DCE3"/>
+                      </a:solidFill>
+                      <a:prstDash val="solid"/>
+                    </a:lnB>
+                    <a:solidFill>
+                      <a:srgbClr val="F3F4F6"/>
+                    </a:solidFill>
+                  </a:tcPr>
+                </a:tc>
+                <a:tc>
+                  <a:txBody>
+                    <a:bodyPr/>
+                    <a:lstStyle/>
+                    <a:p>
+                      <a:pPr algn="l"/>
+                      <a:r>
+                        <a:rPr lang="de-DE" sz="1000" dirty="0">
+                          <a:solidFill>
+                            <a:schemeClr val="accent6"/>
+                          </a:solidFill>
+                        </a:rPr>
+                        <a:t>Preis pro Monat</a:t>
+                      </a:r>
+                    </a:p>
+                  </a:txBody>
+                  <a:tcPr anchor="ctr" marL="91440" marR="91440" marT="0" marB="0">
+                    <a:lnL w="6350" cap="flat" cmpd="sng" algn="ctr">
+                      <a:solidFill>
+                        <a:srgbClr val="D9DCE3"/>
+                      </a:solidFill>
+                      <a:prstDash val="solid"/>
+                    </a:lnL>
+                    <a:lnR w="6350" cap="flat" cmpd="sng" algn="ctr">
+                      <a:solidFill>
+                        <a:srgbClr val="D9DCE3"/>
+                      </a:solidFill>
+                      <a:prstDash val="solid"/>
+                    </a:lnR>
+                    <a:lnT w="6350" cap="flat" cmpd="sng" algn="ctr">
+                      <a:solidFill>
+                        <a:srgbClr val="D9DCE3"/>
+                      </a:solidFill>
+                      <a:prstDash val="solid"/>
+                    </a:lnT>
+                    <a:lnB w="6350" cap="flat" cmpd="sng" algn="ctr">
+                      <a:solidFill>
+                        <a:srgbClr val="D9DCE3"/>
+                      </a:solidFill>
+                      <a:prstDash val="solid"/>
+                    </a:lnB>
+                    <a:solidFill>
+                      <a:schemeClr val="bg1"/>
+                    </a:solidFill>
+                  </a:tcPr>
+                </a:tc>
+                <a:tc>
+                  <a:txBody>
+                    <a:bodyPr/>
+                    <a:lstStyle/>
+                    <a:p>
+                      <a:pPr algn="ctr"/>
+                      <a:endParaRPr lang="de-DE" sz="1000" dirty="0"/>
+                    </a:p>
+                  </a:txBody>
+                  <a:tcPr anchor="ctr" marL="91440" marR="91440" marT="0" marB="0">
+                    <a:lnL w="6350" cap="flat" cmpd="sng" algn="ctr">
+                      <a:solidFill>
+                        <a:srgbClr val="D9DCE3"/>
+                      </a:solidFill>
+                      <a:prstDash val="solid"/>
+                    </a:lnL>
+                    <a:lnR w="6350" cap="flat" cmpd="sng" algn="ctr">
+                      <a:solidFill>
+                        <a:srgbClr val="D9DCE3"/>
+                      </a:solidFill>
+                      <a:prstDash val="solid"/>
+                    </a:lnR>
+                    <a:lnT w="6350" cap="flat" cmpd="sng" algn="ctr">
+                      <a:solidFill>
+                        <a:srgbClr val="D9DCE3"/>
+                      </a:solidFill>
+                      <a:prstDash val="solid"/>
+                    </a:lnT>
+                    <a:lnB w="6350" cap="flat" cmpd="sng" algn="ctr">
+                      <a:solidFill>
+                        <a:srgbClr val="D9DCE3"/>
+                      </a:solidFill>
+                      <a:prstDash val="solid"/>
+                    </a:lnB>
+                    <a:solidFill>
+                      <a:schemeClr val="bg1"/>
+                    </a:solidFill>
+                  </a:tcPr>
+                </a:tc>
+                <a:tc>
+                  <a:txBody>
+                    <a:bodyPr/>
+                    <a:lstStyle/>
+                    <a:p>
+                      <a:pPr algn="ctr"/>
+                      <a:r>
+                        <a:rPr lang="de-DE" sz="1000" dirty="0">
+                          <a:solidFill>
+                            <a:schemeClr val="dk2"/>
+                          </a:solidFill>
+                        </a:rPr>
+                        <a:t>0 €</a:t>
+                      </a:r>
+                    </a:p>
+                  </a:txBody>
+                  <a:tcPr anchor="ctr" marL="91440" marR="91440" marT="0" marB="0">
+                    <a:lnL w="6350" cap="flat" cmpd="sng" algn="ctr">
+                      <a:solidFill>
+                        <a:srgbClr val="D9DCE3"/>
+                      </a:solidFill>
+                      <a:prstDash val="solid"/>
+                    </a:lnL>
+                    <a:lnR w="6350" cap="flat" cmpd="sng" algn="ctr">
+                      <a:solidFill>
+                        <a:srgbClr val="D9DCE3"/>
+                      </a:solidFill>
+                      <a:prstDash val="solid"/>
+                    </a:lnR>
+                    <a:lnT w="6350" cap="flat" cmpd="sng" algn="ctr">
+                      <a:solidFill>
+                        <a:srgbClr val="D9DCE3"/>
+                      </a:solidFill>
+                      <a:prstDash val="solid"/>
+                    </a:lnT>
+                    <a:lnB w="6350" cap="flat" cmpd="sng" algn="ctr">
+                      <a:solidFill>
+                        <a:srgbClr val="D9DCE3"/>
+                      </a:solidFill>
+                      <a:prstDash val="solid"/>
+                    </a:lnB>
+                    <a:solidFill>
+                      <a:srgbClr val="EDE7FF"/>
+                    </a:solidFill>
+                  </a:tcPr>
+                </a:tc>
+                <a:tc>
+                  <a:txBody>
+                    <a:bodyPr/>
+                    <a:lstStyle/>
+                    <a:p>
+                      <a:pPr algn="ctr"/>
+                      <a:r>
+                        <a:rPr lang="de-DE" sz="1000" dirty="0">
+                          <a:solidFill>
+                            <a:schemeClr val="accent6"/>
+                          </a:solidFill>
+                        </a:rPr>
+                        <a:t>ca. 21 €</a:t>
+                      </a:r>
+                    </a:p>
+                  </a:txBody>
+                  <a:tcPr anchor="ctr" marL="91440" marR="91440" marT="0" marB="0">
+                    <a:lnL w="6350" cap="flat" cmpd="sng" algn="ctr">
+                      <a:solidFill>
+                        <a:srgbClr val="D9DCE3"/>
+                      </a:solidFill>
+                      <a:prstDash val="solid"/>
+                    </a:lnL>
+                    <a:lnR w="6350" cap="flat" cmpd="sng" algn="ctr">
+                      <a:solidFill>
+                        <a:srgbClr val="D9DCE3"/>
+                      </a:solidFill>
+                      <a:prstDash val="solid"/>
+                    </a:lnR>
+                    <a:lnT w="6350" cap="flat" cmpd="sng" algn="ctr">
+                      <a:solidFill>
+                        <a:srgbClr val="D9DCE3"/>
+                      </a:solidFill>
+                      <a:prstDash val="solid"/>
+                    </a:lnT>
+                    <a:lnB w="6350" cap="flat" cmpd="sng" algn="ctr">
+                      <a:solidFill>
+                        <a:srgbClr val="D9DCE3"/>
+                      </a:solidFill>
+                      <a:prstDash val="solid"/>
+                    </a:lnB>
+                    <a:solidFill>
+                      <a:schemeClr val="bg1"/>
+                    </a:solidFill>
+                  </a:tcPr>
+                </a:tc>
+                <a:tc>
+                  <a:txBody>
+                    <a:bodyPr/>
+                    <a:lstStyle/>
+                    <a:p>
+                      <a:pPr algn="ctr"/>
+                      <a:r>
+                        <a:rPr lang="de-DE" sz="1000" dirty="0">
+                          <a:solidFill>
+                            <a:schemeClr val="accent6"/>
+                          </a:solidFill>
+                        </a:rPr>
+                        <a:t>ab 25 €</a:t>
+                      </a:r>
+                    </a:p>
+                  </a:txBody>
+                  <a:tcPr anchor="ctr" marL="91440" marR="91440" marT="0" marB="0">
+                    <a:lnL w="6350" cap="flat" cmpd="sng" algn="ctr">
+                      <a:solidFill>
+                        <a:srgbClr val="D9DCE3"/>
+                      </a:solidFill>
+                      <a:prstDash val="solid"/>
+                    </a:lnL>
+                    <a:lnR w="6350" cap="flat" cmpd="sng" algn="ctr">
+                      <a:solidFill>
+                        <a:srgbClr val="D9DCE3"/>
+                      </a:solidFill>
+                      <a:prstDash val="solid"/>
+                    </a:lnR>
+                    <a:lnT w="6350" cap="flat" cmpd="sng" algn="ctr">
+                      <a:solidFill>
+                        <a:srgbClr val="D9DCE3"/>
+                      </a:solidFill>
+                      <a:prstDash val="solid"/>
+                    </a:lnT>
+                    <a:lnB w="6350" cap="flat" cmpd="sng" algn="ctr">
+                      <a:solidFill>
+                        <a:srgbClr val="D9DCE3"/>
+                      </a:solidFill>
+                      <a:prstDash val="solid"/>
+                    </a:lnB>
+                    <a:solidFill>
+                      <a:schemeClr val="bg1"/>
+                    </a:solidFill>
+                  </a:tcPr>
+                </a:tc>
+                <a:tc>
+                  <a:txBody>
+                    <a:bodyPr/>
+                    <a:lstStyle/>
+                    <a:p>
+                      <a:pPr algn="ctr"/>
+                      <a:r>
+                        <a:rPr lang="de-DE" sz="1000" dirty="0">
+                          <a:solidFill>
+                            <a:schemeClr val="accent6"/>
+                          </a:solidFill>
+                        </a:rPr>
+                        <a:t>ab 18 €</a:t>
+                      </a:r>
+                    </a:p>
+                  </a:txBody>
+                  <a:tcPr anchor="ctr" marL="91440" marR="91440" marT="0" marB="0">
+                    <a:lnL w="6350" cap="flat" cmpd="sng" algn="ctr">
+                      <a:solidFill>
+                        <a:srgbClr val="D9DCE3"/>
+                      </a:solidFill>
+                      <a:prstDash val="solid"/>
+                    </a:lnL>
+                    <a:lnR w="6350" cap="flat" cmpd="sng" algn="ctr">
+                      <a:solidFill>
+                        <a:srgbClr val="D9DCE3"/>
+                      </a:solidFill>
+                      <a:prstDash val="solid"/>
+                    </a:lnR>
+                    <a:lnT w="6350" cap="flat" cmpd="sng" algn="ctr">
+                      <a:solidFill>
+                        <a:srgbClr val="D9DCE3"/>
+                      </a:solidFill>
+                      <a:prstDash val="solid"/>
+                    </a:lnT>
+                    <a:lnB w="6350" cap="flat" cmpd="sng" algn="ctr">
+                      <a:solidFill>
+                        <a:srgbClr val="D9DCE3"/>
+                      </a:solidFill>
+                      <a:prstDash val="solid"/>
+                    </a:lnB>
+                    <a:solidFill>
+                      <a:schemeClr val="bg1"/>
+                    </a:solidFill>
+                  </a:tcPr>
+                </a:tc>
+              </a:tr>
+              <a:tr h="329184">
+                <a:tc>
+                  <a:txBody>
+                    <a:bodyPr/>
+                    <a:lstStyle/>
+                    <a:p>
+                      <a:pPr algn="ctr"/>
+                      <a:r>
+                        <a:rPr lang="de-DE" sz="800" dirty="0">
+                          <a:solidFill>
+                            <a:schemeClr val="accent6"/>
+                          </a:solidFill>
+                        </a:rPr>
+                        <a:t>4</a:t>
+                      </a:r>
+                    </a:p>
+                  </a:txBody>
+                  <a:tcPr anchor="ctr" marL="91440" marR="91440" marT="0" marB="0">
+                    <a:lnL w="6350" cap="flat" cmpd="sng" algn="ctr">
+                      <a:solidFill>
+                        <a:srgbClr val="D9DCE3"/>
+                      </a:solidFill>
+                      <a:prstDash val="solid"/>
+                    </a:lnL>
+                    <a:lnR w="6350" cap="flat" cmpd="sng" algn="ctr">
+                      <a:solidFill>
+                        <a:srgbClr val="D9DCE3"/>
+                      </a:solidFill>
+                      <a:prstDash val="solid"/>
+                    </a:lnR>
+                    <a:lnT w="6350" cap="flat" cmpd="sng" algn="ctr">
+                      <a:solidFill>
+                        <a:srgbClr val="D9DCE3"/>
+                      </a:solidFill>
+                      <a:prstDash val="solid"/>
+                    </a:lnT>
+                    <a:lnB w="6350" cap="flat" cmpd="sng" algn="ctr">
+                      <a:solidFill>
+                        <a:srgbClr val="D9DCE3"/>
+                      </a:solidFill>
+                      <a:prstDash val="solid"/>
+                    </a:lnB>
+                    <a:solidFill>
+                      <a:srgbClr val="F3F4F6"/>
+                    </a:solidFill>
+                  </a:tcPr>
+                </a:tc>
+                <a:tc>
+                  <a:txBody>
+                    <a:bodyPr/>
+                    <a:lstStyle/>
+                    <a:p>
+                      <a:pPr algn="l"/>
+                      <a:r>
+                        <a:rPr lang="de-DE" sz="1400" dirty="0">
+                          <a:solidFill>
+                            <a:schemeClr val="tx1"/>
+                          </a:solidFill>
+                        </a:rPr>
+                        <a:t>Kosten (Start + monatlich)</a:t>
+                      </a:r>
+                    </a:p>
+                  </a:txBody>
+                  <a:tcPr anchor="ctr" marL="91440" marR="91440" marT="27432" marB="27432">
+                    <a:lnL w="6350" cap="flat" cmpd="sng" algn="ctr">
+                      <a:solidFill>
+                        <a:srgbClr val="D9DCE3"/>
+                      </a:solidFill>
+                      <a:prstDash val="solid"/>
+                    </a:lnL>
+                    <a:lnR w="6350" cap="flat" cmpd="sng" algn="ctr">
+                      <a:solidFill>
+                        <a:srgbClr val="D9DCE3"/>
+                      </a:solidFill>
+                      <a:prstDash val="solid"/>
+                    </a:lnR>
+                    <a:lnT w="6350" cap="flat" cmpd="sng" algn="ctr">
+                      <a:solidFill>
+                        <a:srgbClr val="D9DCE3"/>
+                      </a:solidFill>
+                      <a:prstDash val="solid"/>
+                    </a:lnT>
+                    <a:lnB w="6350" cap="flat" cmpd="sng" algn="ctr">
+                      <a:solidFill>
+                        <a:srgbClr val="D9DCE3"/>
+                      </a:solidFill>
+                      <a:prstDash val="solid"/>
+                    </a:lnB>
+                    <a:solidFill>
+                      <a:schemeClr val="bg1"/>
+                    </a:solidFill>
+                  </a:tcPr>
+                </a:tc>
+                <a:tc>
+                  <a:txBody>
+                    <a:bodyPr/>
+                    <a:lstStyle/>
+                    <a:p>
+                      <a:pPr algn="ctr"/>
+                      <a:r>
+                        <a:rPr lang="de-DE" sz="1400" dirty="0">
                           <a:solidFill>
                             <a:schemeClr val="accent6"/>
                           </a:solidFill>
@@ -5740,18 +7550,27 @@
                     </a:p>
                   </a:txBody>
                   <a:tcPr anchor="ctr" marL="91440" marR="91440" marT="27432" marB="27432">
-                    <a:lnL w="0">
-                      <a:noFill/>
+                    <a:lnL w="6350" cap="flat" cmpd="sng" algn="ctr">
+                      <a:solidFill>
+                        <a:srgbClr val="D9DCE3"/>
+                      </a:solidFill>
+                      <a:prstDash val="solid"/>
                     </a:lnL>
-                    <a:lnR w="0">
-                      <a:noFill/>
+                    <a:lnR w="6350" cap="flat" cmpd="sng" algn="ctr">
+                      <a:solidFill>
+                        <a:srgbClr val="D9DCE3"/>
+                      </a:solidFill>
+                      <a:prstDash val="solid"/>
                     </a:lnR>
-                    <a:lnT w="0">
-                      <a:noFill/>
+                    <a:lnT w="6350" cap="flat" cmpd="sng" algn="ctr">
+                      <a:solidFill>
+                        <a:srgbClr val="D9DCE3"/>
+                      </a:solidFill>
+                      <a:prstDash val="solid"/>
                     </a:lnT>
-                    <a:lnB w="9525" cap="flat" cmpd="sng" algn="ctr">
-                      <a:solidFill>
-                        <a:srgbClr val="E5E0F5"/>
+                    <a:lnB w="6350" cap="flat" cmpd="sng" algn="ctr">
+                      <a:solidFill>
+                        <a:srgbClr val="D9DCE3"/>
                       </a:solidFill>
                       <a:prstDash val="solid"/>
                     </a:lnB>
@@ -5772,36 +7591,37 @@
                             <a:schemeClr val="tx1"/>
                           </a:solidFill>
                         </a:rPr>
-                        <a:t>7 </a:t>
-                      </a:r>
-                      <a:r>
-                        <a:rPr lang="de-DE" sz="1100" dirty="0">
-                          <a:solidFill>
-                            <a:schemeClr val="accent6"/>
-                          </a:solidFill>
-                        </a:rPr>
-                        <a:t>(1,75)</a:t>
+                        <a:t>10</a:t>
                       </a:r>
                     </a:p>
                   </a:txBody>
                   <a:tcPr anchor="ctr" marL="91440" marR="91440" marT="27432" marB="27432">
-                    <a:lnL w="0">
-                      <a:noFill/>
+                    <a:lnL w="6350" cap="flat" cmpd="sng" algn="ctr">
+                      <a:solidFill>
+                        <a:srgbClr val="D9DCE3"/>
+                      </a:solidFill>
+                      <a:prstDash val="solid"/>
                     </a:lnL>
-                    <a:lnR w="0">
-                      <a:noFill/>
+                    <a:lnR w="6350" cap="flat" cmpd="sng" algn="ctr">
+                      <a:solidFill>
+                        <a:srgbClr val="D9DCE3"/>
+                      </a:solidFill>
+                      <a:prstDash val="solid"/>
                     </a:lnR>
-                    <a:lnT w="0">
-                      <a:noFill/>
+                    <a:lnT w="6350" cap="flat" cmpd="sng" algn="ctr">
+                      <a:solidFill>
+                        <a:srgbClr val="D9DCE3"/>
+                      </a:solidFill>
+                      <a:prstDash val="solid"/>
                     </a:lnT>
-                    <a:lnB w="9525" cap="flat" cmpd="sng" algn="ctr">
-                      <a:solidFill>
-                        <a:srgbClr val="E5E0F5"/>
+                    <a:lnB w="6350" cap="flat" cmpd="sng" algn="ctr">
+                      <a:solidFill>
+                        <a:srgbClr val="D9DCE3"/>
                       </a:solidFill>
                       <a:prstDash val="solid"/>
                     </a:lnB>
                     <a:solidFill>
-                      <a:schemeClr val="bg2"/>
+                      <a:srgbClr val="EDE7FF"/>
                     </a:solidFill>
                   </a:tcPr>
                 </a:tc>
@@ -5817,31 +7637,32 @@
                             <a:schemeClr val="tx1"/>
                           </a:solidFill>
                         </a:rPr>
-                        <a:t>8 </a:t>
-                      </a:r>
-                      <a:r>
-                        <a:rPr lang="de-DE" sz="1100" dirty="0">
-                          <a:solidFill>
-                            <a:schemeClr val="accent6"/>
-                          </a:solidFill>
-                        </a:rPr>
-                        <a:t>(2,00)</a:t>
+                        <a:t>6</a:t>
                       </a:r>
                     </a:p>
                   </a:txBody>
                   <a:tcPr anchor="ctr" marL="91440" marR="91440" marT="27432" marB="27432">
-                    <a:lnL w="0">
-                      <a:noFill/>
+                    <a:lnL w="6350" cap="flat" cmpd="sng" algn="ctr">
+                      <a:solidFill>
+                        <a:srgbClr val="D9DCE3"/>
+                      </a:solidFill>
+                      <a:prstDash val="solid"/>
                     </a:lnL>
-                    <a:lnR w="0">
-                      <a:noFill/>
+                    <a:lnR w="6350" cap="flat" cmpd="sng" algn="ctr">
+                      <a:solidFill>
+                        <a:srgbClr val="D9DCE3"/>
+                      </a:solidFill>
+                      <a:prstDash val="solid"/>
                     </a:lnR>
-                    <a:lnT w="0">
-                      <a:noFill/>
+                    <a:lnT w="6350" cap="flat" cmpd="sng" algn="ctr">
+                      <a:solidFill>
+                        <a:srgbClr val="D9DCE3"/>
+                      </a:solidFill>
+                      <a:prstDash val="solid"/>
                     </a:lnT>
-                    <a:lnB w="9525" cap="flat" cmpd="sng" algn="ctr">
-                      <a:solidFill>
-                        <a:srgbClr val="E5E0F5"/>
+                    <a:lnB w="6350" cap="flat" cmpd="sng" algn="ctr">
+                      <a:solidFill>
+                        <a:srgbClr val="D9DCE3"/>
                       </a:solidFill>
                       <a:prstDash val="solid"/>
                     </a:lnB>
@@ -5862,31 +7683,32 @@
                             <a:schemeClr val="tx1"/>
                           </a:solidFill>
                         </a:rPr>
-                        <a:t>6 </a:t>
-                      </a:r>
-                      <a:r>
-                        <a:rPr lang="de-DE" sz="1100" dirty="0">
-                          <a:solidFill>
-                            <a:schemeClr val="accent6"/>
-                          </a:solidFill>
-                        </a:rPr>
-                        <a:t>(1,50)</a:t>
+                        <a:t>5</a:t>
                       </a:r>
                     </a:p>
                   </a:txBody>
                   <a:tcPr anchor="ctr" marL="91440" marR="91440" marT="27432" marB="27432">
-                    <a:lnL w="0">
-                      <a:noFill/>
+                    <a:lnL w="6350" cap="flat" cmpd="sng" algn="ctr">
+                      <a:solidFill>
+                        <a:srgbClr val="D9DCE3"/>
+                      </a:solidFill>
+                      <a:prstDash val="solid"/>
                     </a:lnL>
-                    <a:lnR w="0">
-                      <a:noFill/>
+                    <a:lnR w="6350" cap="flat" cmpd="sng" algn="ctr">
+                      <a:solidFill>
+                        <a:srgbClr val="D9DCE3"/>
+                      </a:solidFill>
+                      <a:prstDash val="solid"/>
                     </a:lnR>
-                    <a:lnT w="0">
-                      <a:noFill/>
+                    <a:lnT w="6350" cap="flat" cmpd="sng" algn="ctr">
+                      <a:solidFill>
+                        <a:srgbClr val="D9DCE3"/>
+                      </a:solidFill>
+                      <a:prstDash val="solid"/>
                     </a:lnT>
-                    <a:lnB w="9525" cap="flat" cmpd="sng" algn="ctr">
-                      <a:solidFill>
-                        <a:srgbClr val="E5E0F5"/>
+                    <a:lnB w="6350" cap="flat" cmpd="sng" algn="ctr">
+                      <a:solidFill>
+                        <a:srgbClr val="D9DCE3"/>
                       </a:solidFill>
                       <a:prstDash val="solid"/>
                     </a:lnB>
@@ -5907,31 +7729,32 @@
                             <a:schemeClr val="tx1"/>
                           </a:solidFill>
                         </a:rPr>
-                        <a:t>4 </a:t>
-                      </a:r>
-                      <a:r>
-                        <a:rPr lang="de-DE" sz="1100" dirty="0">
-                          <a:solidFill>
-                            <a:schemeClr val="accent6"/>
-                          </a:solidFill>
-                        </a:rPr>
-                        <a:t>(1,00)</a:t>
+                        <a:t>6</a:t>
                       </a:r>
                     </a:p>
                   </a:txBody>
                   <a:tcPr anchor="ctr" marL="91440" marR="91440" marT="27432" marB="27432">
-                    <a:lnL w="0">
-                      <a:noFill/>
+                    <a:lnL w="6350" cap="flat" cmpd="sng" algn="ctr">
+                      <a:solidFill>
+                        <a:srgbClr val="D9DCE3"/>
+                      </a:solidFill>
+                      <a:prstDash val="solid"/>
                     </a:lnL>
-                    <a:lnR w="0">
-                      <a:noFill/>
+                    <a:lnR w="6350" cap="flat" cmpd="sng" algn="ctr">
+                      <a:solidFill>
+                        <a:srgbClr val="D9DCE3"/>
+                      </a:solidFill>
+                      <a:prstDash val="solid"/>
                     </a:lnR>
-                    <a:lnT w="0">
-                      <a:noFill/>
+                    <a:lnT w="6350" cap="flat" cmpd="sng" algn="ctr">
+                      <a:solidFill>
+                        <a:srgbClr val="D9DCE3"/>
+                      </a:solidFill>
+                      <a:prstDash val="solid"/>
                     </a:lnT>
-                    <a:lnB w="9525" cap="flat" cmpd="sng" algn="ctr">
-                      <a:solidFill>
-                        <a:srgbClr val="E5E0F5"/>
+                    <a:lnB w="6350" cap="flat" cmpd="sng" algn="ctr">
+                      <a:solidFill>
+                        <a:srgbClr val="D9DCE3"/>
                       </a:solidFill>
                       <a:prstDash val="solid"/>
                     </a:lnB>
@@ -5941,15 +7764,61 @@
                   </a:tcPr>
                 </a:tc>
               </a:tr>
-              <a:tr h="384048">
+              <a:tr h="329184">
                 <a:tc>
                   <a:txBody>
                     <a:bodyPr/>
                     <a:lstStyle/>
                     <a:p>
-                      <a:pPr/>
+                      <a:pPr algn="ctr"/>
                       <a:r>
-                        <a:rPr lang="de-DE" sz="1300" dirty="0">
+                        <a:rPr lang="de-DE" sz="800" dirty="0">
+                          <a:solidFill>
+                            <a:schemeClr val="accent6"/>
+                          </a:solidFill>
+                        </a:rPr>
+                        <a:t>5</a:t>
+                      </a:r>
+                    </a:p>
+                  </a:txBody>
+                  <a:tcPr anchor="ctr" marL="91440" marR="91440" marT="0" marB="0">
+                    <a:lnL w="6350" cap="flat" cmpd="sng" algn="ctr">
+                      <a:solidFill>
+                        <a:srgbClr val="D9DCE3"/>
+                      </a:solidFill>
+                      <a:prstDash val="solid"/>
+                    </a:lnL>
+                    <a:lnR w="6350" cap="flat" cmpd="sng" algn="ctr">
+                      <a:solidFill>
+                        <a:srgbClr val="D9DCE3"/>
+                      </a:solidFill>
+                      <a:prstDash val="solid"/>
+                    </a:lnR>
+                    <a:lnT w="6350" cap="flat" cmpd="sng" algn="ctr">
+                      <a:solidFill>
+                        <a:srgbClr val="D9DCE3"/>
+                      </a:solidFill>
+                      <a:prstDash val="solid"/>
+                    </a:lnT>
+                    <a:lnB w="6350" cap="flat" cmpd="sng" algn="ctr">
+                      <a:solidFill>
+                        <a:srgbClr val="D9DCE3"/>
+                      </a:solidFill>
+                      <a:prstDash val="solid"/>
+                    </a:lnB>
+                    <a:solidFill>
+                      <a:srgbClr val="F3F4F6"/>
+                    </a:solidFill>
+                  </a:tcPr>
+                </a:tc>
+                <a:tc>
+                  <a:txBody>
+                    <a:bodyPr/>
+                    <a:lstStyle/>
+                    <a:p>
+                      <a:pPr algn="l"/>
+                      <a:r>
+                        <a:rPr lang="de-DE" sz="1400" dirty="0">
                           <a:solidFill>
                             <a:schemeClr val="tx1"/>
                           </a:solidFill>
@@ -5959,18 +7828,27 @@
                     </a:p>
                   </a:txBody>
                   <a:tcPr anchor="ctr" marL="91440" marR="91440" marT="27432" marB="27432">
-                    <a:lnL w="0">
-                      <a:noFill/>
+                    <a:lnL w="6350" cap="flat" cmpd="sng" algn="ctr">
+                      <a:solidFill>
+                        <a:srgbClr val="D9DCE3"/>
+                      </a:solidFill>
+                      <a:prstDash val="solid"/>
                     </a:lnL>
-                    <a:lnR w="0">
-                      <a:noFill/>
+                    <a:lnR w="6350" cap="flat" cmpd="sng" algn="ctr">
+                      <a:solidFill>
+                        <a:srgbClr val="D9DCE3"/>
+                      </a:solidFill>
+                      <a:prstDash val="solid"/>
                     </a:lnR>
-                    <a:lnT w="0">
-                      <a:noFill/>
+                    <a:lnT w="6350" cap="flat" cmpd="sng" algn="ctr">
+                      <a:solidFill>
+                        <a:srgbClr val="D9DCE3"/>
+                      </a:solidFill>
+                      <a:prstDash val="solid"/>
                     </a:lnT>
-                    <a:lnB w="9525" cap="flat" cmpd="sng" algn="ctr">
-                      <a:solidFill>
-                        <a:srgbClr val="E5E0F5"/>
+                    <a:lnB w="6350" cap="flat" cmpd="sng" algn="ctr">
+                      <a:solidFill>
+                        <a:srgbClr val="D9DCE3"/>
                       </a:solidFill>
                       <a:prstDash val="solid"/>
                     </a:lnB>
@@ -5986,28 +7864,37 @@
                     <a:p>
                       <a:pPr algn="ctr"/>
                       <a:r>
-                        <a:rPr lang="de-DE" sz="1300" b="1" dirty="0">
+                        <a:rPr lang="de-DE" sz="1400" dirty="0">
                           <a:solidFill>
                             <a:schemeClr val="accent6"/>
                           </a:solidFill>
                         </a:rPr>
-                        <a:t>20 %</a:t>
+                        <a:t>15 %</a:t>
                       </a:r>
                     </a:p>
                   </a:txBody>
                   <a:tcPr anchor="ctr" marL="91440" marR="91440" marT="27432" marB="27432">
-                    <a:lnL w="0">
-                      <a:noFill/>
+                    <a:lnL w="6350" cap="flat" cmpd="sng" algn="ctr">
+                      <a:solidFill>
+                        <a:srgbClr val="D9DCE3"/>
+                      </a:solidFill>
+                      <a:prstDash val="solid"/>
                     </a:lnL>
-                    <a:lnR w="0">
-                      <a:noFill/>
+                    <a:lnR w="6350" cap="flat" cmpd="sng" algn="ctr">
+                      <a:solidFill>
+                        <a:srgbClr val="D9DCE3"/>
+                      </a:solidFill>
+                      <a:prstDash val="solid"/>
                     </a:lnR>
-                    <a:lnT w="0">
-                      <a:noFill/>
+                    <a:lnT w="6350" cap="flat" cmpd="sng" algn="ctr">
+                      <a:solidFill>
+                        <a:srgbClr val="D9DCE3"/>
+                      </a:solidFill>
+                      <a:prstDash val="solid"/>
                     </a:lnT>
-                    <a:lnB w="9525" cap="flat" cmpd="sng" algn="ctr">
-                      <a:solidFill>
-                        <a:srgbClr val="E5E0F5"/>
+                    <a:lnB w="6350" cap="flat" cmpd="sng" algn="ctr">
+                      <a:solidFill>
+                        <a:srgbClr val="D9DCE3"/>
                       </a:solidFill>
                       <a:prstDash val="solid"/>
                     </a:lnB>
@@ -6028,36 +7915,37 @@
                             <a:schemeClr val="tx1"/>
                           </a:solidFill>
                         </a:rPr>
-                        <a:t>9 </a:t>
-                      </a:r>
-                      <a:r>
-                        <a:rPr lang="de-DE" sz="1100" dirty="0">
-                          <a:solidFill>
-                            <a:schemeClr val="accent6"/>
-                          </a:solidFill>
-                        </a:rPr>
-                        <a:t>(1,80)</a:t>
+                        <a:t>6</a:t>
                       </a:r>
                     </a:p>
                   </a:txBody>
                   <a:tcPr anchor="ctr" marL="91440" marR="91440" marT="27432" marB="27432">
-                    <a:lnL w="0">
-                      <a:noFill/>
+                    <a:lnL w="6350" cap="flat" cmpd="sng" algn="ctr">
+                      <a:solidFill>
+                        <a:srgbClr val="D9DCE3"/>
+                      </a:solidFill>
+                      <a:prstDash val="solid"/>
                     </a:lnL>
-                    <a:lnR w="0">
-                      <a:noFill/>
+                    <a:lnR w="6350" cap="flat" cmpd="sng" algn="ctr">
+                      <a:solidFill>
+                        <a:srgbClr val="D9DCE3"/>
+                      </a:solidFill>
+                      <a:prstDash val="solid"/>
                     </a:lnR>
-                    <a:lnT w="0">
-                      <a:noFill/>
+                    <a:lnT w="6350" cap="flat" cmpd="sng" algn="ctr">
+                      <a:solidFill>
+                        <a:srgbClr val="D9DCE3"/>
+                      </a:solidFill>
+                      <a:prstDash val="solid"/>
                     </a:lnT>
-                    <a:lnB w="9525" cap="flat" cmpd="sng" algn="ctr">
-                      <a:solidFill>
-                        <a:srgbClr val="E5E0F5"/>
+                    <a:lnB w="6350" cap="flat" cmpd="sng" algn="ctr">
+                      <a:solidFill>
+                        <a:srgbClr val="D9DCE3"/>
                       </a:solidFill>
                       <a:prstDash val="solid"/>
                     </a:lnB>
                     <a:solidFill>
-                      <a:schemeClr val="bg2"/>
+                      <a:srgbClr val="EDE7FF"/>
                     </a:solidFill>
                   </a:tcPr>
                 </a:tc>
@@ -6073,31 +7961,32 @@
                             <a:schemeClr val="tx1"/>
                           </a:solidFill>
                         </a:rPr>
-                        <a:t>9 </a:t>
-                      </a:r>
-                      <a:r>
-                        <a:rPr lang="de-DE" sz="1100" dirty="0">
-                          <a:solidFill>
-                            <a:schemeClr val="accent6"/>
-                          </a:solidFill>
-                        </a:rPr>
-                        <a:t>(1,80)</a:t>
+                        <a:t>6</a:t>
                       </a:r>
                     </a:p>
                   </a:txBody>
                   <a:tcPr anchor="ctr" marL="91440" marR="91440" marT="27432" marB="27432">
-                    <a:lnL w="0">
-                      <a:noFill/>
+                    <a:lnL w="6350" cap="flat" cmpd="sng" algn="ctr">
+                      <a:solidFill>
+                        <a:srgbClr val="D9DCE3"/>
+                      </a:solidFill>
+                      <a:prstDash val="solid"/>
                     </a:lnL>
-                    <a:lnR w="0">
-                      <a:noFill/>
+                    <a:lnR w="6350" cap="flat" cmpd="sng" algn="ctr">
+                      <a:solidFill>
+                        <a:srgbClr val="D9DCE3"/>
+                      </a:solidFill>
+                      <a:prstDash val="solid"/>
                     </a:lnR>
-                    <a:lnT w="0">
-                      <a:noFill/>
+                    <a:lnT w="6350" cap="flat" cmpd="sng" algn="ctr">
+                      <a:solidFill>
+                        <a:srgbClr val="D9DCE3"/>
+                      </a:solidFill>
+                      <a:prstDash val="solid"/>
                     </a:lnT>
-                    <a:lnB w="9525" cap="flat" cmpd="sng" algn="ctr">
-                      <a:solidFill>
-                        <a:srgbClr val="E5E0F5"/>
+                    <a:lnB w="6350" cap="flat" cmpd="sng" algn="ctr">
+                      <a:solidFill>
+                        <a:srgbClr val="D9DCE3"/>
                       </a:solidFill>
                       <a:prstDash val="solid"/>
                     </a:lnB>
@@ -6118,31 +8007,32 @@
                             <a:schemeClr val="tx1"/>
                           </a:solidFill>
                         </a:rPr>
-                        <a:t>4 </a:t>
-                      </a:r>
-                      <a:r>
-                        <a:rPr lang="de-DE" sz="1100" dirty="0">
-                          <a:solidFill>
-                            <a:schemeClr val="accent6"/>
-                          </a:solidFill>
-                        </a:rPr>
-                        <a:t>(0,80)</a:t>
+                        <a:t>9</a:t>
                       </a:r>
                     </a:p>
                   </a:txBody>
                   <a:tcPr anchor="ctr" marL="91440" marR="91440" marT="27432" marB="27432">
-                    <a:lnL w="0">
-                      <a:noFill/>
+                    <a:lnL w="6350" cap="flat" cmpd="sng" algn="ctr">
+                      <a:solidFill>
+                        <a:srgbClr val="D9DCE3"/>
+                      </a:solidFill>
+                      <a:prstDash val="solid"/>
                     </a:lnL>
-                    <a:lnR w="0">
-                      <a:noFill/>
+                    <a:lnR w="6350" cap="flat" cmpd="sng" algn="ctr">
+                      <a:solidFill>
+                        <a:srgbClr val="D9DCE3"/>
+                      </a:solidFill>
+                      <a:prstDash val="solid"/>
                     </a:lnR>
-                    <a:lnT w="0">
-                      <a:noFill/>
+                    <a:lnT w="6350" cap="flat" cmpd="sng" algn="ctr">
+                      <a:solidFill>
+                        <a:srgbClr val="D9DCE3"/>
+                      </a:solidFill>
+                      <a:prstDash val="solid"/>
                     </a:lnT>
-                    <a:lnB w="9525" cap="flat" cmpd="sng" algn="ctr">
-                      <a:solidFill>
-                        <a:srgbClr val="E5E0F5"/>
+                    <a:lnB w="6350" cap="flat" cmpd="sng" algn="ctr">
+                      <a:solidFill>
+                        <a:srgbClr val="D9DCE3"/>
                       </a:solidFill>
                       <a:prstDash val="solid"/>
                     </a:lnB>
@@ -6163,31 +8053,32 @@
                             <a:schemeClr val="tx1"/>
                           </a:solidFill>
                         </a:rPr>
-                        <a:t>4 </a:t>
-                      </a:r>
-                      <a:r>
-                        <a:rPr lang="de-DE" sz="1100" dirty="0">
-                          <a:solidFill>
-                            <a:schemeClr val="accent6"/>
-                          </a:solidFill>
-                        </a:rPr>
-                        <a:t>(0,80)</a:t>
+                        <a:t>9</a:t>
                       </a:r>
                     </a:p>
                   </a:txBody>
                   <a:tcPr anchor="ctr" marL="91440" marR="91440" marT="27432" marB="27432">
-                    <a:lnL w="0">
-                      <a:noFill/>
+                    <a:lnL w="6350" cap="flat" cmpd="sng" algn="ctr">
+                      <a:solidFill>
+                        <a:srgbClr val="D9DCE3"/>
+                      </a:solidFill>
+                      <a:prstDash val="solid"/>
                     </a:lnL>
-                    <a:lnR w="0">
-                      <a:noFill/>
+                    <a:lnR w="6350" cap="flat" cmpd="sng" algn="ctr">
+                      <a:solidFill>
+                        <a:srgbClr val="D9DCE3"/>
+                      </a:solidFill>
+                      <a:prstDash val="solid"/>
                     </a:lnR>
-                    <a:lnT w="0">
-                      <a:noFill/>
+                    <a:lnT w="6350" cap="flat" cmpd="sng" algn="ctr">
+                      <a:solidFill>
+                        <a:srgbClr val="D9DCE3"/>
+                      </a:solidFill>
+                      <a:prstDash val="solid"/>
                     </a:lnT>
-                    <a:lnB w="9525" cap="flat" cmpd="sng" algn="ctr">
-                      <a:solidFill>
-                        <a:srgbClr val="E5E0F5"/>
+                    <a:lnB w="6350" cap="flat" cmpd="sng" algn="ctr">
+                      <a:solidFill>
+                        <a:srgbClr val="D9DCE3"/>
                       </a:solidFill>
                       <a:prstDash val="solid"/>
                     </a:lnB>
@@ -6197,36 +8088,91 @@
                   </a:tcPr>
                 </a:tc>
               </a:tr>
-              <a:tr h="384048">
+              <a:tr h="329184">
                 <a:tc>
                   <a:txBody>
                     <a:bodyPr/>
                     <a:lstStyle/>
                     <a:p>
-                      <a:pPr/>
+                      <a:pPr algn="ctr"/>
                       <a:r>
-                        <a:rPr lang="de-DE" sz="1300" dirty="0">
+                        <a:rPr lang="de-DE" sz="800" dirty="0">
+                          <a:solidFill>
+                            <a:schemeClr val="accent6"/>
+                          </a:solidFill>
+                        </a:rPr>
+                        <a:t>6</a:t>
+                      </a:r>
+                    </a:p>
+                  </a:txBody>
+                  <a:tcPr anchor="ctr" marL="91440" marR="91440" marT="0" marB="0">
+                    <a:lnL w="6350" cap="flat" cmpd="sng" algn="ctr">
+                      <a:solidFill>
+                        <a:srgbClr val="D9DCE3"/>
+                      </a:solidFill>
+                      <a:prstDash val="solid"/>
+                    </a:lnL>
+                    <a:lnR w="6350" cap="flat" cmpd="sng" algn="ctr">
+                      <a:solidFill>
+                        <a:srgbClr val="D9DCE3"/>
+                      </a:solidFill>
+                      <a:prstDash val="solid"/>
+                    </a:lnR>
+                    <a:lnT w="6350" cap="flat" cmpd="sng" algn="ctr">
+                      <a:solidFill>
+                        <a:srgbClr val="D9DCE3"/>
+                      </a:solidFill>
+                      <a:prstDash val="solid"/>
+                    </a:lnT>
+                    <a:lnB w="6350" cap="flat" cmpd="sng" algn="ctr">
+                      <a:solidFill>
+                        <a:srgbClr val="D9DCE3"/>
+                      </a:solidFill>
+                      <a:prstDash val="solid"/>
+                    </a:lnB>
+                    <a:solidFill>
+                      <a:srgbClr val="F3F4F6"/>
+                    </a:solidFill>
+                  </a:tcPr>
+                </a:tc>
+                <a:tc>
+                  <a:txBody>
+                    <a:bodyPr/>
+                    <a:lstStyle/>
+                    <a:p>
+                      <a:pPr algn="l"/>
+                      <a:r>
+                        <a:rPr lang="de-DE" sz="1400" dirty="0">
                           <a:solidFill>
                             <a:schemeClr val="tx1"/>
                           </a:solidFill>
                         </a:rPr>
-                        <a:t>Funktionen (Custom Designs, Zahlung)</a:t>
+                        <a:t>Freiheit beim Design</a:t>
                       </a:r>
                     </a:p>
                   </a:txBody>
                   <a:tcPr anchor="ctr" marL="91440" marR="91440" marT="27432" marB="27432">
-                    <a:lnL w="0">
-                      <a:noFill/>
+                    <a:lnL w="6350" cap="flat" cmpd="sng" algn="ctr">
+                      <a:solidFill>
+                        <a:srgbClr val="D9DCE3"/>
+                      </a:solidFill>
+                      <a:prstDash val="solid"/>
                     </a:lnL>
-                    <a:lnR w="0">
-                      <a:noFill/>
+                    <a:lnR w="6350" cap="flat" cmpd="sng" algn="ctr">
+                      <a:solidFill>
+                        <a:srgbClr val="D9DCE3"/>
+                      </a:solidFill>
+                      <a:prstDash val="solid"/>
                     </a:lnR>
-                    <a:lnT w="0">
-                      <a:noFill/>
+                    <a:lnT w="6350" cap="flat" cmpd="sng" algn="ctr">
+                      <a:solidFill>
+                        <a:srgbClr val="D9DCE3"/>
+                      </a:solidFill>
+                      <a:prstDash val="solid"/>
                     </a:lnT>
-                    <a:lnB w="9525" cap="flat" cmpd="sng" algn="ctr">
-                      <a:solidFill>
-                        <a:srgbClr val="E5E0F5"/>
+                    <a:lnB w="6350" cap="flat" cmpd="sng" algn="ctr">
+                      <a:solidFill>
+                        <a:srgbClr val="D9DCE3"/>
                       </a:solidFill>
                       <a:prstDash val="solid"/>
                     </a:lnB>
@@ -6242,7 +8188,7 @@
                     <a:p>
                       <a:pPr algn="ctr"/>
                       <a:r>
-                        <a:rPr lang="de-DE" sz="1300" b="1" dirty="0">
+                        <a:rPr lang="de-DE" sz="1400" dirty="0">
                           <a:solidFill>
                             <a:schemeClr val="accent6"/>
                           </a:solidFill>
@@ -6252,18 +8198,27 @@
                     </a:p>
                   </a:txBody>
                   <a:tcPr anchor="ctr" marL="91440" marR="91440" marT="27432" marB="27432">
-                    <a:lnL w="0">
-                      <a:noFill/>
+                    <a:lnL w="6350" cap="flat" cmpd="sng" algn="ctr">
+                      <a:solidFill>
+                        <a:srgbClr val="D9DCE3"/>
+                      </a:solidFill>
+                      <a:prstDash val="solid"/>
                     </a:lnL>
-                    <a:lnR w="0">
-                      <a:noFill/>
+                    <a:lnR w="6350" cap="flat" cmpd="sng" algn="ctr">
+                      <a:solidFill>
+                        <a:srgbClr val="D9DCE3"/>
+                      </a:solidFill>
+                      <a:prstDash val="solid"/>
                     </a:lnR>
-                    <a:lnT w="0">
-                      <a:noFill/>
+                    <a:lnT w="6350" cap="flat" cmpd="sng" algn="ctr">
+                      <a:solidFill>
+                        <a:srgbClr val="D9DCE3"/>
+                      </a:solidFill>
+                      <a:prstDash val="solid"/>
                     </a:lnT>
-                    <a:lnB w="9525" cap="flat" cmpd="sng" algn="ctr">
-                      <a:solidFill>
-                        <a:srgbClr val="E5E0F5"/>
+                    <a:lnB w="6350" cap="flat" cmpd="sng" algn="ctr">
+                      <a:solidFill>
+                        <a:srgbClr val="D9DCE3"/>
                       </a:solidFill>
                       <a:prstDash val="solid"/>
                     </a:lnB>
@@ -6284,36 +8239,37 @@
                             <a:schemeClr val="tx1"/>
                           </a:solidFill>
                         </a:rPr>
-                        <a:t>9 </a:t>
-                      </a:r>
-                      <a:r>
-                        <a:rPr lang="de-DE" sz="1100" dirty="0">
-                          <a:solidFill>
-                            <a:schemeClr val="accent6"/>
-                          </a:solidFill>
-                        </a:rPr>
-                        <a:t>(1,80)</a:t>
+                        <a:t>9</a:t>
                       </a:r>
                     </a:p>
                   </a:txBody>
                   <a:tcPr anchor="ctr" marL="91440" marR="91440" marT="27432" marB="27432">
-                    <a:lnL w="0">
-                      <a:noFill/>
+                    <a:lnL w="6350" cap="flat" cmpd="sng" algn="ctr">
+                      <a:solidFill>
+                        <a:srgbClr val="D9DCE3"/>
+                      </a:solidFill>
+                      <a:prstDash val="solid"/>
                     </a:lnL>
-                    <a:lnR w="0">
-                      <a:noFill/>
+                    <a:lnR w="6350" cap="flat" cmpd="sng" algn="ctr">
+                      <a:solidFill>
+                        <a:srgbClr val="D9DCE3"/>
+                      </a:solidFill>
+                      <a:prstDash val="solid"/>
                     </a:lnR>
-                    <a:lnT w="0">
-                      <a:noFill/>
+                    <a:lnT w="6350" cap="flat" cmpd="sng" algn="ctr">
+                      <a:solidFill>
+                        <a:srgbClr val="D9DCE3"/>
+                      </a:solidFill>
+                      <a:prstDash val="solid"/>
                     </a:lnT>
-                    <a:lnB w="9525" cap="flat" cmpd="sng" algn="ctr">
-                      <a:solidFill>
-                        <a:srgbClr val="E5E0F5"/>
+                    <a:lnB w="6350" cap="flat" cmpd="sng" algn="ctr">
+                      <a:solidFill>
+                        <a:srgbClr val="D9DCE3"/>
                       </a:solidFill>
                       <a:prstDash val="solid"/>
                     </a:lnB>
                     <a:solidFill>
-                      <a:schemeClr val="bg2"/>
+                      <a:srgbClr val="EDE7FF"/>
                     </a:solidFill>
                   </a:tcPr>
                 </a:tc>
@@ -6329,31 +8285,32 @@
                             <a:schemeClr val="tx1"/>
                           </a:solidFill>
                         </a:rPr>
-                        <a:t>4 </a:t>
-                      </a:r>
-                      <a:r>
-                        <a:rPr lang="de-DE" sz="1100" dirty="0">
-                          <a:solidFill>
-                            <a:schemeClr val="accent6"/>
-                          </a:solidFill>
-                        </a:rPr>
-                        <a:t>(0,80)</a:t>
+                        <a:t>10</a:t>
                       </a:r>
                     </a:p>
                   </a:txBody>
                   <a:tcPr anchor="ctr" marL="91440" marR="91440" marT="27432" marB="27432">
-                    <a:lnL w="0">
-                      <a:noFill/>
+                    <a:lnL w="6350" cap="flat" cmpd="sng" algn="ctr">
+                      <a:solidFill>
+                        <a:srgbClr val="D9DCE3"/>
+                      </a:solidFill>
+                      <a:prstDash val="solid"/>
                     </a:lnL>
-                    <a:lnR w="0">
-                      <a:noFill/>
+                    <a:lnR w="6350" cap="flat" cmpd="sng" algn="ctr">
+                      <a:solidFill>
+                        <a:srgbClr val="D9DCE3"/>
+                      </a:solidFill>
+                      <a:prstDash val="solid"/>
                     </a:lnR>
-                    <a:lnT w="0">
-                      <a:noFill/>
+                    <a:lnT w="6350" cap="flat" cmpd="sng" algn="ctr">
+                      <a:solidFill>
+                        <a:srgbClr val="D9DCE3"/>
+                      </a:solidFill>
+                      <a:prstDash val="solid"/>
                     </a:lnT>
-                    <a:lnB w="9525" cap="flat" cmpd="sng" algn="ctr">
-                      <a:solidFill>
-                        <a:srgbClr val="E5E0F5"/>
+                    <a:lnB w="6350" cap="flat" cmpd="sng" algn="ctr">
+                      <a:solidFill>
+                        <a:srgbClr val="D9DCE3"/>
                       </a:solidFill>
                       <a:prstDash val="solid"/>
                     </a:lnB>
@@ -6374,31 +8331,32 @@
                             <a:schemeClr val="tx1"/>
                           </a:solidFill>
                         </a:rPr>
-                        <a:t>8 </a:t>
-                      </a:r>
-                      <a:r>
-                        <a:rPr lang="de-DE" sz="1100" dirty="0">
-                          <a:solidFill>
-                            <a:schemeClr val="accent6"/>
-                          </a:solidFill>
-                        </a:rPr>
-                        <a:t>(1,60)</a:t>
+                        <a:t>7</a:t>
                       </a:r>
                     </a:p>
                   </a:txBody>
                   <a:tcPr anchor="ctr" marL="91440" marR="91440" marT="27432" marB="27432">
-                    <a:lnL w="0">
-                      <a:noFill/>
+                    <a:lnL w="6350" cap="flat" cmpd="sng" algn="ctr">
+                      <a:solidFill>
+                        <a:srgbClr val="D9DCE3"/>
+                      </a:solidFill>
+                      <a:prstDash val="solid"/>
                     </a:lnL>
-                    <a:lnR w="0">
-                      <a:noFill/>
+                    <a:lnR w="6350" cap="flat" cmpd="sng" algn="ctr">
+                      <a:solidFill>
+                        <a:srgbClr val="D9DCE3"/>
+                      </a:solidFill>
+                      <a:prstDash val="solid"/>
                     </a:lnR>
-                    <a:lnT w="0">
-                      <a:noFill/>
+                    <a:lnT w="6350" cap="flat" cmpd="sng" algn="ctr">
+                      <a:solidFill>
+                        <a:srgbClr val="D9DCE3"/>
+                      </a:solidFill>
+                      <a:prstDash val="solid"/>
                     </a:lnT>
-                    <a:lnB w="9525" cap="flat" cmpd="sng" algn="ctr">
-                      <a:solidFill>
-                        <a:srgbClr val="E5E0F5"/>
+                    <a:lnB w="6350" cap="flat" cmpd="sng" algn="ctr">
+                      <a:solidFill>
+                        <a:srgbClr val="D9DCE3"/>
                       </a:solidFill>
                       <a:prstDash val="solid"/>
                     </a:lnB>
@@ -6419,31 +8377,32 @@
                             <a:schemeClr val="tx1"/>
                           </a:solidFill>
                         </a:rPr>
-                        <a:t>8 </a:t>
-                      </a:r>
-                      <a:r>
-                        <a:rPr lang="de-DE" sz="1100" dirty="0">
-                          <a:solidFill>
-                            <a:schemeClr val="accent6"/>
-                          </a:solidFill>
-                        </a:rPr>
-                        <a:t>(1,60)</a:t>
+                        <a:t>5</a:t>
                       </a:r>
                     </a:p>
                   </a:txBody>
                   <a:tcPr anchor="ctr" marL="91440" marR="91440" marT="27432" marB="27432">
-                    <a:lnL w="0">
-                      <a:noFill/>
+                    <a:lnL w="6350" cap="flat" cmpd="sng" algn="ctr">
+                      <a:solidFill>
+                        <a:srgbClr val="D9DCE3"/>
+                      </a:solidFill>
+                      <a:prstDash val="solid"/>
                     </a:lnL>
-                    <a:lnR w="0">
-                      <a:noFill/>
+                    <a:lnR w="6350" cap="flat" cmpd="sng" algn="ctr">
+                      <a:solidFill>
+                        <a:srgbClr val="D9DCE3"/>
+                      </a:solidFill>
+                      <a:prstDash val="solid"/>
                     </a:lnR>
-                    <a:lnT w="0">
-                      <a:noFill/>
+                    <a:lnT w="6350" cap="flat" cmpd="sng" algn="ctr">
+                      <a:solidFill>
+                        <a:srgbClr val="D9DCE3"/>
+                      </a:solidFill>
+                      <a:prstDash val="solid"/>
                     </a:lnT>
-                    <a:lnB w="9525" cap="flat" cmpd="sng" algn="ctr">
-                      <a:solidFill>
-                        <a:srgbClr val="E5E0F5"/>
+                    <a:lnB w="6350" cap="flat" cmpd="sng" algn="ctr">
+                      <a:solidFill>
+                        <a:srgbClr val="D9DCE3"/>
                       </a:solidFill>
                       <a:prstDash val="solid"/>
                     </a:lnB>
@@ -6453,36 +8412,91 @@
                   </a:tcPr>
                 </a:tc>
               </a:tr>
-              <a:tr h="384048">
+              <a:tr h="329184">
                 <a:tc>
                   <a:txBody>
                     <a:bodyPr/>
                     <a:lstStyle/>
                     <a:p>
-                      <a:pPr/>
+                      <a:pPr algn="ctr"/>
                       <a:r>
-                        <a:rPr lang="de-DE" sz="1300" dirty="0">
+                        <a:rPr lang="de-DE" sz="800" dirty="0">
+                          <a:solidFill>
+                            <a:schemeClr val="accent6"/>
+                          </a:solidFill>
+                        </a:rPr>
+                        <a:t>7</a:t>
+                      </a:r>
+                    </a:p>
+                  </a:txBody>
+                  <a:tcPr anchor="ctr" marL="91440" marR="91440" marT="0" marB="0">
+                    <a:lnL w="6350" cap="flat" cmpd="sng" algn="ctr">
+                      <a:solidFill>
+                        <a:srgbClr val="D9DCE3"/>
+                      </a:solidFill>
+                      <a:prstDash val="solid"/>
+                    </a:lnL>
+                    <a:lnR w="6350" cap="flat" cmpd="sng" algn="ctr">
+                      <a:solidFill>
+                        <a:srgbClr val="D9DCE3"/>
+                      </a:solidFill>
+                      <a:prstDash val="solid"/>
+                    </a:lnR>
+                    <a:lnT w="6350" cap="flat" cmpd="sng" algn="ctr">
+                      <a:solidFill>
+                        <a:srgbClr val="D9DCE3"/>
+                      </a:solidFill>
+                      <a:prstDash val="solid"/>
+                    </a:lnT>
+                    <a:lnB w="6350" cap="flat" cmpd="sng" algn="ctr">
+                      <a:solidFill>
+                        <a:srgbClr val="D9DCE3"/>
+                      </a:solidFill>
+                      <a:prstDash val="solid"/>
+                    </a:lnB>
+                    <a:solidFill>
+                      <a:srgbClr val="F3F4F6"/>
+                    </a:solidFill>
+                  </a:tcPr>
+                </a:tc>
+                <a:tc>
+                  <a:txBody>
+                    <a:bodyPr/>
+                    <a:lstStyle/>
+                    <a:p>
+                      <a:pPr algn="l"/>
+                      <a:r>
+                        <a:rPr lang="de-DE" sz="1400" dirty="0">
                           <a:solidFill>
                             <a:schemeClr val="tx1"/>
                           </a:solidFill>
                         </a:rPr>
-                        <a:t>Rechtssicherheit / DSGVO</a:t>
+                        <a:t>Warenkorb und Zahlung</a:t>
                       </a:r>
                     </a:p>
                   </a:txBody>
                   <a:tcPr anchor="ctr" marL="91440" marR="91440" marT="27432" marB="27432">
-                    <a:lnL w="0">
-                      <a:noFill/>
+                    <a:lnL w="6350" cap="flat" cmpd="sng" algn="ctr">
+                      <a:solidFill>
+                        <a:srgbClr val="D9DCE3"/>
+                      </a:solidFill>
+                      <a:prstDash val="solid"/>
                     </a:lnL>
-                    <a:lnR w="0">
-                      <a:noFill/>
+                    <a:lnR w="6350" cap="flat" cmpd="sng" algn="ctr">
+                      <a:solidFill>
+                        <a:srgbClr val="D9DCE3"/>
+                      </a:solidFill>
+                      <a:prstDash val="solid"/>
                     </a:lnR>
-                    <a:lnT w="0">
-                      <a:noFill/>
+                    <a:lnT w="6350" cap="flat" cmpd="sng" algn="ctr">
+                      <a:solidFill>
+                        <a:srgbClr val="D9DCE3"/>
+                      </a:solidFill>
+                      <a:prstDash val="solid"/>
                     </a:lnT>
-                    <a:lnB w="9525" cap="flat" cmpd="sng" algn="ctr">
-                      <a:solidFill>
-                        <a:srgbClr val="E5E0F5"/>
+                    <a:lnB w="6350" cap="flat" cmpd="sng" algn="ctr">
+                      <a:solidFill>
+                        <a:srgbClr val="D9DCE3"/>
                       </a:solidFill>
                       <a:prstDash val="solid"/>
                     </a:lnB>
@@ -6498,7 +8512,7 @@
                     <a:p>
                       <a:pPr algn="ctr"/>
                       <a:r>
-                        <a:rPr lang="de-DE" sz="1300" b="1" dirty="0">
+                        <a:rPr lang="de-DE" sz="1400" dirty="0">
                           <a:solidFill>
                             <a:schemeClr val="accent6"/>
                           </a:solidFill>
@@ -6508,18 +8522,27 @@
                     </a:p>
                   </a:txBody>
                   <a:tcPr anchor="ctr" marL="91440" marR="91440" marT="27432" marB="27432">
-                    <a:lnL w="0">
-                      <a:noFill/>
+                    <a:lnL w="6350" cap="flat" cmpd="sng" algn="ctr">
+                      <a:solidFill>
+                        <a:srgbClr val="D9DCE3"/>
+                      </a:solidFill>
+                      <a:prstDash val="solid"/>
                     </a:lnL>
-                    <a:lnR w="0">
-                      <a:noFill/>
+                    <a:lnR w="6350" cap="flat" cmpd="sng" algn="ctr">
+                      <a:solidFill>
+                        <a:srgbClr val="D9DCE3"/>
+                      </a:solidFill>
+                      <a:prstDash val="solid"/>
                     </a:lnR>
-                    <a:lnT w="0">
-                      <a:noFill/>
+                    <a:lnT w="6350" cap="flat" cmpd="sng" algn="ctr">
+                      <a:solidFill>
+                        <a:srgbClr val="D9DCE3"/>
+                      </a:solidFill>
+                      <a:prstDash val="solid"/>
                     </a:lnT>
-                    <a:lnB w="9525" cap="flat" cmpd="sng" algn="ctr">
-                      <a:solidFill>
-                        <a:srgbClr val="E5E0F5"/>
+                    <a:lnB w="6350" cap="flat" cmpd="sng" algn="ctr">
+                      <a:solidFill>
+                        <a:srgbClr val="D9DCE3"/>
                       </a:solidFill>
                       <a:prstDash val="solid"/>
                     </a:lnB>
@@ -6540,36 +8563,37 @@
                             <a:schemeClr val="tx1"/>
                           </a:solidFill>
                         </a:rPr>
-                        <a:t>6 </a:t>
-                      </a:r>
-                      <a:r>
-                        <a:rPr lang="de-DE" sz="1100" dirty="0">
-                          <a:solidFill>
-                            <a:schemeClr val="accent6"/>
-                          </a:solidFill>
-                        </a:rPr>
-                        <a:t>(0,90)</a:t>
+                        <a:t>4</a:t>
                       </a:r>
                     </a:p>
                   </a:txBody>
                   <a:tcPr anchor="ctr" marL="91440" marR="91440" marT="27432" marB="27432">
-                    <a:lnL w="0">
-                      <a:noFill/>
+                    <a:lnL w="6350" cap="flat" cmpd="sng" algn="ctr">
+                      <a:solidFill>
+                        <a:srgbClr val="D9DCE3"/>
+                      </a:solidFill>
+                      <a:prstDash val="solid"/>
                     </a:lnL>
-                    <a:lnR w="0">
-                      <a:noFill/>
+                    <a:lnR w="6350" cap="flat" cmpd="sng" algn="ctr">
+                      <a:solidFill>
+                        <a:srgbClr val="D9DCE3"/>
+                      </a:solidFill>
+                      <a:prstDash val="solid"/>
                     </a:lnR>
-                    <a:lnT w="0">
-                      <a:noFill/>
+                    <a:lnT w="6350" cap="flat" cmpd="sng" algn="ctr">
+                      <a:solidFill>
+                        <a:srgbClr val="D9DCE3"/>
+                      </a:solidFill>
+                      <a:prstDash val="solid"/>
                     </a:lnT>
-                    <a:lnB w="9525" cap="flat" cmpd="sng" algn="ctr">
-                      <a:solidFill>
-                        <a:srgbClr val="E5E0F5"/>
+                    <a:lnB w="6350" cap="flat" cmpd="sng" algn="ctr">
+                      <a:solidFill>
+                        <a:srgbClr val="D9DCE3"/>
                       </a:solidFill>
                       <a:prstDash val="solid"/>
                     </a:lnB>
                     <a:solidFill>
-                      <a:schemeClr val="bg2"/>
+                      <a:srgbClr val="EDE7FF"/>
                     </a:solidFill>
                   </a:tcPr>
                 </a:tc>
@@ -6585,31 +8609,32 @@
                             <a:schemeClr val="tx1"/>
                           </a:solidFill>
                         </a:rPr>
-                        <a:t>9 </a:t>
-                      </a:r>
-                      <a:r>
-                        <a:rPr lang="de-DE" sz="1100" dirty="0">
-                          <a:solidFill>
-                            <a:schemeClr val="accent6"/>
-                          </a:solidFill>
-                        </a:rPr>
-                        <a:t>(1,35)</a:t>
+                        <a:t>4</a:t>
                       </a:r>
                     </a:p>
                   </a:txBody>
                   <a:tcPr anchor="ctr" marL="91440" marR="91440" marT="27432" marB="27432">
-                    <a:lnL w="0">
-                      <a:noFill/>
+                    <a:lnL w="6350" cap="flat" cmpd="sng" algn="ctr">
+                      <a:solidFill>
+                        <a:srgbClr val="D9DCE3"/>
+                      </a:solidFill>
+                      <a:prstDash val="solid"/>
                     </a:lnL>
-                    <a:lnR w="0">
-                      <a:noFill/>
+                    <a:lnR w="6350" cap="flat" cmpd="sng" algn="ctr">
+                      <a:solidFill>
+                        <a:srgbClr val="D9DCE3"/>
+                      </a:solidFill>
+                      <a:prstDash val="solid"/>
                     </a:lnR>
-                    <a:lnT w="0">
-                      <a:noFill/>
+                    <a:lnT w="6350" cap="flat" cmpd="sng" algn="ctr">
+                      <a:solidFill>
+                        <a:srgbClr val="D9DCE3"/>
+                      </a:solidFill>
+                      <a:prstDash val="solid"/>
                     </a:lnT>
-                    <a:lnB w="9525" cap="flat" cmpd="sng" algn="ctr">
-                      <a:solidFill>
-                        <a:srgbClr val="E5E0F5"/>
+                    <a:lnB w="6350" cap="flat" cmpd="sng" algn="ctr">
+                      <a:solidFill>
+                        <a:srgbClr val="D9DCE3"/>
                       </a:solidFill>
                       <a:prstDash val="solid"/>
                     </a:lnB>
@@ -6630,31 +8655,32 @@
                             <a:schemeClr val="tx1"/>
                           </a:solidFill>
                         </a:rPr>
-                        <a:t>8 </a:t>
-                      </a:r>
-                      <a:r>
-                        <a:rPr lang="de-DE" sz="1100" dirty="0">
-                          <a:solidFill>
-                            <a:schemeClr val="accent6"/>
-                          </a:solidFill>
-                        </a:rPr>
-                        <a:t>(1,20)</a:t>
+                        <a:t>10</a:t>
                       </a:r>
                     </a:p>
                   </a:txBody>
                   <a:tcPr anchor="ctr" marL="91440" marR="91440" marT="27432" marB="27432">
-                    <a:lnL w="0">
-                      <a:noFill/>
+                    <a:lnL w="6350" cap="flat" cmpd="sng" algn="ctr">
+                      <a:solidFill>
+                        <a:srgbClr val="D9DCE3"/>
+                      </a:solidFill>
+                      <a:prstDash val="solid"/>
                     </a:lnL>
-                    <a:lnR w="0">
-                      <a:noFill/>
+                    <a:lnR w="6350" cap="flat" cmpd="sng" algn="ctr">
+                      <a:solidFill>
+                        <a:srgbClr val="D9DCE3"/>
+                      </a:solidFill>
+                      <a:prstDash val="solid"/>
                     </a:lnR>
-                    <a:lnT w="0">
-                      <a:noFill/>
+                    <a:lnT w="6350" cap="flat" cmpd="sng" algn="ctr">
+                      <a:solidFill>
+                        <a:srgbClr val="D9DCE3"/>
+                      </a:solidFill>
+                      <a:prstDash val="solid"/>
                     </a:lnT>
-                    <a:lnB w="9525" cap="flat" cmpd="sng" algn="ctr">
-                      <a:solidFill>
-                        <a:srgbClr val="E5E0F5"/>
+                    <a:lnB w="6350" cap="flat" cmpd="sng" algn="ctr">
+                      <a:solidFill>
+                        <a:srgbClr val="D9DCE3"/>
                       </a:solidFill>
                       <a:prstDash val="solid"/>
                     </a:lnB>
@@ -6675,31 +8701,32 @@
                             <a:schemeClr val="tx1"/>
                           </a:solidFill>
                         </a:rPr>
-                        <a:t>9 </a:t>
-                      </a:r>
-                      <a:r>
-                        <a:rPr lang="de-DE" sz="1100" dirty="0">
-                          <a:solidFill>
-                            <a:schemeClr val="accent6"/>
-                          </a:solidFill>
-                        </a:rPr>
-                        <a:t>(1,35)</a:t>
+                        <a:t>6</a:t>
                       </a:r>
                     </a:p>
                   </a:txBody>
                   <a:tcPr anchor="ctr" marL="91440" marR="91440" marT="27432" marB="27432">
-                    <a:lnL w="0">
-                      <a:noFill/>
+                    <a:lnL w="6350" cap="flat" cmpd="sng" algn="ctr">
+                      <a:solidFill>
+                        <a:srgbClr val="D9DCE3"/>
+                      </a:solidFill>
+                      <a:prstDash val="solid"/>
                     </a:lnL>
-                    <a:lnR w="0">
-                      <a:noFill/>
+                    <a:lnR w="6350" cap="flat" cmpd="sng" algn="ctr">
+                      <a:solidFill>
+                        <a:srgbClr val="D9DCE3"/>
+                      </a:solidFill>
+                      <a:prstDash val="solid"/>
                     </a:lnR>
-                    <a:lnT w="0">
-                      <a:noFill/>
+                    <a:lnT w="6350" cap="flat" cmpd="sng" algn="ctr">
+                      <a:solidFill>
+                        <a:srgbClr val="D9DCE3"/>
+                      </a:solidFill>
+                      <a:prstDash val="solid"/>
                     </a:lnT>
-                    <a:lnB w="9525" cap="flat" cmpd="sng" algn="ctr">
-                      <a:solidFill>
-                        <a:srgbClr val="E5E0F5"/>
+                    <a:lnB w="6350" cap="flat" cmpd="sng" algn="ctr">
+                      <a:solidFill>
+                        <a:srgbClr val="D9DCE3"/>
                       </a:solidFill>
                       <a:prstDash val="solid"/>
                     </a:lnB>
@@ -6709,36 +8736,91 @@
                   </a:tcPr>
                 </a:tc>
               </a:tr>
-              <a:tr h="384048">
+              <a:tr h="329184">
                 <a:tc>
                   <a:txBody>
                     <a:bodyPr/>
                     <a:lstStyle/>
                     <a:p>
-                      <a:pPr/>
+                      <a:pPr algn="ctr"/>
                       <a:r>
-                        <a:rPr lang="de-DE" sz="1300" dirty="0">
+                        <a:rPr lang="de-DE" sz="800" dirty="0">
+                          <a:solidFill>
+                            <a:schemeClr val="accent6"/>
+                          </a:solidFill>
+                        </a:rPr>
+                        <a:t>8</a:t>
+                      </a:r>
+                    </a:p>
+                  </a:txBody>
+                  <a:tcPr anchor="ctr" marL="91440" marR="91440" marT="0" marB="0">
+                    <a:lnL w="6350" cap="flat" cmpd="sng" algn="ctr">
+                      <a:solidFill>
+                        <a:srgbClr val="D9DCE3"/>
+                      </a:solidFill>
+                      <a:prstDash val="solid"/>
+                    </a:lnL>
+                    <a:lnR w="6350" cap="flat" cmpd="sng" algn="ctr">
+                      <a:solidFill>
+                        <a:srgbClr val="D9DCE3"/>
+                      </a:solidFill>
+                      <a:prstDash val="solid"/>
+                    </a:lnR>
+                    <a:lnT w="6350" cap="flat" cmpd="sng" algn="ctr">
+                      <a:solidFill>
+                        <a:srgbClr val="D9DCE3"/>
+                      </a:solidFill>
+                      <a:prstDash val="solid"/>
+                    </a:lnT>
+                    <a:lnB w="6350" cap="flat" cmpd="sng" algn="ctr">
+                      <a:solidFill>
+                        <a:srgbClr val="D9DCE3"/>
+                      </a:solidFill>
+                      <a:prstDash val="solid"/>
+                    </a:lnB>
+                    <a:solidFill>
+                      <a:srgbClr val="F3F4F6"/>
+                    </a:solidFill>
+                  </a:tcPr>
+                </a:tc>
+                <a:tc>
+                  <a:txBody>
+                    <a:bodyPr/>
+                    <a:lstStyle/>
+                    <a:p>
+                      <a:pPr algn="l"/>
+                      <a:r>
+                        <a:rPr lang="de-DE" sz="1400" dirty="0">
                           <a:solidFill>
                             <a:schemeClr val="tx1"/>
                           </a:solidFill>
                         </a:rPr>
-                        <a:t>Design / Vorlagen</a:t>
+                        <a:t>Domain und Hosting inklusive</a:t>
                       </a:r>
                     </a:p>
                   </a:txBody>
                   <a:tcPr anchor="ctr" marL="91440" marR="91440" marT="27432" marB="27432">
-                    <a:lnL w="0">
-                      <a:noFill/>
+                    <a:lnL w="6350" cap="flat" cmpd="sng" algn="ctr">
+                      <a:solidFill>
+                        <a:srgbClr val="D9DCE3"/>
+                      </a:solidFill>
+                      <a:prstDash val="solid"/>
                     </a:lnL>
-                    <a:lnR w="0">
-                      <a:noFill/>
+                    <a:lnR w="6350" cap="flat" cmpd="sng" algn="ctr">
+                      <a:solidFill>
+                        <a:srgbClr val="D9DCE3"/>
+                      </a:solidFill>
+                      <a:prstDash val="solid"/>
                     </a:lnR>
-                    <a:lnT w="0">
-                      <a:noFill/>
+                    <a:lnT w="6350" cap="flat" cmpd="sng" algn="ctr">
+                      <a:solidFill>
+                        <a:srgbClr val="D9DCE3"/>
+                      </a:solidFill>
+                      <a:prstDash val="solid"/>
                     </a:lnT>
-                    <a:lnB w="9525" cap="flat" cmpd="sng" algn="ctr">
-                      <a:solidFill>
-                        <a:srgbClr val="E5E0F5"/>
+                    <a:lnB w="6350" cap="flat" cmpd="sng" algn="ctr">
+                      <a:solidFill>
+                        <a:srgbClr val="D9DCE3"/>
                       </a:solidFill>
                       <a:prstDash val="solid"/>
                     </a:lnB>
@@ -6754,28 +8836,37 @@
                     <a:p>
                       <a:pPr algn="ctr"/>
                       <a:r>
-                        <a:rPr lang="de-DE" sz="1300" b="1" dirty="0">
+                        <a:rPr lang="de-DE" sz="1400" dirty="0">
                           <a:solidFill>
                             <a:schemeClr val="accent6"/>
                           </a:solidFill>
                         </a:rPr>
-                        <a:t>10 %</a:t>
+                        <a:t>15 %</a:t>
                       </a:r>
                     </a:p>
                   </a:txBody>
                   <a:tcPr anchor="ctr" marL="91440" marR="91440" marT="27432" marB="27432">
-                    <a:lnL w="0">
-                      <a:noFill/>
+                    <a:lnL w="6350" cap="flat" cmpd="sng" algn="ctr">
+                      <a:solidFill>
+                        <a:srgbClr val="D9DCE3"/>
+                      </a:solidFill>
+                      <a:prstDash val="solid"/>
                     </a:lnL>
-                    <a:lnR w="0">
-                      <a:noFill/>
+                    <a:lnR w="6350" cap="flat" cmpd="sng" algn="ctr">
+                      <a:solidFill>
+                        <a:srgbClr val="D9DCE3"/>
+                      </a:solidFill>
+                      <a:prstDash val="solid"/>
                     </a:lnR>
-                    <a:lnT w="0">
-                      <a:noFill/>
+                    <a:lnT w="6350" cap="flat" cmpd="sng" algn="ctr">
+                      <a:solidFill>
+                        <a:srgbClr val="D9DCE3"/>
+                      </a:solidFill>
+                      <a:prstDash val="solid"/>
                     </a:lnT>
-                    <a:lnB w="9525" cap="flat" cmpd="sng" algn="ctr">
-                      <a:solidFill>
-                        <a:srgbClr val="E5E0F5"/>
+                    <a:lnB w="6350" cap="flat" cmpd="sng" algn="ctr">
+                      <a:solidFill>
+                        <a:srgbClr val="D9DCE3"/>
                       </a:solidFill>
                       <a:prstDash val="solid"/>
                     </a:lnB>
@@ -6796,36 +8887,37 @@
                             <a:schemeClr val="tx1"/>
                           </a:solidFill>
                         </a:rPr>
-                        <a:t>9 </a:t>
-                      </a:r>
-                      <a:r>
-                        <a:rPr lang="de-DE" sz="1100" dirty="0">
-                          <a:solidFill>
-                            <a:schemeClr val="accent6"/>
-                          </a:solidFill>
-                        </a:rPr>
-                        <a:t>(0,90)</a:t>
+                        <a:t>9</a:t>
                       </a:r>
                     </a:p>
                   </a:txBody>
                   <a:tcPr anchor="ctr" marL="91440" marR="91440" marT="27432" marB="27432">
-                    <a:lnL w="0">
-                      <a:noFill/>
+                    <a:lnL w="6350" cap="flat" cmpd="sng" algn="ctr">
+                      <a:solidFill>
+                        <a:srgbClr val="D9DCE3"/>
+                      </a:solidFill>
+                      <a:prstDash val="solid"/>
                     </a:lnL>
-                    <a:lnR w="0">
-                      <a:noFill/>
+                    <a:lnR w="6350" cap="flat" cmpd="sng" algn="ctr">
+                      <a:solidFill>
+                        <a:srgbClr val="D9DCE3"/>
+                      </a:solidFill>
+                      <a:prstDash val="solid"/>
                     </a:lnR>
-                    <a:lnT w="0">
-                      <a:noFill/>
+                    <a:lnT w="6350" cap="flat" cmpd="sng" algn="ctr">
+                      <a:solidFill>
+                        <a:srgbClr val="D9DCE3"/>
+                      </a:solidFill>
+                      <a:prstDash val="solid"/>
                     </a:lnT>
-                    <a:lnB w="9525" cap="flat" cmpd="sng" algn="ctr">
-                      <a:solidFill>
-                        <a:srgbClr val="E5E0F5"/>
+                    <a:lnB w="6350" cap="flat" cmpd="sng" algn="ctr">
+                      <a:solidFill>
+                        <a:srgbClr val="D9DCE3"/>
                       </a:solidFill>
                       <a:prstDash val="solid"/>
                     </a:lnB>
                     <a:solidFill>
-                      <a:schemeClr val="bg2"/>
+                      <a:srgbClr val="EDE7FF"/>
                     </a:solidFill>
                   </a:tcPr>
                 </a:tc>
@@ -6841,31 +8933,32 @@
                             <a:schemeClr val="tx1"/>
                           </a:solidFill>
                         </a:rPr>
-                        <a:t>6 </a:t>
-                      </a:r>
-                      <a:r>
-                        <a:rPr lang="de-DE" sz="1100" dirty="0">
-                          <a:solidFill>
-                            <a:schemeClr val="accent6"/>
-                          </a:solidFill>
-                        </a:rPr>
-                        <a:t>(0,60)</a:t>
+                        <a:t>1</a:t>
                       </a:r>
                     </a:p>
                   </a:txBody>
                   <a:tcPr anchor="ctr" marL="91440" marR="91440" marT="27432" marB="27432">
-                    <a:lnL w="0">
-                      <a:noFill/>
+                    <a:lnL w="6350" cap="flat" cmpd="sng" algn="ctr">
+                      <a:solidFill>
+                        <a:srgbClr val="D9DCE3"/>
+                      </a:solidFill>
+                      <a:prstDash val="solid"/>
                     </a:lnL>
-                    <a:lnR w="0">
-                      <a:noFill/>
+                    <a:lnR w="6350" cap="flat" cmpd="sng" algn="ctr">
+                      <a:solidFill>
+                        <a:srgbClr val="D9DCE3"/>
+                      </a:solidFill>
+                      <a:prstDash val="solid"/>
                     </a:lnR>
-                    <a:lnT w="0">
-                      <a:noFill/>
+                    <a:lnT w="6350" cap="flat" cmpd="sng" algn="ctr">
+                      <a:solidFill>
+                        <a:srgbClr val="D9DCE3"/>
+                      </a:solidFill>
+                      <a:prstDash val="solid"/>
                     </a:lnT>
-                    <a:lnB w="9525" cap="flat" cmpd="sng" algn="ctr">
-                      <a:solidFill>
-                        <a:srgbClr val="E5E0F5"/>
+                    <a:lnB w="6350" cap="flat" cmpd="sng" algn="ctr">
+                      <a:solidFill>
+                        <a:srgbClr val="D9DCE3"/>
                       </a:solidFill>
                       <a:prstDash val="solid"/>
                     </a:lnB>
@@ -6886,31 +8979,32 @@
                             <a:schemeClr val="tx1"/>
                           </a:solidFill>
                         </a:rPr>
-                        <a:t>7 </a:t>
-                      </a:r>
-                      <a:r>
-                        <a:rPr lang="de-DE" sz="1100" dirty="0">
-                          <a:solidFill>
-                            <a:schemeClr val="accent6"/>
-                          </a:solidFill>
-                        </a:rPr>
-                        <a:t>(0,70)</a:t>
+                        <a:t>9</a:t>
                       </a:r>
                     </a:p>
                   </a:txBody>
                   <a:tcPr anchor="ctr" marL="91440" marR="91440" marT="27432" marB="27432">
-                    <a:lnL w="0">
-                      <a:noFill/>
+                    <a:lnL w="6350" cap="flat" cmpd="sng" algn="ctr">
+                      <a:solidFill>
+                        <a:srgbClr val="D9DCE3"/>
+                      </a:solidFill>
+                      <a:prstDash val="solid"/>
                     </a:lnL>
-                    <a:lnR w="0">
-                      <a:noFill/>
+                    <a:lnR w="6350" cap="flat" cmpd="sng" algn="ctr">
+                      <a:solidFill>
+                        <a:srgbClr val="D9DCE3"/>
+                      </a:solidFill>
+                      <a:prstDash val="solid"/>
                     </a:lnR>
-                    <a:lnT w="0">
-                      <a:noFill/>
+                    <a:lnT w="6350" cap="flat" cmpd="sng" algn="ctr">
+                      <a:solidFill>
+                        <a:srgbClr val="D9DCE3"/>
+                      </a:solidFill>
+                      <a:prstDash val="solid"/>
                     </a:lnT>
-                    <a:lnB w="9525" cap="flat" cmpd="sng" algn="ctr">
-                      <a:solidFill>
-                        <a:srgbClr val="E5E0F5"/>
+                    <a:lnB w="6350" cap="flat" cmpd="sng" algn="ctr">
+                      <a:solidFill>
+                        <a:srgbClr val="D9DCE3"/>
                       </a:solidFill>
                       <a:prstDash val="solid"/>
                     </a:lnB>
@@ -6931,31 +9025,32 @@
                             <a:schemeClr val="tx1"/>
                           </a:solidFill>
                         </a:rPr>
-                        <a:t>6 </a:t>
-                      </a:r>
-                      <a:r>
-                        <a:rPr lang="de-DE" sz="1100" dirty="0">
-                          <a:solidFill>
-                            <a:schemeClr val="accent6"/>
-                          </a:solidFill>
-                        </a:rPr>
-                        <a:t>(0,60)</a:t>
+                        <a:t>8</a:t>
                       </a:r>
                     </a:p>
                   </a:txBody>
                   <a:tcPr anchor="ctr" marL="91440" marR="91440" marT="27432" marB="27432">
-                    <a:lnL w="0">
-                      <a:noFill/>
+                    <a:lnL w="6350" cap="flat" cmpd="sng" algn="ctr">
+                      <a:solidFill>
+                        <a:srgbClr val="D9DCE3"/>
+                      </a:solidFill>
+                      <a:prstDash val="solid"/>
                     </a:lnL>
-                    <a:lnR w="0">
-                      <a:noFill/>
+                    <a:lnR w="6350" cap="flat" cmpd="sng" algn="ctr">
+                      <a:solidFill>
+                        <a:srgbClr val="D9DCE3"/>
+                      </a:solidFill>
+                      <a:prstDash val="solid"/>
                     </a:lnR>
-                    <a:lnT w="0">
-                      <a:noFill/>
+                    <a:lnT w="6350" cap="flat" cmpd="sng" algn="ctr">
+                      <a:solidFill>
+                        <a:srgbClr val="D9DCE3"/>
+                      </a:solidFill>
+                      <a:prstDash val="solid"/>
                     </a:lnT>
-                    <a:lnB w="9525" cap="flat" cmpd="sng" algn="ctr">
-                      <a:solidFill>
-                        <a:srgbClr val="E5E0F5"/>
+                    <a:lnB w="6350" cap="flat" cmpd="sng" algn="ctr">
+                      <a:solidFill>
+                        <a:srgbClr val="D9DCE3"/>
                       </a:solidFill>
                       <a:prstDash val="solid"/>
                     </a:lnB>
@@ -6965,36 +9060,91 @@
                   </a:tcPr>
                 </a:tc>
               </a:tr>
-              <a:tr h="384048">
+              <a:tr h="329184">
                 <a:tc>
                   <a:txBody>
                     <a:bodyPr/>
                     <a:lstStyle/>
                     <a:p>
-                      <a:pPr/>
+                      <a:pPr algn="ctr"/>
                       <a:r>
-                        <a:rPr lang="de-DE" sz="1300" dirty="0">
+                        <a:rPr lang="de-DE" sz="800" dirty="0">
+                          <a:solidFill>
+                            <a:schemeClr val="accent6"/>
+                          </a:solidFill>
+                        </a:rPr>
+                        <a:t>9</a:t>
+                      </a:r>
+                    </a:p>
+                  </a:txBody>
+                  <a:tcPr anchor="ctr" marL="91440" marR="91440" marT="0" marB="0">
+                    <a:lnL w="6350" cap="flat" cmpd="sng" algn="ctr">
+                      <a:solidFill>
+                        <a:srgbClr val="D9DCE3"/>
+                      </a:solidFill>
+                      <a:prstDash val="solid"/>
+                    </a:lnL>
+                    <a:lnR w="6350" cap="flat" cmpd="sng" algn="ctr">
+                      <a:solidFill>
+                        <a:srgbClr val="D9DCE3"/>
+                      </a:solidFill>
+                      <a:prstDash val="solid"/>
+                    </a:lnR>
+                    <a:lnT w="6350" cap="flat" cmpd="sng" algn="ctr">
+                      <a:solidFill>
+                        <a:srgbClr val="D9DCE3"/>
+                      </a:solidFill>
+                      <a:prstDash val="solid"/>
+                    </a:lnT>
+                    <a:lnB w="6350" cap="flat" cmpd="sng" algn="ctr">
+                      <a:solidFill>
+                        <a:srgbClr val="D9DCE3"/>
+                      </a:solidFill>
+                      <a:prstDash val="solid"/>
+                    </a:lnB>
+                    <a:solidFill>
+                      <a:srgbClr val="F3F4F6"/>
+                    </a:solidFill>
+                  </a:tcPr>
+                </a:tc>
+                <a:tc>
+                  <a:txBody>
+                    <a:bodyPr/>
+                    <a:lstStyle/>
+                    <a:p>
+                      <a:pPr algn="l"/>
+                      <a:r>
+                        <a:rPr lang="de-DE" sz="1400" dirty="0">
                           <a:solidFill>
                             <a:schemeClr val="tx1"/>
                           </a:solidFill>
                         </a:rPr>
-                        <a:t>Support auf Deutsch</a:t>
+                        <a:t>Datenschutz (DSGVO)</a:t>
                       </a:r>
                     </a:p>
                   </a:txBody>
                   <a:tcPr anchor="ctr" marL="91440" marR="91440" marT="27432" marB="27432">
-                    <a:lnL w="0">
-                      <a:noFill/>
+                    <a:lnL w="6350" cap="flat" cmpd="sng" algn="ctr">
+                      <a:solidFill>
+                        <a:srgbClr val="D9DCE3"/>
+                      </a:solidFill>
+                      <a:prstDash val="solid"/>
                     </a:lnL>
-                    <a:lnR w="0">
-                      <a:noFill/>
+                    <a:lnR w="6350" cap="flat" cmpd="sng" algn="ctr">
+                      <a:solidFill>
+                        <a:srgbClr val="D9DCE3"/>
+                      </a:solidFill>
+                      <a:prstDash val="solid"/>
                     </a:lnR>
-                    <a:lnT w="0">
-                      <a:noFill/>
+                    <a:lnT w="6350" cap="flat" cmpd="sng" algn="ctr">
+                      <a:solidFill>
+                        <a:srgbClr val="D9DCE3"/>
+                      </a:solidFill>
+                      <a:prstDash val="solid"/>
                     </a:lnT>
-                    <a:lnB w="9525" cap="flat" cmpd="sng" algn="ctr">
-                      <a:solidFill>
-                        <a:srgbClr val="E5E0F5"/>
+                    <a:lnB w="6350" cap="flat" cmpd="sng" algn="ctr">
+                      <a:solidFill>
+                        <a:srgbClr val="D9DCE3"/>
                       </a:solidFill>
                       <a:prstDash val="solid"/>
                     </a:lnB>
@@ -7010,7 +9160,7 @@
                     <a:p>
                       <a:pPr algn="ctr"/>
                       <a:r>
-                        <a:rPr lang="de-DE" sz="1300" b="1" dirty="0">
+                        <a:rPr lang="de-DE" sz="1400" dirty="0">
                           <a:solidFill>
                             <a:schemeClr val="accent6"/>
                           </a:solidFill>
@@ -7020,18 +9170,27 @@
                     </a:p>
                   </a:txBody>
                   <a:tcPr anchor="ctr" marL="91440" marR="91440" marT="27432" marB="27432">
-                    <a:lnL w="0">
-                      <a:noFill/>
+                    <a:lnL w="6350" cap="flat" cmpd="sng" algn="ctr">
+                      <a:solidFill>
+                        <a:srgbClr val="D9DCE3"/>
+                      </a:solidFill>
+                      <a:prstDash val="solid"/>
                     </a:lnL>
-                    <a:lnR w="0">
-                      <a:noFill/>
+                    <a:lnR w="6350" cap="flat" cmpd="sng" algn="ctr">
+                      <a:solidFill>
+                        <a:srgbClr val="D9DCE3"/>
+                      </a:solidFill>
+                      <a:prstDash val="solid"/>
                     </a:lnR>
-                    <a:lnT w="0">
-                      <a:noFill/>
+                    <a:lnT w="6350" cap="flat" cmpd="sng" algn="ctr">
+                      <a:solidFill>
+                        <a:srgbClr val="D9DCE3"/>
+                      </a:solidFill>
+                      <a:prstDash val="solid"/>
                     </a:lnT>
-                    <a:lnB w="9525" cap="flat" cmpd="sng" algn="ctr">
-                      <a:solidFill>
-                        <a:srgbClr val="E5E0F5"/>
+                    <a:lnB w="6350" cap="flat" cmpd="sng" algn="ctr">
+                      <a:solidFill>
+                        <a:srgbClr val="D9DCE3"/>
                       </a:solidFill>
                       <a:prstDash val="solid"/>
                     </a:lnB>
@@ -7052,36 +9211,37 @@
                             <a:schemeClr val="tx1"/>
                           </a:solidFill>
                         </a:rPr>
-                        <a:t>7 </a:t>
-                      </a:r>
-                      <a:r>
-                        <a:rPr lang="de-DE" sz="1100" dirty="0">
-                          <a:solidFill>
-                            <a:schemeClr val="accent6"/>
-                          </a:solidFill>
-                        </a:rPr>
-                        <a:t>(0,70)</a:t>
+                        <a:t>5</a:t>
                       </a:r>
                     </a:p>
                   </a:txBody>
                   <a:tcPr anchor="ctr" marL="91440" marR="91440" marT="27432" marB="27432">
-                    <a:lnL w="0">
-                      <a:noFill/>
+                    <a:lnL w="6350" cap="flat" cmpd="sng" algn="ctr">
+                      <a:solidFill>
+                        <a:srgbClr val="D9DCE3"/>
+                      </a:solidFill>
+                      <a:prstDash val="solid"/>
                     </a:lnL>
-                    <a:lnR w="0">
-                      <a:noFill/>
+                    <a:lnR w="6350" cap="flat" cmpd="sng" algn="ctr">
+                      <a:solidFill>
+                        <a:srgbClr val="D9DCE3"/>
+                      </a:solidFill>
+                      <a:prstDash val="solid"/>
                     </a:lnR>
-                    <a:lnT w="0">
-                      <a:noFill/>
+                    <a:lnT w="6350" cap="flat" cmpd="sng" algn="ctr">
+                      <a:solidFill>
+                        <a:srgbClr val="D9DCE3"/>
+                      </a:solidFill>
+                      <a:prstDash val="solid"/>
                     </a:lnT>
-                    <a:lnB w="9525" cap="flat" cmpd="sng" algn="ctr">
-                      <a:solidFill>
-                        <a:srgbClr val="E5E0F5"/>
+                    <a:lnB w="6350" cap="flat" cmpd="sng" algn="ctr">
+                      <a:solidFill>
+                        <a:srgbClr val="D9DCE3"/>
                       </a:solidFill>
                       <a:prstDash val="solid"/>
                     </a:lnB>
                     <a:solidFill>
-                      <a:schemeClr val="bg2"/>
+                      <a:srgbClr val="EDE7FF"/>
                     </a:solidFill>
                   </a:tcPr>
                 </a:tc>
@@ -7097,31 +9257,32 @@
                             <a:schemeClr val="tx1"/>
                           </a:solidFill>
                         </a:rPr>
-                        <a:t>9 </a:t>
-                      </a:r>
-                      <a:r>
-                        <a:rPr lang="de-DE" sz="1100" dirty="0">
-                          <a:solidFill>
-                            <a:schemeClr val="accent6"/>
-                          </a:solidFill>
-                        </a:rPr>
-                        <a:t>(0,90)</a:t>
+                        <a:t>5</a:t>
                       </a:r>
                     </a:p>
                   </a:txBody>
                   <a:tcPr anchor="ctr" marL="91440" marR="91440" marT="27432" marB="27432">
-                    <a:lnL w="0">
-                      <a:noFill/>
+                    <a:lnL w="6350" cap="flat" cmpd="sng" algn="ctr">
+                      <a:solidFill>
+                        <a:srgbClr val="D9DCE3"/>
+                      </a:solidFill>
+                      <a:prstDash val="solid"/>
                     </a:lnL>
-                    <a:lnR w="0">
-                      <a:noFill/>
+                    <a:lnR w="6350" cap="flat" cmpd="sng" algn="ctr">
+                      <a:solidFill>
+                        <a:srgbClr val="D9DCE3"/>
+                      </a:solidFill>
+                      <a:prstDash val="solid"/>
                     </a:lnR>
-                    <a:lnT w="0">
-                      <a:noFill/>
+                    <a:lnT w="6350" cap="flat" cmpd="sng" algn="ctr">
+                      <a:solidFill>
+                        <a:srgbClr val="D9DCE3"/>
+                      </a:solidFill>
+                      <a:prstDash val="solid"/>
                     </a:lnT>
-                    <a:lnB w="9525" cap="flat" cmpd="sng" algn="ctr">
-                      <a:solidFill>
-                        <a:srgbClr val="E5E0F5"/>
+                    <a:lnB w="6350" cap="flat" cmpd="sng" algn="ctr">
+                      <a:solidFill>
+                        <a:srgbClr val="D9DCE3"/>
                       </a:solidFill>
                       <a:prstDash val="solid"/>
                     </a:lnB>
@@ -7142,31 +9303,32 @@
                             <a:schemeClr val="tx1"/>
                           </a:solidFill>
                         </a:rPr>
-                        <a:t>4 </a:t>
-                      </a:r>
-                      <a:r>
-                        <a:rPr lang="de-DE" sz="1100" dirty="0">
-                          <a:solidFill>
-                            <a:schemeClr val="accent6"/>
-                          </a:solidFill>
-                        </a:rPr>
-                        <a:t>(0,40)</a:t>
+                        <a:t>6</a:t>
                       </a:r>
                     </a:p>
                   </a:txBody>
                   <a:tcPr anchor="ctr" marL="91440" marR="91440" marT="27432" marB="27432">
-                    <a:lnL w="0">
-                      <a:noFill/>
+                    <a:lnL w="6350" cap="flat" cmpd="sng" algn="ctr">
+                      <a:solidFill>
+                        <a:srgbClr val="D9DCE3"/>
+                      </a:solidFill>
+                      <a:prstDash val="solid"/>
                     </a:lnL>
-                    <a:lnR w="0">
-                      <a:noFill/>
+                    <a:lnR w="6350" cap="flat" cmpd="sng" algn="ctr">
+                      <a:solidFill>
+                        <a:srgbClr val="D9DCE3"/>
+                      </a:solidFill>
+                      <a:prstDash val="solid"/>
                     </a:lnR>
-                    <a:lnT w="0">
-                      <a:noFill/>
+                    <a:lnT w="6350" cap="flat" cmpd="sng" algn="ctr">
+                      <a:solidFill>
+                        <a:srgbClr val="D9DCE3"/>
+                      </a:solidFill>
+                      <a:prstDash val="solid"/>
                     </a:lnT>
-                    <a:lnB w="9525" cap="flat" cmpd="sng" algn="ctr">
-                      <a:solidFill>
-                        <a:srgbClr val="E5E0F5"/>
+                    <a:lnB w="6350" cap="flat" cmpd="sng" algn="ctr">
+                      <a:solidFill>
+                        <a:srgbClr val="D9DCE3"/>
                       </a:solidFill>
                       <a:prstDash val="solid"/>
                     </a:lnB>
@@ -7187,31 +9349,32 @@
                             <a:schemeClr val="tx1"/>
                           </a:solidFill>
                         </a:rPr>
-                        <a:t>7 </a:t>
-                      </a:r>
-                      <a:r>
-                        <a:rPr lang="de-DE" sz="1100" dirty="0">
-                          <a:solidFill>
-                            <a:schemeClr val="accent6"/>
-                          </a:solidFill>
-                        </a:rPr>
-                        <a:t>(0,70)</a:t>
+                        <a:t>9</a:t>
                       </a:r>
                     </a:p>
                   </a:txBody>
                   <a:tcPr anchor="ctr" marL="91440" marR="91440" marT="27432" marB="27432">
-                    <a:lnL w="0">
-                      <a:noFill/>
+                    <a:lnL w="6350" cap="flat" cmpd="sng" algn="ctr">
+                      <a:solidFill>
+                        <a:srgbClr val="D9DCE3"/>
+                      </a:solidFill>
+                      <a:prstDash val="solid"/>
                     </a:lnL>
-                    <a:lnR w="0">
-                      <a:noFill/>
+                    <a:lnR w="6350" cap="flat" cmpd="sng" algn="ctr">
+                      <a:solidFill>
+                        <a:srgbClr val="D9DCE3"/>
+                      </a:solidFill>
+                      <a:prstDash val="solid"/>
                     </a:lnR>
-                    <a:lnT w="0">
-                      <a:noFill/>
+                    <a:lnT w="6350" cap="flat" cmpd="sng" algn="ctr">
+                      <a:solidFill>
+                        <a:srgbClr val="D9DCE3"/>
+                      </a:solidFill>
+                      <a:prstDash val="solid"/>
                     </a:lnT>
-                    <a:lnB w="9525" cap="flat" cmpd="sng" algn="ctr">
-                      <a:solidFill>
-                        <a:srgbClr val="E5E0F5"/>
+                    <a:lnB w="6350" cap="flat" cmpd="sng" algn="ctr">
+                      <a:solidFill>
+                        <a:srgbClr val="D9DCE3"/>
                       </a:solidFill>
                       <a:prstDash val="solid"/>
                     </a:lnB>
@@ -7221,13 +9384,59 @@
                   </a:tcPr>
                 </a:tc>
               </a:tr>
-              <a:tr h="457200">
+              <a:tr h="365760">
                 <a:tc>
                   <a:txBody>
                     <a:bodyPr/>
                     <a:lstStyle/>
                     <a:p>
-                      <a:pPr/>
+                      <a:pPr algn="ctr"/>
+                      <a:r>
+                        <a:rPr lang="de-DE" sz="800" dirty="0">
+                          <a:solidFill>
+                            <a:schemeClr val="accent6"/>
+                          </a:solidFill>
+                        </a:rPr>
+                        <a:t>10</a:t>
+                      </a:r>
+                    </a:p>
+                  </a:txBody>
+                  <a:tcPr anchor="ctr" marL="91440" marR="91440" marT="0" marB="0">
+                    <a:lnL w="6350" cap="flat" cmpd="sng" algn="ctr">
+                      <a:solidFill>
+                        <a:srgbClr val="D9DCE3"/>
+                      </a:solidFill>
+                      <a:prstDash val="solid"/>
+                    </a:lnL>
+                    <a:lnR w="6350" cap="flat" cmpd="sng" algn="ctr">
+                      <a:solidFill>
+                        <a:srgbClr val="D9DCE3"/>
+                      </a:solidFill>
+                      <a:prstDash val="solid"/>
+                    </a:lnR>
+                    <a:lnT w="6350" cap="flat" cmpd="sng" algn="ctr">
+                      <a:solidFill>
+                        <a:srgbClr val="D9DCE3"/>
+                      </a:solidFill>
+                      <a:prstDash val="solid"/>
+                    </a:lnT>
+                    <a:lnB w="6350" cap="flat" cmpd="sng" algn="ctr">
+                      <a:solidFill>
+                        <a:srgbClr val="D9DCE3"/>
+                      </a:solidFill>
+                      <a:prstDash val="solid"/>
+                    </a:lnB>
+                    <a:solidFill>
+                      <a:srgbClr val="F3F4F6"/>
+                    </a:solidFill>
+                  </a:tcPr>
+                </a:tc>
+                <a:tc>
+                  <a:txBody>
+                    <a:bodyPr/>
+                    <a:lstStyle/>
+                    <a:p>
+                      <a:pPr algn="l"/>
                       <a:r>
                         <a:rPr lang="de-DE" sz="1400" b="1" dirty="0">
                           <a:solidFill>
@@ -7239,23 +9448,32 @@
                     </a:p>
                   </a:txBody>
                   <a:tcPr anchor="ctr" marL="91440" marR="91440" marT="27432" marB="27432">
-                    <a:lnL w="0">
-                      <a:noFill/>
+                    <a:lnL w="6350" cap="flat" cmpd="sng" algn="ctr">
+                      <a:solidFill>
+                        <a:srgbClr val="D9DCE3"/>
+                      </a:solidFill>
+                      <a:prstDash val="solid"/>
                     </a:lnL>
-                    <a:lnR w="0">
-                      <a:noFill/>
+                    <a:lnR w="6350" cap="flat" cmpd="sng" algn="ctr">
+                      <a:solidFill>
+                        <a:srgbClr val="D9DCE3"/>
+                      </a:solidFill>
+                      <a:prstDash val="solid"/>
                     </a:lnR>
-                    <a:lnT w="19050" cap="flat" cmpd="sng" algn="ctr">
-                      <a:solidFill>
-                        <a:schemeClr val="accent1"/>
+                    <a:lnT w="6350" cap="flat" cmpd="sng" algn="ctr">
+                      <a:solidFill>
+                        <a:srgbClr val="D9DCE3"/>
                       </a:solidFill>
                       <a:prstDash val="solid"/>
                     </a:lnT>
-                    <a:lnB w="0">
-                      <a:noFill/>
+                    <a:lnB w="6350" cap="flat" cmpd="sng" algn="ctr">
+                      <a:solidFill>
+                        <a:srgbClr val="D9DCE3"/>
+                      </a:solidFill>
+                      <a:prstDash val="solid"/>
                     </a:lnB>
                     <a:solidFill>
-                      <a:schemeClr val="bg1"/>
+                      <a:schemeClr val="bg2"/>
                     </a:solidFill>
                   </a:tcPr>
                 </a:tc>
@@ -7276,23 +9494,32 @@
                     </a:p>
                   </a:txBody>
                   <a:tcPr anchor="ctr" marL="91440" marR="91440" marT="27432" marB="27432">
-                    <a:lnL w="0">
-                      <a:noFill/>
+                    <a:lnL w="6350" cap="flat" cmpd="sng" algn="ctr">
+                      <a:solidFill>
+                        <a:srgbClr val="D9DCE3"/>
+                      </a:solidFill>
+                      <a:prstDash val="solid"/>
                     </a:lnL>
-                    <a:lnR w="0">
-                      <a:noFill/>
+                    <a:lnR w="6350" cap="flat" cmpd="sng" algn="ctr">
+                      <a:solidFill>
+                        <a:srgbClr val="D9DCE3"/>
+                      </a:solidFill>
+                      <a:prstDash val="solid"/>
                     </a:lnR>
-                    <a:lnT w="19050" cap="flat" cmpd="sng" algn="ctr">
-                      <a:solidFill>
-                        <a:schemeClr val="accent1"/>
+                    <a:lnT w="6350" cap="flat" cmpd="sng" algn="ctr">
+                      <a:solidFill>
+                        <a:srgbClr val="D9DCE3"/>
                       </a:solidFill>
                       <a:prstDash val="solid"/>
                     </a:lnT>
-                    <a:lnB w="0">
-                      <a:noFill/>
+                    <a:lnB w="6350" cap="flat" cmpd="sng" algn="ctr">
+                      <a:solidFill>
+                        <a:srgbClr val="D9DCE3"/>
+                      </a:solidFill>
+                      <a:prstDash val="solid"/>
                     </a:lnB>
                     <a:solidFill>
-                      <a:schemeClr val="bg1"/>
+                      <a:schemeClr val="bg2"/>
                     </a:solidFill>
                   </a:tcPr>
                 </a:tc>
@@ -7303,33 +9530,88 @@
                     <a:p>
                       <a:pPr algn="ctr"/>
                       <a:r>
-                        <a:rPr lang="de-DE" sz="1800" b="1" dirty="0">
+                        <a:rPr lang="de-DE" sz="1600" b="1" dirty="0">
                           <a:solidFill>
                             <a:schemeClr val="bg1"/>
                           </a:solidFill>
                         </a:rPr>
-                        <a:t>7,85</a:t>
+                        <a:t>7,65</a:t>
                       </a:r>
                     </a:p>
                   </a:txBody>
                   <a:tcPr anchor="ctr" marL="91440" marR="91440" marT="27432" marB="27432">
-                    <a:lnL w="0">
-                      <a:noFill/>
+                    <a:lnL w="6350" cap="flat" cmpd="sng" algn="ctr">
+                      <a:solidFill>
+                        <a:srgbClr val="D9DCE3"/>
+                      </a:solidFill>
+                      <a:prstDash val="solid"/>
                     </a:lnL>
-                    <a:lnR w="0">
-                      <a:noFill/>
+                    <a:lnR w="6350" cap="flat" cmpd="sng" algn="ctr">
+                      <a:solidFill>
+                        <a:srgbClr val="D9DCE3"/>
+                      </a:solidFill>
+                      <a:prstDash val="solid"/>
                     </a:lnR>
-                    <a:lnT w="19050" cap="flat" cmpd="sng" algn="ctr">
-                      <a:solidFill>
-                        <a:schemeClr val="accent1"/>
+                    <a:lnT w="6350" cap="flat" cmpd="sng" algn="ctr">
+                      <a:solidFill>
+                        <a:srgbClr val="D9DCE3"/>
                       </a:solidFill>
                       <a:prstDash val="solid"/>
                     </a:lnT>
-                    <a:lnB w="0">
-                      <a:noFill/>
+                    <a:lnB w="6350" cap="flat" cmpd="sng" algn="ctr">
+                      <a:solidFill>
+                        <a:srgbClr val="D9DCE3"/>
+                      </a:solidFill>
+                      <a:prstDash val="solid"/>
                     </a:lnB>
                     <a:solidFill>
                       <a:schemeClr val="accent1"/>
+                    </a:solidFill>
+                  </a:tcPr>
+                </a:tc>
+                <a:tc>
+                  <a:txBody>
+                    <a:bodyPr/>
+                    <a:lstStyle/>
+                    <a:p>
+                      <a:pPr algn="ctr"/>
+                      <a:r>
+                        <a:rPr lang="de-DE" sz="1600" b="1" dirty="0">
+                          <a:solidFill>
+                            <a:schemeClr val="tx1"/>
+                          </a:solidFill>
+                        </a:rPr>
+                        <a:t>5,65</a:t>
+                      </a:r>
+                    </a:p>
+                  </a:txBody>
+                  <a:tcPr anchor="ctr" marL="91440" marR="91440" marT="27432" marB="27432">
+                    <a:lnL w="6350" cap="flat" cmpd="sng" algn="ctr">
+                      <a:solidFill>
+                        <a:srgbClr val="D9DCE3"/>
+                      </a:solidFill>
+                      <a:prstDash val="solid"/>
+                    </a:lnL>
+                    <a:lnR w="6350" cap="flat" cmpd="sng" algn="ctr">
+                      <a:solidFill>
+                        <a:srgbClr val="D9DCE3"/>
+                      </a:solidFill>
+                      <a:prstDash val="solid"/>
+                    </a:lnR>
+                    <a:lnT w="6350" cap="flat" cmpd="sng" algn="ctr">
+                      <a:solidFill>
+                        <a:srgbClr val="D9DCE3"/>
+                      </a:solidFill>
+                      <a:prstDash val="solid"/>
+                    </a:lnT>
+                    <a:lnB w="6350" cap="flat" cmpd="sng" algn="ctr">
+                      <a:solidFill>
+                        <a:srgbClr val="D9DCE3"/>
+                      </a:solidFill>
+                      <a:prstDash val="solid"/>
+                    </a:lnB>
+                    <a:solidFill>
+                      <a:schemeClr val="bg2"/>
                     </a:solidFill>
                   </a:tcPr>
                 </a:tc>
@@ -7350,23 +9632,32 @@
                     </a:p>
                   </a:txBody>
                   <a:tcPr anchor="ctr" marL="91440" marR="91440" marT="27432" marB="27432">
-                    <a:lnL w="0">
-                      <a:noFill/>
+                    <a:lnL w="6350" cap="flat" cmpd="sng" algn="ctr">
+                      <a:solidFill>
+                        <a:srgbClr val="D9DCE3"/>
+                      </a:solidFill>
+                      <a:prstDash val="solid"/>
                     </a:lnL>
-                    <a:lnR w="0">
-                      <a:noFill/>
+                    <a:lnR w="6350" cap="flat" cmpd="sng" algn="ctr">
+                      <a:solidFill>
+                        <a:srgbClr val="D9DCE3"/>
+                      </a:solidFill>
+                      <a:prstDash val="solid"/>
                     </a:lnR>
-                    <a:lnT w="19050" cap="flat" cmpd="sng" algn="ctr">
-                      <a:solidFill>
-                        <a:schemeClr val="accent1"/>
+                    <a:lnT w="6350" cap="flat" cmpd="sng" algn="ctr">
+                      <a:solidFill>
+                        <a:srgbClr val="D9DCE3"/>
                       </a:solidFill>
                       <a:prstDash val="solid"/>
                     </a:lnT>
-                    <a:lnB w="0">
-                      <a:noFill/>
+                    <a:lnB w="6350" cap="flat" cmpd="sng" algn="ctr">
+                      <a:solidFill>
+                        <a:srgbClr val="D9DCE3"/>
+                      </a:solidFill>
+                      <a:prstDash val="solid"/>
                     </a:lnB>
                     <a:solidFill>
-                      <a:schemeClr val="bg1"/>
+                      <a:schemeClr val="bg2"/>
                     </a:solidFill>
                   </a:tcPr>
                 </a:tc>
@@ -7382,65 +9673,37 @@
                             <a:schemeClr val="tx1"/>
                           </a:solidFill>
                         </a:rPr>
-                        <a:t>6,20</a:t>
+                        <a:t>6,85</a:t>
                       </a:r>
                     </a:p>
                   </a:txBody>
                   <a:tcPr anchor="ctr" marL="91440" marR="91440" marT="27432" marB="27432">
-                    <a:lnL w="0">
-                      <a:noFill/>
+                    <a:lnL w="6350" cap="flat" cmpd="sng" algn="ctr">
+                      <a:solidFill>
+                        <a:srgbClr val="D9DCE3"/>
+                      </a:solidFill>
+                      <a:prstDash val="solid"/>
                     </a:lnL>
-                    <a:lnR w="0">
-                      <a:noFill/>
+                    <a:lnR w="6350" cap="flat" cmpd="sng" algn="ctr">
+                      <a:solidFill>
+                        <a:srgbClr val="D9DCE3"/>
+                      </a:solidFill>
+                      <a:prstDash val="solid"/>
                     </a:lnR>
-                    <a:lnT w="19050" cap="flat" cmpd="sng" algn="ctr">
-                      <a:solidFill>
-                        <a:schemeClr val="accent1"/>
+                    <a:lnT w="6350" cap="flat" cmpd="sng" algn="ctr">
+                      <a:solidFill>
+                        <a:srgbClr val="D9DCE3"/>
                       </a:solidFill>
                       <a:prstDash val="solid"/>
                     </a:lnT>
-                    <a:lnB w="0">
-                      <a:noFill/>
+                    <a:lnB w="6350" cap="flat" cmpd="sng" algn="ctr">
+                      <a:solidFill>
+                        <a:srgbClr val="D9DCE3"/>
+                      </a:solidFill>
+                      <a:prstDash val="solid"/>
                     </a:lnB>
                     <a:solidFill>
-                      <a:schemeClr val="bg1"/>
-                    </a:solidFill>
-                  </a:tcPr>
-                </a:tc>
-                <a:tc>
-                  <a:txBody>
-                    <a:bodyPr/>
-                    <a:lstStyle/>
-                    <a:p>
-                      <a:pPr algn="ctr"/>
-                      <a:r>
-                        <a:rPr lang="de-DE" sz="1600" b="1" dirty="0">
-                          <a:solidFill>
-                            <a:schemeClr val="tx1"/>
-                          </a:solidFill>
-                        </a:rPr>
-                        <a:t>6,05</a:t>
-                      </a:r>
-                    </a:p>
-                  </a:txBody>
-                  <a:tcPr anchor="ctr" marL="91440" marR="91440" marT="27432" marB="27432">
-                    <a:lnL w="0">
-                      <a:noFill/>
-                    </a:lnL>
-                    <a:lnR w="0">
-                      <a:noFill/>
-                    </a:lnR>
-                    <a:lnT w="19050" cap="flat" cmpd="sng" algn="ctr">
-                      <a:solidFill>
-                        <a:schemeClr val="accent1"/>
-                      </a:solidFill>
-                      <a:prstDash val="solid"/>
-                    </a:lnT>
-                    <a:lnB w="0">
-                      <a:noFill/>
-                    </a:lnB>
-                    <a:solidFill>
-                      <a:schemeClr val="bg1"/>
+                      <a:schemeClr val="bg2"/>
                     </a:solidFill>
                   </a:tcPr>
                 </a:tc>
@@ -7457,7 +9720,7 @@
         </p:nvSpPr>
         <p:spPr>
           <a:xfrm>
-            <a:off x="548640" y="5230368"/>
+            <a:off x="548640" y="5321808"/>
             <a:ext cx="11091672" cy="502920"/>
           </a:xfrm>
           <a:prstGeom prst="roundRect">
@@ -7487,7 +9750,7 @@
         </p:blipFill>
         <p:spPr>
           <a:xfrm>
-            <a:off x="777240" y="5344668"/>
+            <a:off x="777240" y="5431536"/>
             <a:ext cx="274320" cy="274320"/>
           </a:xfrm>
           <a:prstGeom prst="rect">
@@ -7503,7 +9766,7 @@
         </p:nvSpPr>
         <p:spPr>
           <a:xfrm>
-            <a:off x="1188720" y="5230368"/>
+            <a:off x="1188720" y="5321808"/>
             <a:ext cx="10241280" cy="502920"/>
           </a:xfrm>
           <a:prstGeom prst="rect">
@@ -7533,7 +9796,7 @@
                   <a:schemeClr val="bg1"/>
                 </a:solidFill>
               </a:rPr>
-              <a:t>Shopify gewinnt knapp vor Jimdo, weil sich Custom Designs dort am einfachsten umsetzen lassen.</a:t>
+              <a:t>Netlify gewinnt knapp vor Shopify: kostenlos und volle Freiheit beim Design.</a:t>
             </a:r>
             <a:endParaRPr lang="de-DE" sz="1600" dirty="0"/>
           </a:p>
@@ -7547,8 +9810,8 @@
         </p:nvSpPr>
         <p:spPr>
           <a:xfrm>
-            <a:off x="548640" y="5806440"/>
-            <a:ext cx="8503920" cy="274320"/>
+            <a:off x="548640" y="5870448"/>
+            <a:ext cx="9418320" cy="274320"/>
           </a:xfrm>
           <a:prstGeom prst="rect">
             <a:avLst/>
@@ -7569,7 +9832,7 @@
                   <a:schemeClr val="accent6"/>
                 </a:solidFill>
               </a:rPr>
-              <a:t>* Software kostenlos, aber Hosting, Erweiterungen für deutsches Recht und Wartung kosten Geld.</a:t>
+              <a:t>Claude Code baut die Seite, stellt sie aber nicht ins Internet. Deshalb kombinieren wir: gebaut mit Claude Code, online bei Netlify.</a:t>
             </a:r>
             <a:endParaRPr lang="de-DE" sz="1100" dirty="0"/>
           </a:p>
@@ -7673,7 +9936,7 @@
                   <a:schemeClr val="tx1"/>
                 </a:solidFill>
               </a:rPr>
-              <a:t>Unsere Wahl: Shopify</a:t>
+              <a:t>Unsere Wahl: Netlify</a:t>
             </a:r>
             <a:endParaRPr lang="en-US" sz="3400" dirty="0"/>
           </a:p>
@@ -7709,7 +9972,7 @@
                   <a:schemeClr val="tx1"/>
                 </a:solidFill>
               </a:rPr>
-              <a:t>Warum Shopify?</a:t>
+              <a:t>Warum Netlify?</a:t>
             </a:r>
             <a:endParaRPr lang="de-DE" sz="2000" dirty="0"/>
           </a:p>
@@ -7717,7 +9980,7 @@
       </p:sp>
       <p:sp>
         <p:nvSpPr>
-          <p:cNvPr id="4" name="Custom Designs per App Kreis"/>
+          <p:cNvPr id="4" name="Kostenlos starten Kreis"/>
           <p:cNvSpPr/>
           <p:nvPr/>
         </p:nvSpPr>
@@ -7737,7 +10000,123 @@
       </p:sp>
       <p:pic>
         <p:nvPicPr>
-          <p:cNvPr id="5" name="Custom Designs per App Icon" descr="Custom Designs per App Icon"/>
+          <p:cNvPr id="5" name="Kostenlos starten Icon" descr="Kostenlos starten"/>
+          <p:cNvPicPr>
+            <a:picLocks noChangeAspect="1"/>
+          </p:cNvPicPr>
+          <p:nvPr/>
+        </p:nvPicPr>
+        <p:blipFill>
+          <a:blip r:embed="rId5"/>
+          <a:stretch>
+            <a:fillRect/>
+          </a:stretch>
+        </p:blipFill>
+        <p:spPr>
+          <a:xfrm>
+            <a:off x="674370" y="2091690"/>
+            <a:ext cx="251460" cy="251460"/>
+          </a:xfrm>
+          <a:prstGeom prst="rect">
+            <a:avLst/>
+          </a:prstGeom>
+        </p:spPr>
+      </p:pic>
+      <p:sp>
+        <p:nvSpPr>
+          <p:cNvPr id="6" name="Kostenlos starten Titel"/>
+          <p:cNvSpPr txBox="1"/>
+          <p:nvPr/>
+        </p:nvSpPr>
+        <p:spPr>
+          <a:xfrm>
+            <a:off x="1234440" y="1929384"/>
+            <a:ext cx="4617720" cy="310896"/>
+          </a:xfrm>
+          <a:prstGeom prst="rect">
+            <a:avLst/>
+          </a:prstGeom>
+          <a:noFill/>
+          <a:ln/>
+        </p:spPr>
+        <p:txBody>
+          <a:bodyPr wrap="square" lIns="0" tIns="0" rIns="0" bIns="0" rtlCol="0" anchor="ctr"/>
+          <a:lstStyle/>
+          <a:p>
+            <a:pPr indent="0" marL="0">
+              <a:buNone/>
+            </a:pPr>
+            <a:r>
+              <a:rPr lang="de-DE" sz="1600" b="1" dirty="0">
+                <a:solidFill>
+                  <a:schemeClr val="tx1"/>
+                </a:solidFill>
+              </a:rPr>
+              <a:t>Kostenlos starten</a:t>
+            </a:r>
+            <a:endParaRPr lang="de-DE" sz="1600" dirty="0"/>
+          </a:p>
+        </p:txBody>
+      </p:sp>
+      <p:sp>
+        <p:nvSpPr>
+          <p:cNvPr id="7" name="Kostenlos starten Text"/>
+          <p:cNvSpPr txBox="1"/>
+          <p:nvPr/>
+        </p:nvSpPr>
+        <p:spPr>
+          <a:xfrm>
+            <a:off x="1234440" y="2249424"/>
+            <a:ext cx="4617720" cy="457200"/>
+          </a:xfrm>
+          <a:prstGeom prst="rect">
+            <a:avLst/>
+          </a:prstGeom>
+          <a:noFill/>
+          <a:ln/>
+        </p:spPr>
+        <p:txBody>
+          <a:bodyPr wrap="square" lIns="0" tIns="0" rIns="0" bIns="0" rtlCol="0" anchor="t"/>
+          <a:lstStyle/>
+          <a:p>
+            <a:pPr indent="0" marL="0">
+              <a:buNone/>
+            </a:pPr>
+            <a:r>
+              <a:rPr lang="de-DE" sz="1300" dirty="0">
+                <a:solidFill>
+                  <a:schemeClr val="tx1"/>
+                </a:solidFill>
+              </a:rPr>
+              <a:t>Free-Tarif für 0 € im Monat, 300 Credits inklusive</a:t>
+            </a:r>
+            <a:endParaRPr lang="de-DE" sz="1300" dirty="0"/>
+          </a:p>
+        </p:txBody>
+      </p:sp>
+      <p:sp>
+        <p:nvSpPr>
+          <p:cNvPr id="8" name="Volle Freiheit beim Design Kreis"/>
+          <p:cNvSpPr/>
+          <p:nvPr/>
+        </p:nvSpPr>
+        <p:spPr>
+          <a:xfrm>
+            <a:off x="548640" y="2752344"/>
+            <a:ext cx="502920" cy="502920"/>
+          </a:xfrm>
+          <a:prstGeom prst="ellipse">
+            <a:avLst/>
+          </a:prstGeom>
+          <a:solidFill>
+            <a:schemeClr val="accent1"/>
+          </a:solidFill>
+          <a:ln/>
+        </p:spPr>
+      </p:sp>
+      <p:pic>
+        <p:nvPicPr>
+          <p:cNvPr id="9" name="Volle Freiheit beim Design Icon" descr="Volle Freiheit beim Design"/>
           <p:cNvPicPr>
             <a:picLocks noChangeAspect="1"/>
           </p:cNvPicPr>
@@ -7751,7 +10130,7 @@
         </p:blipFill>
         <p:spPr>
           <a:xfrm>
-            <a:off x="674370" y="2091690"/>
+            <a:off x="674370" y="2878074"/>
             <a:ext cx="251460" cy="251460"/>
           </a:xfrm>
           <a:prstGeom prst="rect">
@@ -7761,13 +10140,13 @@
       </p:pic>
       <p:sp>
         <p:nvSpPr>
-          <p:cNvPr id="6" name="Custom Designs per App Titel"/>
+          <p:cNvPr id="10" name="Volle Freiheit beim Design Titel"/>
           <p:cNvSpPr txBox="1"/>
           <p:nvPr/>
         </p:nvSpPr>
         <p:spPr>
           <a:xfrm>
-            <a:off x="1234440" y="1929384"/>
+            <a:off x="1234440" y="2715768"/>
             <a:ext cx="4617720" cy="310896"/>
           </a:xfrm>
           <a:prstGeom prst="rect">
@@ -7789,7 +10168,7 @@
                   <a:schemeClr val="tx1"/>
                 </a:solidFill>
               </a:rPr>
-              <a:t>Custom Designs per App</a:t>
+              <a:t>Volle Freiheit beim Design</a:t>
             </a:r>
             <a:endParaRPr lang="de-DE" sz="1600" dirty="0"/>
           </a:p>
@@ -7797,13 +10176,13 @@
       </p:sp>
       <p:sp>
         <p:nvSpPr>
-          <p:cNvPr id="7" name="Custom Designs per App Text"/>
+          <p:cNvPr id="11" name="Volle Freiheit beim Design Text"/>
           <p:cNvSpPr txBox="1"/>
           <p:nvPr/>
         </p:nvSpPr>
         <p:spPr>
           <a:xfrm>
-            <a:off x="1234440" y="2249424"/>
+            <a:off x="1234440" y="3035808"/>
             <a:ext cx="4617720" cy="457200"/>
           </a:xfrm>
           <a:prstGeom prst="rect">
@@ -7825,7 +10204,7 @@
                   <a:schemeClr val="tx1"/>
                 </a:solidFill>
               </a:rPr>
-              <a:t>Motiv-Upload und Druck per App, z. B. mit Printful</a:t>
+              <a:t>Eigener Code statt Baukasten, gebaut mit Claude Code</a:t>
             </a:r>
             <a:endParaRPr lang="de-DE" sz="1300" dirty="0"/>
           </a:p>
@@ -7833,13 +10212,13 @@
       </p:sp>
       <p:sp>
         <p:nvSpPr>
-          <p:cNvPr id="8" name="Schnell startklar Kreis"/>
+          <p:cNvPr id="12" name="Domain und HTTPS inklusive Kreis"/>
           <p:cNvSpPr/>
           <p:nvPr/>
         </p:nvSpPr>
         <p:spPr>
           <a:xfrm>
-            <a:off x="548640" y="2752344"/>
+            <a:off x="548640" y="3538728"/>
             <a:ext cx="502920" cy="502920"/>
           </a:xfrm>
           <a:prstGeom prst="ellipse">
@@ -7853,7 +10232,123 @@
       </p:sp>
       <p:pic>
         <p:nvPicPr>
-          <p:cNvPr id="9" name="Schnell startklar Icon" descr="Schnell startklar Icon"/>
+          <p:cNvPr id="13" name="Domain und HTTPS inklusive Icon" descr="Domain und HTTPS inklusive"/>
+          <p:cNvPicPr>
+            <a:picLocks noChangeAspect="1"/>
+          </p:cNvPicPr>
+          <p:nvPr/>
+        </p:nvPicPr>
+        <p:blipFill>
+          <a:blip r:embed="rId17"/>
+          <a:stretch>
+            <a:fillRect/>
+          </a:stretch>
+        </p:blipFill>
+        <p:spPr>
+          <a:xfrm>
+            <a:off x="674370" y="3664458"/>
+            <a:ext cx="251460" cy="251460"/>
+          </a:xfrm>
+          <a:prstGeom prst="rect">
+            <a:avLst/>
+          </a:prstGeom>
+        </p:spPr>
+      </p:pic>
+      <p:sp>
+        <p:nvSpPr>
+          <p:cNvPr id="14" name="Domain und HTTPS inklusive Titel"/>
+          <p:cNvSpPr txBox="1"/>
+          <p:nvPr/>
+        </p:nvSpPr>
+        <p:spPr>
+          <a:xfrm>
+            <a:off x="1234440" y="3502152"/>
+            <a:ext cx="4617720" cy="310896"/>
+          </a:xfrm>
+          <a:prstGeom prst="rect">
+            <a:avLst/>
+          </a:prstGeom>
+          <a:noFill/>
+          <a:ln/>
+        </p:spPr>
+        <p:txBody>
+          <a:bodyPr wrap="square" lIns="0" tIns="0" rIns="0" bIns="0" rtlCol="0" anchor="ctr"/>
+          <a:lstStyle/>
+          <a:p>
+            <a:pPr indent="0" marL="0">
+              <a:buNone/>
+            </a:pPr>
+            <a:r>
+              <a:rPr lang="de-DE" sz="1600" b="1" dirty="0">
+                <a:solidFill>
+                  <a:schemeClr val="tx1"/>
+                </a:solidFill>
+              </a:rPr>
+              <a:t>Domain und HTTPS inklusive</a:t>
+            </a:r>
+            <a:endParaRPr lang="de-DE" sz="1600" dirty="0"/>
+          </a:p>
+        </p:txBody>
+      </p:sp>
+      <p:sp>
+        <p:nvSpPr>
+          <p:cNvPr id="15" name="Domain und HTTPS inklusive Text"/>
+          <p:cNvSpPr txBox="1"/>
+          <p:nvPr/>
+        </p:nvSpPr>
+        <p:spPr>
+          <a:xfrm>
+            <a:off x="1234440" y="3822192"/>
+            <a:ext cx="4617720" cy="457200"/>
+          </a:xfrm>
+          <a:prstGeom prst="rect">
+            <a:avLst/>
+          </a:prstGeom>
+          <a:noFill/>
+          <a:ln/>
+        </p:spPr>
+        <p:txBody>
+          <a:bodyPr wrap="square" lIns="0" tIns="0" rIns="0" bIns="0" rtlCol="0" anchor="t"/>
+          <a:lstStyle/>
+          <a:p>
+            <a:pPr indent="0" marL="0">
+              <a:buNone/>
+            </a:pPr>
+            <a:r>
+              <a:rPr lang="de-DE" sz="1300" dirty="0">
+                <a:solidFill>
+                  <a:schemeClr val="tx1"/>
+                </a:solidFill>
+              </a:rPr>
+              <a:t>Gratis-Adresse lootlager.netlify.app, eigene Domain anschließbar</a:t>
+            </a:r>
+            <a:endParaRPr lang="de-DE" sz="1300" dirty="0"/>
+          </a:p>
+        </p:txBody>
+      </p:sp>
+      <p:sp>
+        <p:nvSpPr>
+          <p:cNvPr id="16" name="Schnell online Kreis"/>
+          <p:cNvSpPr/>
+          <p:nvPr/>
+        </p:nvSpPr>
+        <p:spPr>
+          <a:xfrm>
+            <a:off x="548640" y="4325112"/>
+            <a:ext cx="502920" cy="502920"/>
+          </a:xfrm>
+          <a:prstGeom prst="ellipse">
+            <a:avLst/>
+          </a:prstGeom>
+          <a:solidFill>
+            <a:schemeClr val="accent1"/>
+          </a:solidFill>
+          <a:ln/>
+        </p:spPr>
+      </p:sp>
+      <p:pic>
+        <p:nvPicPr>
+          <p:cNvPr id="17" name="Schnell online Icon" descr="Schnell online"/>
           <p:cNvPicPr>
             <a:picLocks noChangeAspect="1"/>
           </p:cNvPicPr>
@@ -7867,238 +10362,6 @@
         </p:blipFill>
         <p:spPr>
           <a:xfrm>
-            <a:off x="674370" y="2878074"/>
-            <a:ext cx="251460" cy="251460"/>
-          </a:xfrm>
-          <a:prstGeom prst="rect">
-            <a:avLst/>
-          </a:prstGeom>
-        </p:spPr>
-      </p:pic>
-      <p:sp>
-        <p:nvSpPr>
-          <p:cNvPr id="10" name="Schnell startklar Titel"/>
-          <p:cNvSpPr txBox="1"/>
-          <p:nvPr/>
-        </p:nvSpPr>
-        <p:spPr>
-          <a:xfrm>
-            <a:off x="1234440" y="2715768"/>
-            <a:ext cx="4617720" cy="310896"/>
-          </a:xfrm>
-          <a:prstGeom prst="rect">
-            <a:avLst/>
-          </a:prstGeom>
-          <a:noFill/>
-          <a:ln/>
-        </p:spPr>
-        <p:txBody>
-          <a:bodyPr wrap="square" lIns="0" tIns="0" rIns="0" bIns="0" rtlCol="0" anchor="ctr"/>
-          <a:lstStyle/>
-          <a:p>
-            <a:pPr indent="0" marL="0">
-              <a:buNone/>
-            </a:pPr>
-            <a:r>
-              <a:rPr lang="de-DE" sz="1600" b="1" dirty="0">
-                <a:solidFill>
-                  <a:schemeClr val="tx1"/>
-                </a:solidFill>
-              </a:rPr>
-              <a:t>Schnell startklar</a:t>
-            </a:r>
-            <a:endParaRPr lang="de-DE" sz="1600" dirty="0"/>
-          </a:p>
-        </p:txBody>
-      </p:sp>
-      <p:sp>
-        <p:nvSpPr>
-          <p:cNvPr id="11" name="Schnell startklar Text"/>
-          <p:cNvSpPr txBox="1"/>
-          <p:nvPr/>
-        </p:nvSpPr>
-        <p:spPr>
-          <a:xfrm>
-            <a:off x="1234440" y="3035808"/>
-            <a:ext cx="4617720" cy="457200"/>
-          </a:xfrm>
-          <a:prstGeom prst="rect">
-            <a:avLst/>
-          </a:prstGeom>
-          <a:noFill/>
-          <a:ln/>
-        </p:spPr>
-        <p:txBody>
-          <a:bodyPr wrap="square" lIns="0" tIns="0" rIns="0" bIns="0" rtlCol="0" anchor="t"/>
-          <a:lstStyle/>
-          <a:p>
-            <a:pPr indent="0" marL="0">
-              <a:buNone/>
-            </a:pPr>
-            <a:r>
-              <a:rPr lang="de-DE" sz="1300" dirty="0">
-                <a:solidFill>
-                  <a:schemeClr val="tx1"/>
-                </a:solidFill>
-              </a:rPr>
-              <a:t>Kein eigener Server nötig, in wenigen Tagen online</a:t>
-            </a:r>
-            <a:endParaRPr lang="de-DE" sz="1300" dirty="0"/>
-          </a:p>
-        </p:txBody>
-      </p:sp>
-      <p:sp>
-        <p:nvSpPr>
-          <p:cNvPr id="12" name="Alle wichtigen Zahlungsarten Kreis"/>
-          <p:cNvSpPr/>
-          <p:nvPr/>
-        </p:nvSpPr>
-        <p:spPr>
-          <a:xfrm>
-            <a:off x="548640" y="3538728"/>
-            <a:ext cx="502920" cy="502920"/>
-          </a:xfrm>
-          <a:prstGeom prst="ellipse">
-            <a:avLst/>
-          </a:prstGeom>
-          <a:solidFill>
-            <a:schemeClr val="accent1"/>
-          </a:solidFill>
-          <a:ln/>
-        </p:spPr>
-      </p:sp>
-      <p:pic>
-        <p:nvPicPr>
-          <p:cNvPr id="13" name="Alle wichtigen Zahlungsarten Icon" descr="Alle wichtigen Zahlungsarten Icon"/>
-          <p:cNvPicPr>
-            <a:picLocks noChangeAspect="1"/>
-          </p:cNvPicPr>
-          <p:nvPr/>
-        </p:nvPicPr>
-        <p:blipFill>
-          <a:blip r:embed="rId4"/>
-          <a:stretch>
-            <a:fillRect/>
-          </a:stretch>
-        </p:blipFill>
-        <p:spPr>
-          <a:xfrm>
-            <a:off x="674370" y="3664458"/>
-            <a:ext cx="251460" cy="251460"/>
-          </a:xfrm>
-          <a:prstGeom prst="rect">
-            <a:avLst/>
-          </a:prstGeom>
-        </p:spPr>
-      </p:pic>
-      <p:sp>
-        <p:nvSpPr>
-          <p:cNvPr id="14" name="Alle wichtigen Zahlungsarten Titel"/>
-          <p:cNvSpPr txBox="1"/>
-          <p:nvPr/>
-        </p:nvSpPr>
-        <p:spPr>
-          <a:xfrm>
-            <a:off x="1234440" y="3502152"/>
-            <a:ext cx="4617720" cy="310896"/>
-          </a:xfrm>
-          <a:prstGeom prst="rect">
-            <a:avLst/>
-          </a:prstGeom>
-          <a:noFill/>
-          <a:ln/>
-        </p:spPr>
-        <p:txBody>
-          <a:bodyPr wrap="square" lIns="0" tIns="0" rIns="0" bIns="0" rtlCol="0" anchor="ctr"/>
-          <a:lstStyle/>
-          <a:p>
-            <a:pPr indent="0" marL="0">
-              <a:buNone/>
-            </a:pPr>
-            <a:r>
-              <a:rPr lang="de-DE" sz="1600" b="1" dirty="0">
-                <a:solidFill>
-                  <a:schemeClr val="tx1"/>
-                </a:solidFill>
-              </a:rPr>
-              <a:t>Alle wichtigen Zahlungsarten</a:t>
-            </a:r>
-            <a:endParaRPr lang="de-DE" sz="1600" dirty="0"/>
-          </a:p>
-        </p:txBody>
-      </p:sp>
-      <p:sp>
-        <p:nvSpPr>
-          <p:cNvPr id="15" name="Alle wichtigen Zahlungsarten Text"/>
-          <p:cNvSpPr txBox="1"/>
-          <p:nvPr/>
-        </p:nvSpPr>
-        <p:spPr>
-          <a:xfrm>
-            <a:off x="1234440" y="3822192"/>
-            <a:ext cx="4617720" cy="457200"/>
-          </a:xfrm>
-          <a:prstGeom prst="rect">
-            <a:avLst/>
-          </a:prstGeom>
-          <a:noFill/>
-          <a:ln/>
-        </p:spPr>
-        <p:txBody>
-          <a:bodyPr wrap="square" lIns="0" tIns="0" rIns="0" bIns="0" rtlCol="0" anchor="t"/>
-          <a:lstStyle/>
-          <a:p>
-            <a:pPr indent="0" marL="0">
-              <a:buNone/>
-            </a:pPr>
-            <a:r>
-              <a:rPr lang="de-DE" sz="1300" dirty="0">
-                <a:solidFill>
-                  <a:schemeClr val="tx1"/>
-                </a:solidFill>
-              </a:rPr>
-              <a:t>PayPal, Klarna, Kreditkarte, Apple Pay und Google Pay</a:t>
-            </a:r>
-            <a:endParaRPr lang="de-DE" sz="1300" dirty="0"/>
-          </a:p>
-        </p:txBody>
-      </p:sp>
-      <p:sp>
-        <p:nvSpPr>
-          <p:cNvPr id="16" name="Günstiger Start Kreis"/>
-          <p:cNvSpPr/>
-          <p:nvPr/>
-        </p:nvSpPr>
-        <p:spPr>
-          <a:xfrm>
-            <a:off x="548640" y="4325112"/>
-            <a:ext cx="502920" cy="502920"/>
-          </a:xfrm>
-          <a:prstGeom prst="ellipse">
-            <a:avLst/>
-          </a:prstGeom>
-          <a:solidFill>
-            <a:schemeClr val="accent1"/>
-          </a:solidFill>
-          <a:ln/>
-        </p:spPr>
-      </p:sp>
-      <p:pic>
-        <p:nvPicPr>
-          <p:cNvPr id="17" name="Günstiger Start Icon" descr="Günstiger Start Icon"/>
-          <p:cNvPicPr>
-            <a:picLocks noChangeAspect="1"/>
-          </p:cNvPicPr>
-          <p:nvPr/>
-        </p:nvPicPr>
-        <p:blipFill>
-          <a:blip r:embed="rId5"/>
-          <a:stretch>
-            <a:fillRect/>
-          </a:stretch>
-        </p:blipFill>
-        <p:spPr>
-          <a:xfrm>
             <a:off x="674370" y="4450842"/>
             <a:ext cx="251460" cy="251460"/>
           </a:xfrm>
@@ -8109,7 +10372,7 @@
       </p:pic>
       <p:sp>
         <p:nvSpPr>
-          <p:cNvPr id="18" name="Günstiger Start Titel"/>
+          <p:cNvPr id="18" name="Schnell online Titel"/>
           <p:cNvSpPr txBox="1"/>
           <p:nvPr/>
         </p:nvSpPr>
@@ -8137,7 +10400,7 @@
                   <a:schemeClr val="tx1"/>
                 </a:solidFill>
               </a:rPr>
-              <a:t>Günstiger Start</a:t>
+              <a:t>Schnell online</a:t>
             </a:r>
             <a:endParaRPr lang="de-DE" sz="1600" dirty="0"/>
           </a:p>
@@ -8145,7 +10408,7 @@
       </p:sp>
       <p:sp>
         <p:nvSpPr>
-          <p:cNvPr id="19" name="Günstiger Start Text"/>
+          <p:cNvPr id="19" name="Schnell online Text"/>
           <p:cNvSpPr txBox="1"/>
           <p:nvPr/>
         </p:nvSpPr>
@@ -8173,7 +10436,7 @@
                   <a:schemeClr val="tx1"/>
                 </a:solidFill>
               </a:rPr>
-              <a:t>3 Tage gratis, dann 3 Monate für je 1 €, danach ab 25 € im Monat</a:t>
+              <a:t>Ordner hochladen oder GitHub verbinden, in Sekunden live</a:t>
             </a:r>
             <a:endParaRPr lang="de-DE" sz="1300" dirty="0"/>
           </a:p>
@@ -8285,45 +10548,9 @@
                   <a:schemeClr val="tx1"/>
                 </a:solidFill>
               </a:rPr>
-              <a:t>Daten teils außerhalb der EU. Ohne Shopify Payments 2 % Gebühr pro Verkauf. Manche Apps kosten extra.</a:t>
+              <a:t>Kein fertiges Shopsystem: Warenkorb und Zahlung bauen wir selbst ein. Die Server stehen in den USA. Rechtstexte schreiben wir selbst.</a:t>
             </a:r>
             <a:endParaRPr lang="de-DE" sz="1200" dirty="0"/>
-          </a:p>
-        </p:txBody>
-      </p:sp>
-      <p:sp>
-        <p:nvSpPr>
-          <p:cNvPr id="24" name="Entwurf Überschrift"/>
-          <p:cNvSpPr txBox="1"/>
-          <p:nvPr/>
-        </p:nvSpPr>
-        <p:spPr>
-          <a:xfrm>
-            <a:off x="6309360" y="1371600"/>
-            <a:ext cx="5330952" cy="411480"/>
-          </a:xfrm>
-          <a:prstGeom prst="rect">
-            <a:avLst/>
-          </a:prstGeom>
-          <a:noFill/>
-          <a:ln/>
-        </p:spPr>
-        <p:txBody>
-          <a:bodyPr wrap="square" lIns="0" tIns="0" rIns="0" bIns="0" rtlCol="0" anchor="ctr"/>
-          <a:lstStyle/>
-          <a:p>
-            <a:pPr indent="0" marL="0">
-              <a:buNone/>
-            </a:pPr>
-            <a:r>
-              <a:rPr lang="de-DE" sz="2000" b="1" dirty="0">
-                <a:solidFill>
-                  <a:schemeClr val="tx1"/>
-                </a:solidFill>
-              </a:rPr>
-              <a:t>Entwurf unserer Startseite</a:t>
-            </a:r>
-            <a:endParaRPr lang="de-DE" sz="2000" dirty="0"/>
           </a:p>
         </p:txBody>
       </p:sp>
@@ -8335,8 +10562,8 @@
         </p:nvSpPr>
         <p:spPr>
           <a:xfrm>
-            <a:off x="6309360" y="1920240"/>
-            <a:ext cx="5330952" cy="4069080"/>
+            <a:off x="6537960" y="1371600"/>
+            <a:ext cx="5102352" cy="4631150"/>
           </a:xfrm>
           <a:prstGeom prst="roundRect">
             <a:avLst>
@@ -8369,7 +10596,7 @@
         </p:nvSpPr>
         <p:spPr>
           <a:xfrm>
-            <a:off x="6437376" y="2039112"/>
+            <a:off x="6665976" y="1499616"/>
             <a:ext cx="82296" cy="82296"/>
           </a:xfrm>
           <a:prstGeom prst="ellipse">
@@ -8389,7 +10616,7 @@
         </p:nvSpPr>
         <p:spPr>
           <a:xfrm>
-            <a:off x="6574536" y="2039112"/>
+            <a:off x="6803136" y="1499616"/>
             <a:ext cx="82296" cy="82296"/>
           </a:xfrm>
           <a:prstGeom prst="ellipse">
@@ -8409,7 +10636,7 @@
         </p:nvSpPr>
         <p:spPr>
           <a:xfrm>
-            <a:off x="6711696" y="2039112"/>
+            <a:off x="6940296" y="1499616"/>
             <a:ext cx="82296" cy="82296"/>
           </a:xfrm>
           <a:prstGeom prst="ellipse">
@@ -8429,8 +10656,8 @@
         </p:nvSpPr>
         <p:spPr>
           <a:xfrm>
-            <a:off x="6986016" y="1984248"/>
-            <a:ext cx="2926080" cy="201168"/>
+            <a:off x="7214616" y="1440180"/>
+            <a:ext cx="2377440" cy="201168"/>
           </a:xfrm>
           <a:prstGeom prst="roundRect">
             <a:avLst>
@@ -8451,8 +10678,8 @@
         </p:nvSpPr>
         <p:spPr>
           <a:xfrm>
-            <a:off x="6986016" y="1984248"/>
-            <a:ext cx="2926080" cy="201168"/>
+            <a:off x="7214616" y="1440180"/>
+            <a:ext cx="2377440" cy="201168"/>
           </a:xfrm>
           <a:prstGeom prst="rect">
             <a:avLst/>
@@ -8476,946 +10703,68 @@
               <a:t>lootlager.de</a:t>
             </a:r>
             <a:endParaRPr lang="de-DE" sz="800" dirty="0"/>
+          </a:p>
+        </p:txBody>
+      </p:sp>
+      <p:sp>
+        <p:nvSpPr>
+          <p:cNvPr id="66" name="Startseite Hinweis"/>
+          <p:cNvSpPr txBox="1"/>
+          <p:nvPr/>
+        </p:nvSpPr>
+        <p:spPr>
+          <a:xfrm>
+            <a:off x="9738360" y="1440180"/>
+            <a:ext cx="1773936" cy="201168"/>
+          </a:xfrm>
+          <a:prstGeom prst="rect">
+            <a:avLst/>
+          </a:prstGeom>
+          <a:noFill/>
+          <a:ln/>
+        </p:spPr>
+        <p:txBody>
+          <a:bodyPr wrap="square" lIns="0" tIns="0" rIns="0" bIns="0" rtlCol="0" anchor="ctr"/>
+          <a:lstStyle/>
+          <a:p>
+            <a:pPr algn="r" indent="0" marL="0">
+              <a:buNone/>
+            </a:pPr>
+            <a:r>
+              <a:rPr lang="de-DE" sz="900" b="1" dirty="0">
+                <a:solidFill>
+                  <a:schemeClr val="accent6"/>
+                </a:solidFill>
+              </a:rPr>
+              <a:t>Unsere Startseite</a:t>
+            </a:r>
           </a:p>
         </p:txBody>
       </p:sp>
       <p:pic>
         <p:nvPicPr>
-          <p:cNvPr id="31" name="Shop Logo" descr="Shop Logo"/>
+          <p:cNvPr id="67" name="Startseite" descr="Startseite von LootLager mit Logo, Slogan und fünf Produkten"/>
           <p:cNvPicPr>
             <a:picLocks noChangeAspect="1"/>
           </p:cNvPicPr>
           <p:nvPr/>
         </p:nvPicPr>
         <p:blipFill>
-          <a:blip r:embed="rId7"/>
+          <a:blip r:embed="rId18"/>
           <a:stretch>
             <a:fillRect/>
           </a:stretch>
         </p:blipFill>
         <p:spPr>
           <a:xfrm>
-            <a:off x="6437376" y="2304288"/>
-            <a:ext cx="1143000" cy="311618"/>
+            <a:off x="6665976" y="1709928"/>
+            <a:ext cx="4846320" cy="4164806"/>
           </a:xfrm>
           <a:prstGeom prst="rect">
             <a:avLst/>
           </a:prstGeom>
         </p:spPr>
       </p:pic>
-      <p:sp>
-        <p:nvSpPr>
-          <p:cNvPr id="32" name="Suchfeld"/>
-          <p:cNvSpPr/>
-          <p:nvPr/>
-        </p:nvSpPr>
-        <p:spPr>
-          <a:xfrm>
-            <a:off x="7717536" y="2322576"/>
-            <a:ext cx="2697480" cy="274320"/>
-          </a:xfrm>
-          <a:prstGeom prst="roundRect">
-            <a:avLst>
-              <a:gd name="adj" fmla="val 50000"/>
-            </a:avLst>
-          </a:prstGeom>
-          <a:solidFill>
-            <a:schemeClr val="bg1"/>
-          </a:solidFill>
-          <a:ln w="9525">
-            <a:solidFill>
-              <a:srgbClr val="D1D5DB"/>
-            </a:solidFill>
-            <a:prstDash val="solid"/>
-          </a:ln>
-        </p:spPr>
-      </p:sp>
-      <p:sp>
-        <p:nvSpPr>
-          <p:cNvPr id="33" name="Suchfeld Text"/>
-          <p:cNvSpPr txBox="1"/>
-          <p:nvPr/>
-        </p:nvSpPr>
-        <p:spPr>
-          <a:xfrm>
-            <a:off x="7717536" y="2322576"/>
-            <a:ext cx="2377440" cy="274320"/>
-          </a:xfrm>
-          <a:prstGeom prst="rect">
-            <a:avLst/>
-          </a:prstGeom>
-          <a:noFill/>
-          <a:ln/>
-        </p:spPr>
-        <p:txBody>
-          <a:bodyPr wrap="square" lIns="109728" tIns="0" rIns="109728" bIns="0" rtlCol="0" anchor="ctr"/>
-          <a:lstStyle/>
-          <a:p>
-            <a:pPr indent="0" marL="0">
-              <a:buNone/>
-            </a:pPr>
-            <a:r>
-              <a:rPr lang="de-DE" sz="800" dirty="0">
-                <a:solidFill>
-                  <a:srgbClr val="9CA3AF"/>
-                </a:solidFill>
-              </a:rPr>
-              <a:t>Motiv oder Produkt suchen …</a:t>
-            </a:r>
-            <a:endParaRPr lang="de-DE" sz="800" dirty="0"/>
-          </a:p>
-        </p:txBody>
-      </p:sp>
-      <p:pic>
-        <p:nvPicPr>
-          <p:cNvPr id="34" name="Suche Icon" descr="Suche Icon"/>
-          <p:cNvPicPr>
-            <a:picLocks noChangeAspect="1"/>
-          </p:cNvPicPr>
-          <p:nvPr/>
-        </p:nvPicPr>
-        <p:blipFill>
-          <a:blip r:embed="rId8"/>
-          <a:stretch>
-            <a:fillRect/>
-          </a:stretch>
-        </p:blipFill>
-        <p:spPr>
-          <a:xfrm>
-            <a:off x="10168128" y="2386584"/>
-            <a:ext cx="146304" cy="146304"/>
-          </a:xfrm>
-          <a:prstGeom prst="rect">
-            <a:avLst/>
-          </a:prstGeom>
-        </p:spPr>
-      </p:pic>
-      <p:pic>
-        <p:nvPicPr>
-          <p:cNvPr id="35" name="Konto Icon" descr="Konto Icon"/>
-          <p:cNvPicPr>
-            <a:picLocks noChangeAspect="1"/>
-          </p:cNvPicPr>
-          <p:nvPr/>
-        </p:nvPicPr>
-        <p:blipFill>
-          <a:blip r:embed="rId9"/>
-          <a:stretch>
-            <a:fillRect/>
-          </a:stretch>
-        </p:blipFill>
-        <p:spPr>
-          <a:xfrm>
-            <a:off x="10780776" y="2359152"/>
-            <a:ext cx="201168" cy="201168"/>
-          </a:xfrm>
-          <a:prstGeom prst="rect">
-            <a:avLst/>
-          </a:prstGeom>
-        </p:spPr>
-      </p:pic>
-      <p:pic>
-        <p:nvPicPr>
-          <p:cNvPr id="36" name="Warenkorb Icon" descr="Warenkorb Icon"/>
-          <p:cNvPicPr>
-            <a:picLocks noChangeAspect="1"/>
-          </p:cNvPicPr>
-          <p:nvPr/>
-        </p:nvPicPr>
-        <p:blipFill>
-          <a:blip r:embed="rId10"/>
-          <a:stretch>
-            <a:fillRect/>
-          </a:stretch>
-        </p:blipFill>
-        <p:spPr>
-          <a:xfrm>
-            <a:off x="11146536" y="2359152"/>
-            <a:ext cx="201168" cy="201168"/>
-          </a:xfrm>
-          <a:prstGeom prst="rect">
-            <a:avLst/>
-          </a:prstGeom>
-        </p:spPr>
-      </p:pic>
-      <p:sp>
-        <p:nvSpPr>
-          <p:cNvPr id="37" name="Navigation"/>
-          <p:cNvSpPr txBox="1"/>
-          <p:nvPr/>
-        </p:nvSpPr>
-        <p:spPr>
-          <a:xfrm>
-            <a:off x="6437376" y="2743200"/>
-            <a:ext cx="5074920" cy="237744"/>
-          </a:xfrm>
-          <a:prstGeom prst="rect">
-            <a:avLst/>
-          </a:prstGeom>
-          <a:noFill/>
-          <a:ln/>
-        </p:spPr>
-        <p:txBody>
-          <a:bodyPr wrap="square" lIns="0" tIns="0" rIns="0" bIns="0" rtlCol="0" anchor="ctr"/>
-          <a:lstStyle/>
-          <a:p>
-            <a:pPr indent="0" marL="0" algn="ctr">
-              <a:buNone/>
-            </a:pPr>
-            <a:r>
-              <a:rPr lang="de-DE" sz="900" b="1" dirty="0">
-                <a:solidFill>
-                  <a:schemeClr val="tx1"/>
-                </a:solidFill>
-              </a:rPr>
-              <a:t>Mauspads     Controller-Skins     Keycaps     LED-Schilder     </a:t>
-            </a:r>
-            <a:r>
-              <a:rPr lang="de-DE" sz="900" b="1" dirty="0">
-                <a:solidFill>
-                  <a:schemeClr val="accent1"/>
-                </a:solidFill>
-              </a:rPr>
-              <a:t>Eigenes Design</a:t>
-            </a:r>
-            <a:endParaRPr lang="de-DE" sz="900" dirty="0"/>
-          </a:p>
-        </p:txBody>
-      </p:sp>
-      <p:sp>
-        <p:nvSpPr>
-          <p:cNvPr id="38" name="Banner"/>
-          <p:cNvSpPr/>
-          <p:nvPr/>
-        </p:nvSpPr>
-        <p:spPr>
-          <a:xfrm>
-            <a:off x="6437376" y="3072384"/>
-            <a:ext cx="5074920" cy="1051560"/>
-          </a:xfrm>
-          <a:prstGeom prst="roundRect">
-            <a:avLst>
-              <a:gd name="adj" fmla="val 7000"/>
-            </a:avLst>
-          </a:prstGeom>
-          <a:solidFill>
-            <a:schemeClr val="tx1"/>
-          </a:solidFill>
-          <a:ln/>
-        </p:spPr>
-      </p:sp>
-      <p:sp>
-        <p:nvSpPr>
-          <p:cNvPr id="39" name="Banner Slogan"/>
-          <p:cNvSpPr txBox="1"/>
-          <p:nvPr/>
-        </p:nvSpPr>
-        <p:spPr>
-          <a:xfrm>
-            <a:off x="6665976" y="3191256"/>
-            <a:ext cx="3566160" cy="365760"/>
-          </a:xfrm>
-          <a:prstGeom prst="rect">
-            <a:avLst/>
-          </a:prstGeom>
-          <a:noFill/>
-          <a:ln/>
-        </p:spPr>
-        <p:txBody>
-          <a:bodyPr wrap="square" lIns="0" tIns="0" rIns="0" bIns="0" rtlCol="0" anchor="ctr"/>
-          <a:lstStyle/>
-          <a:p>
-            <a:pPr indent="0" marL="0">
-              <a:buNone/>
-            </a:pPr>
-            <a:r>
-              <a:rPr lang="de-DE" sz="1800" b="1" dirty="0">
-                <a:solidFill>
-                  <a:schemeClr val="bg1"/>
-                </a:solidFill>
-              </a:rPr>
-              <a:t>Level up dein Setup.</a:t>
-            </a:r>
-            <a:endParaRPr lang="de-DE" sz="1800" dirty="0"/>
-          </a:p>
-        </p:txBody>
-      </p:sp>
-      <p:sp>
-        <p:nvSpPr>
-          <p:cNvPr id="40" name="Banner Text"/>
-          <p:cNvSpPr txBox="1"/>
-          <p:nvPr/>
-        </p:nvSpPr>
-        <p:spPr>
-          <a:xfrm>
-            <a:off x="6665976" y="3557016"/>
-            <a:ext cx="3566160" cy="228600"/>
-          </a:xfrm>
-          <a:prstGeom prst="rect">
-            <a:avLst/>
-          </a:prstGeom>
-          <a:noFill/>
-          <a:ln/>
-        </p:spPr>
-        <p:txBody>
-          <a:bodyPr wrap="square" lIns="0" tIns="0" rIns="0" bIns="0" rtlCol="0" anchor="ctr"/>
-          <a:lstStyle/>
-          <a:p>
-            <a:pPr indent="0" marL="0">
-              <a:buNone/>
-            </a:pPr>
-            <a:r>
-              <a:rPr lang="de-DE" sz="900" dirty="0">
-                <a:solidFill>
-                  <a:schemeClr val="accent5"/>
-                </a:solidFill>
-              </a:rPr>
-              <a:t>Lade dein Motiv hoch, wir drucken es auf dein Zubehör.</a:t>
-            </a:r>
-            <a:endParaRPr lang="de-DE" sz="900" dirty="0"/>
-          </a:p>
-        </p:txBody>
-      </p:sp>
-      <p:sp>
-        <p:nvSpPr>
-          <p:cNvPr id="41" name="Banner Button"/>
-          <p:cNvSpPr/>
-          <p:nvPr/>
-        </p:nvSpPr>
-        <p:spPr>
-          <a:xfrm>
-            <a:off x="6665976" y="3831336"/>
-            <a:ext cx="1234440" cy="219456"/>
-          </a:xfrm>
-          <a:prstGeom prst="roundRect">
-            <a:avLst>
-              <a:gd name="adj" fmla="val 50000"/>
-            </a:avLst>
-          </a:prstGeom>
-          <a:solidFill>
-            <a:schemeClr val="accent2"/>
-          </a:solidFill>
-          <a:ln/>
-        </p:spPr>
-      </p:sp>
-      <p:sp>
-        <p:nvSpPr>
-          <p:cNvPr id="42" name="Banner Button Text"/>
-          <p:cNvSpPr txBox="1"/>
-          <p:nvPr/>
-        </p:nvSpPr>
-        <p:spPr>
-          <a:xfrm>
-            <a:off x="6665976" y="3831336"/>
-            <a:ext cx="1234440" cy="219456"/>
-          </a:xfrm>
-          <a:prstGeom prst="rect">
-            <a:avLst/>
-          </a:prstGeom>
-          <a:noFill/>
-          <a:ln/>
-        </p:spPr>
-        <p:txBody>
-          <a:bodyPr wrap="square" lIns="0" tIns="0" rIns="0" bIns="0" rtlCol="0" anchor="ctr"/>
-          <a:lstStyle/>
-          <a:p>
-            <a:pPr indent="0" marL="0" algn="ctr">
-              <a:buNone/>
-            </a:pPr>
-            <a:r>
-              <a:rPr lang="de-DE" sz="900" b="1" dirty="0">
-                <a:solidFill>
-                  <a:schemeClr val="tx1"/>
-                </a:solidFill>
-              </a:rPr>
-              <a:t>Jetzt gestalten</a:t>
-            </a:r>
-            <a:endParaRPr lang="de-DE" sz="900" dirty="0"/>
-          </a:p>
-        </p:txBody>
-      </p:sp>
-      <p:sp>
-        <p:nvSpPr>
-          <p:cNvPr id="43" name="Banner Truhe Kreis"/>
-          <p:cNvSpPr/>
-          <p:nvPr/>
-        </p:nvSpPr>
-        <p:spPr>
-          <a:xfrm>
-            <a:off x="10442448" y="3163824"/>
-            <a:ext cx="868680" cy="868680"/>
-          </a:xfrm>
-          <a:prstGeom prst="ellipse">
-            <a:avLst/>
-          </a:prstGeom>
-          <a:solidFill>
-            <a:schemeClr val="bg1"/>
-          </a:solidFill>
-          <a:ln/>
-        </p:spPr>
-      </p:sp>
-      <p:pic>
-        <p:nvPicPr>
-          <p:cNvPr id="44" name="Banner Truhe" descr="Banner Truhe"/>
-          <p:cNvPicPr>
-            <a:picLocks noChangeAspect="1"/>
-          </p:cNvPicPr>
-          <p:nvPr/>
-        </p:nvPicPr>
-        <p:blipFill>
-          <a:blip r:embed="rId11"/>
-          <a:stretch>
-            <a:fillRect/>
-          </a:stretch>
-        </p:blipFill>
-        <p:spPr>
-          <a:xfrm>
-            <a:off x="10588752" y="3310128"/>
-            <a:ext cx="576072" cy="576072"/>
-          </a:xfrm>
-          <a:prstGeom prst="rect">
-            <a:avLst/>
-          </a:prstGeom>
-        </p:spPr>
-      </p:pic>
-      <p:sp>
-        <p:nvSpPr>
-          <p:cNvPr id="45" name="Bestseller Überschrift"/>
-          <p:cNvSpPr txBox="1"/>
-          <p:nvPr/>
-        </p:nvSpPr>
-        <p:spPr>
-          <a:xfrm>
-            <a:off x="6437376" y="4233672"/>
-            <a:ext cx="5074920" cy="219456"/>
-          </a:xfrm>
-          <a:prstGeom prst="rect">
-            <a:avLst/>
-          </a:prstGeom>
-          <a:noFill/>
-          <a:ln/>
-        </p:spPr>
-        <p:txBody>
-          <a:bodyPr wrap="square" lIns="0" tIns="0" rIns="0" bIns="0" rtlCol="0" anchor="ctr"/>
-          <a:lstStyle/>
-          <a:p>
-            <a:pPr indent="0" marL="0">
-              <a:buNone/>
-            </a:pPr>
-            <a:r>
-              <a:rPr lang="de-DE" sz="1000" b="1" dirty="0">
-                <a:solidFill>
-                  <a:schemeClr val="tx1"/>
-                </a:solidFill>
-              </a:rPr>
-              <a:t>Bestseller</a:t>
-            </a:r>
-            <a:endParaRPr lang="de-DE" sz="1000" dirty="0"/>
-          </a:p>
-        </p:txBody>
-      </p:sp>
-      <p:sp>
-        <p:nvSpPr>
-          <p:cNvPr id="46" name="Produkt XXL-Mauspad"/>
-          <p:cNvSpPr/>
-          <p:nvPr/>
-        </p:nvSpPr>
-        <p:spPr>
-          <a:xfrm>
-            <a:off x="6437376" y="4507992"/>
-            <a:ext cx="1200150" cy="749808"/>
-          </a:xfrm>
-          <a:prstGeom prst="roundRect">
-            <a:avLst>
-              <a:gd name="adj" fmla="val 7500"/>
-            </a:avLst>
-          </a:prstGeom>
-          <a:solidFill>
-            <a:schemeClr val="bg2"/>
-          </a:solidFill>
-          <a:ln/>
-        </p:spPr>
-      </p:sp>
-      <p:sp>
-        <p:nvSpPr>
-          <p:cNvPr id="47" name="XXL-Mauspad Kreis"/>
-          <p:cNvSpPr/>
-          <p:nvPr/>
-        </p:nvSpPr>
-        <p:spPr>
-          <a:xfrm>
-            <a:off x="6547104" y="4599432"/>
-            <a:ext cx="347472" cy="347472"/>
-          </a:xfrm>
-          <a:prstGeom prst="ellipse">
-            <a:avLst/>
-          </a:prstGeom>
-          <a:solidFill>
-            <a:schemeClr val="accent1"/>
-          </a:solidFill>
-          <a:ln/>
-        </p:spPr>
-      </p:sp>
-      <p:pic>
-        <p:nvPicPr>
-          <p:cNvPr id="48" name="XXL-Mauspad Icon" descr="XXL-Mauspad Icon"/>
-          <p:cNvPicPr>
-            <a:picLocks noChangeAspect="1"/>
-          </p:cNvPicPr>
-          <p:nvPr/>
-        </p:nvPicPr>
-        <p:blipFill>
-          <a:blip r:embed="rId12"/>
-          <a:stretch>
-            <a:fillRect/>
-          </a:stretch>
-        </p:blipFill>
-        <p:spPr>
-          <a:xfrm>
-            <a:off x="6633972" y="4686300"/>
-            <a:ext cx="173736" cy="173736"/>
-          </a:xfrm>
-          <a:prstGeom prst="rect">
-            <a:avLst/>
-          </a:prstGeom>
-        </p:spPr>
-      </p:pic>
-      <p:sp>
-        <p:nvSpPr>
-          <p:cNvPr id="49" name="XXL-Mauspad Name"/>
-          <p:cNvSpPr txBox="1"/>
-          <p:nvPr/>
-        </p:nvSpPr>
-        <p:spPr>
-          <a:xfrm>
-            <a:off x="6547104" y="4992624"/>
-            <a:ext cx="1017270" cy="201168"/>
-          </a:xfrm>
-          <a:prstGeom prst="rect">
-            <a:avLst/>
-          </a:prstGeom>
-          <a:noFill/>
-          <a:ln/>
-        </p:spPr>
-        <p:txBody>
-          <a:bodyPr wrap="square" lIns="0" tIns="0" rIns="0" bIns="0" rtlCol="0" anchor="ctr"/>
-          <a:lstStyle/>
-          <a:p>
-            <a:pPr indent="0" marL="0">
-              <a:buNone/>
-            </a:pPr>
-            <a:r>
-              <a:rPr lang="de-DE" sz="900" b="1" dirty="0">
-                <a:solidFill>
-                  <a:schemeClr val="tx1"/>
-                </a:solidFill>
-              </a:rPr>
-              <a:t>XXL-Mauspad</a:t>
-            </a:r>
-            <a:endParaRPr lang="de-DE" sz="900" dirty="0"/>
-          </a:p>
-        </p:txBody>
-      </p:sp>
-      <p:sp>
-        <p:nvSpPr>
-          <p:cNvPr id="50" name="Produkt Controller-Skin"/>
-          <p:cNvSpPr/>
-          <p:nvPr/>
-        </p:nvSpPr>
-        <p:spPr>
-          <a:xfrm>
-            <a:off x="7728966" y="4507992"/>
-            <a:ext cx="1200150" cy="749808"/>
-          </a:xfrm>
-          <a:prstGeom prst="roundRect">
-            <a:avLst>
-              <a:gd name="adj" fmla="val 7500"/>
-            </a:avLst>
-          </a:prstGeom>
-          <a:solidFill>
-            <a:schemeClr val="bg2"/>
-          </a:solidFill>
-          <a:ln/>
-        </p:spPr>
-      </p:sp>
-      <p:sp>
-        <p:nvSpPr>
-          <p:cNvPr id="51" name="Controller-Skin Kreis"/>
-          <p:cNvSpPr/>
-          <p:nvPr/>
-        </p:nvSpPr>
-        <p:spPr>
-          <a:xfrm>
-            <a:off x="7838694" y="4599432"/>
-            <a:ext cx="347472" cy="347472"/>
-          </a:xfrm>
-          <a:prstGeom prst="ellipse">
-            <a:avLst/>
-          </a:prstGeom>
-          <a:solidFill>
-            <a:schemeClr val="accent1"/>
-          </a:solidFill>
-          <a:ln/>
-        </p:spPr>
-      </p:sp>
-      <p:pic>
-        <p:nvPicPr>
-          <p:cNvPr id="52" name="Controller-Skin Icon" descr="Controller-Skin Icon"/>
-          <p:cNvPicPr>
-            <a:picLocks noChangeAspect="1"/>
-          </p:cNvPicPr>
-          <p:nvPr/>
-        </p:nvPicPr>
-        <p:blipFill>
-          <a:blip r:embed="rId13"/>
-          <a:stretch>
-            <a:fillRect/>
-          </a:stretch>
-        </p:blipFill>
-        <p:spPr>
-          <a:xfrm>
-            <a:off x="7925562" y="4686300"/>
-            <a:ext cx="173736" cy="173736"/>
-          </a:xfrm>
-          <a:prstGeom prst="rect">
-            <a:avLst/>
-          </a:prstGeom>
-        </p:spPr>
-      </p:pic>
-      <p:sp>
-        <p:nvSpPr>
-          <p:cNvPr id="53" name="Controller-Skin Name"/>
-          <p:cNvSpPr txBox="1"/>
-          <p:nvPr/>
-        </p:nvSpPr>
-        <p:spPr>
-          <a:xfrm>
-            <a:off x="7838694" y="4992624"/>
-            <a:ext cx="1017270" cy="201168"/>
-          </a:xfrm>
-          <a:prstGeom prst="rect">
-            <a:avLst/>
-          </a:prstGeom>
-          <a:noFill/>
-          <a:ln/>
-        </p:spPr>
-        <p:txBody>
-          <a:bodyPr wrap="square" lIns="0" tIns="0" rIns="0" bIns="0" rtlCol="0" anchor="ctr"/>
-          <a:lstStyle/>
-          <a:p>
-            <a:pPr indent="0" marL="0">
-              <a:buNone/>
-            </a:pPr>
-            <a:r>
-              <a:rPr lang="de-DE" sz="900" b="1" dirty="0">
-                <a:solidFill>
-                  <a:schemeClr val="tx1"/>
-                </a:solidFill>
-              </a:rPr>
-              <a:t>Controller-Skin</a:t>
-            </a:r>
-            <a:endParaRPr lang="de-DE" sz="900" dirty="0"/>
-          </a:p>
-        </p:txBody>
-      </p:sp>
-      <p:sp>
-        <p:nvSpPr>
-          <p:cNvPr id="54" name="Produkt Custom Keycaps"/>
-          <p:cNvSpPr/>
-          <p:nvPr/>
-        </p:nvSpPr>
-        <p:spPr>
-          <a:xfrm>
-            <a:off x="9020556" y="4507992"/>
-            <a:ext cx="1200150" cy="749808"/>
-          </a:xfrm>
-          <a:prstGeom prst="roundRect">
-            <a:avLst>
-              <a:gd name="adj" fmla="val 7500"/>
-            </a:avLst>
-          </a:prstGeom>
-          <a:solidFill>
-            <a:schemeClr val="bg2"/>
-          </a:solidFill>
-          <a:ln/>
-        </p:spPr>
-      </p:sp>
-      <p:sp>
-        <p:nvSpPr>
-          <p:cNvPr id="55" name="Custom Keycaps Kreis"/>
-          <p:cNvSpPr/>
-          <p:nvPr/>
-        </p:nvSpPr>
-        <p:spPr>
-          <a:xfrm>
-            <a:off x="9130284" y="4599432"/>
-            <a:ext cx="347472" cy="347472"/>
-          </a:xfrm>
-          <a:prstGeom prst="ellipse">
-            <a:avLst/>
-          </a:prstGeom>
-          <a:solidFill>
-            <a:schemeClr val="accent1"/>
-          </a:solidFill>
-          <a:ln/>
-        </p:spPr>
-      </p:sp>
-      <p:pic>
-        <p:nvPicPr>
-          <p:cNvPr id="56" name="Custom Keycaps Icon" descr="Custom Keycaps Icon"/>
-          <p:cNvPicPr>
-            <a:picLocks noChangeAspect="1"/>
-          </p:cNvPicPr>
-          <p:nvPr/>
-        </p:nvPicPr>
-        <p:blipFill>
-          <a:blip r:embed="rId14"/>
-          <a:stretch>
-            <a:fillRect/>
-          </a:stretch>
-        </p:blipFill>
-        <p:spPr>
-          <a:xfrm>
-            <a:off x="9217152" y="4686300"/>
-            <a:ext cx="173736" cy="173736"/>
-          </a:xfrm>
-          <a:prstGeom prst="rect">
-            <a:avLst/>
-          </a:prstGeom>
-        </p:spPr>
-      </p:pic>
-      <p:sp>
-        <p:nvSpPr>
-          <p:cNvPr id="57" name="Custom Keycaps Name"/>
-          <p:cNvSpPr txBox="1"/>
-          <p:nvPr/>
-        </p:nvSpPr>
-        <p:spPr>
-          <a:xfrm>
-            <a:off x="9130284" y="4992624"/>
-            <a:ext cx="1017270" cy="201168"/>
-          </a:xfrm>
-          <a:prstGeom prst="rect">
-            <a:avLst/>
-          </a:prstGeom>
-          <a:noFill/>
-          <a:ln/>
-        </p:spPr>
-        <p:txBody>
-          <a:bodyPr wrap="square" lIns="0" tIns="0" rIns="0" bIns="0" rtlCol="0" anchor="ctr"/>
-          <a:lstStyle/>
-          <a:p>
-            <a:pPr indent="0" marL="0">
-              <a:buNone/>
-            </a:pPr>
-            <a:r>
-              <a:rPr lang="de-DE" sz="900" b="1" dirty="0">
-                <a:solidFill>
-                  <a:schemeClr val="tx1"/>
-                </a:solidFill>
-              </a:rPr>
-              <a:t>Custom Keycaps</a:t>
-            </a:r>
-            <a:endParaRPr lang="de-DE" sz="900" dirty="0"/>
-          </a:p>
-        </p:txBody>
-      </p:sp>
-      <p:sp>
-        <p:nvSpPr>
-          <p:cNvPr id="58" name="Produkt LED-Schild"/>
-          <p:cNvSpPr/>
-          <p:nvPr/>
-        </p:nvSpPr>
-        <p:spPr>
-          <a:xfrm>
-            <a:off x="10312146" y="4507992"/>
-            <a:ext cx="1200150" cy="749808"/>
-          </a:xfrm>
-          <a:prstGeom prst="roundRect">
-            <a:avLst>
-              <a:gd name="adj" fmla="val 7500"/>
-            </a:avLst>
-          </a:prstGeom>
-          <a:solidFill>
-            <a:schemeClr val="bg2"/>
-          </a:solidFill>
-          <a:ln/>
-        </p:spPr>
-      </p:sp>
-      <p:sp>
-        <p:nvSpPr>
-          <p:cNvPr id="59" name="LED-Schild Kreis"/>
-          <p:cNvSpPr/>
-          <p:nvPr/>
-        </p:nvSpPr>
-        <p:spPr>
-          <a:xfrm>
-            <a:off x="10421874" y="4599432"/>
-            <a:ext cx="347472" cy="347472"/>
-          </a:xfrm>
-          <a:prstGeom prst="ellipse">
-            <a:avLst/>
-          </a:prstGeom>
-          <a:solidFill>
-            <a:schemeClr val="accent1"/>
-          </a:solidFill>
-          <a:ln/>
-        </p:spPr>
-      </p:sp>
-      <p:pic>
-        <p:nvPicPr>
-          <p:cNvPr id="60" name="LED-Schild Icon" descr="LED-Schild Icon"/>
-          <p:cNvPicPr>
-            <a:picLocks noChangeAspect="1"/>
-          </p:cNvPicPr>
-          <p:nvPr/>
-        </p:nvPicPr>
-        <p:blipFill>
-          <a:blip r:embed="rId15"/>
-          <a:stretch>
-            <a:fillRect/>
-          </a:stretch>
-        </p:blipFill>
-        <p:spPr>
-          <a:xfrm>
-            <a:off x="10508742" y="4686300"/>
-            <a:ext cx="173736" cy="173736"/>
-          </a:xfrm>
-          <a:prstGeom prst="rect">
-            <a:avLst/>
-          </a:prstGeom>
-        </p:spPr>
-      </p:pic>
-      <p:sp>
-        <p:nvSpPr>
-          <p:cNvPr id="61" name="LED-Schild Name"/>
-          <p:cNvSpPr txBox="1"/>
-          <p:nvPr/>
-        </p:nvSpPr>
-        <p:spPr>
-          <a:xfrm>
-            <a:off x="10421874" y="4992624"/>
-            <a:ext cx="1017270" cy="201168"/>
-          </a:xfrm>
-          <a:prstGeom prst="rect">
-            <a:avLst/>
-          </a:prstGeom>
-          <a:noFill/>
-          <a:ln/>
-        </p:spPr>
-        <p:txBody>
-          <a:bodyPr wrap="square" lIns="0" tIns="0" rIns="0" bIns="0" rtlCol="0" anchor="ctr"/>
-          <a:lstStyle/>
-          <a:p>
-            <a:pPr indent="0" marL="0">
-              <a:buNone/>
-            </a:pPr>
-            <a:r>
-              <a:rPr lang="de-DE" sz="900" b="1" dirty="0">
-                <a:solidFill>
-                  <a:schemeClr val="tx1"/>
-                </a:solidFill>
-              </a:rPr>
-              <a:t>LED-Schild</a:t>
-            </a:r>
-            <a:endParaRPr lang="de-DE" sz="900" dirty="0"/>
-          </a:p>
-        </p:txBody>
-      </p:sp>
-      <p:sp>
-        <p:nvSpPr>
-          <p:cNvPr id="62" name="Vorteile"/>
-          <p:cNvSpPr txBox="1"/>
-          <p:nvPr/>
-        </p:nvSpPr>
-        <p:spPr>
-          <a:xfrm>
-            <a:off x="6437376" y="5330952"/>
-            <a:ext cx="5074920" cy="219456"/>
-          </a:xfrm>
-          <a:prstGeom prst="rect">
-            <a:avLst/>
-          </a:prstGeom>
-          <a:noFill/>
-          <a:ln/>
-        </p:spPr>
-        <p:txBody>
-          <a:bodyPr wrap="square" lIns="0" tIns="0" rIns="0" bIns="0" rtlCol="0" anchor="ctr"/>
-          <a:lstStyle/>
-          <a:p>
-            <a:pPr indent="0" marL="0" algn="ctr">
-              <a:buNone/>
-            </a:pPr>
-            <a:r>
-              <a:rPr lang="de-DE" sz="850" b="1" dirty="0">
-                <a:solidFill>
-                  <a:schemeClr val="accent4"/>
-                </a:solidFill>
-              </a:rPr>
-              <a:t>Versand aus Deutschland  ·  Design-Vorschau vor dem Kauf  ·  PayPal, Klarna, Karte</a:t>
-            </a:r>
-            <a:endParaRPr lang="de-DE" sz="850" dirty="0"/>
-          </a:p>
-        </p:txBody>
-      </p:sp>
-      <p:sp>
-        <p:nvSpPr>
-          <p:cNvPr id="63" name="Footer"/>
-          <p:cNvSpPr/>
-          <p:nvPr/>
-        </p:nvSpPr>
-        <p:spPr>
-          <a:xfrm>
-            <a:off x="6437376" y="5605272"/>
-            <a:ext cx="5074920" cy="292608"/>
-          </a:xfrm>
-          <a:prstGeom prst="roundRect">
-            <a:avLst>
-              <a:gd name="adj" fmla="val 20000"/>
-            </a:avLst>
-          </a:prstGeom>
-          <a:solidFill>
-            <a:srgbClr val="F3F4F6"/>
-          </a:solidFill>
-          <a:ln/>
-        </p:spPr>
-      </p:sp>
-      <p:sp>
-        <p:nvSpPr>
-          <p:cNvPr id="64" name="Footer Text"/>
-          <p:cNvSpPr txBox="1"/>
-          <p:nvPr/>
-        </p:nvSpPr>
-        <p:spPr>
-          <a:xfrm>
-            <a:off x="6437376" y="5605272"/>
-            <a:ext cx="5074920" cy="292608"/>
-          </a:xfrm>
-          <a:prstGeom prst="rect">
-            <a:avLst/>
-          </a:prstGeom>
-          <a:noFill/>
-          <a:ln/>
-        </p:spPr>
-        <p:txBody>
-          <a:bodyPr wrap="square" lIns="0" tIns="0" rIns="0" bIns="0" rtlCol="0" anchor="ctr"/>
-          <a:lstStyle/>
-          <a:p>
-            <a:pPr indent="0" marL="0" algn="ctr">
-              <a:buNone/>
-            </a:pPr>
-            <a:r>
-              <a:rPr lang="de-DE" sz="800" dirty="0">
-                <a:solidFill>
-                  <a:schemeClr val="accent6"/>
-                </a:solidFill>
-              </a:rPr>
-              <a:t>Impressum  ·  Datenschutz  ·  AGB  ·  Widerruf  ·  Versand &amp; Zahlung</a:t>
-            </a:r>
-            <a:endParaRPr lang="de-DE" sz="800" dirty="0"/>
-          </a:p>
-        </p:txBody>
-      </p:sp>
       <p:sp>
         <p:nvSpPr>
           <p:cNvPr id="65" name="Slide Number Placeholder 0"/>
@@ -9586,8 +10935,8 @@
         </p:nvSpPr>
         <p:spPr>
           <a:xfrm>
-            <a:off x="822960" y="2240280"/>
-            <a:ext cx="457200" cy="457200"/>
+            <a:off x="822960" y="2176272"/>
+            <a:ext cx="402336" cy="402336"/>
           </a:xfrm>
           <a:prstGeom prst="ellipse">
             <a:avLst/>
@@ -9614,8 +10963,8 @@
         </p:blipFill>
         <p:spPr>
           <a:xfrm>
-            <a:off x="937260" y="2354580"/>
-            <a:ext cx="228600" cy="228600"/>
+            <a:off x="923544" y="2276856"/>
+            <a:ext cx="201168" cy="201168"/>
           </a:xfrm>
           <a:prstGeom prst="rect">
             <a:avLst/>
@@ -9630,7 +10979,7 @@
         </p:nvSpPr>
         <p:spPr>
           <a:xfrm>
-            <a:off x="1463040" y="2203704"/>
+            <a:off x="1463040" y="2139696"/>
             <a:ext cx="4023360" cy="219456"/>
           </a:xfrm>
           <a:prstGeom prst="rect">
@@ -9666,7 +11015,7 @@
         </p:nvSpPr>
         <p:spPr>
           <a:xfrm>
-            <a:off x="1463040" y="2423160"/>
+            <a:off x="1463040" y="2350008"/>
             <a:ext cx="4023360" cy="292608"/>
           </a:xfrm>
           <a:prstGeom prst="rect">
@@ -9702,8 +11051,8 @@
         </p:nvSpPr>
         <p:spPr>
           <a:xfrm>
-            <a:off x="822960" y="2862072"/>
-            <a:ext cx="457200" cy="457200"/>
+            <a:off x="822960" y="2702052"/>
+            <a:ext cx="402336" cy="402336"/>
           </a:xfrm>
           <a:prstGeom prst="ellipse">
             <a:avLst/>
@@ -9730,8 +11079,8 @@
         </p:blipFill>
         <p:spPr>
           <a:xfrm>
-            <a:off x="937260" y="2976372"/>
-            <a:ext cx="228600" cy="228600"/>
+            <a:off x="923544" y="2802636"/>
+            <a:ext cx="201168" cy="201168"/>
           </a:xfrm>
           <a:prstGeom prst="rect">
             <a:avLst/>
@@ -9746,7 +11095,7 @@
         </p:nvSpPr>
         <p:spPr>
           <a:xfrm>
-            <a:off x="1463040" y="2825496"/>
+            <a:off x="1463040" y="2665476"/>
             <a:ext cx="4023360" cy="219456"/>
           </a:xfrm>
           <a:prstGeom prst="rect">
@@ -9782,7 +11131,7 @@
         </p:nvSpPr>
         <p:spPr>
           <a:xfrm>
-            <a:off x="1463040" y="3044952"/>
+            <a:off x="1463040" y="2875788"/>
             <a:ext cx="4023360" cy="292608"/>
           </a:xfrm>
           <a:prstGeom prst="rect">
@@ -9818,8 +11167,8 @@
         </p:nvSpPr>
         <p:spPr>
           <a:xfrm>
-            <a:off x="822960" y="3483864"/>
-            <a:ext cx="457200" cy="457200"/>
+            <a:off x="822960" y="3227832"/>
+            <a:ext cx="402336" cy="402336"/>
           </a:xfrm>
           <a:prstGeom prst="ellipse">
             <a:avLst/>
@@ -9846,8 +11195,8 @@
         </p:blipFill>
         <p:spPr>
           <a:xfrm>
-            <a:off x="937260" y="3598164"/>
-            <a:ext cx="228600" cy="228600"/>
+            <a:off x="923544" y="3328416"/>
+            <a:ext cx="201168" cy="201168"/>
           </a:xfrm>
           <a:prstGeom prst="rect">
             <a:avLst/>
@@ -9862,7 +11211,7 @@
         </p:nvSpPr>
         <p:spPr>
           <a:xfrm>
-            <a:off x="1463040" y="3447288"/>
+            <a:off x="1463040" y="3191256"/>
             <a:ext cx="4023360" cy="219456"/>
           </a:xfrm>
           <a:prstGeom prst="rect">
@@ -9898,7 +11247,7 @@
         </p:nvSpPr>
         <p:spPr>
           <a:xfrm>
-            <a:off x="1463040" y="3666744"/>
+            <a:off x="1463040" y="3401568"/>
             <a:ext cx="4023360" cy="292608"/>
           </a:xfrm>
           <a:prstGeom prst="rect">
@@ -9928,14 +11277,14 @@
       </p:sp>
       <p:sp>
         <p:nvSpPr>
-          <p:cNvPr id="17" name="Shopsystem Kreis"/>
+          <p:cNvPr id="17" name="Homepage Kreis"/>
           <p:cNvSpPr/>
           <p:nvPr/>
         </p:nvSpPr>
         <p:spPr>
           <a:xfrm>
-            <a:off x="822960" y="4105656"/>
-            <a:ext cx="457200" cy="457200"/>
+            <a:off x="822960" y="4279392"/>
+            <a:ext cx="402336" cy="402336"/>
           </a:xfrm>
           <a:prstGeom prst="ellipse">
             <a:avLst/>
@@ -9948,7 +11297,7 @@
       </p:sp>
       <p:pic>
         <p:nvPicPr>
-          <p:cNvPr id="18" name="Shopsystem Icon" descr="Shopsystem Icon"/>
+          <p:cNvPr id="18" name="Homepage Icon" descr="Shopsystem Icon"/>
           <p:cNvPicPr>
             <a:picLocks noChangeAspect="1"/>
           </p:cNvPicPr>
@@ -9962,8 +11311,8 @@
         </p:blipFill>
         <p:spPr>
           <a:xfrm>
-            <a:off x="937260" y="4219956"/>
-            <a:ext cx="228600" cy="228600"/>
+            <a:off x="923544" y="4379976"/>
+            <a:ext cx="201168" cy="201168"/>
           </a:xfrm>
           <a:prstGeom prst="rect">
             <a:avLst/>
@@ -9972,13 +11321,13 @@
       </p:pic>
       <p:sp>
         <p:nvSpPr>
-          <p:cNvPr id="19" name="SHOPSYSTEM Label"/>
+          <p:cNvPr id="19" name="HOMEPAGE Label"/>
           <p:cNvSpPr txBox="1"/>
           <p:nvPr/>
         </p:nvSpPr>
         <p:spPr>
           <a:xfrm>
-            <a:off x="1463040" y="4069080"/>
+            <a:off x="1463040" y="4242816"/>
             <a:ext cx="4023360" cy="219456"/>
           </a:xfrm>
           <a:prstGeom prst="rect">
@@ -10000,7 +11349,7 @@
                   <a:schemeClr val="accent1"/>
                 </a:solidFill>
               </a:rPr>
-              <a:t>SHOPSYSTEM</a:t>
+              <a:t>HOMEPAGE</a:t>
             </a:r>
             <a:endParaRPr lang="de-DE" sz="1100" dirty="0"/>
           </a:p>
@@ -10008,13 +11357,13 @@
       </p:sp>
       <p:sp>
         <p:nvSpPr>
-          <p:cNvPr id="20" name="SHOPSYSTEM Wert"/>
+          <p:cNvPr id="20" name="HOMEPAGE Wert"/>
           <p:cNvSpPr txBox="1"/>
           <p:nvPr/>
         </p:nvSpPr>
         <p:spPr>
           <a:xfrm>
-            <a:off x="1463040" y="4288536"/>
+            <a:off x="1463040" y="4453128"/>
             <a:ext cx="4023360" cy="292608"/>
           </a:xfrm>
           <a:prstGeom prst="rect">
@@ -10036,7 +11385,7 @@
                   <a:schemeClr val="tx1"/>
                 </a:solidFill>
               </a:rPr>
-              <a:t>Shopify (Basic-Tarif)</a:t>
+              <a:t>Netlify, gebaut mit Claude Code</a:t>
             </a:r>
             <a:endParaRPr lang="de-DE" sz="1500" dirty="0"/>
           </a:p>
@@ -10050,8 +11399,8 @@
         </p:nvSpPr>
         <p:spPr>
           <a:xfrm>
-            <a:off x="822960" y="4727448"/>
-            <a:ext cx="457200" cy="457200"/>
+            <a:off x="822960" y="4805172"/>
+            <a:ext cx="402336" cy="402336"/>
           </a:xfrm>
           <a:prstGeom prst="ellipse">
             <a:avLst/>
@@ -10078,8 +11427,8 @@
         </p:blipFill>
         <p:spPr>
           <a:xfrm>
-            <a:off x="937260" y="4841748"/>
-            <a:ext cx="228600" cy="228600"/>
+            <a:off x="923544" y="4905756"/>
+            <a:ext cx="201168" cy="201168"/>
           </a:xfrm>
           <a:prstGeom prst="rect">
             <a:avLst/>
@@ -10094,7 +11443,7 @@
         </p:nvSpPr>
         <p:spPr>
           <a:xfrm>
-            <a:off x="1463040" y="4690872"/>
+            <a:off x="1463040" y="4768596"/>
             <a:ext cx="4023360" cy="219456"/>
           </a:xfrm>
           <a:prstGeom prst="rect">
@@ -10116,7 +11465,7 @@
                   <a:schemeClr val="accent1"/>
                 </a:solidFill>
               </a:rPr>
-              <a:t>LOGO</a:t>
+              <a:t>LOGO UND BILDER</a:t>
             </a:r>
             <a:endParaRPr lang="de-DE" sz="1100" dirty="0"/>
           </a:p>
@@ -10130,7 +11479,7 @@
         </p:nvSpPr>
         <p:spPr>
           <a:xfrm>
-            <a:off x="1463040" y="4910328"/>
+            <a:off x="1463040" y="4978908"/>
             <a:ext cx="4023360" cy="292608"/>
           </a:xfrm>
           <a:prstGeom prst="rect">
@@ -10152,7 +11501,7 @@
                   <a:schemeClr val="tx1"/>
                 </a:solidFill>
               </a:rPr>
-              <a:t>mit KI erstellt (ChatGPT)</a:t>
+              <a:t>mit KI erstellt (ChatGPT und Gemini)</a:t>
             </a:r>
             <a:endParaRPr lang="de-DE" sz="1500" dirty="0"/>
           </a:p>
@@ -10572,7 +11921,7 @@
                   <a:schemeClr val="tx1"/>
                 </a:solidFill>
               </a:rPr>
-              <a:t>Domain lootlager.de und Marke LootLager beim DPMA anmelden</a:t>
+              <a:t>Domain lootlager.de mit Netlify verbinden, Marke beim DPMA anmelden</a:t>
             </a:r>
             <a:endParaRPr lang="de-DE" sz="1250" dirty="0"/>
           </a:p>
@@ -10664,7 +12013,7 @@
                   <a:schemeClr val="tx1"/>
                 </a:solidFill>
               </a:rPr>
-              <a:t>Shop bauen</a:t>
+              <a:t>Shop fertig machen</a:t>
             </a:r>
             <a:endParaRPr lang="de-DE" sz="1600" dirty="0"/>
           </a:p>
@@ -10700,7 +12049,7 @@
                   <a:schemeClr val="tx1"/>
                 </a:solidFill>
               </a:rPr>
-              <a:t>Shopify einrichten, Produkte und Rechtstexte anlegen</a:t>
+              <a:t>Zahlung per PayPal oder Stripe einbauen, Rechtstexte ergänzen</a:t>
             </a:r>
             <a:endParaRPr lang="de-DE" sz="1250" dirty="0"/>
           </a:p>
@@ -10872,9 +12221,125 @@
                   <a:schemeClr val="accent6"/>
                 </a:solidFill>
               </a:rPr>
-              <a:t>HGB §§ 17–19, GmbHG §§ 4 und 5a, BGB § 312g · Preise und Funktionen der Shopsysteme: Preisvergleiche auf qualimero.com, l-iz.de und tooltester.com (abgerufen am 07.10.2026) · Logo: ChatGPT (KI)</a:t>
+              <a:t>HGB §§ 17–19, GmbHG §§ 4 und 5a, BGB § 312g · Preise: netlify.com/pricing und Preisvergleiche auf qualimero.com, trusted.de und eesel.ai (abgerufen am 13.10.2026) · Logo: ChatGPT (KI) · Bilder: Gemini (KI) · Shop: gebaut mit Claude Code (KI)</a:t>
             </a:r>
             <a:endParaRPr lang="de-DE" sz="1000" dirty="0"/>
+          </a:p>
+        </p:txBody>
+      </p:sp>
+      <p:sp>
+        <p:nvSpPr>
+          <p:cNvPr id="48" name="Domain Kreis"/>
+          <p:cNvSpPr/>
+          <p:nvPr/>
+        </p:nvSpPr>
+        <p:spPr>
+          <a:xfrm>
+            <a:off x="822960" y="3753612"/>
+            <a:ext cx="402336" cy="402336"/>
+          </a:xfrm>
+          <a:prstGeom prst="ellipse">
+            <a:avLst/>
+          </a:prstGeom>
+          <a:solidFill>
+            <a:schemeClr val="accent1"/>
+          </a:solidFill>
+          <a:ln/>
+        </p:spPr>
+      </p:sp>
+      <p:pic>
+        <p:nvPicPr>
+          <p:cNvPr id="49" name="Domain Icon" descr="Domain"/>
+          <p:cNvPicPr>
+            <a:picLocks noChangeAspect="1"/>
+          </p:cNvPicPr>
+          <p:nvPr/>
+        </p:nvPicPr>
+        <p:blipFill>
+          <a:blip r:embed="rId8"/>
+          <a:stretch>
+            <a:fillRect/>
+          </a:stretch>
+        </p:blipFill>
+        <p:spPr>
+          <a:xfrm>
+            <a:off x="923544" y="3854196"/>
+            <a:ext cx="201168" cy="201168"/>
+          </a:xfrm>
+          <a:prstGeom prst="rect">
+            <a:avLst/>
+          </a:prstGeom>
+        </p:spPr>
+      </p:pic>
+      <p:sp>
+        <p:nvSpPr>
+          <p:cNvPr id="50" name="DOMAIN Label"/>
+          <p:cNvSpPr txBox="1"/>
+          <p:nvPr/>
+        </p:nvSpPr>
+        <p:spPr>
+          <a:xfrm>
+            <a:off x="1463040" y="3717036"/>
+            <a:ext cx="4023360" cy="219456"/>
+          </a:xfrm>
+          <a:prstGeom prst="rect">
+            <a:avLst/>
+          </a:prstGeom>
+          <a:noFill/>
+          <a:ln/>
+        </p:spPr>
+        <p:txBody>
+          <a:bodyPr wrap="square" lIns="0" tIns="0" rIns="0" bIns="0" rtlCol="0" anchor="ctr"/>
+          <a:lstStyle/>
+          <a:p>
+            <a:pPr indent="0" marL="0">
+              <a:buNone/>
+            </a:pPr>
+            <a:r>
+              <a:rPr lang="de-DE" sz="1100" b="1" dirty="0">
+                <a:solidFill>
+                  <a:schemeClr val="accent1"/>
+                </a:solidFill>
+              </a:rPr>
+              <a:t>DOMAIN</a:t>
+            </a:r>
+            <a:endParaRPr lang="de-DE" sz="1100" dirty="0"/>
+          </a:p>
+        </p:txBody>
+      </p:sp>
+      <p:sp>
+        <p:nvSpPr>
+          <p:cNvPr id="51" name="DOMAIN Wert"/>
+          <p:cNvSpPr txBox="1"/>
+          <p:nvPr/>
+        </p:nvSpPr>
+        <p:spPr>
+          <a:xfrm>
+            <a:off x="1463040" y="3927348"/>
+            <a:ext cx="4023360" cy="292608"/>
+          </a:xfrm>
+          <a:prstGeom prst="rect">
+            <a:avLst/>
+          </a:prstGeom>
+          <a:noFill/>
+          <a:ln/>
+        </p:spPr>
+        <p:txBody>
+          <a:bodyPr wrap="square" lIns="0" tIns="0" rIns="0" bIns="0" rtlCol="0" anchor="ctr"/>
+          <a:lstStyle/>
+          <a:p>
+            <a:pPr indent="0" marL="0">
+              <a:buNone/>
+            </a:pPr>
+            <a:r>
+              <a:rPr lang="de-DE" sz="1500" b="1" dirty="0">
+                <a:solidFill>
+                  <a:schemeClr val="tx1"/>
+                </a:solidFill>
+              </a:rPr>
+              <a:t>lootlager.de</a:t>
+            </a:r>
+            <a:endParaRPr lang="de-DE" sz="1500" dirty="0"/>
           </a:p>
         </p:txBody>
       </p:sp>
@@ -10923,6 +12388,249 @@
               <a:t>7</a:t>
             </a:fld>
             <a:endParaRPr lang="en-US"/>
+          </a:p>
+        </p:txBody>
+      </p:sp>
+    </p:spTree>
+  </p:cSld>
+  <p:clrMapOvr>
+    <a:masterClrMapping/>
+  </p:clrMapOvr>
+</p:sld>
+</file>
+
+<file path=ppt/slides/slide8.xml><?xml version="1.0" encoding="utf-8"?>
+<p:sld xmlns:a="http://schemas.openxmlformats.org/drawingml/2006/main" xmlns:r="http://schemas.openxmlformats.org/officeDocument/2006/relationships" xmlns:p="http://schemas.openxmlformats.org/presentationml/2006/main">
+  <p:cSld name="Slide 8">
+    <p:spTree>
+      <p:nvGrpSpPr>
+        <p:cNvPr id="1" name=""/>
+        <p:cNvGrpSpPr/>
+        <p:nvPr/>
+      </p:nvGrpSpPr>
+      <p:grpSpPr>
+        <a:xfrm>
+          <a:off x="0" y="0"/>
+          <a:ext cx="0" cy="0"/>
+          <a:chOff x="0" y="0"/>
+          <a:chExt cx="0" cy="0"/>
+        </a:xfrm>
+      </p:grpSpPr>
+      <p:pic>
+        <p:nvPicPr>
+          <p:cNvPr id="2" name="Hintergrund" descr="Gaming-Schreibtisch bei Nacht mit XXL-Mauspad, Tastatur, Controller, Headset-Halter und leuchtendem GG!-Neon-Schild"/>
+          <p:cNvPicPr>
+            <a:picLocks noChangeAspect="1"/>
+          </p:cNvPicPr>
+          <p:nvPr/>
+        </p:nvPicPr>
+        <p:blipFill>
+          <a:blip r:embed="rId1"/>
+          <a:stretch>
+            <a:fillRect/>
+          </a:stretch>
+        </p:blipFill>
+        <p:spPr>
+          <a:xfrm>
+            <a:off x="0" y="0"/>
+            <a:ext cx="12192000" cy="6858000"/>
+          </a:xfrm>
+          <a:prstGeom prst="rect">
+            <a:avLst/>
+          </a:prstGeom>
+        </p:spPr>
+      </p:pic>
+      <p:sp>
+        <p:nvSpPr>
+          <p:cNvPr id="4" name="Text 0"/>
+          <p:cNvSpPr/>
+          <p:nvPr>
+            <p:ph idx="100" type="title" hasCustomPrompt="1"/>
+          </p:nvPr>
+        </p:nvSpPr>
+        <p:spPr>
+          <a:xfrm>
+            <a:off x="548640" y="2103120"/>
+            <a:ext cx="4754880" cy="822960"/>
+          </a:xfrm>
+          <a:prstGeom prst="rect">
+            <a:avLst/>
+          </a:prstGeom>
+          <a:noFill/>
+          <a:ln/>
+        </p:spPr>
+        <p:txBody>
+          <a:bodyPr wrap="square" lIns="0" tIns="0" rIns="0" bIns="0" rtlCol="0" anchor="ctr"/>
+          <a:lstStyle/>
+          <a:p>
+            <a:pPr algn="l" indent="0" marL="0">
+              <a:buNone/>
+            </a:pPr>
+            <a:r>
+              <a:rPr lang="de-DE" sz="4800" b="1" i="0" dirty="0">
+                <a:solidFill>
+                  <a:schemeClr val="bg1"/>
+                </a:solidFill>
+              </a:rPr>
+              <a:t>Vielen Dank!</a:t>
+            </a:r>
+            <a:endParaRPr lang="de-DE" sz="4800" dirty="0"/>
+          </a:p>
+        </p:txBody>
+      </p:sp>
+      <p:sp>
+        <p:nvSpPr>
+          <p:cNvPr id="5" name="Fragen"/>
+          <p:cNvSpPr txBox="1"/>
+          <p:nvPr/>
+        </p:nvSpPr>
+        <p:spPr>
+          <a:xfrm>
+            <a:off x="548640" y="3017520"/>
+            <a:ext cx="4754880" cy="457200"/>
+          </a:xfrm>
+          <a:prstGeom prst="rect">
+            <a:avLst/>
+          </a:prstGeom>
+          <a:noFill/>
+          <a:ln/>
+        </p:spPr>
+        <p:txBody>
+          <a:bodyPr wrap="square" lIns="0" tIns="0" rIns="0" bIns="0" rtlCol="0" anchor="ctr"/>
+          <a:lstStyle/>
+          <a:p>
+            <a:pPr algn="l" indent="0" marL="0">
+              <a:buNone/>
+            </a:pPr>
+            <a:r>
+              <a:rPr lang="de-DE" sz="2400" b="1" i="0" dirty="0">
+                <a:solidFill>
+                  <a:schemeClr val="accent2"/>
+                </a:solidFill>
+              </a:rPr>
+              <a:t>Habt ihr noch Fragen?</a:t>
+            </a:r>
+            <a:endParaRPr lang="de-DE" sz="2400" dirty="0"/>
+          </a:p>
+        </p:txBody>
+      </p:sp>
+      <p:sp>
+        <p:nvSpPr>
+          <p:cNvPr id="6" name="Slogan"/>
+          <p:cNvSpPr txBox="1"/>
+          <p:nvPr/>
+        </p:nvSpPr>
+        <p:spPr>
+          <a:xfrm>
+            <a:off x="548640" y="3566160"/>
+            <a:ext cx="4754880" cy="365760"/>
+          </a:xfrm>
+          <a:prstGeom prst="rect">
+            <a:avLst/>
+          </a:prstGeom>
+          <a:noFill/>
+          <a:ln/>
+        </p:spPr>
+        <p:txBody>
+          <a:bodyPr wrap="square" lIns="0" tIns="0" rIns="0" bIns="0" rtlCol="0" anchor="ctr"/>
+          <a:lstStyle/>
+          <a:p>
+            <a:pPr algn="l" indent="0" marL="0">
+              <a:buNone/>
+            </a:pPr>
+            <a:r>
+              <a:rPr lang="de-DE" sz="1800" b="0" i="1" dirty="0">
+                <a:solidFill>
+                  <a:schemeClr val="accent5"/>
+                </a:solidFill>
+              </a:rPr>
+              <a:t>„Level up dein Setup.“</a:t>
+            </a:r>
+            <a:endParaRPr lang="de-DE" sz="1800" dirty="0"/>
+          </a:p>
+        </p:txBody>
+      </p:sp>
+      <p:sp>
+        <p:nvSpPr>
+          <p:cNvPr id="7" name="Logo Karte"/>
+          <p:cNvSpPr/>
+          <p:nvPr/>
+        </p:nvSpPr>
+        <p:spPr>
+          <a:xfrm>
+            <a:off x="548640" y="5486400"/>
+            <a:ext cx="2103120" cy="640080"/>
+          </a:xfrm>
+          <a:prstGeom prst="roundRect">
+            <a:avLst>
+              <a:gd name="adj" fmla="val 22000"/>
+            </a:avLst>
+          </a:prstGeom>
+          <a:solidFill>
+            <a:schemeClr val="bg1"/>
+          </a:solidFill>
+          <a:ln>
+            <a:noFill/>
+          </a:ln>
+        </p:spPr>
+      </p:sp>
+      <p:pic>
+        <p:nvPicPr>
+          <p:cNvPr id="8" name="Firmenlogo" descr="Logo von LootLager"/>
+          <p:cNvPicPr>
+            <a:picLocks noChangeAspect="1"/>
+          </p:cNvPicPr>
+          <p:nvPr/>
+        </p:nvPicPr>
+        <p:blipFill>
+          <a:blip r:embed="rId2"/>
+          <a:stretch>
+            <a:fillRect/>
+          </a:stretch>
+        </p:blipFill>
+        <p:spPr>
+          <a:xfrm>
+            <a:off x="828776" y="5596128"/>
+            <a:ext cx="1542849" cy="420624"/>
+          </a:xfrm>
+          <a:prstGeom prst="rect">
+            <a:avLst/>
+          </a:prstGeom>
+        </p:spPr>
+      </p:pic>
+      <p:sp>
+        <p:nvSpPr>
+          <p:cNvPr id="9" name="Gruppe"/>
+          <p:cNvSpPr txBox="1"/>
+          <p:nvPr/>
+        </p:nvSpPr>
+        <p:spPr>
+          <a:xfrm>
+            <a:off x="2880360" y="5486400"/>
+            <a:ext cx="3200400" cy="640080"/>
+          </a:xfrm>
+          <a:prstGeom prst="rect">
+            <a:avLst/>
+          </a:prstGeom>
+          <a:noFill/>
+          <a:ln/>
+        </p:spPr>
+        <p:txBody>
+          <a:bodyPr wrap="square" lIns="0" tIns="0" rIns="0" bIns="0" rtlCol="0" anchor="ctr"/>
+          <a:lstStyle/>
+          <a:p>
+            <a:pPr algn="l" indent="0" marL="0">
+              <a:buNone/>
+            </a:pPr>
+            <a:r>
+              <a:rPr lang="de-DE" sz="1400" b="0" i="0" dirty="0">
+                <a:solidFill>
+                  <a:schemeClr val="bg1"/>
+                </a:solidFill>
+              </a:rPr>
+              <a:t>Gruppe 4  ·  Nick und Luca</a:t>
+            </a:r>
+            <a:endParaRPr lang="de-DE" sz="1400" dirty="0"/>
           </a:p>
         </p:txBody>
       </p:sp>

--- a/praesentation/LootLager_Praesentation.pptx
+++ b/praesentation/LootLager_Praesentation.pptx
@@ -795,6 +795,28 @@
               <a:t>Nein, in echt ist lootlager.de schon vergeben. Das zeigt die Abfrage bei der DENIC (Stand 13.10.2026). Weil unsere Gründung fiktiv ist, tun wir so, als wäre sie frei. Online stellen können wir den Shop trotzdem: über die kostenlose Netlify-Adresse lootlager.netlify.app.</a:t>
             </a:r>
           </a:p>
+          <a:p/>
+          <a:p>
+            <a:r>
+              <a:t>NACHFRAGE „Wie habt ihr das Logo gemacht?“:</a:t>
+            </a:r>
+          </a:p>
+          <a:p>
+            <a:r>
+              <a:t>Mit ChatGPT. Unser Prompt, gekürzt: „Erstelle ein Logo für unseren Onlineshop LootLager. Symbol: eine stilisierte, leicht geöffnete Schatztruhe wie eine Loot-Kiste aus Videospielen, aus der helles Licht strahlt. Schriftzug LootLager daneben, Loot in Violett, Lager in Türkis. Stil: flaches Vektor-Design, klare Formen, Hintergrund weiß, kein weiterer Text.“ Der ganze Prompt steht in unserer Planung in Abschnitt 4.</a:t>
+            </a:r>
+          </a:p>
+          <a:p/>
+          <a:p>
+            <a:r>
+              <a:t>NACHFRAGE „Im Prompt stehen LED-Leisten und Controller-Ständer?“:</a:t>
+            </a:r>
+          </a:p>
+          <a:p>
+            <a:r>
+              <a:t>Stimmt. Das Logo war zuerst fertig, das Sortiment haben wir danach festgelegt. Das Logo zeigt nur die Truhe und kein Produkt, deshalb passt es weiterhin.</a:t>
+            </a:r>
+          </a:p>
         </p:txBody>
       </p:sp>
       <p:sp>
@@ -878,23 +900,96 @@
           <a:lstStyle/>
           <a:p>
             <a:r>
-              <a:rPr lang="en-US" dirty="0"/>
-              <a:t>WARUM DIE UG?
-Wir sind zwei Gründer und wollen nicht mit unserem Privatvermögen haften. Für eine GmbH fehlen uns die 25.000 € Stammkapital. Die UG gibt uns die beschränkte Haftung schon ab 1 € Stammkapital.
-WAS HEISST HAFTUNGSBESCHRÄNKT?
-Wenn die Firma Schulden hat, haftet nur das Vermögen der Gesellschaft. Unser privates Geld ist geschützt.
-WARUM KEINE GbR ODER OHG?
-Dort haftet jeder Gesellschafter unbeschränkt mit seinem Privatvermögen, auch für die Schulden der anderen. Im Onlinehandel ist das zu riskant, z. B. bei Abmahnungen oder wenn wir auf Ware sitzen bleiben.
-WARUM KEIN EINZELUNTERNEHMEN?
-Ein Einzelunternehmen hat nur einen Inhaber, wir sind aber zu zweit. Außerdem haftet der Inhaber unbeschränkt.
-WIE VIEL STAMMKAPITAL?
-1.000 €. Nick und Luca sind die Gesellschafter und zahlen je 500 € ein.
-WER FÜHRT DIE GESCHÄFTE?
-Wir beide: Nick und Luca sind gemeinsam Geschäftsführer. Die Geschäftsführung bestimmen die Gesellschafter, und das sind bei uns auch wir zwei.
-WIE GRÜNDET MAN EINE UG?
-Gesellschaftsvertrag beim Notar → Stammkapital einzahlen → Eintrag ins Handelsregister → Gewerbe anmelden → Finanzamt.</a:t>
-            </a:r>
-            <a:endParaRPr lang="en-US" dirty="0"/>
+              <a:t>SPRECHTEXT:</a:t>
+            </a:r>
+          </a:p>
+          <a:p>
+            <a:r>
+              <a:t>Als Rechtsform haben wir die UG (haftungsbeschränkt) gewählt. Dafür gibt es vier Gründe. Erstens: Die Haftung ist beschränkt. Bei Schulden haftet nur die Firma, nicht unser Privatvermögen. Zweitens: Wir brauchen wenig Startkapital. Eine UG kann man schon ab 1 € gründen, wir starten mit 1.000 €, jeder zahlt 500 € ein. Drittens: Die UG passt zu zwei Gründern. Wir halten je 50 % und führen die Geschäfte gemeinsam. Viertens: Wir können wachsen. Sobald das Stammkapital 25.000 € erreicht, können wir zur GmbH werden.</a:t>
+            </a:r>
+          </a:p>
+          <a:p/>
+          <a:p>
+            <a:r>
+              <a:t>Es gibt auch Nachteile: Ein Viertel vom Gewinn müssen wir jedes Jahr zurücklegen. Notar und Handelsregister kosten Geld. Und Banken und Lieferanten vertrauen einer UG weniger als einer GmbH. Eine GmbH wäre die Alternative, aber dafür fehlen uns die 25.000 € Stammkapital.</a:t>
+            </a:r>
+          </a:p>
+          <a:p/>
+          <a:p>
+            <a:r>
+              <a:t>WARUM DIE UG?</a:t>
+            </a:r>
+          </a:p>
+          <a:p>
+            <a:r>
+              <a:t>Wir sind zwei Gründer und wollen nicht mit unserem Privatvermögen haften. Für eine GmbH fehlen uns die 25.000 € Stammkapital. Die UG gibt uns die beschränkte Haftung schon ab 1 € Stammkapital.</a:t>
+            </a:r>
+          </a:p>
+          <a:p/>
+          <a:p>
+            <a:r>
+              <a:t>WAS HEISST HAFTUNGSBESCHRÄNKT?</a:t>
+            </a:r>
+          </a:p>
+          <a:p>
+            <a:r>
+              <a:t>Wenn die Firma Schulden hat, haftet nur das Vermögen der Gesellschaft. Unser privates Geld ist geschützt.</a:t>
+            </a:r>
+          </a:p>
+          <a:p/>
+          <a:p>
+            <a:r>
+              <a:t>WARUM KEINE GbR ODER OHG?</a:t>
+            </a:r>
+          </a:p>
+          <a:p>
+            <a:r>
+              <a:t>Dort haftet jeder Gesellschafter unbeschränkt mit seinem Privatvermögen, auch für die Schulden der anderen. Im Onlinehandel ist das zu riskant, z. B. bei Abmahnungen oder wenn wir auf Ware sitzen bleiben.</a:t>
+            </a:r>
+          </a:p>
+          <a:p/>
+          <a:p>
+            <a:r>
+              <a:t>WARUM KEIN EINZELUNTERNEHMEN?</a:t>
+            </a:r>
+          </a:p>
+          <a:p>
+            <a:r>
+              <a:t>Ein Einzelunternehmen hat nur einen Inhaber, wir sind aber zu zweit. Außerdem haftet der Inhaber unbeschränkt.</a:t>
+            </a:r>
+          </a:p>
+          <a:p/>
+          <a:p>
+            <a:r>
+              <a:t>WIE VIEL STAMMKAPITAL?</a:t>
+            </a:r>
+          </a:p>
+          <a:p>
+            <a:r>
+              <a:t>1.000 €. Nick und Luca sind die Gesellschafter und zahlen je 500 € ein.</a:t>
+            </a:r>
+          </a:p>
+          <a:p/>
+          <a:p>
+            <a:r>
+              <a:t>WER FÜHRT DIE GESCHÄFTE?</a:t>
+            </a:r>
+          </a:p>
+          <a:p>
+            <a:r>
+              <a:t>Wir beide: Nick und Luca sind gemeinsam Geschäftsführer. Die Geschäftsführung bestimmen die Gesellschafter, und das sind bei uns auch wir zwei.</a:t>
+            </a:r>
+          </a:p>
+          <a:p/>
+          <a:p>
+            <a:r>
+              <a:t>WIE GRÜNDET MAN EINE UG?</a:t>
+            </a:r>
+          </a:p>
+          <a:p>
+            <a:r>
+              <a:t>Gesellschaftsvertrag beim Notar → Stammkapital einzahlen → Eintrag ins Handelsregister → Gewerbe anmelden → Finanzamt.</a:t>
+            </a:r>
           </a:p>
         </p:txBody>
       </p:sp>
@@ -1065,6 +1160,28 @@
               <a:t>Die Punkte haben wir selbst vergeben. Die Preise kommen von netlify.com und aus Preisvergleichen im Internet, Stand 13.10.2026.</a:t>
             </a:r>
           </a:p>
+          <a:p/>
+          <a:p>
+            <a:r>
+              <a:t>NETLIFY BEKOMMT BEI DEN KOSTEN 10 PUNKTE. IHR BRAUCHT ABER CLAUDE CODE FÜR 21 €?</a:t>
+            </a:r>
+          </a:p>
+          <a:p>
+            <a:r>
+              <a:t>Stimmt, das Abo brauchen wir zum Bauen. Aber nur, solange wir an der Seite arbeiten. Danach können wir es kündigen, und die Seite läuft bei Netlify für 0 € weiter. Bei Shopify und Jimdo zahlen wir jeden Monat, solange es den Shop gibt.</a:t>
+            </a:r>
+          </a:p>
+          <a:p/>
+          <a:p>
+            <a:r>
+              <a:t>WIE SICHER IST DAS ERGEBNIS?</a:t>
+            </a:r>
+          </a:p>
+          <a:p>
+            <a:r>
+              <a:t>Es ist knapp: 7,65 gegen 7,45 Punkte. Das Ergebnis hängt an unserer Gewichtung. Uns sind die Kosten am wichtigsten, weil wir wenig Startkapital haben. Wäre uns die Zahlung wichtiger als die Kosten, würde Shopify gewinnen: Mit 20 % für die Kosten und 20 % für Warenkorb und Zahlung hätte Shopify 7,70 Punkte und Netlify 7,35. Deshalb ist Shopify unsere zweite Wahl, sobald wir echte Bestellungen haben.</a:t>
+            </a:r>
+          </a:p>
         </p:txBody>
       </p:sp>
       <p:sp>
@@ -1155,12 +1272,23 @@
           <a:p/>
           <a:p>
             <a:r>
+              <a:t>LIVE-DEMO (ca. 1 Minute, falls Internet und Zeit da sind):</a:t>
+            </a:r>
+          </a:p>
+          <a:p>
+            <a:r>
+              <a:t>1. Shop öffnen und zu „Eigenes Design“ gehen. 2. Produkt wählen, ein Bild hochladen, Gamertag eintippen: Die Vorschau ändert sich sofort. 3. „In den Warenkorb“ klicken und den Warenkorb öffnen. 4. „Zur Kasse“: Testdaten eintragen und auf „Zahlungspflichtig bestellen“ klicken. Ohne Internet geht es auch: im Projektordner shop/index.html doppelklicken.</a:t>
+            </a:r>
+          </a:p>
+          <a:p/>
+          <a:p>
+            <a:r>
               <a:t>HAT NETLIFY AUCH NACHTEILE?</a:t>
             </a:r>
           </a:p>
           <a:p>
             <a:r>
-              <a:t>Ja. Netlify ist kein fertiges Shopsystem. Den Warenkorb haben wir selbst gebaut, und eine echte Zahlung müssten wir noch einbauen, zum Beispiel mit PayPal oder Stripe. Die Server stehen in den USA, das müssen wir in der Datenschutzerklärung angeben. Und Rechtstexte wie AGB bekommen wir nicht mitgeliefert.</a:t>
+              <a:t>Ja. Netlify ist kein fertiges Shopsystem. Den Warenkorb haben wir selbst gebaut, und eine echte Zahlung müssten wir noch einbauen, zum Beispiel mit PayPal oder Stripe. Netlify ist ein Unternehmen aus den USA. Die Seite wird zwar über ein weltweites Netz von Servern ausgeliefert, in Europa zum Beispiel aus Frankfurt. Trotzdem können Daten in die USA gehen, das müssen wir in der Datenschutzerklärung angeben. Und Rechtstexte wie AGB bekommen wir nicht mitgeliefert. Die würden wir bei einem Anbieter wie dem Händlerbund holen und nicht selbst schreiben, weil Fehler zu Abmahnungen führen können.</a:t>
             </a:r>
           </a:p>
           <a:p/>
@@ -1171,7 +1299,7 @@
           </a:p>
           <a:p>
             <a:r>
-              <a:t>Nein. Der Shop ist eine Demo für unser Schulprojekt. Man kann Produkte in den Warenkorb legen, aber an der Kasse kommt ein Hinweis, dass es keine echten Bestellungen gibt.</a:t>
+              <a:t>Nein. Der Shop ist eine Demo für unser Schulprojekt. Man kann Produkte in den Warenkorb legen und an der Kasse eine Testbestellung durchspielen, mit Adresse und Zahlungsart. Am Ende kommt der Hinweis, dass nichts bestellt und nichts gespeichert wurde.</a:t>
             </a:r>
           </a:p>
           <a:p/>
@@ -1193,18 +1321,40 @@
           </a:p>
           <a:p>
             <a:r>
-              <a:t>Weil unsere Produkte nach Kundenwunsch bedruckt werden. Für solche individuellen Produkte gibt es kein Widerrufsrecht (§ 312g Abs. 2 Nr. 1 BGB). Darauf müssen wir in der Widerrufsbelehrung hinweisen. Deshalb zeigen wir vor dem Kauf eine Design-Vorschau.</a:t>
+              <a:t>Weil die meisten Produkte nach Kundenwunsch bedruckt werden. Für Produkte mit eigenem Motiv oder Gamertag gibt es kein Widerrufsrecht (§ 312g Abs. 2 Nr. 1 BGB). Darauf müssen wir in der Widerrufsbelehrung hinweisen. Deshalb zeigen wir vor dem Kauf eine Design-Vorschau.</a:t>
             </a:r>
           </a:p>
           <a:p/>
           <a:p>
             <a:r>
+              <a:t>UND WENN ICH EIN PRODUKT MIT EUREM DESIGN KAUFE?</a:t>
+            </a:r>
+          </a:p>
+          <a:p>
+            <a:r>
+              <a:t>Dann gilt das normale Widerrufsrecht: Man kann den Kauf 14 Tage lang ohne Grund widerrufen. Die Ausnahme gilt nur für Produkte, die extra für einen Kunden angefertigt werden.</a:t>
+            </a:r>
+          </a:p>
+          <a:p/>
+          <a:p>
+            <a:r>
               <a:t>WELCHE PFLICHTSEITEN BRAUCHT EIN SHOP?</a:t>
             </a:r>
           </a:p>
           <a:p>
             <a:r>
               <a:t>Impressum (§ 5 DDG), Datenschutzerklärung (DSGVO), AGB, Widerrufsbelehrung sowie Infos zu Versand und Zahlung. Auf unserer Seite stehen sie unten im Footer unter „Rechtliches“.</a:t>
+            </a:r>
+          </a:p>
+          <a:p/>
+          <a:p>
+            <a:r>
+              <a:t>WARUM HEISST DER KNOPF „ZAHLUNGSPFLICHTIG BESTELLEN“?</a:t>
+            </a:r>
+          </a:p>
+          <a:p>
+            <a:r>
+              <a:t>Das ist die Button-Lösung aus § 312j Abs. 3 BGB. Der letzte Knopf muss eindeutig zeigen, dass es ab jetzt Geld kostet. Direkt darüber steht der Gesamtpreis mit Mehrwertsteuer und Versand.</a:t>
             </a:r>
           </a:p>
         </p:txBody>
@@ -1372,6 +1522,12 @@
           <a:p>
             <a:r>
               <a:t>Vielen Dank fürs Zuhören! Habt ihr noch Fragen?</a:t>
+            </a:r>
+          </a:p>
+          <a:p/>
+          <a:p>
+            <a:r>
+              <a:t>Wer unseren Shop ausprobieren will: Der QR-Code führt zu lootlager.netlify.app. (Vorher prüfen, dass der Shop unter genau dieser Adresse online ist.)</a:t>
             </a:r>
           </a:p>
           <a:p/>
@@ -4914,6 +5070,50 @@
       </p:sp>
       <p:sp>
         <p:nvSpPr>
+          <p:cNvPr id="30" name="Logo Prompt"/>
+          <p:cNvSpPr txBox="1"/>
+          <p:nvPr/>
+        </p:nvSpPr>
+        <p:spPr>
+          <a:xfrm>
+            <a:off x="4846320" y="5669280"/>
+            <a:ext cx="6793992" cy="457200"/>
+          </a:xfrm>
+          <a:prstGeom prst="rect">
+            <a:avLst/>
+          </a:prstGeom>
+          <a:noFill/>
+          <a:ln/>
+        </p:spPr>
+        <p:txBody>
+          <a:bodyPr wrap="square" lIns="0" tIns="0" rIns="0" bIns="0" rtlCol="0" anchor="t"/>
+          <a:lstStyle/>
+          <a:p>
+            <a:pPr algn="l" indent="0" marL="0">
+              <a:buNone/>
+            </a:pPr>
+            <a:r>
+              <a:rPr lang="de-DE" sz="1200" b="1" dirty="0">
+                <a:solidFill>
+                  <a:schemeClr val="accent6"/>
+                </a:solidFill>
+              </a:rPr>
+              <a:t xml:space="preserve">Unser Prompt für ChatGPT (gekürzt): </a:t>
+            </a:r>
+            <a:r>
+              <a:rPr lang="de-DE" sz="1200" i="1" dirty="0">
+                <a:solidFill>
+                  <a:schemeClr val="accent6"/>
+                </a:solidFill>
+              </a:rPr>
+              <a:t>„Erstelle ein Logo für unseren Onlineshop LootLager. Symbol: eine stilisierte, leicht geöffnete Schatztruhe, aus der Licht strahlt. Stil: flaches Vektor-Design.“</a:t>
+            </a:r>
+            <a:endParaRPr lang="de-DE" sz="1200" dirty="0"/>
+          </a:p>
+        </p:txBody>
+      </p:sp>
+      <p:sp>
+        <p:nvSpPr>
           <p:cNvPr id="25" name="Slide Number Placeholder 0"/>
           <p:cNvSpPr>
             <a:spLocks noGrp="1"/>
@@ -9811,7 +10011,7 @@
         <p:spPr>
           <a:xfrm>
             <a:off x="548640" y="5870448"/>
-            <a:ext cx="9418320" cy="274320"/>
+            <a:ext cx="11091672" cy="274320"/>
           </a:xfrm>
           <a:prstGeom prst="rect">
             <a:avLst/>
@@ -9832,7 +10032,7 @@
                   <a:schemeClr val="accent6"/>
                 </a:solidFill>
               </a:rPr>
-              <a:t>Claude Code baut die Seite, stellt sie aber nicht ins Internet. Deshalb kombinieren wir: gebaut mit Claude Code, online bei Netlify.</a:t>
+              <a:t>Claude Code baut die Seite, Netlify stellt sie ins Internet. Das Ergebnis ist knapp: Wäre uns die Zahlung wichtiger als die Kosten, läge Shopify vorn.</a:t>
             </a:r>
             <a:endParaRPr lang="de-DE" sz="1100" dirty="0"/>
           </a:p>
@@ -10548,7 +10748,7 @@
                   <a:schemeClr val="tx1"/>
                 </a:solidFill>
               </a:rPr>
-              <a:t>Kein fertiges Shopsystem: Warenkorb und Zahlung bauen wir selbst ein. Die Server stehen in den USA. Rechtstexte schreiben wir selbst.</a:t>
+              <a:t>Kein fertiges Shopsystem, Warenkorb und Zahlung bauen wir selbst. US-Anbieter: Daten können in die USA gehen. Rechtstexte müssen wir extra besorgen.</a:t>
             </a:r>
             <a:endParaRPr lang="de-DE" sz="1200" dirty="0"/>
           </a:p>
@@ -12192,7 +12392,7 @@
         <p:spPr>
           <a:xfrm>
             <a:off x="548640" y="5559552"/>
-            <a:ext cx="11091672" cy="457200"/>
+            <a:ext cx="11091672" cy="548640"/>
           </a:xfrm>
           <a:prstGeom prst="rect">
             <a:avLst/>
@@ -12221,7 +12421,7 @@
                   <a:schemeClr val="accent6"/>
                 </a:solidFill>
               </a:rPr>
-              <a:t>HGB §§ 17–19, GmbHG §§ 4 und 5a, BGB § 312g · Preise: netlify.com/pricing und Preisvergleiche auf qualimero.com, trusted.de und eesel.ai (abgerufen am 13.10.2026) · Logo: ChatGPT (KI) · Bilder: Gemini (KI) · Shop: gebaut mit Claude Code (KI)</a:t>
+              <a:t>HGB §§ 17–19, GmbHG §§ 4 und 5a, BGB §§ 312g und 312j, MarkenG § 3, DDG § 5 · Domain: Abfrage bei denic.de · Preise: netlify.com/pricing und Preisvergleiche auf qualimero.com, trusted.de und eesel.ai (alles abgerufen am 13.10.2026) · Logo: ChatGPT (KI) · Bilder: Gemini (KI) · Shop: gebaut mit Claude Code (KI)</a:t>
             </a:r>
             <a:endParaRPr lang="de-DE" sz="1000" dirty="0"/>
           </a:p>
@@ -12450,7 +12650,7 @@
         </p:nvSpPr>
         <p:spPr>
           <a:xfrm>
-            <a:off x="548640" y="2103120"/>
+            <a:off x="548640" y="1280160"/>
             <a:ext cx="4754880" cy="822960"/>
           </a:xfrm>
           <a:prstGeom prst="rect">
@@ -12486,7 +12686,7 @@
         </p:nvSpPr>
         <p:spPr>
           <a:xfrm>
-            <a:off x="548640" y="3017520"/>
+            <a:off x="548640" y="2194560"/>
             <a:ext cx="4754880" cy="457200"/>
           </a:xfrm>
           <a:prstGeom prst="rect">
@@ -12522,7 +12722,7 @@
         </p:nvSpPr>
         <p:spPr>
           <a:xfrm>
-            <a:off x="548640" y="3566160"/>
+            <a:off x="548640" y="2743200"/>
             <a:ext cx="4754880" cy="365760"/>
           </a:xfrm>
           <a:prstGeom prst="rect">
@@ -12547,6 +12747,104 @@
               <a:t>„Level up dein Setup.“</a:t>
             </a:r>
             <a:endParaRPr lang="de-DE" sz="1800" dirty="0"/>
+          </a:p>
+        </p:txBody>
+      </p:sp>
+      <p:sp>
+        <p:nvSpPr>
+          <p:cNvPr id="10" name="QR Karte"/>
+          <p:cNvSpPr/>
+          <p:nvPr/>
+        </p:nvSpPr>
+        <p:spPr>
+          <a:xfrm>
+            <a:off x="548640" y="3383280"/>
+            <a:ext cx="1920240" cy="1920240"/>
+          </a:xfrm>
+          <a:prstGeom prst="roundRect">
+            <a:avLst>
+              <a:gd name="adj" fmla="val 7000"/>
+            </a:avLst>
+          </a:prstGeom>
+          <a:solidFill>
+            <a:schemeClr val="bg1"/>
+          </a:solidFill>
+          <a:ln>
+            <a:noFill/>
+          </a:ln>
+        </p:spPr>
+      </p:sp>
+      <p:pic>
+        <p:nvPicPr>
+          <p:cNvPr id="11" name="QR-Code" descr="QR-Code zum Shop: lootlager.netlify.app"/>
+          <p:cNvPicPr>
+            <a:picLocks noChangeAspect="1"/>
+          </p:cNvPicPr>
+          <p:nvPr/>
+        </p:nvPicPr>
+        <p:blipFill>
+          <a:blip r:embed="rId7"/>
+          <a:stretch>
+            <a:fillRect/>
+          </a:stretch>
+        </p:blipFill>
+        <p:spPr>
+          <a:xfrm>
+            <a:off x="640080" y="3474720"/>
+            <a:ext cx="1737360" cy="1737360"/>
+          </a:xfrm>
+          <a:prstGeom prst="rect">
+            <a:avLst/>
+          </a:prstGeom>
+        </p:spPr>
+      </p:pic>
+      <p:sp>
+        <p:nvSpPr>
+          <p:cNvPr id="12" name="QR Text"/>
+          <p:cNvSpPr txBox="1"/>
+          <p:nvPr/>
+        </p:nvSpPr>
+        <p:spPr>
+          <a:xfrm>
+            <a:off x="2697480" y="3474720"/>
+            <a:ext cx="2926080" cy="822960"/>
+          </a:xfrm>
+          <a:prstGeom prst="rect">
+            <a:avLst/>
+          </a:prstGeom>
+          <a:noFill/>
+          <a:ln/>
+        </p:spPr>
+        <p:txBody>
+          <a:bodyPr wrap="square" lIns="0" tIns="0" rIns="0" bIns="0" rtlCol="0" anchor="t"/>
+          <a:lstStyle/>
+          <a:p>
+            <a:pPr algn="l" indent="0" marL="0">
+              <a:buNone/>
+            </a:pPr>
+            <a:r>
+              <a:rPr lang="de-DE" sz="1800" b="1" dirty="0">
+                <a:solidFill>
+                  <a:schemeClr val="bg1"/>
+                </a:solidFill>
+              </a:rPr>
+              <a:t>Shop ausprobieren</a:t>
+            </a:r>
+            <a:endParaRPr lang="de-DE" sz="1800" dirty="0"/>
+          </a:p>
+          <a:p>
+            <a:pPr algn="l" indent="0" marL="0">
+              <a:buNone/>
+            </a:pPr>
+            <a:r>
+              <a:rPr lang="de-DE" sz="1400" dirty="0">
+                <a:solidFill>
+                  <a:schemeClr val="bg1"/>
+                </a:solidFill>
+              </a:rPr>
+              <a:t>lootlager.netlify.app</a:t>
+            </a:r>
+            <a:endParaRPr lang="de-DE" sz="1400" dirty="0"/>
           </a:p>
         </p:txBody>
       </p:sp>

--- a/praesentation/LootLager_Praesentation.pptx
+++ b/praesentation/LootLager_Praesentation.pptx
@@ -1242,7 +1242,6 @@
               <a:rPr lang="en-US" dirty="0"/>
               <a:t>SPRECHTEXT:
 Vielen Dank fürs Zuhören! Habt ihr noch Fragen?
-Wer unseren Shop ausprobieren will: Der QR-Code führt zu lootlager.netlify.app. (Vorher prüfen, dass der Shop unter genau dieser Adresse online ist.)
 WOHER SIND DIE BILDER?
 Die Produktbilder, das Bild mit der Truhe auf der Startseite und dieses Bild vom Schreibtisch haben wir mit Gemini erstellt, einer KI von Google. Das Logo ist von ChatGPT. Die Prompts stehen in unserem Projekt im Ordner assets/ki-bilder.
 GIBT ES DIE PRODUKTE SCHON?
@@ -14358,124 +14357,6 @@
               <a:t>„Level up dein Setup.“</a:t>
             </a:r>
             <a:endParaRPr lang="en-US" sz="1800" dirty="0"/>
-          </a:p>
-        </p:txBody>
-      </p:sp>
-      <p:sp>
-        <p:nvSpPr>
-          <p:cNvPr id="5" name="QR-Karte"/>
-          <p:cNvSpPr/>
-          <p:nvPr/>
-        </p:nvSpPr>
-        <p:spPr>
-          <a:xfrm>
-            <a:off x="640080" y="3383280"/>
-            <a:ext cx="1965960" cy="1965960"/>
-          </a:xfrm>
-          <a:prstGeom prst="roundRect">
-            <a:avLst>
-              <a:gd name="adj" fmla="val 8372"/>
-            </a:avLst>
-          </a:prstGeom>
-          <a:solidFill>
-            <a:schemeClr val="bg1"/>
-          </a:solidFill>
-          <a:ln/>
-        </p:spPr>
-      </p:sp>
-      <p:pic>
-        <p:nvPicPr>
-          <p:cNvPr id="6" name="QR-Code" descr="QR-Code zum Shop: lootlager.netlify.app">    </p:cNvPr>
-          <p:cNvPicPr>
-            <a:picLocks noChangeAspect="1"/>
-          </p:cNvPicPr>
-          <p:nvPr/>
-        </p:nvPicPr>
-        <p:blipFill>
-          <a:blip r:embed="rId1"/>
-          <a:stretch>
-            <a:fillRect/>
-          </a:stretch>
-        </p:blipFill>
-        <p:spPr>
-          <a:xfrm>
-            <a:off x="731520" y="3474720"/>
-            <a:ext cx="1783080" cy="1783080"/>
-          </a:xfrm>
-          <a:prstGeom prst="rect">
-            <a:avLst/>
-          </a:prstGeom>
-        </p:spPr>
-      </p:pic>
-      <p:sp>
-        <p:nvSpPr>
-          <p:cNvPr id="7" name="Text 4"/>
-          <p:cNvSpPr txBox="1"/>
-          <p:nvPr/>
-        </p:nvSpPr>
-        <p:spPr>
-          <a:xfrm>
-            <a:off x="2834640" y="3931920"/>
-            <a:ext cx="3200400" cy="365760"/>
-          </a:xfrm>
-          <a:prstGeom prst="rect">
-            <a:avLst/>
-          </a:prstGeom>
-          <a:noFill/>
-          <a:ln/>
-        </p:spPr>
-        <p:txBody>
-          <a:bodyPr wrap="square" lIns="0" tIns="0" rIns="0" bIns="0" rtlCol="0" anchor="t"/>
-          <a:lstStyle/>
-          <a:p>
-            <a:pPr indent="0" marL="0">
-              <a:buNone/>
-            </a:pPr>
-            <a:r>
-              <a:rPr lang="en-US" sz="2000" b="1" dirty="0">
-                <a:solidFill>
-                  <a:schemeClr val="bg1"/>
-                </a:solidFill>
-              </a:rPr>
-              <a:t>Shop ausprobieren</a:t>
-            </a:r>
-            <a:endParaRPr lang="en-US" sz="2000" dirty="0"/>
-          </a:p>
-        </p:txBody>
-      </p:sp>
-      <p:sp>
-        <p:nvSpPr>
-          <p:cNvPr id="8" name="Text 5"/>
-          <p:cNvSpPr txBox="1"/>
-          <p:nvPr/>
-        </p:nvSpPr>
-        <p:spPr>
-          <a:xfrm>
-            <a:off x="2834640" y="4315968"/>
-            <a:ext cx="3200400" cy="320040"/>
-          </a:xfrm>
-          <a:prstGeom prst="rect">
-            <a:avLst/>
-          </a:prstGeom>
-          <a:noFill/>
-          <a:ln/>
-        </p:spPr>
-        <p:txBody>
-          <a:bodyPr wrap="square" lIns="0" tIns="0" rIns="0" bIns="0" rtlCol="0" anchor="t"/>
-          <a:lstStyle/>
-          <a:p>
-            <a:pPr indent="0" marL="0">
-              <a:buNone/>
-            </a:pPr>
-            <a:r>
-              <a:rPr lang="en-US" sz="1600" dirty="0">
-                <a:solidFill>
-                  <a:schemeClr val="accent2"/>
-                </a:solidFill>
-              </a:rPr>
-              <a:t>lootlager.netlify.app</a:t>
-            </a:r>
-            <a:endParaRPr lang="en-US" sz="1600" dirty="0"/>
           </a:p>
         </p:txBody>
       </p:sp>
